--- a/outputs/posters/poster_pns_asma_morrison_en.pptx
+++ b/outputs/posters/poster_pns_asma_morrison_en.pptx
@@ -3007,7 +3007,7 @@
 </file>
 
 <file path=ppt/slides/slide1.xml><?xml version="1.0" encoding="utf-8"?>
-<p:sld xmlns:p="http://schemas.openxmlformats.org/presentationml/2006/main">
+<p:sld xmlns:a="http://schemas.openxmlformats.org/drawingml/2006/main" xmlns:ns2="http://schemas.microsoft.com/office/drawing/2014/main" xmlns:ns4="http://schemas.microsoft.com/office/powerpoint/2010/main" xmlns:p="http://schemas.openxmlformats.org/presentationml/2006/main" xmlns:r="http://schemas.openxmlformats.org/officeDocument/2006/relationships">
   <p:cSld>
     <p:spTree>
       <p:nvGrpSpPr>
@@ -3016,70 +3016,70 @@
         <p:nvPr/>
       </p:nvGrpSpPr>
       <p:grpSpPr>
-        <a:xfrm xmlns:a="http://schemas.openxmlformats.org/drawingml/2006/main"/>
+        <a:xfrm/>
       </p:grpSpPr>
       <p:sp>
         <p:nvSpPr>
           <p:cNvPr id="4" name="TextBox 3">
-            <a:extLst xmlns:a="http://schemas.openxmlformats.org/drawingml/2006/main">
+            <a:extLst>
               <a:ext uri="{FF2B5EF4-FFF2-40B4-BE49-F238E27FC236}">
-                <a16:creationId xmlns:a16="http://schemas.microsoft.com/office/drawing/2014/main" id="{953F0A63-7DBA-4862-8ADB-634BE2082DC4}"/>
+                <ns2:creationId id="{953F0A63-7DBA-4862-8ADB-634BE2082DC4}"/>
               </a:ext>
             </a:extLst>
           </p:cNvPr>
           <p:cNvSpPr>
-            <a:spLocks xmlns:a="http://schemas.openxmlformats.org/drawingml/2006/main" noGrp="1"/>
+            <a:spLocks noGrp="1"/>
           </p:cNvSpPr>
           <p:nvPr/>
         </p:nvSpPr>
         <p:spPr>
-          <a:xfrm xmlns:a="http://schemas.openxmlformats.org/drawingml/2006/main">
+          <a:xfrm>
             <a:off x="8436429" y="0"/>
             <a:ext cx="26974800" cy="32918400"/>
           </a:xfrm>
-          <a:prstGeom xmlns:a="http://schemas.openxmlformats.org/drawingml/2006/main" prst="rect">
-            <a:avLst/>
-          </a:prstGeom>
-          <a:solidFill xmlns:a="http://schemas.openxmlformats.org/drawingml/2006/main">
+          <a:prstGeom prst="rect">
+            <a:avLst/>
+          </a:prstGeom>
+          <a:solidFill>
             <a:srgbClr val="20425A"/>
           </a:solidFill>
         </p:spPr>
         <p:txBody>
-          <a:bodyPr xmlns:a="http://schemas.openxmlformats.org/drawingml/2006/main" wrap="square">
+          <a:bodyPr wrap="square">
             <a:spAutoFit/>
           </a:bodyPr>
-          <a:lstStyle xmlns:a="http://schemas.openxmlformats.org/drawingml/2006/main"/>
-          <a:p xmlns:a="http://schemas.openxmlformats.org/drawingml/2006/main"/>
+          <a:lstStyle/>
+          <a:p/>
         </p:txBody>
       </p:sp>
       <p:sp>
         <p:nvSpPr>
           <p:cNvPr id="5" name="Title 4">
-            <a:extLst xmlns:a="http://schemas.openxmlformats.org/drawingml/2006/main">
+            <a:extLst>
               <a:ext uri="{FF2B5EF4-FFF2-40B4-BE49-F238E27FC236}">
-                <a16:creationId xmlns:a16="http://schemas.microsoft.com/office/drawing/2014/main" id="{E2B6D61B-B0C1-41B4-91D3-8A4338C302FE}"/>
+                <ns2:creationId id="{E2B6D61B-B0C1-41B4-91D3-8A4338C302FE}"/>
               </a:ext>
             </a:extLst>
           </p:cNvPr>
           <p:cNvSpPr>
-            <a:spLocks xmlns:a="http://schemas.openxmlformats.org/drawingml/2006/main" noGrp="1"/>
+            <a:spLocks noGrp="1"/>
           </p:cNvSpPr>
           <p:nvPr/>
         </p:nvSpPr>
         <p:spPr>
-          <a:xfrm xmlns:a="http://schemas.openxmlformats.org/drawingml/2006/main">
+          <a:xfrm>
             <a:off x="8436429" y="6443810"/>
             <a:ext cx="26974800" cy="11097741"/>
           </a:xfrm>
-          <a:prstGeom xmlns:a="http://schemas.openxmlformats.org/drawingml/2006/main" prst="rect">
+          <a:prstGeom prst="rect">
             <a:avLst/>
           </a:prstGeom>
         </p:spPr>
         <p:txBody>
-          <a:bodyPr xmlns:a="http://schemas.openxmlformats.org/drawingml/2006/main" vert="horz" lIns="914400" rIns="914400" anchor="t">
+          <a:bodyPr vert="horz" lIns="914400" rIns="914400" anchor="t">
             <a:noAutofit/>
           </a:bodyPr>
-          <a:lstStyle xmlns:a="http://schemas.openxmlformats.org/drawingml/2006/main">
+          <a:lstStyle>
             <a:lvl1pPr algn="ctr" defTabSz="3260725">
               <a:spcBef>
                 <a:spcPct val="0"/>
@@ -3234,18 +3234,7 @@
               </a:defRPr>
             </a:lvl9pPr>
           </a:lstStyle>
-          <a:p xmlns:a="http://schemas.openxmlformats.org/drawingml/2006/main">
-            <a:pPr algn="l">
-              <a:lnSpc>
-                <a:spcPct val="150000"/>
-              </a:lnSpc>
-              <a:buNone/>
-              <a:defRPr sz="9600" b="1" i="0">
-                <a:solidFill>
-                  <a:srgbClr val="FFFFFF"/>
-                </a:solidFill>
-              </a:defRPr>
-            </a:pPr>
+          <a:p>
             <a:r>
               <a:rPr sz="9600" b="1" i="0">
                 <a:solidFill>
@@ -3255,31 +3244,32 @@
                 <a:ea typeface="Arial"/>
                 <a:cs typeface="Arial"/>
               </a:rPr>
-              <a:t>Asthma diagnosis rose, but attacks did not clearly decline</a:t>
-            </a:r>
+              <a:t>More asthma diagnosis, without proportional improvement in control</a:t>
+            </a:r>
+            <a:endParaRPr/>
           </a:p>
         </p:txBody>
       </p:sp>
       <p:sp>
         <p:nvSpPr>
           <p:cNvPr id="11" name="Graphic 7">
-            <a:extLst xmlns:a="http://schemas.openxmlformats.org/drawingml/2006/main">
+            <a:extLst>
               <a:ext uri="{FF2B5EF4-FFF2-40B4-BE49-F238E27FC236}">
-                <a16:creationId xmlns:a16="http://schemas.microsoft.com/office/drawing/2014/main" id="{6A914F07-9B81-4F27-AA77-A20809DD98D8}"/>
+                <ns2:creationId id="{6A914F07-9B81-4F27-AA77-A20809DD98D8}"/>
               </a:ext>
             </a:extLst>
           </p:cNvPr>
           <p:cNvSpPr>
-            <a:spLocks xmlns:a="http://schemas.openxmlformats.org/drawingml/2006/main" noGrp="1"/>
+            <a:spLocks noGrp="1"/>
           </p:cNvSpPr>
           <p:nvPr/>
         </p:nvSpPr>
         <p:spPr>
-          <a:xfrm xmlns:a="http://schemas.openxmlformats.org/drawingml/2006/main">
+          <a:xfrm>
             <a:off x="17812662" y="25909266"/>
             <a:ext cx="1117158" cy="1932381"/>
           </a:xfrm>
-          <a:custGeom xmlns:a="http://schemas.openxmlformats.org/drawingml/2006/main">
+          <a:custGeom>
             <a:gdLst>
               <a:gd name="connsiteX0" fmla="*/ 321256 w 2089376"/>
               <a:gd name="connsiteY0" fmla="*/ 0 h 3614056"/>
@@ -3522,58 +3512,50 @@
               </a:path>
             </a:pathLst>
           </a:custGeom>
-          <a:solidFill xmlns:a="http://schemas.openxmlformats.org/drawingml/2006/main">
+          <a:solidFill>
             <a:srgbClr val="B9D9EB"/>
           </a:solidFill>
-          <a:ln xmlns:a="http://schemas.openxmlformats.org/drawingml/2006/main" w="56406">
+          <a:ln w="56406">
             <a:noFill/>
             <a:prstDash val="solid"/>
           </a:ln>
         </p:spPr>
         <p:txBody>
-          <a:bodyPr xmlns:a="http://schemas.openxmlformats.org/drawingml/2006/main" anchor="ctr"/>
-          <a:lstStyle xmlns:a="http://schemas.openxmlformats.org/drawingml/2006/main"/>
-          <a:p xmlns:a="http://schemas.openxmlformats.org/drawingml/2006/main"/>
+          <a:bodyPr anchor="ctr"/>
+          <a:lstStyle/>
+          <a:p/>
         </p:txBody>
       </p:sp>
       <p:sp>
         <p:nvSpPr>
           <p:cNvPr id="12" name="TextBox 11">
-            <a:extLst xmlns:a="http://schemas.openxmlformats.org/drawingml/2006/main">
+            <a:extLst>
               <a:ext uri="{FF2B5EF4-FFF2-40B4-BE49-F238E27FC236}">
-                <a16:creationId xmlns:a16="http://schemas.microsoft.com/office/drawing/2014/main" id="{166E3CCB-B3D7-4851-9F10-196B92FE8D0C}"/>
+                <ns2:creationId id="{166E3CCB-B3D7-4851-9F10-196B92FE8D0C}"/>
               </a:ext>
             </a:extLst>
           </p:cNvPr>
           <p:cNvSpPr>
-            <a:spLocks xmlns:a="http://schemas.openxmlformats.org/drawingml/2006/main" noGrp="1"/>
+            <a:spLocks noGrp="1"/>
           </p:cNvSpPr>
           <p:nvPr/>
         </p:nvSpPr>
         <p:spPr>
-          <a:xfrm xmlns:a="http://schemas.openxmlformats.org/drawingml/2006/main">
+          <a:xfrm>
             <a:off x="19306853" y="25997207"/>
             <a:ext cx="7179897" cy="1405641"/>
           </a:xfrm>
-          <a:prstGeom xmlns:a="http://schemas.openxmlformats.org/drawingml/2006/main" prst="rect">
-            <a:avLst/>
-          </a:prstGeom>
-          <a:noFill xmlns:a="http://schemas.openxmlformats.org/drawingml/2006/main"/>
+          <a:prstGeom prst="rect">
+            <a:avLst/>
+          </a:prstGeom>
+          <a:noFill/>
         </p:spPr>
         <p:txBody>
-          <a:bodyPr xmlns:a="http://schemas.openxmlformats.org/drawingml/2006/main" wrap="square">
+          <a:bodyPr wrap="square">
             <a:spAutoFit/>
           </a:bodyPr>
-          <a:lstStyle xmlns:a="http://schemas.openxmlformats.org/drawingml/2006/main"/>
-          <a:p xmlns:a="http://schemas.openxmlformats.org/drawingml/2006/main">
-            <a:pPr algn="l">
-              <a:buNone/>
-              <a:defRPr sz="2325" b="0" i="0">
-                <a:solidFill>
-                  <a:srgbClr val="B9D9EB"/>
-                </a:solidFill>
-              </a:defRPr>
-            </a:pPr>
+          <a:lstStyle/>
+          <a:p>
             <a:r>
               <a:rPr sz="2325" b="0" i="0">
                 <a:solidFill>
@@ -3585,16 +3567,9 @@
               </a:rPr>
               <a:t>Scan to open</a:t>
             </a:r>
-          </a:p>
-          <a:p xmlns:a="http://schemas.openxmlformats.org/drawingml/2006/main">
-            <a:pPr algn="l">
-              <a:buNone/>
-              <a:defRPr sz="2325" b="0" i="0">
-                <a:solidFill>
-                  <a:srgbClr val="B9D9EB"/>
-                </a:solidFill>
-              </a:defRPr>
-            </a:pPr>
+            <a:endParaRPr/>
+          </a:p>
+          <a:p>
             <a:r>
               <a:rPr sz="2325" b="0" i="0">
                 <a:solidFill>
@@ -3604,8 +3579,9 @@
                 <a:ea typeface="Arial"/>
                 <a:cs typeface="Arial"/>
               </a:rPr>
-              <a:t>the repository</a:t>
-            </a:r>
+              <a:t>the methodological report</a:t>
+            </a:r>
+            <a:endParaRPr/>
           </a:p>
         </p:txBody>
       </p:sp>
@@ -3616,14 +3592,14 @@
           <p:nvPr/>
         </p:nvCxnSpPr>
         <p:spPr>
-          <a:xfrm xmlns:a="http://schemas.openxmlformats.org/drawingml/2006/main" flipH="1">
+          <a:xfrm flipH="1">
             <a:off x="16574285" y="26803752"/>
             <a:ext cx="1153301" cy="0"/>
           </a:xfrm>
-          <a:prstGeom xmlns:a="http://schemas.openxmlformats.org/drawingml/2006/main" prst="straightConnector1">
-            <a:avLst/>
-          </a:prstGeom>
-          <a:ln xmlns:a="http://schemas.openxmlformats.org/drawingml/2006/main" w="66675">
+          <a:prstGeom prst="straightConnector1">
+            <a:avLst/>
+          </a:prstGeom>
+          <a:ln w="66675">
             <a:solidFill>
               <a:srgbClr val="B9D9EB"/>
             </a:solidFill>
@@ -3632,16 +3608,16 @@
           </a:ln>
         </p:spPr>
         <p:style>
-          <a:lnRef xmlns:a="http://schemas.openxmlformats.org/drawingml/2006/main" idx="1">
+          <a:lnRef idx="1">
             <a:schemeClr val="accent1"/>
           </a:lnRef>
-          <a:fillRef xmlns:a="http://schemas.openxmlformats.org/drawingml/2006/main" idx="0">
+          <a:fillRef idx="0">
             <a:schemeClr val="accent1"/>
           </a:fillRef>
-          <a:effectRef xmlns:a="http://schemas.openxmlformats.org/drawingml/2006/main" idx="0">
+          <a:effectRef idx="0">
             <a:schemeClr val="accent1"/>
           </a:effectRef>
-          <a:fontRef xmlns:a="http://schemas.openxmlformats.org/drawingml/2006/main" idx="minor">
+          <a:fontRef idx="minor">
             <a:schemeClr val="tx1"/>
           </a:fontRef>
         </p:style>
@@ -3649,29 +3625,29 @@
       <p:sp>
         <p:nvSpPr>
           <p:cNvPr id="14" name="Rectangle 13">
-            <a:extLst xmlns:a="http://schemas.openxmlformats.org/drawingml/2006/main">
+            <a:extLst>
               <a:ext uri="{FF2B5EF4-FFF2-40B4-BE49-F238E27FC236}">
-                <a16:creationId xmlns:a16="http://schemas.microsoft.com/office/drawing/2014/main" id="{613982A0-69CB-45AD-A5F2-E7F4BB7E86EB}"/>
+                <ns2:creationId id="{613982A0-69CB-45AD-A5F2-E7F4BB7E86EB}"/>
               </a:ext>
             </a:extLst>
           </p:cNvPr>
           <p:cNvSpPr>
-            <a:spLocks xmlns:a="http://schemas.openxmlformats.org/drawingml/2006/main" noGrp="1"/>
+            <a:spLocks noGrp="1"/>
           </p:cNvSpPr>
           <p:nvPr/>
         </p:nvSpPr>
         <p:spPr>
-          <a:xfrm xmlns:a="http://schemas.openxmlformats.org/drawingml/2006/main">
+          <a:xfrm>
             <a:off x="-1" y="0"/>
             <a:ext cx="8436429" cy="32918400"/>
           </a:xfrm>
-          <a:prstGeom xmlns:a="http://schemas.openxmlformats.org/drawingml/2006/main" prst="rect">
-            <a:avLst/>
-          </a:prstGeom>
-          <a:solidFill xmlns:a="http://schemas.openxmlformats.org/drawingml/2006/main">
+          <a:prstGeom prst="rect">
+            <a:avLst/>
+          </a:prstGeom>
+          <a:solidFill>
             <a:schemeClr val="bg1"/>
           </a:solidFill>
-          <a:ln xmlns:a="http://schemas.openxmlformats.org/drawingml/2006/main" w="9525" cmpd="sng">
+          <a:ln w="9525" cmpd="sng">
             <a:noFill/>
             <a:prstDash val="solid"/>
             <a:headEnd type="none" w="med" len="med"/>
@@ -3679,9 +3655,9 @@
           </a:ln>
         </p:spPr>
         <p:txBody>
-          <a:bodyPr xmlns:a="http://schemas.openxmlformats.org/drawingml/2006/main" vert="horz" wrap="square" lIns="91440" tIns="45720" rIns="91440" bIns="45720" anchor="t"/>
-          <a:lstStyle xmlns:a="http://schemas.openxmlformats.org/drawingml/2006/main"/>
-          <a:p xmlns:a="http://schemas.openxmlformats.org/drawingml/2006/main">
+          <a:bodyPr vert="horz" wrap="square" lIns="91440" tIns="45720" rIns="91440" bIns="45720" anchor="t"/>
+          <a:lstStyle/>
+          <a:p>
             <a:pPr marL="0" marR="0" indent="0" algn="l" defTabSz="2665413">
               <a:lnSpc>
                 <a:spcPct val="100000"/>
@@ -3703,29 +3679,29 @@
       <p:sp>
         <p:nvSpPr>
           <p:cNvPr id="17" name="Rectangle 16">
-            <a:extLst xmlns:a="http://schemas.openxmlformats.org/drawingml/2006/main">
+            <a:extLst>
               <a:ext uri="{FF2B5EF4-FFF2-40B4-BE49-F238E27FC236}">
-                <a16:creationId xmlns:a16="http://schemas.microsoft.com/office/drawing/2014/main" id="{3E20FE60-407F-4C94-8E81-E6399E6D12A5}"/>
+                <ns2:creationId id="{3E20FE60-407F-4C94-8E81-E6399E6D12A5}"/>
               </a:ext>
             </a:extLst>
           </p:cNvPr>
           <p:cNvSpPr>
-            <a:spLocks xmlns:a="http://schemas.openxmlformats.org/drawingml/2006/main" noGrp="1"/>
+            <a:spLocks noGrp="1"/>
           </p:cNvSpPr>
           <p:nvPr/>
         </p:nvSpPr>
         <p:spPr>
-          <a:xfrm xmlns:a="http://schemas.openxmlformats.org/drawingml/2006/main">
+          <a:xfrm>
             <a:off x="35411229" y="0"/>
             <a:ext cx="8436429" cy="32918400"/>
           </a:xfrm>
-          <a:prstGeom xmlns:a="http://schemas.openxmlformats.org/drawingml/2006/main" prst="rect">
-            <a:avLst/>
-          </a:prstGeom>
-          <a:solidFill xmlns:a="http://schemas.openxmlformats.org/drawingml/2006/main">
+          <a:prstGeom prst="rect">
+            <a:avLst/>
+          </a:prstGeom>
+          <a:solidFill>
             <a:schemeClr val="bg1"/>
           </a:solidFill>
-          <a:ln xmlns:a="http://schemas.openxmlformats.org/drawingml/2006/main" w="9525" cmpd="sng">
+          <a:ln w="9525" cmpd="sng">
             <a:noFill/>
             <a:prstDash val="solid"/>
             <a:headEnd type="none" w="med" len="med"/>
@@ -3733,9 +3709,9 @@
           </a:ln>
         </p:spPr>
         <p:txBody>
-          <a:bodyPr xmlns:a="http://schemas.openxmlformats.org/drawingml/2006/main" vert="horz" wrap="square" lIns="91440" tIns="45720" rIns="91440" bIns="45720" anchor="t"/>
-          <a:lstStyle xmlns:a="http://schemas.openxmlformats.org/drawingml/2006/main"/>
-          <a:p xmlns:a="http://schemas.openxmlformats.org/drawingml/2006/main">
+          <a:bodyPr vert="horz" wrap="square" lIns="91440" tIns="45720" rIns="91440" bIns="45720" anchor="t"/>
+          <a:lstStyle/>
+          <a:p>
             <a:pPr marL="0" marR="0" indent="0" algn="l" defTabSz="2665413">
               <a:lnSpc>
                 <a:spcPct val="100000"/>
@@ -3758,22 +3734,22 @@
         <p:nvPicPr>
           <p:cNvPr id="127" name="Picture 19"/>
           <p:cNvPicPr>
-            <a:picLocks xmlns:a="http://schemas.openxmlformats.org/drawingml/2006/main" noChangeAspect="1"/>
+            <a:picLocks noChangeAspect="1"/>
           </p:cNvPicPr>
           <p:nvPr/>
         </p:nvPicPr>
         <p:blipFill>
-          <a:blip xmlns:r="http://schemas.openxmlformats.org/officeDocument/2006/relationships" xmlns:a="http://schemas.openxmlformats.org/drawingml/2006/main" r:embed="R25f50d1c3e5c4dee"/>
-          <a:stretch xmlns:a="http://schemas.openxmlformats.org/drawingml/2006/main">
+          <a:blip r:embed="R25f50d1c3e5c4dee"/>
+          <a:stretch>
             <a:fillRect l="0" t="0" r="0" b="0"/>
           </a:stretch>
         </p:blipFill>
         <p:spPr>
-          <a:xfrm xmlns:a="http://schemas.openxmlformats.org/drawingml/2006/main">
+          <a:xfrm>
             <a:off x="36419038" y="29678799"/>
             <a:ext cx="2810933" cy="2294467"/>
           </a:xfrm>
-          <a:prstGeom xmlns:a="http://schemas.openxmlformats.org/drawingml/2006/main" prst="rect">
+          <a:prstGeom prst="rect">
             <a:avLst/>
           </a:prstGeom>
         </p:spPr>
@@ -3781,23 +3757,23 @@
       <p:sp>
         <p:nvSpPr>
           <p:cNvPr id="21" name="Graphic 18">
-            <a:extLst xmlns:a="http://schemas.openxmlformats.org/drawingml/2006/main">
+            <a:extLst>
               <a:ext uri="{FF2B5EF4-FFF2-40B4-BE49-F238E27FC236}">
-                <a16:creationId xmlns:a16="http://schemas.microsoft.com/office/drawing/2014/main" id="{DF6CD646-5E36-42FB-96E3-FEB08C25F063}"/>
+                <ns2:creationId id="{DF6CD646-5E36-42FB-96E3-FEB08C25F063}"/>
               </a:ext>
             </a:extLst>
           </p:cNvPr>
           <p:cNvSpPr>
-            <a:spLocks xmlns:a="http://schemas.openxmlformats.org/drawingml/2006/main" noGrp="1"/>
+            <a:spLocks noGrp="1"/>
           </p:cNvSpPr>
           <p:nvPr/>
         </p:nvSpPr>
         <p:spPr>
-          <a:xfrm xmlns:a="http://schemas.openxmlformats.org/drawingml/2006/main" rot="0" flipH="0" flipV="0">
+          <a:xfrm rot="0" flipH="0" flipV="0">
             <a:off x="561452" y="7489285"/>
             <a:ext cx="320382" cy="297952"/>
           </a:xfrm>
-          <a:custGeom xmlns:a="http://schemas.openxmlformats.org/drawingml/2006/main">
+          <a:custGeom>
             <a:gdLst>
               <a:gd name="connsiteX0" fmla="*/ 310594 w 327663"/>
               <a:gd name="connsiteY0" fmla="*/ 219906 h 335196"/>
@@ -3912,43 +3888,43 @@
               </a:path>
             </a:pathLst>
           </a:custGeom>
-          <a:solidFill xmlns:a="http://schemas.openxmlformats.org/drawingml/2006/main">
+          <a:solidFill>
             <a:schemeClr val="tx1">
               <a:lumMod val="50000"/>
               <a:lumOff val="50000"/>
             </a:schemeClr>
           </a:solidFill>
-          <a:ln xmlns:a="http://schemas.openxmlformats.org/drawingml/2006/main" w="3663">
+          <a:ln w="3663">
             <a:noFill/>
             <a:prstDash val="solid"/>
           </a:ln>
         </p:spPr>
         <p:txBody>
-          <a:bodyPr xmlns:a="http://schemas.openxmlformats.org/drawingml/2006/main" anchor="ctr"/>
-          <a:lstStyle xmlns:a="http://schemas.openxmlformats.org/drawingml/2006/main"/>
-          <a:p xmlns:a="http://schemas.openxmlformats.org/drawingml/2006/main"/>
+          <a:bodyPr anchor="ctr"/>
+          <a:lstStyle/>
+          <a:p/>
         </p:txBody>
       </p:sp>
       <p:sp>
         <p:nvSpPr>
           <p:cNvPr id="24" name="Graphic 18">
-            <a:extLst xmlns:a="http://schemas.openxmlformats.org/drawingml/2006/main">
+            <a:extLst>
               <a:ext uri="{FF2B5EF4-FFF2-40B4-BE49-F238E27FC236}">
-                <a16:creationId xmlns:a16="http://schemas.microsoft.com/office/drawing/2014/main" id="{1726A8DA-9186-4C79-926E-2D1215AE14D2}"/>
+                <ns2:creationId id="{1726A8DA-9186-4C79-926E-2D1215AE14D2}"/>
               </a:ext>
             </a:extLst>
           </p:cNvPr>
           <p:cNvSpPr>
-            <a:spLocks xmlns:a="http://schemas.openxmlformats.org/drawingml/2006/main" noGrp="1"/>
+            <a:spLocks noGrp="1"/>
           </p:cNvSpPr>
           <p:nvPr/>
         </p:nvSpPr>
         <p:spPr>
-          <a:xfrm xmlns:a="http://schemas.openxmlformats.org/drawingml/2006/main">
+          <a:xfrm>
             <a:off x="36419038" y="26632748"/>
             <a:ext cx="320382" cy="297952"/>
           </a:xfrm>
-          <a:custGeom xmlns:a="http://schemas.openxmlformats.org/drawingml/2006/main">
+          <a:custGeom>
             <a:gdLst>
               <a:gd name="connsiteX0" fmla="*/ 310594 w 327663"/>
               <a:gd name="connsiteY0" fmla="*/ 219906 h 335196"/>
@@ -4063,42 +4039,42 @@
               </a:path>
             </a:pathLst>
           </a:custGeom>
-          <a:solidFill xmlns:a="http://schemas.openxmlformats.org/drawingml/2006/main">
+          <a:solidFill>
             <a:schemeClr val="tx1">
               <a:lumMod val="50000"/>
               <a:lumOff val="50000"/>
             </a:schemeClr>
           </a:solidFill>
-          <a:ln xmlns:a="http://schemas.openxmlformats.org/drawingml/2006/main" w="3663">
+          <a:ln w="3663">
             <a:noFill/>
             <a:prstDash val="solid"/>
           </a:ln>
         </p:spPr>
         <p:txBody>
-          <a:bodyPr xmlns:a="http://schemas.openxmlformats.org/drawingml/2006/main" anchor="ctr"/>
-          <a:lstStyle xmlns:a="http://schemas.openxmlformats.org/drawingml/2006/main"/>
-          <a:p xmlns:a="http://schemas.openxmlformats.org/drawingml/2006/main"/>
+          <a:bodyPr anchor="ctr"/>
+          <a:lstStyle/>
+          <a:p/>
         </p:txBody>
       </p:sp>
       <p:pic>
         <p:nvPicPr>
           <p:cNvPr id="130" name="Imagem 2"/>
           <p:cNvPicPr>
-            <a:picLocks xmlns:a="http://schemas.openxmlformats.org/drawingml/2006/main" noChangeAspect="1"/>
+            <a:picLocks noChangeAspect="1"/>
           </p:cNvPicPr>
           <p:nvPr/>
         </p:nvPicPr>
         <p:blipFill>
-          <a:blip xmlns:r="http://schemas.openxmlformats.org/officeDocument/2006/relationships" xmlns:a="http://schemas.openxmlformats.org/drawingml/2006/main" r:embed="R9a03a2d3afeb441c"/>
-          <a:srcRect xmlns:a="http://schemas.openxmlformats.org/drawingml/2006/main" l="0" t="0" r="0" b="0"/>
-          <a:stretch xmlns:a="http://schemas.openxmlformats.org/drawingml/2006/main"/>
+          <a:blip r:embed="R9a03a2d3afeb441c"/>
+          <a:srcRect l="0" t="0" r="0" b="0"/>
+          <a:stretch/>
         </p:blipFill>
         <p:spPr>
-          <a:xfrm xmlns:a="http://schemas.openxmlformats.org/drawingml/2006/main">
+          <a:xfrm>
             <a:off x="40237780" y="28882425"/>
             <a:ext cx="3330899" cy="3731175"/>
           </a:xfrm>
-          <a:prstGeom xmlns:a="http://schemas.openxmlformats.org/drawingml/2006/main" prst="rect">
+          <a:prstGeom prst="rect">
             <a:avLst/>
           </a:prstGeom>
         </p:spPr>
@@ -4107,21 +4083,21 @@
         <p:nvPicPr>
           <p:cNvPr id="131" name="Imagem 15"/>
           <p:cNvPicPr>
-            <a:picLocks xmlns:a="http://schemas.openxmlformats.org/drawingml/2006/main" noChangeAspect="1"/>
+            <a:picLocks noChangeAspect="1"/>
           </p:cNvPicPr>
           <p:nvPr/>
         </p:nvPicPr>
         <p:blipFill>
-          <a:blip xmlns:r="http://schemas.openxmlformats.org/officeDocument/2006/relationships" xmlns:a="http://schemas.openxmlformats.org/drawingml/2006/main" r:embed="R47bd4cdb33eb49cf"/>
-          <a:srcRect xmlns:a="http://schemas.openxmlformats.org/drawingml/2006/main" l="0" t="41985" r="50251" b="34197"/>
-          <a:stretch xmlns:a="http://schemas.openxmlformats.org/drawingml/2006/main"/>
+          <a:blip r:embed="R47bd4cdb33eb49cf"/>
+          <a:srcRect l="0" t="41985" r="50251" b="34197"/>
+          <a:stretch/>
         </p:blipFill>
         <p:spPr>
-          <a:xfrm xmlns:a="http://schemas.openxmlformats.org/drawingml/2006/main" rot="0" flipH="1" flipV="0">
+          <a:xfrm rot="0" flipH="1" flipV="0">
             <a:off x="17720847" y="1"/>
             <a:ext cx="17829495" cy="4696690"/>
           </a:xfrm>
-          <a:prstGeom xmlns:a="http://schemas.openxmlformats.org/drawingml/2006/main" prst="rect">
+          <a:prstGeom prst="rect">
             <a:avLst/>
           </a:prstGeom>
         </p:spPr>
@@ -4130,21 +4106,21 @@
         <p:nvPicPr>
           <p:cNvPr id="132" name="Imagem 25"/>
           <p:cNvPicPr>
-            <a:picLocks xmlns:a="http://schemas.openxmlformats.org/drawingml/2006/main" noChangeAspect="1"/>
+            <a:picLocks noChangeAspect="1"/>
           </p:cNvPicPr>
           <p:nvPr/>
         </p:nvPicPr>
         <p:blipFill>
-          <a:blip xmlns:r="http://schemas.openxmlformats.org/officeDocument/2006/relationships" xmlns:a="http://schemas.openxmlformats.org/drawingml/2006/main" r:embed="R47bd4cdb33eb49cf"/>
-          <a:srcRect xmlns:a="http://schemas.openxmlformats.org/drawingml/2006/main" l="0" t="0" r="0" b="0"/>
-          <a:stretch xmlns:a="http://schemas.openxmlformats.org/drawingml/2006/main"/>
+          <a:blip r:embed="R47bd4cdb33eb49cf"/>
+          <a:srcRect l="0" t="0" r="0" b="0"/>
+          <a:stretch/>
         </p:blipFill>
         <p:spPr>
-          <a:xfrm xmlns:a="http://schemas.openxmlformats.org/drawingml/2006/main" rot="0" flipH="0" flipV="0">
+          <a:xfrm rot="0" flipH="0" flipV="0">
             <a:off x="35372905" y="1"/>
             <a:ext cx="8518294" cy="4696690"/>
           </a:xfrm>
-          <a:prstGeom xmlns:a="http://schemas.openxmlformats.org/drawingml/2006/main" prst="rect">
+          <a:prstGeom prst="rect">
             <a:avLst/>
           </a:prstGeom>
         </p:spPr>
@@ -4153,21 +4129,21 @@
         <p:nvPicPr>
           <p:cNvPr id="133" name="Imagem 26"/>
           <p:cNvPicPr>
-            <a:picLocks xmlns:a="http://schemas.openxmlformats.org/drawingml/2006/main" noChangeAspect="1"/>
+            <a:picLocks noChangeAspect="1"/>
           </p:cNvPicPr>
           <p:nvPr/>
         </p:nvPicPr>
         <p:blipFill>
-          <a:blip xmlns:r="http://schemas.openxmlformats.org/officeDocument/2006/relationships" xmlns:a="http://schemas.openxmlformats.org/drawingml/2006/main" r:embed="R47bd4cdb33eb49cf"/>
-          <a:srcRect xmlns:a="http://schemas.openxmlformats.org/drawingml/2006/main" l="0" t="41985" r="50251" b="34197"/>
-          <a:stretch xmlns:a="http://schemas.openxmlformats.org/drawingml/2006/main"/>
+          <a:blip r:embed="R47bd4cdb33eb49cf"/>
+          <a:srcRect l="0" t="41985" r="50251" b="34197"/>
+          <a:stretch/>
         </p:blipFill>
         <p:spPr>
-          <a:xfrm xmlns:a="http://schemas.openxmlformats.org/drawingml/2006/main" rot="10800000" flipH="1" flipV="0">
+          <a:xfrm rot="10800000" flipH="1" flipV="0">
             <a:off x="0" y="1"/>
             <a:ext cx="17829495" cy="4696690"/>
           </a:xfrm>
-          <a:prstGeom xmlns:a="http://schemas.openxmlformats.org/drawingml/2006/main" prst="rect">
+          <a:prstGeom prst="rect">
             <a:avLst/>
           </a:prstGeom>
         </p:spPr>
@@ -4176,22 +4152,22 @@
         <p:nvPicPr>
           <p:cNvPr id="134" name="Imagem 8"/>
           <p:cNvPicPr>
-            <a:picLocks xmlns:a="http://schemas.openxmlformats.org/drawingml/2006/main" noChangeAspect="1"/>
+            <a:picLocks noChangeAspect="1"/>
           </p:cNvPicPr>
           <p:nvPr/>
         </p:nvPicPr>
         <p:blipFill>
-          <a:blip xmlns:r="http://schemas.openxmlformats.org/officeDocument/2006/relationships" xmlns:a="http://schemas.openxmlformats.org/drawingml/2006/main" r:embed="R837c7528521d42f5"/>
-          <a:stretch xmlns:a="http://schemas.openxmlformats.org/drawingml/2006/main">
+          <a:blip r:embed="R837c7528521d42f5"/>
+          <a:stretch>
             <a:fillRect l="0" t="0" r="0" b="0"/>
           </a:stretch>
         </p:blipFill>
         <p:spPr>
-          <a:xfrm xmlns:a="http://schemas.openxmlformats.org/drawingml/2006/main" rot="0" flipH="0" flipV="0">
+          <a:xfrm rot="0" flipH="0" flipV="0">
             <a:off x="1104807" y="998069"/>
             <a:ext cx="12847803" cy="2658990"/>
           </a:xfrm>
-          <a:prstGeom xmlns:a="http://schemas.openxmlformats.org/drawingml/2006/main" prst="rect">
+          <a:prstGeom prst="rect">
             <a:avLst/>
           </a:prstGeom>
         </p:spPr>
@@ -4200,23 +4176,23 @@
         <p:nvPicPr>
           <p:cNvPr id="135" name="Imagem 14"/>
           <p:cNvPicPr>
-            <a:picLocks xmlns:a="http://schemas.openxmlformats.org/drawingml/2006/main" noChangeAspect="1"/>
+            <a:picLocks noChangeAspect="1"/>
           </p:cNvPicPr>
           <p:nvPr/>
         </p:nvPicPr>
         <p:blipFill>
-          <a:blip xmlns:r="http://schemas.openxmlformats.org/officeDocument/2006/relationships" xmlns:a="http://schemas.openxmlformats.org/drawingml/2006/main" r:embed="R161f7d53ecff4105"/>
-          <a:srcRect xmlns:a="http://schemas.openxmlformats.org/drawingml/2006/main" l="0" t="21190" r="0" b="0"/>
-          <a:stretch xmlns:a="http://schemas.openxmlformats.org/drawingml/2006/main">
+          <a:blip r:embed="R161f7d53ecff4105"/>
+          <a:srcRect l="0" t="21190" r="0" b="0"/>
+          <a:stretch>
             <a:fillRect l="0" t="0" r="0" b="0"/>
           </a:stretch>
         </p:blipFill>
         <p:spPr>
-          <a:xfrm xmlns:a="http://schemas.openxmlformats.org/drawingml/2006/main" rot="0" flipH="0" flipV="0">
+          <a:xfrm rot="0" flipH="0" flipV="0">
             <a:off x="16751300" y="1901593"/>
             <a:ext cx="23686714" cy="1755466"/>
           </a:xfrm>
-          <a:prstGeom xmlns:a="http://schemas.openxmlformats.org/drawingml/2006/main" prst="rect">
+          <a:prstGeom prst="rect">
             <a:avLst/>
           </a:prstGeom>
         </p:spPr>
@@ -4225,21 +4201,21 @@
         <p:nvPicPr>
           <p:cNvPr id="136" name="Imagem 30"/>
           <p:cNvPicPr>
-            <a:picLocks xmlns:a="http://schemas.openxmlformats.org/drawingml/2006/main" noChangeAspect="1"/>
+            <a:picLocks noChangeAspect="1"/>
           </p:cNvPicPr>
           <p:nvPr/>
         </p:nvPicPr>
         <p:blipFill>
-          <a:blip xmlns:r="http://schemas.openxmlformats.org/officeDocument/2006/relationships" xmlns:a="http://schemas.openxmlformats.org/drawingml/2006/main" r:embed="R47bd4cdb33eb49cf"/>
-          <a:srcRect xmlns:a="http://schemas.openxmlformats.org/drawingml/2006/main" l="0" t="41985" r="50251" b="34197"/>
-          <a:stretch xmlns:a="http://schemas.openxmlformats.org/drawingml/2006/main"/>
+          <a:blip r:embed="R47bd4cdb33eb49cf"/>
+          <a:srcRect l="0" t="41985" r="50251" b="34197"/>
+          <a:stretch/>
         </p:blipFill>
         <p:spPr>
-          <a:xfrm xmlns:a="http://schemas.openxmlformats.org/drawingml/2006/main" rot="0" flipH="1" flipV="0">
+          <a:xfrm rot="0" flipH="1" flipV="0">
             <a:off x="17873247" y="152401"/>
             <a:ext cx="17829495" cy="4696690"/>
           </a:xfrm>
-          <a:prstGeom xmlns:a="http://schemas.openxmlformats.org/drawingml/2006/main" prst="rect">
+          <a:prstGeom prst="rect">
             <a:avLst/>
           </a:prstGeom>
         </p:spPr>
@@ -4248,21 +4224,21 @@
         <p:nvPicPr>
           <p:cNvPr id="137" name="Imagem 31"/>
           <p:cNvPicPr>
-            <a:picLocks xmlns:a="http://schemas.openxmlformats.org/drawingml/2006/main" noChangeAspect="1"/>
+            <a:picLocks noChangeAspect="1"/>
           </p:cNvPicPr>
           <p:nvPr/>
         </p:nvPicPr>
         <p:blipFill>
-          <a:blip xmlns:r="http://schemas.openxmlformats.org/officeDocument/2006/relationships" xmlns:a="http://schemas.openxmlformats.org/drawingml/2006/main" r:embed="R47bd4cdb33eb49cf"/>
-          <a:srcRect xmlns:a="http://schemas.openxmlformats.org/drawingml/2006/main" l="0" t="0" r="0" b="0"/>
-          <a:stretch xmlns:a="http://schemas.openxmlformats.org/drawingml/2006/main"/>
+          <a:blip r:embed="R47bd4cdb33eb49cf"/>
+          <a:srcRect l="0" t="0" r="0" b="0"/>
+          <a:stretch/>
         </p:blipFill>
         <p:spPr>
-          <a:xfrm xmlns:a="http://schemas.openxmlformats.org/drawingml/2006/main" rot="0" flipH="0" flipV="0">
+          <a:xfrm rot="0" flipH="0" flipV="0">
             <a:off x="35525305" y="152401"/>
             <a:ext cx="8518294" cy="4696690"/>
           </a:xfrm>
-          <a:prstGeom xmlns:a="http://schemas.openxmlformats.org/drawingml/2006/main" prst="rect">
+          <a:prstGeom prst="rect">
             <a:avLst/>
           </a:prstGeom>
         </p:spPr>
@@ -4271,21 +4247,21 @@
         <p:nvPicPr>
           <p:cNvPr id="138" name="Imagem 32"/>
           <p:cNvPicPr>
-            <a:picLocks xmlns:a="http://schemas.openxmlformats.org/drawingml/2006/main" noChangeAspect="1"/>
+            <a:picLocks noChangeAspect="1"/>
           </p:cNvPicPr>
           <p:nvPr/>
         </p:nvPicPr>
         <p:blipFill>
-          <a:blip xmlns:r="http://schemas.openxmlformats.org/officeDocument/2006/relationships" xmlns:a="http://schemas.openxmlformats.org/drawingml/2006/main" r:embed="R47bd4cdb33eb49cf"/>
-          <a:srcRect xmlns:a="http://schemas.openxmlformats.org/drawingml/2006/main" l="0" t="41985" r="50251" b="34197"/>
-          <a:stretch xmlns:a="http://schemas.openxmlformats.org/drawingml/2006/main"/>
+          <a:blip r:embed="R47bd4cdb33eb49cf"/>
+          <a:srcRect l="0" t="41985" r="50251" b="34197"/>
+          <a:stretch/>
         </p:blipFill>
         <p:spPr>
-          <a:xfrm xmlns:a="http://schemas.openxmlformats.org/drawingml/2006/main" rot="10800000" flipH="1" flipV="0">
+          <a:xfrm rot="10800000" flipH="1" flipV="0">
             <a:off x="152400" y="152401"/>
             <a:ext cx="17829495" cy="4696690"/>
           </a:xfrm>
-          <a:prstGeom xmlns:a="http://schemas.openxmlformats.org/drawingml/2006/main" prst="rect">
+          <a:prstGeom prst="rect">
             <a:avLst/>
           </a:prstGeom>
         </p:spPr>
@@ -4294,22 +4270,22 @@
         <p:nvPicPr>
           <p:cNvPr id="139" name="Imagem 28"/>
           <p:cNvPicPr>
-            <a:picLocks xmlns:a="http://schemas.openxmlformats.org/drawingml/2006/main" noChangeAspect="1"/>
+            <a:picLocks noChangeAspect="1"/>
           </p:cNvPicPr>
           <p:nvPr/>
         </p:nvPicPr>
         <p:blipFill>
-          <a:blip xmlns:r="http://schemas.openxmlformats.org/officeDocument/2006/relationships" xmlns:a="http://schemas.openxmlformats.org/drawingml/2006/main" r:embed="R837c7528521d42f5"/>
-          <a:stretch xmlns:a="http://schemas.openxmlformats.org/drawingml/2006/main">
+          <a:blip r:embed="R837c7528521d42f5"/>
+          <a:stretch>
             <a:fillRect l="0" t="0" r="0" b="0"/>
           </a:stretch>
         </p:blipFill>
         <p:spPr>
-          <a:xfrm xmlns:a="http://schemas.openxmlformats.org/drawingml/2006/main" rot="0" flipH="0" flipV="0">
+          <a:xfrm rot="0" flipH="0" flipV="0">
             <a:off x="1257207" y="1150469"/>
             <a:ext cx="12847803" cy="2658990"/>
           </a:xfrm>
-          <a:prstGeom xmlns:a="http://schemas.openxmlformats.org/drawingml/2006/main" prst="rect">
+          <a:prstGeom prst="rect">
             <a:avLst/>
           </a:prstGeom>
         </p:spPr>
@@ -4318,22 +4294,22 @@
         <p:nvPicPr>
           <p:cNvPr id="140" name="Imagem 34"/>
           <p:cNvPicPr>
-            <a:picLocks xmlns:a="http://schemas.openxmlformats.org/drawingml/2006/main" noChangeAspect="1"/>
+            <a:picLocks noChangeAspect="1"/>
           </p:cNvPicPr>
           <p:nvPr/>
         </p:nvPicPr>
         <p:blipFill>
-          <a:blip xmlns:r="http://schemas.openxmlformats.org/officeDocument/2006/relationships" xmlns:a="http://schemas.openxmlformats.org/drawingml/2006/main" r:embed="R59a633428939412e"/>
-          <a:stretch xmlns:a="http://schemas.openxmlformats.org/drawingml/2006/main">
+          <a:blip r:embed="R59a633428939412e"/>
+          <a:stretch>
             <a:fillRect l="0" t="0" r="0" b="0"/>
           </a:stretch>
         </p:blipFill>
         <p:spPr>
-          <a:xfrm xmlns:a="http://schemas.openxmlformats.org/drawingml/2006/main">
+          <a:xfrm>
             <a:off x="16751301" y="1892510"/>
             <a:ext cx="24396700" cy="1536490"/>
           </a:xfrm>
-          <a:prstGeom xmlns:a="http://schemas.openxmlformats.org/drawingml/2006/main" prst="rect">
+          <a:prstGeom prst="rect">
             <a:avLst/>
           </a:prstGeom>
         </p:spPr>
@@ -4341,43 +4317,35 @@
       <p:sp>
         <p:nvSpPr>
           <p:cNvPr id="39" name="poster-title">
-            <a:extLst xmlns:a="http://schemas.openxmlformats.org/drawingml/2006/main">
+            <a:extLst>
               <a:ext uri="{FF2B5EF4-FFF2-40B4-BE49-F238E27FC236}">
-                <a16:creationId xmlns:a16="http://schemas.microsoft.com/office/drawing/2014/main" id="{DD16D0E4-4F60-4FC0-B876-21F32411E942}"/>
+                <ns2:creationId id="{DD16D0E4-4F60-4FC0-B876-21F32411E942}"/>
               </a:ext>
             </a:extLst>
           </p:cNvPr>
           <p:cNvSpPr>
-            <a:spLocks xmlns:a="http://schemas.openxmlformats.org/drawingml/2006/main" noGrp="1"/>
+            <a:spLocks noGrp="1"/>
           </p:cNvSpPr>
           <p:nvPr/>
         </p:nvSpPr>
         <p:spPr>
-          <a:xfrm xmlns:a="http://schemas.openxmlformats.org/drawingml/2006/main">
+          <a:xfrm>
             <a:off x="552450" y="5619750"/>
             <a:ext cx="7067550" cy="1428750"/>
           </a:xfrm>
-          <a:prstGeom xmlns:a="http://schemas.openxmlformats.org/drawingml/2006/main" prst="rect">
-            <a:avLst/>
-          </a:prstGeom>
-          <a:noFill xmlns:a="http://schemas.openxmlformats.org/drawingml/2006/main"/>
-          <a:ln xmlns:a="http://schemas.openxmlformats.org/drawingml/2006/main" w="0">
+          <a:prstGeom prst="rect">
+            <a:avLst/>
+          </a:prstGeom>
+          <a:noFill/>
+          <a:ln w="0">
             <a:noFill/>
             <a:prstDash val="solid"/>
           </a:ln>
         </p:spPr>
         <p:txBody>
-          <a:bodyPr xmlns:a="http://schemas.openxmlformats.org/drawingml/2006/main"/>
-          <a:lstStyle xmlns:a="http://schemas.openxmlformats.org/drawingml/2006/main"/>
-          <a:p xmlns:a="http://schemas.openxmlformats.org/drawingml/2006/main">
-            <a:pPr algn="l">
-              <a:buNone/>
-              <a:defRPr sz="2700" b="1" i="1">
-                <a:solidFill>
-                  <a:srgbClr val="111111"/>
-                </a:solidFill>
-              </a:defRPr>
-            </a:pPr>
+          <a:bodyPr/>
+          <a:lstStyle/>
+          <a:p>
             <a:r>
               <a:rPr sz="2700" b="1" i="1">
                 <a:solidFill>
@@ -4389,16 +4357,9 @@
               </a:rPr>
               <a:t>Asthma in Brazil, 2013-2019</a:t>
             </a:r>
-          </a:p>
-          <a:p xmlns:a="http://schemas.openxmlformats.org/drawingml/2006/main">
-            <a:pPr algn="l">
-              <a:buNone/>
-              <a:defRPr sz="2700" b="1" i="1">
-                <a:solidFill>
-                  <a:srgbClr val="111111"/>
-                </a:solidFill>
-              </a:defRPr>
-            </a:pPr>
+            <a:endParaRPr/>
+          </a:p>
+          <a:p>
             <a:r>
               <a:rPr sz="2700" b="1" i="1">
                 <a:solidFill>
@@ -4408,43 +4369,44 @@
                 <a:ea typeface="Arial"/>
                 <a:cs typeface="Arial"/>
               </a:rPr>
-              <a:t>Reproducible estimates from PNS microdata</a:t>
-            </a:r>
+              <a:t>PNS sampling design and reproducible indicators</a:t>
+            </a:r>
+            <a:endParaRPr/>
           </a:p>
         </p:txBody>
       </p:sp>
       <p:sp>
         <p:nvSpPr>
           <p:cNvPr id="40" name="poster-presenter">
-            <a:extLst xmlns:a="http://schemas.openxmlformats.org/drawingml/2006/main">
+            <a:extLst>
               <a:ext uri="{FF2B5EF4-FFF2-40B4-BE49-F238E27FC236}">
-                <a16:creationId xmlns:a16="http://schemas.microsoft.com/office/drawing/2014/main" id="{0F5D8B28-13B9-47D5-9A43-2E279A4B9987}"/>
+                <ns2:creationId id="{0F5D8B28-13B9-47D5-9A43-2E279A4B9987}"/>
               </a:ext>
             </a:extLst>
           </p:cNvPr>
           <p:cNvSpPr>
-            <a:spLocks xmlns:a="http://schemas.openxmlformats.org/drawingml/2006/main" noGrp="1"/>
+            <a:spLocks noGrp="1"/>
           </p:cNvSpPr>
           <p:nvPr/>
         </p:nvSpPr>
         <p:spPr>
-          <a:xfrm xmlns:a="http://schemas.openxmlformats.org/drawingml/2006/main">
+          <a:xfrm>
             <a:off x="942975" y="7334250"/>
             <a:ext cx="7048500" cy="552450"/>
           </a:xfrm>
-          <a:prstGeom xmlns:a="http://schemas.openxmlformats.org/drawingml/2006/main" prst="rect">
-            <a:avLst/>
-          </a:prstGeom>
-          <a:noFill xmlns:a="http://schemas.openxmlformats.org/drawingml/2006/main"/>
-          <a:ln xmlns:a="http://schemas.openxmlformats.org/drawingml/2006/main" w="0">
+          <a:prstGeom prst="rect">
+            <a:avLst/>
+          </a:prstGeom>
+          <a:noFill/>
+          <a:ln w="0">
             <a:noFill/>
             <a:prstDash val="solid"/>
           </a:ln>
         </p:spPr>
         <p:txBody>
-          <a:bodyPr xmlns:a="http://schemas.openxmlformats.org/drawingml/2006/main"/>
-          <a:lstStyle xmlns:a="http://schemas.openxmlformats.org/drawingml/2006/main"/>
-          <a:p xmlns:a="http://schemas.openxmlformats.org/drawingml/2006/main">
+          <a:bodyPr/>
+          <a:lstStyle/>
+          <a:p>
             <a:pPr algn="l">
               <a:buNone/>
               <a:defRPr sz="1875" b="0" i="0">
@@ -4470,35 +4432,35 @@
       <p:sp>
         <p:nvSpPr>
           <p:cNvPr id="43" name="poster-authors">
-            <a:extLst xmlns:a="http://schemas.openxmlformats.org/drawingml/2006/main">
+            <a:extLst>
               <a:ext uri="{FF2B5EF4-FFF2-40B4-BE49-F238E27FC236}">
-                <a16:creationId xmlns:a16="http://schemas.microsoft.com/office/drawing/2014/main" id="{7CE64CB1-A695-414D-A5AE-FD95A44745D0}"/>
+                <ns2:creationId id="{7CE64CB1-A695-414D-A5AE-FD95A44745D0}"/>
               </a:ext>
             </a:extLst>
           </p:cNvPr>
           <p:cNvSpPr>
-            <a:spLocks xmlns:a="http://schemas.openxmlformats.org/drawingml/2006/main" noGrp="1"/>
+            <a:spLocks noGrp="1"/>
           </p:cNvSpPr>
           <p:nvPr/>
         </p:nvSpPr>
         <p:spPr>
-          <a:xfrm xmlns:a="http://schemas.openxmlformats.org/drawingml/2006/main">
+          <a:xfrm>
             <a:off x="36852225" y="26450925"/>
             <a:ext cx="6667500" cy="2000250"/>
           </a:xfrm>
-          <a:prstGeom xmlns:a="http://schemas.openxmlformats.org/drawingml/2006/main" prst="rect">
-            <a:avLst/>
-          </a:prstGeom>
-          <a:noFill xmlns:a="http://schemas.openxmlformats.org/drawingml/2006/main"/>
-          <a:ln xmlns:a="http://schemas.openxmlformats.org/drawingml/2006/main" w="0">
+          <a:prstGeom prst="rect">
+            <a:avLst/>
+          </a:prstGeom>
+          <a:noFill/>
+          <a:ln w="0">
             <a:noFill/>
             <a:prstDash val="solid"/>
           </a:ln>
         </p:spPr>
         <p:txBody>
-          <a:bodyPr xmlns:a="http://schemas.openxmlformats.org/drawingml/2006/main"/>
-          <a:lstStyle xmlns:a="http://schemas.openxmlformats.org/drawingml/2006/main"/>
-          <a:p xmlns:a="http://schemas.openxmlformats.org/drawingml/2006/main">
+          <a:bodyPr/>
+          <a:lstStyle/>
+          <a:p>
             <a:pPr algn="l">
               <a:buNone/>
               <a:defRPr sz="2100" b="0" i="0">
@@ -4519,7 +4481,7 @@
               <a:t>I. Dube; M. E. L. Silva</a:t>
             </a:r>
           </a:p>
-          <a:p xmlns:a="http://schemas.openxmlformats.org/drawingml/2006/main">
+          <a:p>
             <a:pPr algn="l">
               <a:buNone/>
               <a:defRPr sz="2100" b="0" i="0">
@@ -4545,29 +4507,29 @@
       <p:sp>
         <p:nvSpPr>
           <p:cNvPr id="44" name="github-qr-placeholder">
-            <a:extLst xmlns:a="http://schemas.openxmlformats.org/drawingml/2006/main">
+            <a:extLst>
               <a:ext uri="{FF2B5EF4-FFF2-40B4-BE49-F238E27FC236}">
-                <a16:creationId xmlns:a16="http://schemas.microsoft.com/office/drawing/2014/main" id="{3C2FDF1F-3204-4C2D-8B6F-9BC5448D7D93}"/>
+                <ns2:creationId id="{3C2FDF1F-3204-4C2D-8B6F-9BC5448D7D93}"/>
               </a:ext>
             </a:extLst>
           </p:cNvPr>
           <p:cNvSpPr>
-            <a:spLocks xmlns:a="http://schemas.openxmlformats.org/drawingml/2006/main" noGrp="1"/>
+            <a:spLocks noGrp="1"/>
           </p:cNvSpPr>
           <p:nvPr/>
         </p:nvSpPr>
         <p:spPr>
-          <a:xfrm xmlns:a="http://schemas.openxmlformats.org/drawingml/2006/main">
+          <a:xfrm>
             <a:off x="12049125" y="24574500"/>
             <a:ext cx="4572000" cy="4572000"/>
           </a:xfrm>
-          <a:prstGeom xmlns:a="http://schemas.openxmlformats.org/drawingml/2006/main" prst="rect">
-            <a:avLst/>
-          </a:prstGeom>
-          <a:solidFill xmlns:a="http://schemas.openxmlformats.org/drawingml/2006/main">
+          <a:prstGeom prst="rect">
+            <a:avLst/>
+          </a:prstGeom>
+          <a:solidFill>
             <a:srgbClr val="FFFFFF"/>
           </a:solidFill>
-          <a:ln xmlns:a="http://schemas.openxmlformats.org/drawingml/2006/main" w="57150">
+          <a:ln w="57150">
             <a:solidFill>
               <a:srgbClr val="B9D9EB"/>
             </a:solidFill>
@@ -4578,43 +4540,35 @@
       <p:sp>
         <p:nvSpPr>
           <p:cNvPr id="45" name="github-qr-placeholder-label">
-            <a:extLst xmlns:a="http://schemas.openxmlformats.org/drawingml/2006/main">
+            <a:extLst>
               <a:ext uri="{FF2B5EF4-FFF2-40B4-BE49-F238E27FC236}">
-                <a16:creationId xmlns:a16="http://schemas.microsoft.com/office/drawing/2014/main" id="{FAE6DF9F-2CFD-4F30-AC54-DF4142910DF0}"/>
+                <ns2:creationId id="{FAE6DF9F-2CFD-4F30-AC54-DF4142910DF0}"/>
               </a:ext>
             </a:extLst>
           </p:cNvPr>
           <p:cNvSpPr>
-            <a:spLocks xmlns:a="http://schemas.openxmlformats.org/drawingml/2006/main" noGrp="1"/>
+            <a:spLocks noGrp="1"/>
           </p:cNvSpPr>
           <p:nvPr/>
         </p:nvSpPr>
         <p:spPr>
-          <a:xfrm xmlns:a="http://schemas.openxmlformats.org/drawingml/2006/main">
+          <a:xfrm>
             <a:off x="12334875" y="26098500"/>
             <a:ext cx="4000500" cy="1143000"/>
           </a:xfrm>
-          <a:prstGeom xmlns:a="http://schemas.openxmlformats.org/drawingml/2006/main" prst="rect">
-            <a:avLst/>
-          </a:prstGeom>
-          <a:noFill xmlns:a="http://schemas.openxmlformats.org/drawingml/2006/main"/>
-          <a:ln xmlns:a="http://schemas.openxmlformats.org/drawingml/2006/main" w="0">
+          <a:prstGeom prst="rect">
+            <a:avLst/>
+          </a:prstGeom>
+          <a:noFill/>
+          <a:ln w="0">
             <a:noFill/>
             <a:prstDash val="solid"/>
           </a:ln>
         </p:spPr>
         <p:txBody>
-          <a:bodyPr xmlns:a="http://schemas.openxmlformats.org/drawingml/2006/main"/>
-          <a:lstStyle xmlns:a="http://schemas.openxmlformats.org/drawingml/2006/main"/>
-          <a:p xmlns:a="http://schemas.openxmlformats.org/drawingml/2006/main">
-            <a:pPr algn="ctr">
-              <a:buNone/>
-              <a:defRPr sz="2325" b="1" i="0">
-                <a:solidFill>
-                  <a:srgbClr val="20425A"/>
-                </a:solidFill>
-              </a:defRPr>
-            </a:pPr>
+          <a:bodyPr/>
+          <a:lstStyle/>
+          <a:p>
             <a:r>
               <a:rPr sz="2325" b="1" i="0">
                 <a:solidFill>
@@ -4624,8 +4578,23 @@
                 <a:ea typeface="Arial"/>
                 <a:cs typeface="Arial"/>
               </a:rPr>
-              <a:t>Insert GitHub QR code here</a:t>
-            </a:r>
+              <a:t>QR Code</a:t>
+            </a:r>
+            <a:endParaRPr/>
+          </a:p>
+          <a:p>
+            <a:r>
+              <a:rPr sz="2325" b="1" i="0">
+                <a:solidFill>
+                  <a:srgbClr val="20425A"/>
+                </a:solidFill>
+                <a:latin typeface="Arial"/>
+                <a:ea typeface="Arial"/>
+                <a:cs typeface="Arial"/>
+              </a:rPr>
+              <a:t>methodological report</a:t>
+            </a:r>
+            <a:endParaRPr/>
           </a:p>
         </p:txBody>
       </p:sp>
@@ -4633,20 +4602,20 @@
         <p:nvPicPr>
           <p:cNvPr id="146" name=""/>
           <p:cNvPicPr>
-            <a:picLocks xmlns:a="http://schemas.openxmlformats.org/drawingml/2006/main" noChangeAspect="1"/>
+            <a:picLocks noChangeAspect="1"/>
           </p:cNvPicPr>
           <p:nvPr/>
         </p:nvPicPr>
         <p:blipFill>
-          <a:blip xmlns:r="http://schemas.openxmlformats.org/officeDocument/2006/relationships" xmlns:a="http://schemas.openxmlformats.org/drawingml/2006/main" r:embed="R0f2383c324ff4946"/>
-          <a:stretch xmlns:a="http://schemas.openxmlformats.org/drawingml/2006/main"/>
+          <a:blip r:embed="R0f2383c324ff4946"/>
+          <a:stretch/>
         </p:blipFill>
         <p:spPr>
-          <a:xfrm xmlns:a="http://schemas.openxmlformats.org/drawingml/2006/main">
+          <a:xfrm>
             <a:off x="9906000" y="13716000"/>
             <a:ext cx="10477500" cy="8096250"/>
           </a:xfrm>
-          <a:prstGeom xmlns:a="http://schemas.openxmlformats.org/drawingml/2006/main" prst="rect">
+          <a:prstGeom prst="rect">
             <a:avLst/>
           </a:prstGeom>
         </p:spPr>
@@ -4655,20 +4624,20 @@
         <p:nvPicPr>
           <p:cNvPr id="147" name=""/>
           <p:cNvPicPr>
-            <a:picLocks xmlns:a="http://schemas.openxmlformats.org/drawingml/2006/main" noChangeAspect="1"/>
+            <a:picLocks noChangeAspect="1"/>
           </p:cNvPicPr>
           <p:nvPr/>
         </p:nvPicPr>
         <p:blipFill>
-          <a:blip xmlns:r="http://schemas.openxmlformats.org/officeDocument/2006/relationships" xmlns:a="http://schemas.openxmlformats.org/drawingml/2006/main" r:embed="R5b50d2b0086c487b"/>
-          <a:stretch xmlns:a="http://schemas.openxmlformats.org/drawingml/2006/main"/>
+          <a:blip r:embed="R5b50d2b0086c487b"/>
+          <a:stretch/>
         </p:blipFill>
         <p:spPr>
-          <a:xfrm xmlns:a="http://schemas.openxmlformats.org/drawingml/2006/main">
+          <a:xfrm>
             <a:off x="23050500" y="13716000"/>
             <a:ext cx="10477500" cy="8096250"/>
           </a:xfrm>
-          <a:prstGeom xmlns:a="http://schemas.openxmlformats.org/drawingml/2006/main" prst="rect">
+          <a:prstGeom prst="rect">
             <a:avLst/>
           </a:prstGeom>
         </p:spPr>
@@ -4677,20 +4646,20 @@
         <p:nvPicPr>
           <p:cNvPr id="148" name=""/>
           <p:cNvPicPr>
-            <a:picLocks xmlns:a="http://schemas.openxmlformats.org/drawingml/2006/main" noChangeAspect="1"/>
+            <a:picLocks noChangeAspect="1"/>
           </p:cNvPicPr>
           <p:nvPr/>
         </p:nvPicPr>
         <p:blipFill>
-          <a:blip xmlns:r="http://schemas.openxmlformats.org/officeDocument/2006/relationships" xmlns:a="http://schemas.openxmlformats.org/drawingml/2006/main" r:embed="Rfd3d3e68d53740fb"/>
-          <a:stretch xmlns:a="http://schemas.openxmlformats.org/drawingml/2006/main"/>
+          <a:blip r:embed="Rfd3d3e68d53740fb"/>
+          <a:stretch/>
         </p:blipFill>
         <p:spPr>
-          <a:xfrm xmlns:a="http://schemas.openxmlformats.org/drawingml/2006/main">
+          <a:xfrm>
             <a:off x="9906000" y="13716000"/>
             <a:ext cx="10477500" cy="8096250"/>
           </a:xfrm>
-          <a:prstGeom xmlns:a="http://schemas.openxmlformats.org/drawingml/2006/main" prst="rect">
+          <a:prstGeom prst="rect">
             <a:avLst/>
           </a:prstGeom>
         </p:spPr>
@@ -4699,20 +4668,20 @@
         <p:nvPicPr>
           <p:cNvPr id="149" name=""/>
           <p:cNvPicPr>
-            <a:picLocks xmlns:a="http://schemas.openxmlformats.org/drawingml/2006/main" noChangeAspect="1"/>
+            <a:picLocks noChangeAspect="1"/>
           </p:cNvPicPr>
           <p:nvPr/>
         </p:nvPicPr>
         <p:blipFill>
-          <a:blip xmlns:r="http://schemas.openxmlformats.org/officeDocument/2006/relationships" xmlns:a="http://schemas.openxmlformats.org/drawingml/2006/main" r:embed="R1e47abb8afa14a86"/>
-          <a:stretch xmlns:a="http://schemas.openxmlformats.org/drawingml/2006/main"/>
+          <a:blip r:embed="R1e47abb8afa14a86"/>
+          <a:stretch/>
         </p:blipFill>
         <p:spPr>
-          <a:xfrm xmlns:a="http://schemas.openxmlformats.org/drawingml/2006/main">
+          <a:xfrm>
             <a:off x="23050500" y="13716000"/>
             <a:ext cx="10477500" cy="8096250"/>
           </a:xfrm>
-          <a:prstGeom xmlns:a="http://schemas.openxmlformats.org/drawingml/2006/main" prst="rect">
+          <a:prstGeom prst="rect">
             <a:avLst/>
           </a:prstGeom>
         </p:spPr>
@@ -4720,44 +4689,39 @@
       <p:sp>
         <p:nvSpPr>
           <p:cNvPr id="115" name="morrison-method-detail">
-            <a:extLst xmlns:a="http://schemas.openxmlformats.org/drawingml/2006/main">
+            <a:extLst>
               <a:ext uri="{FF2B5EF4-FFF2-40B4-BE49-F238E27FC236}">
-                <a16:creationId xmlns:a16="http://schemas.microsoft.com/office/drawing/2014/main" id="{92A54272-6325-4923-B0AB-8F8B5311000C}"/>
+                <ns2:creationId id="{92A54272-6325-4923-B0AB-8F8B5311000C}"/>
               </a:ext>
             </a:extLst>
           </p:cNvPr>
           <p:cNvSpPr>
-            <a:spLocks xmlns:a="http://schemas.openxmlformats.org/drawingml/2006/main" noGrp="1"/>
+            <a:spLocks noGrp="1"/>
           </p:cNvSpPr>
           <p:nvPr/>
         </p:nvSpPr>
         <p:spPr>
-          <a:xfrm xmlns:a="http://schemas.openxmlformats.org/drawingml/2006/main">
+          <a:xfrm>
             <a:off x="495300" y="8667750"/>
-            <a:ext cx="7239000" cy="15049500"/>
-          </a:xfrm>
-          <a:prstGeom xmlns:a="http://schemas.openxmlformats.org/drawingml/2006/main" prst="rect">
-            <a:avLst/>
-          </a:prstGeom>
-          <a:noFill xmlns:a="http://schemas.openxmlformats.org/drawingml/2006/main"/>
-          <a:ln xmlns:a="http://schemas.openxmlformats.org/drawingml/2006/main" w="0">
+            <a:ext cx="7239000" cy="5600000"/>
+            <a:off y="8667750"/>
+            <a:ext cy="6150000"/>
+          </a:xfrm>
+          <a:prstGeom prst="rect">
+            <a:avLst/>
+          </a:prstGeom>
+          <a:noFill/>
+          <a:ln w="0">
             <a:noFill/>
             <a:prstDash val="solid"/>
           </a:ln>
         </p:spPr>
         <p:txBody>
-          <a:bodyPr xmlns:a="http://schemas.openxmlformats.org/drawingml/2006/main"/>
-          <a:lstStyle xmlns:a="http://schemas.openxmlformats.org/drawingml/2006/main"/>
-          <a:p xmlns:a="http://schemas.openxmlformats.org/drawingml/2006/main">
-            <a:pPr algn="l">
-              <a:defRPr sz="1875" b="0" i="0">
-                <a:solidFill>
-                  <a:srgbClr val="111111"/>
-                </a:solidFill>
-              </a:defRPr>
-            </a:pPr>
-            <a:r>
-              <a:rPr sz="1875" b="0" i="0">
+          <a:bodyPr/>
+          <a:lstStyle/>
+          <a:p>
+            <a:r>
+              <a:rPr sz="660" b="1" i="0">
                 <a:solidFill>
                   <a:srgbClr val="111111"/>
                 </a:solidFill>
@@ -4765,19 +4729,13 @@
                 <a:ea typeface="Arial"/>
                 <a:cs typeface="Arial"/>
               </a:rPr>
-              <a:t>INTRO:</a:t>
-            </a:r>
-          </a:p>
-          <a:p xmlns:a="http://schemas.openxmlformats.org/drawingml/2006/main">
-            <a:pPr algn="l">
-              <a:defRPr sz="1875" b="0" i="0">
-                <a:solidFill>
-                  <a:srgbClr val="111111"/>
-                </a:solidFill>
-              </a:defRPr>
-            </a:pPr>
-            <a:r>
-              <a:rPr sz="1875" b="0" i="0">
+              <a:t>INTRO</a:t>
+            </a:r>
+            <a:endParaRPr/>
+          </a:p>
+          <a:p>
+            <a:r>
+              <a:rPr sz="660" b="0" i="0">
                 <a:solidFill>
                   <a:srgbClr val="111111"/>
                 </a:solidFill>
@@ -4785,24 +4743,41 @@
                 <a:ea typeface="Arial"/>
                 <a:cs typeface="Arial"/>
               </a:rPr>
-              <a:t>Asthma combines chronic burden, recurrent attacks and sustained management needs.</a:t>
-            </a:r>
-          </a:p>
-          <a:p xmlns:a="http://schemas.openxmlformats.org/drawingml/2006/main">
-            <a:r>
-              <a:t/>
-            </a:r>
-          </a:p>
-          <a:p xmlns:a="http://schemas.openxmlformats.org/drawingml/2006/main">
-            <a:pPr algn="l">
-              <a:defRPr sz="1875" b="0" i="0">
+              <a:t>• Asthma combines chronic burden, attacks and sustained management.</a:t>
+            </a:r>
+            <a:endParaRPr/>
+          </a:p>
+          <a:p>
+            <a:r>
+              <a:rPr sz="660" b="0" i="0">
                 <a:solidFill>
                   <a:srgbClr val="111111"/>
                 </a:solidFill>
-              </a:defRPr>
-            </a:pPr>
-            <a:r>
-              <a:rPr sz="1875" b="0" i="0">
+                <a:latin typeface="Arial"/>
+                <a:ea typeface="Arial"/>
+                <a:cs typeface="Arial"/>
+              </a:rPr>
+              <a:t>• PNS indicators support surveillance and public policy.</a:t>
+            </a:r>
+            <a:endParaRPr/>
+          </a:p>
+          <a:p>
+            <a:r>
+              <a:rPr sz="660" b="0" i="0">
+                <a:solidFill>
+                  <a:srgbClr val="111111"/>
+                </a:solidFill>
+                <a:latin typeface="Arial"/>
+                <a:ea typeface="Arial"/>
+                <a:cs typeface="Arial"/>
+              </a:rPr>
+              <a:t/>
+            </a:r>
+            <a:endParaRPr/>
+          </a:p>
+          <a:p>
+            <a:r>
+              <a:rPr sz="660" b="0" i="0">
                 <a:solidFill>
                   <a:srgbClr val="111111"/>
                 </a:solidFill>
@@ -4812,17 +4787,11 @@
               </a:rPr>
               <a:t>METHODS</a:t>
             </a:r>
-          </a:p>
-          <a:p xmlns:a="http://schemas.openxmlformats.org/drawingml/2006/main">
-            <a:pPr algn="l">
-              <a:defRPr sz="1875" b="0" i="0">
-                <a:solidFill>
-                  <a:srgbClr val="111111"/>
-                </a:solidFill>
-              </a:defRPr>
-            </a:pPr>
-            <a:r>
-              <a:rPr sz="1875" b="0" i="0">
+            <a:endParaRPr/>
+          </a:p>
+          <a:p>
+            <a:r>
+              <a:rPr sz="660" b="0" i="0">
                 <a:solidFill>
                   <a:srgbClr val="111111"/>
                 </a:solidFill>
@@ -4830,19 +4799,13 @@
                 <a:ea typeface="Arial"/>
                 <a:cs typeface="Arial"/>
               </a:rPr>
-              <a:t>1. PNS 2013/2019 microdata.</a:t>
-            </a:r>
-          </a:p>
-          <a:p xmlns:a="http://schemas.openxmlformats.org/drawingml/2006/main">
-            <a:pPr algn="l">
-              <a:defRPr sz="1875" b="0" i="0">
-                <a:solidFill>
-                  <a:srgbClr val="111111"/>
-                </a:solidFill>
-              </a:defRPr>
-            </a:pPr>
-            <a:r>
-              <a:rPr sz="1875" b="0" i="0">
+              <a:t>• PNS 2013/2019 selected-resident microdata.</a:t>
+            </a:r>
+            <a:endParaRPr/>
+          </a:p>
+          <a:p>
+            <a:r>
+              <a:rPr sz="660" b="0" i="0">
                 <a:solidFill>
                   <a:srgbClr val="111111"/>
                 </a:solidFill>
@@ -4850,19 +4813,13 @@
                 <a:ea typeface="Arial"/>
                 <a:cs typeface="Arial"/>
               </a:rPr>
-              <a:t>2. Design: PSU, strata and weights via `pns_design()`.</a:t>
-            </a:r>
-          </a:p>
-          <a:p xmlns:a="http://schemas.openxmlformats.org/drawingml/2006/main">
-            <a:pPr algn="l">
-              <a:defRPr sz="1875" b="0" i="0">
-                <a:solidFill>
-                  <a:srgbClr val="111111"/>
-                </a:solidFill>
-              </a:defRPr>
-            </a:pPr>
-            <a:r>
-              <a:rPr sz="1875" b="0" i="0">
+              <a:t>• Complex design: PSU, strata and weights via `pns_design()`.</a:t>
+            </a:r>
+            <a:endParaRPr/>
+          </a:p>
+          <a:p>
+            <a:r>
+              <a:rPr sz="660" b="0" i="0">
                 <a:solidFill>
                   <a:srgbClr val="111111"/>
                 </a:solidFill>
@@ -4870,175 +4827,44 @@
                 <a:ea typeface="Arial"/>
                 <a:cs typeface="Arial"/>
               </a:rPr>
-              <a:t>3. p_hat = sum(w_i y_i) / sum(w_i).</a:t>
-            </a:r>
-          </a:p>
-          <a:p xmlns:a="http://schemas.openxmlformats.org/drawingml/2006/main">
-            <a:pPr algn="l">
-              <a:defRPr sz="1875" b="0" i="0">
-                <a:solidFill>
-                  <a:srgbClr val="111111"/>
-                </a:solidFill>
-              </a:defRPr>
-            </a:pPr>
-            <a:r>
-              <a:rPr sz="1875" b="0" i="0">
-                <a:solidFill>
-                  <a:srgbClr val="111111"/>
-                </a:solidFill>
-                <a:latin typeface="Arial"/>
-                <a:ea typeface="Arial"/>
-                <a:cs typeface="Arial"/>
-              </a:rPr>
-              <a:t>4. % = 100*p_hat; rate_100k = 100000*p_hat.</a:t>
-            </a:r>
-          </a:p>
-          <a:p xmlns:a="http://schemas.openxmlformats.org/drawingml/2006/main">
-            <a:pPr algn="l">
-              <a:defRPr sz="1875" b="0" i="0">
-                <a:solidFill>
-                  <a:srgbClr val="111111"/>
-                </a:solidFill>
-              </a:defRPr>
-            </a:pPr>
-            <a:r>
-              <a:rPr sz="1875" b="0" i="0">
-                <a:solidFill>
-                  <a:srgbClr val="111111"/>
-                </a:solidFill>
-                <a:latin typeface="Arial"/>
-                <a:ea typeface="Arial"/>
-                <a:cs typeface="Arial"/>
-              </a:rPr>
-              <a:t>5. 95% CI: `svyciprop(method = "beta")`.</a:t>
-            </a:r>
-          </a:p>
-          <a:p xmlns:a="http://schemas.openxmlformats.org/drawingml/2006/main">
-            <a:r>
-              <a:t/>
-            </a:r>
-          </a:p>
-          <a:p xmlns:a="http://schemas.openxmlformats.org/drawingml/2006/main">
-            <a:pPr algn="l">
-              <a:defRPr sz="1875" b="0" i="0">
-                <a:solidFill>
-                  <a:srgbClr val="111111"/>
-                </a:solidFill>
-              </a:defRPr>
-            </a:pPr>
-            <a:r>
-              <a:rPr sz="1875" b="0" i="0">
-                <a:solidFill>
-                  <a:srgbClr val="111111"/>
-                </a:solidFill>
-                <a:latin typeface="Arial"/>
-                <a:ea typeface="Arial"/>
-                <a:cs typeface="Arial"/>
-              </a:rPr>
-              <a:t>RESULTS</a:t>
-            </a:r>
-          </a:p>
-          <a:p xmlns:a="http://schemas.openxmlformats.org/drawingml/2006/main">
-            <a:pPr algn="l">
-              <a:defRPr sz="1875" b="0" i="0">
-                <a:solidFill>
-                  <a:srgbClr val="111111"/>
-                </a:solidFill>
-              </a:defRPr>
-            </a:pPr>
-            <a:r>
-              <a:rPr sz="1875" b="0" i="0">
-                <a:solidFill>
-                  <a:srgbClr val="111111"/>
-                </a:solidFill>
-                <a:latin typeface="Arial"/>
-                <a:ea typeface="Arial"/>
-                <a:cs typeface="Arial"/>
-              </a:rPr>
-              <a:t>• Asthma: 4.41% -&gt; 5.40%.</a:t>
-            </a:r>
-          </a:p>
-          <a:p xmlns:a="http://schemas.openxmlformats.org/drawingml/2006/main">
-            <a:pPr algn="l">
-              <a:defRPr sz="1875" b="0" i="0">
-                <a:solidFill>
-                  <a:srgbClr val="111111"/>
-                </a:solidFill>
-              </a:defRPr>
-            </a:pPr>
-            <a:r>
-              <a:rPr sz="1875" b="0" i="0">
-                <a:solidFill>
-                  <a:srgbClr val="111111"/>
-                </a:solidFill>
-                <a:latin typeface="Arial"/>
-                <a:ea typeface="Arial"/>
-                <a:cs typeface="Arial"/>
-              </a:rPr>
-              <a:t>• Attacks: 38.3% -&gt; 37.7%.</a:t>
-            </a:r>
-          </a:p>
-          <a:p xmlns:a="http://schemas.openxmlformats.org/drawingml/2006/main">
-            <a:pPr algn="l">
-              <a:defRPr sz="1875" b="0" i="0">
-                <a:solidFill>
-                  <a:srgbClr val="111111"/>
-                </a:solidFill>
-              </a:defRPr>
-            </a:pPr>
-            <a:r>
-              <a:rPr sz="1875" b="0" i="0">
-                <a:solidFill>
-                  <a:srgbClr val="111111"/>
-                </a:solidFill>
-                <a:latin typeface="Arial"/>
-                <a:ea typeface="Arial"/>
-                <a:cs typeface="Arial"/>
-              </a:rPr>
-              <a:t>• Medication: 81.5% -&gt; 64.4%.</a:t>
-            </a:r>
+              <a:t>• Beta 95% CI: suited to proportions and small domains.</a:t>
+            </a:r>
+            <a:endParaRPr/>
           </a:p>
         </p:txBody>
       </p:sp>
       <p:sp>
         <p:nvSpPr>
           <p:cNvPr id="116" name="morrison-resource-detail">
-            <a:extLst xmlns:a="http://schemas.openxmlformats.org/drawingml/2006/main">
+            <a:extLst>
               <a:ext uri="{FF2B5EF4-FFF2-40B4-BE49-F238E27FC236}">
-                <a16:creationId xmlns:a16="http://schemas.microsoft.com/office/drawing/2014/main" id="{775396DD-3FB2-4986-88F5-BBE24386FCA1}"/>
+                <ns2:creationId id="{775396DD-3FB2-4986-88F5-BBE24386FCA1}"/>
               </a:ext>
             </a:extLst>
           </p:cNvPr>
           <p:cNvSpPr>
-            <a:spLocks xmlns:a="http://schemas.openxmlformats.org/drawingml/2006/main" noGrp="1"/>
+            <a:spLocks noGrp="1"/>
           </p:cNvSpPr>
           <p:nvPr/>
         </p:nvSpPr>
         <p:spPr>
-          <a:xfrm xmlns:a="http://schemas.openxmlformats.org/drawingml/2006/main">
+          <a:xfrm>
             <a:off x="36223575" y="5686425"/>
             <a:ext cx="6905625" cy="14668500"/>
           </a:xfrm>
-          <a:prstGeom xmlns:a="http://schemas.openxmlformats.org/drawingml/2006/main" prst="rect">
-            <a:avLst/>
-          </a:prstGeom>
-          <a:noFill xmlns:a="http://schemas.openxmlformats.org/drawingml/2006/main"/>
-          <a:ln xmlns:a="http://schemas.openxmlformats.org/drawingml/2006/main" w="0">
+          <a:prstGeom prst="rect">
+            <a:avLst/>
+          </a:prstGeom>
+          <a:noFill/>
+          <a:ln w="0">
             <a:noFill/>
             <a:prstDash val="solid"/>
           </a:ln>
         </p:spPr>
         <p:txBody>
-          <a:bodyPr xmlns:a="http://schemas.openxmlformats.org/drawingml/2006/main"/>
-          <a:lstStyle xmlns:a="http://schemas.openxmlformats.org/drawingml/2006/main"/>
-          <a:p xmlns:a="http://schemas.openxmlformats.org/drawingml/2006/main">
-            <a:pPr algn="l">
-              <a:defRPr sz="1875" b="0" i="0">
-                <a:solidFill>
-                  <a:srgbClr val="111111"/>
-                </a:solidFill>
-              </a:defRPr>
-            </a:pPr>
+          <a:bodyPr/>
+          <a:lstStyle/>
+          <a:p>
             <a:r>
               <a:rPr sz="1875" b="0" i="0">
                 <a:solidFill>
@@ -5050,20 +4876,9 @@
               </a:rPr>
               <a:t>RESOURCES</a:t>
             </a:r>
-          </a:p>
-          <a:p xmlns:a="http://schemas.openxmlformats.org/drawingml/2006/main">
-            <a:r>
-              <a:t/>
-            </a:r>
-          </a:p>
-          <a:p xmlns:a="http://schemas.openxmlformats.org/drawingml/2006/main">
-            <a:pPr algn="l">
-              <a:defRPr sz="1875" b="0" i="0">
-                <a:solidFill>
-                  <a:srgbClr val="111111"/>
-                </a:solidFill>
-              </a:defRPr>
-            </a:pPr>
+            <a:endParaRPr/>
+          </a:p>
+          <a:p>
             <a:r>
               <a:rPr sz="1875" b="0" i="0">
                 <a:solidFill>
@@ -5073,22 +4888,11 @@
                 <a:ea typeface="Arial"/>
                 <a:cs typeface="Arial"/>
               </a:rPr>
-              <a:t>Reserved space for GitHub QR code.</a:t>
-            </a:r>
-          </a:p>
-          <a:p xmlns:a="http://schemas.openxmlformats.org/drawingml/2006/main">
-            <a:r>
-              <a:t/>
-            </a:r>
-          </a:p>
-          <a:p xmlns:a="http://schemas.openxmlformats.org/drawingml/2006/main">
-            <a:pPr algn="l">
-              <a:defRPr sz="1875" b="0" i="0">
-                <a:solidFill>
-                  <a:srgbClr val="111111"/>
-                </a:solidFill>
-              </a:defRPr>
-            </a:pPr>
+              <a:t>• QR: methodological report, reproducible code and figures.</a:t>
+            </a:r>
+            <a:endParaRPr/>
+          </a:p>
+          <a:p>
             <a:r>
               <a:rPr sz="1875" b="0" i="0">
                 <a:solidFill>
@@ -5098,17 +4902,11 @@
                 <a:ea typeface="Arial"/>
                 <a:cs typeface="Arial"/>
               </a:rPr>
-              <a:t>Reproducible code:</a:t>
-            </a:r>
-          </a:p>
-          <a:p xmlns:a="http://schemas.openxmlformats.org/drawingml/2006/main">
-            <a:pPr algn="l">
-              <a:defRPr sz="1875" b="0" i="0">
-                <a:solidFill>
-                  <a:srgbClr val="111111"/>
-                </a:solidFill>
-              </a:defRPr>
-            </a:pPr>
+              <a:t>• Link: ingodube.github.io/PNS_2013_2019/metodologia.html</a:t>
+            </a:r>
+            <a:endParaRPr/>
+          </a:p>
+          <a:p>
             <a:r>
               <a:rPr sz="1875" b="0" i="0">
                 <a:solidFill>
@@ -5118,22 +4916,11 @@
                 <a:ea typeface="Arial"/>
                 <a:cs typeface="Arial"/>
               </a:rPr>
-              <a:t>https://github.com/ingodube/PNS_2013_2019</a:t>
-            </a:r>
-          </a:p>
-          <a:p xmlns:a="http://schemas.openxmlformats.org/drawingml/2006/main">
-            <a:r>
               <a:t/>
             </a:r>
-          </a:p>
-          <a:p xmlns:a="http://schemas.openxmlformats.org/drawingml/2006/main">
-            <a:pPr algn="l">
-              <a:defRPr sz="1875" b="0" i="0">
-                <a:solidFill>
-                  <a:srgbClr val="111111"/>
-                </a:solidFill>
-              </a:defRPr>
-            </a:pPr>
+            <a:endParaRPr/>
+          </a:p>
+          <a:p>
             <a:r>
               <a:rPr sz="1875" b="0" i="0">
                 <a:solidFill>
@@ -5143,17 +4930,11 @@
                 <a:ea typeface="Arial"/>
                 <a:cs typeface="Arial"/>
               </a:rPr>
-              <a:t>Interpretation:</a:t>
-            </a:r>
-          </a:p>
-          <a:p xmlns:a="http://schemas.openxmlformats.org/drawingml/2006/main">
-            <a:pPr algn="l">
-              <a:defRPr sz="1875" b="0" i="0">
-                <a:solidFill>
-                  <a:srgbClr val="111111"/>
-                </a:solidFill>
-              </a:defRPr>
-            </a:pPr>
+              <a:t>INTERPRETATION</a:t>
+            </a:r>
+            <a:endParaRPr/>
+          </a:p>
+          <a:p>
             <a:r>
               <a:rPr sz="1875" b="0" i="0">
                 <a:solidFill>
@@ -5163,17 +4944,11 @@
                 <a:ea typeface="Arial"/>
                 <a:cs typeface="Arial"/>
               </a:rPr>
-              <a:t>• Non-overlapping CIs support the national asthma increase.</a:t>
-            </a:r>
-          </a:p>
-          <a:p xmlns:a="http://schemas.openxmlformats.org/drawingml/2006/main">
-            <a:pPr algn="l">
-              <a:defRPr sz="1875" b="0" i="0">
-                <a:solidFill>
-                  <a:srgbClr val="111111"/>
-                </a:solidFill>
-              </a:defRPr>
-            </a:pPr>
+              <a:t>• Non-overlapping CIs support the national diagnosis increase.</a:t>
+            </a:r>
+            <a:endParaRPr/>
+          </a:p>
+          <a:p>
             <a:r>
               <a:rPr sz="1875" b="0" i="0">
                 <a:solidFill>
@@ -5183,17 +4958,11 @@
                 <a:ea typeface="Arial"/>
                 <a:cs typeface="Arial"/>
               </a:rPr>
-              <a:t>• Overlapping CIs limit state-level claims.</a:t>
-            </a:r>
-          </a:p>
-          <a:p xmlns:a="http://schemas.openxmlformats.org/drawingml/2006/main">
-            <a:pPr algn="l">
-              <a:defRPr sz="1875" b="0" i="0">
-                <a:solidFill>
-                  <a:srgbClr val="111111"/>
-                </a:solidFill>
-              </a:defRPr>
-            </a:pPr>
+              <a:t>• Overlapping CIs limit conclusions for several states.</a:t>
+            </a:r>
+            <a:endParaRPr/>
+          </a:p>
+          <a:p>
             <a:r>
               <a:rPr sz="1875" b="0" i="0">
                 <a:solidFill>
@@ -5203,17 +4972,11 @@
                 <a:ea typeface="Arial"/>
                 <a:cs typeface="Arial"/>
               </a:rPr>
-              <a:t>• Stable attacks suggest management gaps.</a:t>
-            </a:r>
-          </a:p>
-          <a:p xmlns:a="http://schemas.openxmlformats.org/drawingml/2006/main">
-            <a:pPr algn="l">
-              <a:defRPr sz="1875" b="0" i="0">
-                <a:solidFill>
-                  <a:srgbClr val="111111"/>
-                </a:solidFill>
-              </a:defRPr>
-            </a:pPr>
+              <a:t>• Stable attacks suggest disease management remains insufficient.</a:t>
+            </a:r>
+            <a:endParaRPr/>
+          </a:p>
+          <a:p>
             <a:r>
               <a:rPr sz="1875" b="0" i="0">
                 <a:solidFill>
@@ -5223,8 +4986,107 @@
                 <a:ea typeface="Arial"/>
                 <a:cs typeface="Arial"/>
               </a:rPr>
-              <a:t>• Lower medication percentage should be read with the population rate.</a:t>
-            </a:r>
+              <a:t>• Smoking declined, but does not by itself explain the diagnosis increase.</a:t>
+            </a:r>
+            <a:endParaRPr/>
+          </a:p>
+          <a:p>
+            <a:r>
+              <a:rPr sz="1875" b="0" i="0">
+                <a:solidFill>
+                  <a:srgbClr val="111111"/>
+                </a:solidFill>
+                <a:latin typeface="Arial"/>
+                <a:ea typeface="Arial"/>
+                <a:cs typeface="Arial"/>
+              </a:rPr>
+              <a:t/>
+            </a:r>
+            <a:endParaRPr/>
+          </a:p>
+          <a:p>
+            <a:r>
+              <a:rPr sz="1875" b="0" i="0">
+                <a:solidFill>
+                  <a:srgbClr val="111111"/>
+                </a:solidFill>
+                <a:latin typeface="Arial"/>
+                <a:ea typeface="Arial"/>
+                <a:cs typeface="Arial"/>
+              </a:rPr>
+              <a:t>OBSERVATIONAL DATA</a:t>
+            </a:r>
+            <a:endParaRPr/>
+          </a:p>
+          <a:p>
+            <a:r>
+              <a:rPr sz="1875" b="0" i="0">
+                <a:solidFill>
+                  <a:srgbClr val="111111"/>
+                </a:solidFill>
+                <a:latin typeface="Arial"/>
+                <a:ea typeface="Arial"/>
+                <a:cs typeface="Arial"/>
+              </a:rPr>
+              <a:t>• The analytical workflow follows ETL logic.</a:t>
+            </a:r>
+            <a:endParaRPr/>
+          </a:p>
+          <a:p>
+            <a:r>
+              <a:rPr sz="1875" b="0" i="0">
+                <a:solidFill>
+                  <a:srgbClr val="111111"/>
+                </a:solidFill>
+                <a:latin typeface="Arial"/>
+                <a:ea typeface="Arial"/>
+                <a:cs typeface="Arial"/>
+              </a:rPr>
+              <a:t>• OMOP/OHDSI informs standardization, interoperability and future comparison with health-care databases.</a:t>
+            </a:r>
+            <a:endParaRPr/>
+          </a:p>
+          <a:p>
+            <a:r>
+              <a:rPr sz="1875" b="0" i="0">
+                <a:solidFill>
+                  <a:srgbClr val="111111"/>
+                </a:solidFill>
+                <a:latin typeface="Arial"/>
+                <a:ea typeface="Arial"/>
+                <a:cs typeface="Arial"/>
+              </a:rPr>
+              <a:t/>
+            </a:r>
+            <a:endParaRPr/>
+          </a:p>
+          <a:p>
+            <a:r>
+              <a:rPr sz="1875" b="0" i="0">
+                <a:solidFill>
+                  <a:srgbClr val="111111"/>
+                </a:solidFill>
+                <a:latin typeface="Arial"/>
+                <a:ea typeface="Arial"/>
+                <a:cs typeface="Arial"/>
+              </a:rPr>
+              <a:t>REFERENCES</a:t>
+            </a:r>
+            <a:endParaRPr/>
+          </a:p>
+          <a:p>
+            <a:r>
+              <a:rPr sz="1875" b="0" i="0">
+                <a:solidFill>
+                  <a:srgbClr val="111111"/>
+                </a:solidFill>
+                <a:latin typeface="Arial"/>
+                <a:ea typeface="Arial"/>
+                <a:cs typeface="Arial"/>
+              </a:rPr>
+              <a:t>[1] GAN 2022; [2] Souza-Júnior 2015; [3] Dube/Silva 2026; [4] Menezes 2015; [5] Santos 2018; [6] Brown 2001; [7] Korn 1998.</a:t>
+            </a:r>
+            <a:endParaRPr/>
           </a:p>
         </p:txBody>
       </p:sp>
@@ -5232,20 +5094,20 @@
         <p:nvPicPr>
           <p:cNvPr id="152" name=""/>
           <p:cNvPicPr>
-            <a:picLocks xmlns:a="http://schemas.openxmlformats.org/drawingml/2006/main" noChangeAspect="1"/>
+            <a:picLocks noChangeAspect="1"/>
           </p:cNvPicPr>
           <p:nvPr/>
         </p:nvPicPr>
         <p:blipFill>
-          <a:blip xmlns:r="http://schemas.openxmlformats.org/officeDocument/2006/relationships" xmlns:a="http://schemas.openxmlformats.org/drawingml/2006/main" r:embed="R876f2124fa524b5b"/>
-          <a:stretch xmlns:a="http://schemas.openxmlformats.org/drawingml/2006/main"/>
+          <a:blip r:embed="R876f2124fa524b5b"/>
+          <a:stretch/>
         </p:blipFill>
         <p:spPr>
-          <a:xfrm xmlns:a="http://schemas.openxmlformats.org/drawingml/2006/main">
+          <a:xfrm>
             <a:off x="9906000" y="13716000"/>
             <a:ext cx="10477500" cy="8096250"/>
           </a:xfrm>
-          <a:prstGeom xmlns:a="http://schemas.openxmlformats.org/drawingml/2006/main" prst="rect">
+          <a:prstGeom prst="rect">
             <a:avLst/>
           </a:prstGeom>
         </p:spPr>
@@ -5254,20 +5116,20 @@
         <p:nvPicPr>
           <p:cNvPr id="153" name=""/>
           <p:cNvPicPr>
-            <a:picLocks xmlns:a="http://schemas.openxmlformats.org/drawingml/2006/main" noChangeAspect="1"/>
+            <a:picLocks noChangeAspect="1"/>
           </p:cNvPicPr>
           <p:nvPr/>
         </p:nvPicPr>
         <p:blipFill>
-          <a:blip xmlns:r="http://schemas.openxmlformats.org/officeDocument/2006/relationships" xmlns:a="http://schemas.openxmlformats.org/drawingml/2006/main" r:embed="R69942654c14048d3"/>
-          <a:stretch xmlns:a="http://schemas.openxmlformats.org/drawingml/2006/main"/>
+          <a:blip r:embed="R69942654c14048d3"/>
+          <a:stretch/>
         </p:blipFill>
         <p:spPr>
-          <a:xfrm xmlns:a="http://schemas.openxmlformats.org/drawingml/2006/main">
+          <a:xfrm>
             <a:off x="23050500" y="13716000"/>
             <a:ext cx="10477500" cy="8096250"/>
           </a:xfrm>
-          <a:prstGeom xmlns:a="http://schemas.openxmlformats.org/drawingml/2006/main" prst="rect">
+          <a:prstGeom prst="rect">
             <a:avLst/>
           </a:prstGeom>
         </p:spPr>
@@ -5275,42 +5137,35 @@
       <p:sp>
         <p:nvSpPr>
           <p:cNvPr id="119" name="morrison-chart-note">
-            <a:extLst xmlns:a="http://schemas.openxmlformats.org/drawingml/2006/main">
+            <a:extLst>
               <a:ext uri="{FF2B5EF4-FFF2-40B4-BE49-F238E27FC236}">
-                <a16:creationId xmlns:a16="http://schemas.microsoft.com/office/drawing/2014/main" id="{E22CCC04-AB6E-4084-9CED-68338E5E286A}"/>
+                <ns2:creationId id="{E22CCC04-AB6E-4084-9CED-68338E5E286A}"/>
               </a:ext>
             </a:extLst>
           </p:cNvPr>
           <p:cNvSpPr>
-            <a:spLocks xmlns:a="http://schemas.openxmlformats.org/drawingml/2006/main" noGrp="1"/>
+            <a:spLocks noGrp="1"/>
           </p:cNvSpPr>
           <p:nvPr/>
         </p:nvSpPr>
         <p:spPr>
-          <a:xfrm xmlns:a="http://schemas.openxmlformats.org/drawingml/2006/main">
+          <a:xfrm>
             <a:off x="9334500" y="22145625"/>
             <a:ext cx="24765000" cy="1238250"/>
           </a:xfrm>
-          <a:prstGeom xmlns:a="http://schemas.openxmlformats.org/drawingml/2006/main" prst="rect">
-            <a:avLst/>
-          </a:prstGeom>
-          <a:noFill xmlns:a="http://schemas.openxmlformats.org/drawingml/2006/main"/>
-          <a:ln xmlns:a="http://schemas.openxmlformats.org/drawingml/2006/main" w="0">
+          <a:prstGeom prst="rect">
+            <a:avLst/>
+          </a:prstGeom>
+          <a:noFill/>
+          <a:ln w="0">
             <a:noFill/>
             <a:prstDash val="solid"/>
           </a:ln>
         </p:spPr>
         <p:txBody>
-          <a:bodyPr xmlns:a="http://schemas.openxmlformats.org/drawingml/2006/main"/>
-          <a:lstStyle xmlns:a="http://schemas.openxmlformats.org/drawingml/2006/main"/>
-          <a:p xmlns:a="http://schemas.openxmlformats.org/drawingml/2006/main">
-            <a:pPr algn="ctr">
-              <a:defRPr sz="2325" b="0" i="0">
-                <a:solidFill>
-                  <a:srgbClr val="B9D9EB"/>
-                </a:solidFill>
-              </a:defRPr>
-            </a:pPr>
+          <a:bodyPr/>
+          <a:lstStyle/>
+          <a:p>
             <a:r>
               <a:rPr sz="2325" b="0" i="0">
                 <a:solidFill>
@@ -5320,15 +5175,151 @@
                 <a:ea typeface="Arial"/>
                 <a:cs typeface="Arial"/>
               </a:rPr>
-              <a:t>Plots exported from the R scripts: `geom_col`, `geom_errorbar`, `coord_flip`, 95% CIs and original palette.</a:t>
-            </a:r>
+              <a:t>Figures exported from the R code: horizontal state bars, 2013/2019 comparison, 95% CIs and original palette.</a:t>
+            </a:r>
+            <a:endParaRPr/>
+          </a:p>
+        </p:txBody>
+      </p:sp>
+      <p:sp>
+        <p:nvSpPr>
+          <p:cNvPr id="154" name="formula-box-morrison-en"/>
+          <p:cNvSpPr txBox="1"/>
+          <p:nvPr/>
+        </p:nvSpPr>
+        <p:spPr>
+          <a:xfrm>
+            <a:off x="495300" y="14550000"/>
+            <a:ext cx="7239000" cy="1600000"/>
+            <a:off x="495300" y="14950000"/>
+            <a:ext cx="7239000" cy="2450000"/>
+          </a:xfrm>
+          <a:prstGeom prst="rect">
+            <a:avLst/>
+          </a:prstGeom>
+          <a:solidFill>
+            <a:srgbClr val="F8FBFD"/>
+          </a:solidFill>
+          <a:ln w="12700">
+            <a:solidFill>
+              <a:srgbClr val="1F4E79"/>
+            </a:solidFill>
+          </a:ln>
+        </p:spPr>
+        <p:txBody>
+          <a:bodyPr wrap="square" lIns="76200" rIns="76200" tIns="76200" bIns="76200" anchor="ctr"/>
+          <a:lstStyle/>
+          <a:p>
+            <a:pPr algn="ctr"/>
+            <a:r>
+              <a:rPr lang="pt-BR" sz="960" b="1">
+                <a:latin typeface="Cambria Math"/>
+              </a:rPr>
+              <a:t>FORMULAS</a:t>
+            </a:r>
+            <a:endParaRPr/>
+          </a:p>
+          <a:p>
+            <a:pPr algn="ctr"/>
+            <a:r>
+              <a:rPr lang="pt-BR" sz="960" b="0">
+                <a:latin typeface="Cambria Math"/>
+              </a:rPr>
+              <a:t>p̂ = Σ wᵢyᵢ / Σ wᵢ</a:t>
+            </a:r>
+            <a:endParaRPr/>
+          </a:p>
+          <a:p>
+            <a:pPr algn="ctr"/>
+            <a:r>
+              <a:rPr lang="pt-BR" sz="960" b="0">
+                <a:latin typeface="Cambria Math"/>
+              </a:rPr>
+              <a:t>% = 100 × p̂</a:t>
+            </a:r>
+            <a:endParaRPr/>
+          </a:p>
+          <a:p>
+            <a:pPr algn="ctr"/>
+            <a:r>
+              <a:rPr lang="pt-BR" sz="960" b="0">
+                <a:latin typeface="Cambria Math"/>
+              </a:rPr>
+              <a:t>rate₁₀₀k = 100000 × p̂</a:t>
+            </a:r>
+            <a:endParaRPr/>
+          </a:p>
+        </p:txBody>
+      </p:sp>
+      <p:sp>
+        <p:nvSpPr>
+          <p:cNvPr id="155" name="results-box-morrison-en"/>
+          <p:cNvSpPr txBox="1"/>
+          <p:nvPr/>
+        </p:nvSpPr>
+        <p:spPr>
+          <a:xfrm>
+            <a:off x="495300" y="16450000"/>
+            <a:ext cx="7239000" cy="4700000"/>
+            <a:off x="495300" y="17650000"/>
+            <a:ext cx="7239000" cy="3600000"/>
+          </a:xfrm>
+          <a:prstGeom prst="rect">
+            <a:avLst/>
+          </a:prstGeom>
+          <a:solidFill>
+            <a:srgbClr val="F8FBFD"/>
+          </a:solidFill>
+          <a:ln w="12700">
+            <a:solidFill>
+              <a:srgbClr val="1F4E79"/>
+            </a:solidFill>
+          </a:ln>
+        </p:spPr>
+        <p:txBody>
+          <a:bodyPr wrap="square" lIns="76200" rIns="76200" tIns="76200" bIns="76200" anchor="ctr"/>
+          <a:lstStyle/>
+          <a:p>
+            <a:r>
+              <a:rPr lang="pt-BR" sz="740" b="1"/>
+              <a:t>RESULTS</a:t>
+            </a:r>
+            <a:endParaRPr/>
+          </a:p>
+          <a:p>
+            <a:r>
+              <a:rPr lang="pt-BR" sz="740" b="0"/>
+              <a:t>• Asthma: 4.41% -&gt; 5.40%.</a:t>
+            </a:r>
+            <a:endParaRPr/>
+          </a:p>
+          <a:p>
+            <a:r>
+              <a:rPr lang="pt-BR" sz="740" b="0"/>
+              <a:t>• Attacks: 38.3% -&gt; 37.7%.</a:t>
+            </a:r>
+            <a:endParaRPr/>
+          </a:p>
+          <a:p>
+            <a:r>
+              <a:rPr lang="pt-BR" sz="740" b="0"/>
+              <a:t>• Medication: 81.5% -&gt; 64.4%.</a:t>
+            </a:r>
+            <a:endParaRPr/>
+          </a:p>
+          <a:p>
+            <a:r>
+              <a:rPr lang="pt-BR" sz="740" b="0"/>
+              <a:t>• 95% CIs guide year and state comparisons.</a:t>
+            </a:r>
+            <a:endParaRPr/>
           </a:p>
         </p:txBody>
       </p:sp>
     </p:spTree>
     <p:extLst>
       <p:ext uri="{BB962C8B-B14F-4D97-AF65-F5344CB8AC3E}">
-        <p14:creationId xmlns:p14="http://schemas.microsoft.com/office/powerpoint/2010/main" val="2440222578"/>
+        <ns4:creationId val="2440222578"/>
       </p:ext>
     </p:extLst>
   </p:cSld>

--- a/outputs/posters/poster_pns_asma_morrison_en.pptx
+++ b/outputs/posters/poster_pns_asma_morrison_en.pptx
@@ -3007,7 +3007,7 @@
 </file>
 
 <file path=ppt/slides/slide1.xml><?xml version="1.0" encoding="utf-8"?>
-<p:sld xmlns:a="http://schemas.openxmlformats.org/drawingml/2006/main" xmlns:ns2="http://schemas.microsoft.com/office/drawing/2014/main" xmlns:ns4="http://schemas.microsoft.com/office/powerpoint/2010/main" xmlns:p="http://schemas.openxmlformats.org/presentationml/2006/main" xmlns:r="http://schemas.openxmlformats.org/officeDocument/2006/relationships">
+<p:sld xmlns:a="http://schemas.openxmlformats.org/drawingml/2006/main" xmlns:ns2="http://schemas.microsoft.com/office/drawing/2014/main" xmlns:ns3="http://schemas.openxmlformats.org/officeDocument/2006/relationships" xmlns:ns4="http://schemas.microsoft.com/office/powerpoint/2010/main" xmlns:p="http://schemas.openxmlformats.org/presentationml/2006/main">
   <p:cSld>
     <p:spTree>
       <p:nvGrpSpPr>
@@ -3068,15 +3068,15 @@
         </p:nvSpPr>
         <p:spPr>
           <a:xfrm>
-            <a:off x="8436429" y="6443810"/>
-            <a:ext cx="26974800" cy="11097741"/>
+            <a:off x="8436429" y="5700000"/>
+            <a:ext cx="26974800" cy="3700000"/>
           </a:xfrm>
           <a:prstGeom prst="rect">
             <a:avLst/>
           </a:prstGeom>
         </p:spPr>
         <p:txBody>
-          <a:bodyPr vert="horz" lIns="914400" rIns="914400" anchor="t">
+          <a:bodyPr vert="horz" lIns="914400" rIns="914400" anchor="t" wrap="square">
             <a:noAutofit/>
           </a:bodyPr>
           <a:lstStyle>
@@ -3235,16 +3235,32 @@
             </a:lvl9pPr>
           </a:lstStyle>
           <a:p>
-            <a:r>
-              <a:rPr sz="9600" b="1" i="0">
+            <a:pPr algn="ctr"/>
+            <a:r>
+              <a:rPr sz="3100" b="1" i="0">
+                <a:latin typeface="Arial"/>
+                <a:ea typeface="Arial"/>
+                <a:cs typeface="Arial"/>
                 <a:solidFill>
                   <a:srgbClr val="FFFFFF"/>
                 </a:solidFill>
-                <a:latin typeface="Arial"/>
-                <a:ea typeface="Arial"/>
-                <a:cs typeface="Arial"/>
-              </a:rPr>
-              <a:t>More asthma diagnosis, without proportional improvement in control</a:t>
+              </a:rPr>
+              <a:t>Asthma diagnosis increased; control and therapeutic access</a:t>
+            </a:r>
+            <a:endParaRPr/>
+          </a:p>
+          <a:p>
+            <a:pPr algn="ctr"/>
+            <a:r>
+              <a:rPr sz="3100" b="0" i="0">
+                <a:latin typeface="Arial"/>
+                <a:ea typeface="Arial"/>
+                <a:cs typeface="Arial"/>
+                <a:solidFill>
+                  <a:srgbClr val="FFFFFF"/>
+                </a:solidFill>
+              </a:rPr>
+              <a:t>did not improve proportionally</a:t>
             </a:r>
             <a:endParaRPr/>
           </a:p>
@@ -3739,7 +3755,7 @@
           <p:nvPr/>
         </p:nvPicPr>
         <p:blipFill>
-          <a:blip r:embed="R25f50d1c3e5c4dee"/>
+          <a:blip ns3:embed="R25f50d1c3e5c4dee"/>
           <a:stretch>
             <a:fillRect l="0" t="0" r="0" b="0"/>
           </a:stretch>
@@ -4065,7 +4081,7 @@
           <p:nvPr/>
         </p:nvPicPr>
         <p:blipFill>
-          <a:blip r:embed="R9a03a2d3afeb441c"/>
+          <a:blip ns3:embed="R9a03a2d3afeb441c"/>
           <a:srcRect l="0" t="0" r="0" b="0"/>
           <a:stretch/>
         </p:blipFill>
@@ -4088,7 +4104,7 @@
           <p:nvPr/>
         </p:nvPicPr>
         <p:blipFill>
-          <a:blip r:embed="R47bd4cdb33eb49cf"/>
+          <a:blip ns3:embed="R47bd4cdb33eb49cf"/>
           <a:srcRect l="0" t="41985" r="50251" b="34197"/>
           <a:stretch/>
         </p:blipFill>
@@ -4111,7 +4127,7 @@
           <p:nvPr/>
         </p:nvPicPr>
         <p:blipFill>
-          <a:blip r:embed="R47bd4cdb33eb49cf"/>
+          <a:blip ns3:embed="R47bd4cdb33eb49cf"/>
           <a:srcRect l="0" t="0" r="0" b="0"/>
           <a:stretch/>
         </p:blipFill>
@@ -4134,7 +4150,7 @@
           <p:nvPr/>
         </p:nvPicPr>
         <p:blipFill>
-          <a:blip r:embed="R47bd4cdb33eb49cf"/>
+          <a:blip ns3:embed="R47bd4cdb33eb49cf"/>
           <a:srcRect l="0" t="41985" r="50251" b="34197"/>
           <a:stretch/>
         </p:blipFill>
@@ -4157,7 +4173,7 @@
           <p:nvPr/>
         </p:nvPicPr>
         <p:blipFill>
-          <a:blip r:embed="R837c7528521d42f5"/>
+          <a:blip ns3:embed="R837c7528521d42f5"/>
           <a:stretch>
             <a:fillRect l="0" t="0" r="0" b="0"/>
           </a:stretch>
@@ -4181,7 +4197,7 @@
           <p:nvPr/>
         </p:nvPicPr>
         <p:blipFill>
-          <a:blip r:embed="R161f7d53ecff4105"/>
+          <a:blip ns3:embed="R161f7d53ecff4105"/>
           <a:srcRect l="0" t="21190" r="0" b="0"/>
           <a:stretch>
             <a:fillRect l="0" t="0" r="0" b="0"/>
@@ -4206,7 +4222,7 @@
           <p:nvPr/>
         </p:nvPicPr>
         <p:blipFill>
-          <a:blip r:embed="R47bd4cdb33eb49cf"/>
+          <a:blip ns3:embed="R47bd4cdb33eb49cf"/>
           <a:srcRect l="0" t="41985" r="50251" b="34197"/>
           <a:stretch/>
         </p:blipFill>
@@ -4229,7 +4245,7 @@
           <p:nvPr/>
         </p:nvPicPr>
         <p:blipFill>
-          <a:blip r:embed="R47bd4cdb33eb49cf"/>
+          <a:blip ns3:embed="R47bd4cdb33eb49cf"/>
           <a:srcRect l="0" t="0" r="0" b="0"/>
           <a:stretch/>
         </p:blipFill>
@@ -4252,7 +4268,7 @@
           <p:nvPr/>
         </p:nvPicPr>
         <p:blipFill>
-          <a:blip r:embed="R47bd4cdb33eb49cf"/>
+          <a:blip ns3:embed="R47bd4cdb33eb49cf"/>
           <a:srcRect l="0" t="41985" r="50251" b="34197"/>
           <a:stretch/>
         </p:blipFill>
@@ -4275,7 +4291,7 @@
           <p:nvPr/>
         </p:nvPicPr>
         <p:blipFill>
-          <a:blip r:embed="R837c7528521d42f5"/>
+          <a:blip ns3:embed="R837c7528521d42f5"/>
           <a:stretch>
             <a:fillRect l="0" t="0" r="0" b="0"/>
           </a:stretch>
@@ -4299,7 +4315,7 @@
           <p:nvPr/>
         </p:nvPicPr>
         <p:blipFill>
-          <a:blip r:embed="R59a633428939412e"/>
+          <a:blip ns3:embed="R59a633428939412e"/>
           <a:stretch>
             <a:fillRect l="0" t="0" r="0" b="0"/>
           </a:stretch>
@@ -4343,11 +4359,11 @@
           </a:ln>
         </p:spPr>
         <p:txBody>
-          <a:bodyPr/>
+          <a:bodyPr wrap="square"/>
           <a:lstStyle/>
           <a:p>
             <a:r>
-              <a:rPr sz="2700" b="1" i="1">
+              <a:rPr sz="770" b="1" i="1">
                 <a:solidFill>
                   <a:srgbClr val="111111"/>
                 </a:solidFill>
@@ -4361,15 +4377,29 @@
           </a:p>
           <a:p>
             <a:r>
-              <a:rPr sz="2700" b="1" i="1">
-                <a:solidFill>
-                  <a:srgbClr val="111111"/>
-                </a:solidFill>
-                <a:latin typeface="Arial"/>
-                <a:ea typeface="Arial"/>
-                <a:cs typeface="Arial"/>
-              </a:rPr>
-              <a:t>PNS sampling design and reproducible indicators</a:t>
+              <a:rPr sz="770" b="0" i="1">
+                <a:solidFill>
+                  <a:srgbClr val="111111"/>
+                </a:solidFill>
+                <a:latin typeface="Arial"/>
+                <a:ea typeface="Arial"/>
+                <a:cs typeface="Arial"/>
+              </a:rPr>
+              <a:t>PNS complex sampling design and</a:t>
+            </a:r>
+            <a:endParaRPr/>
+          </a:p>
+          <a:p>
+            <a:r>
+              <a:rPr sz="770" b="0" i="1">
+                <a:solidFill>
+                  <a:srgbClr val="111111"/>
+                </a:solidFill>
+                <a:latin typeface="Arial"/>
+                <a:ea typeface="Arial"/>
+                <a:cs typeface="Arial"/>
+              </a:rPr>
+              <a:t>reproducible indicators</a:t>
             </a:r>
             <a:endParaRPr/>
           </a:p>
@@ -4553,8 +4583,8 @@
         </p:nvSpPr>
         <p:spPr>
           <a:xfrm>
-            <a:off x="12334875" y="26098500"/>
-            <a:ext cx="4000500" cy="1143000"/>
+            <a:off x="12190000" y="25520000"/>
+            <a:ext cx="4300000" cy="1900000"/>
           </a:xfrm>
           <a:prstGeom prst="rect">
             <a:avLst/>
@@ -4566,11 +4596,12 @@
           </a:ln>
         </p:spPr>
         <p:txBody>
-          <a:bodyPr/>
+          <a:bodyPr wrap="square"/>
           <a:lstStyle/>
           <a:p>
-            <a:r>
-              <a:rPr sz="2325" b="1" i="0">
+            <a:pPr algn="ctr"/>
+            <a:r>
+              <a:rPr sz="660" b="1" i="0">
                 <a:solidFill>
                   <a:srgbClr val="20425A"/>
                 </a:solidFill>
@@ -4583,8 +4614,9 @@
             <a:endParaRPr/>
           </a:p>
           <a:p>
-            <a:r>
-              <a:rPr sz="2325" b="1" i="0">
+            <a:pPr algn="ctr"/>
+            <a:r>
+              <a:rPr sz="660" b="0" i="0">
                 <a:solidFill>
                   <a:srgbClr val="20425A"/>
                 </a:solidFill>
@@ -4592,7 +4624,37 @@
                 <a:ea typeface="Arial"/>
                 <a:cs typeface="Arial"/>
               </a:rPr>
-              <a:t>methodological report</a:t>
+              <a:t>Methodological report,</a:t>
+            </a:r>
+            <a:endParaRPr/>
+          </a:p>
+          <a:p>
+            <a:pPr algn="ctr"/>
+            <a:r>
+              <a:rPr sz="660" b="0" i="0">
+                <a:solidFill>
+                  <a:srgbClr val="20425A"/>
+                </a:solidFill>
+                <a:latin typeface="Arial"/>
+                <a:ea typeface="Arial"/>
+                <a:cs typeface="Arial"/>
+              </a:rPr>
+              <a:t>reproducible code and figures</a:t>
+            </a:r>
+            <a:endParaRPr/>
+          </a:p>
+          <a:p>
+            <a:pPr algn="ctr"/>
+            <a:r>
+              <a:rPr sz="660" b="0" i="0">
+                <a:solidFill>
+                  <a:srgbClr val="20425A"/>
+                </a:solidFill>
+                <a:latin typeface="Arial"/>
+                <a:ea typeface="Arial"/>
+                <a:cs typeface="Arial"/>
+              </a:rPr>
+              <a:t>https://ingodube.github.io/PNS_2013_2019/metodologia.html</a:t>
             </a:r>
             <a:endParaRPr/>
           </a:p>
@@ -4607,7 +4669,7 @@
           <p:nvPr/>
         </p:nvPicPr>
         <p:blipFill>
-          <a:blip r:embed="R0f2383c324ff4946"/>
+          <a:blip ns3:embed="R0f2383c324ff4946"/>
           <a:stretch/>
         </p:blipFill>
         <p:spPr>
@@ -4629,7 +4691,7 @@
           <p:nvPr/>
         </p:nvPicPr>
         <p:blipFill>
-          <a:blip r:embed="R5b50d2b0086c487b"/>
+          <a:blip ns3:embed="R5b50d2b0086c487b"/>
           <a:stretch/>
         </p:blipFill>
         <p:spPr>
@@ -4651,7 +4713,7 @@
           <p:nvPr/>
         </p:nvPicPr>
         <p:blipFill>
-          <a:blip r:embed="Rfd3d3e68d53740fb"/>
+          <a:blip ns3:embed="Rfd3d3e68d53740fb"/>
           <a:stretch/>
         </p:blipFill>
         <p:spPr>
@@ -4673,7 +4735,7 @@
           <p:nvPr/>
         </p:nvPicPr>
         <p:blipFill>
-          <a:blip r:embed="R1e47abb8afa14a86"/>
+          <a:blip ns3:embed="R1e47abb8afa14a86"/>
           <a:stretch/>
         </p:blipFill>
         <p:spPr>
@@ -4702,8 +4764,8 @@
         </p:nvSpPr>
         <p:spPr>
           <a:xfrm>
-            <a:off x="495300" y="8667750"/>
-            <a:ext cx="7239000" cy="5600000"/>
+            <a:off x="495300" y="7900000"/>
+            <a:ext cx="7239000" cy="7000000"/>
             <a:off y="8667750"/>
             <a:ext cy="6150000"/>
           </a:xfrm>
@@ -4717,53 +4779,95 @@
           </a:ln>
         </p:spPr>
         <p:txBody>
-          <a:bodyPr/>
+          <a:bodyPr wrap="square"/>
           <a:lstStyle/>
           <a:p>
             <a:r>
-              <a:rPr sz="660" b="1" i="0">
-                <a:solidFill>
-                  <a:srgbClr val="111111"/>
-                </a:solidFill>
-                <a:latin typeface="Arial"/>
-                <a:ea typeface="Arial"/>
-                <a:cs typeface="Arial"/>
-              </a:rPr>
-              <a:t>INTRO</a:t>
-            </a:r>
-            <a:endParaRPr/>
-          </a:p>
-          <a:p>
-            <a:r>
-              <a:rPr sz="660" b="0" i="0">
-                <a:solidFill>
-                  <a:srgbClr val="111111"/>
-                </a:solidFill>
-                <a:latin typeface="Arial"/>
-                <a:ea typeface="Arial"/>
-                <a:cs typeface="Arial"/>
-              </a:rPr>
-              <a:t>• Asthma combines chronic burden, attacks and sustained management.</a:t>
-            </a:r>
-            <a:endParaRPr/>
-          </a:p>
-          <a:p>
-            <a:r>
-              <a:rPr sz="660" b="0" i="0">
-                <a:solidFill>
-                  <a:srgbClr val="111111"/>
-                </a:solidFill>
-                <a:latin typeface="Arial"/>
-                <a:ea typeface="Arial"/>
-                <a:cs typeface="Arial"/>
-              </a:rPr>
-              <a:t>• PNS indicators support surveillance and public policy.</a:t>
-            </a:r>
-            <a:endParaRPr/>
-          </a:p>
-          <a:p>
-            <a:r>
-              <a:rPr sz="660" b="0" i="0">
+              <a:rPr sz="590" b="1" i="0">
+                <a:solidFill>
+                  <a:srgbClr val="111111"/>
+                </a:solidFill>
+                <a:latin typeface="Arial"/>
+                <a:ea typeface="Arial"/>
+                <a:cs typeface="Arial"/>
+              </a:rPr>
+              <a:t>CONTEXT</a:t>
+            </a:r>
+            <a:endParaRPr/>
+          </a:p>
+          <a:p>
+            <a:r>
+              <a:rPr sz="590" b="0" i="0">
+                <a:solidFill>
+                  <a:srgbClr val="111111"/>
+                </a:solidFill>
+                <a:latin typeface="Arial"/>
+                <a:ea typeface="Arial"/>
+                <a:cs typeface="Arial"/>
+              </a:rPr>
+              <a:t>• PNS is a household sample survey;</a:t>
+            </a:r>
+            <a:endParaRPr/>
+          </a:p>
+          <a:p>
+            <a:r>
+              <a:rPr sz="590" b="0" i="0">
+                <a:solidFill>
+                  <a:srgbClr val="111111"/>
+                </a:solidFill>
+                <a:latin typeface="Arial"/>
+                <a:ea typeface="Arial"/>
+                <a:cs typeface="Arial"/>
+              </a:rPr>
+              <a:t>  analytical unit: selected resident.</a:t>
+            </a:r>
+            <a:endParaRPr/>
+          </a:p>
+          <a:p>
+            <a:r>
+              <a:rPr sz="590" b="0" i="0">
+                <a:solidFill>
+                  <a:srgbClr val="111111"/>
+                </a:solidFill>
+                <a:latin typeface="Arial"/>
+                <a:ea typeface="Arial"/>
+                <a:cs typeface="Arial"/>
+              </a:rPr>
+              <a:t>• Epidemiological indicators translate</a:t>
+            </a:r>
+            <a:endParaRPr/>
+          </a:p>
+          <a:p>
+            <a:r>
+              <a:rPr sz="590" b="0" i="0">
+                <a:solidFill>
+                  <a:srgbClr val="111111"/>
+                </a:solidFill>
+                <a:latin typeface="Arial"/>
+                <a:ea typeface="Arial"/>
+                <a:cs typeface="Arial"/>
+              </a:rPr>
+              <a:t>  individual responses into evidence</a:t>
+            </a:r>
+            <a:endParaRPr/>
+          </a:p>
+          <a:p>
+            <a:r>
+              <a:rPr sz="590" b="0" i="0">
+                <a:solidFill>
+                  <a:srgbClr val="111111"/>
+                </a:solidFill>
+                <a:latin typeface="Arial"/>
+                <a:ea typeface="Arial"/>
+                <a:cs typeface="Arial"/>
+              </a:rPr>
+              <a:t>  for surveillance and planning.</a:t>
+            </a:r>
+            <a:endParaRPr/>
+          </a:p>
+          <a:p>
+            <a:r>
+              <a:rPr sz="590" b="0" i="0">
                 <a:solidFill>
                   <a:srgbClr val="111111"/>
                 </a:solidFill>
@@ -4777,57 +4881,155 @@
           </a:p>
           <a:p>
             <a:r>
-              <a:rPr sz="660" b="0" i="0">
-                <a:solidFill>
-                  <a:srgbClr val="111111"/>
-                </a:solidFill>
-                <a:latin typeface="Arial"/>
-                <a:ea typeface="Arial"/>
-                <a:cs typeface="Arial"/>
-              </a:rPr>
-              <a:t>METHODS</a:t>
-            </a:r>
-            <a:endParaRPr/>
-          </a:p>
-          <a:p>
-            <a:r>
-              <a:rPr sz="660" b="0" i="0">
-                <a:solidFill>
-                  <a:srgbClr val="111111"/>
-                </a:solidFill>
-                <a:latin typeface="Arial"/>
-                <a:ea typeface="Arial"/>
-                <a:cs typeface="Arial"/>
-              </a:rPr>
-              <a:t>• PNS 2013/2019 selected-resident microdata.</a:t>
-            </a:r>
-            <a:endParaRPr/>
-          </a:p>
-          <a:p>
-            <a:r>
-              <a:rPr sz="660" b="0" i="0">
-                <a:solidFill>
-                  <a:srgbClr val="111111"/>
-                </a:solidFill>
-                <a:latin typeface="Arial"/>
-                <a:ea typeface="Arial"/>
-                <a:cs typeface="Arial"/>
-              </a:rPr>
-              <a:t>• Complex design: PSU, strata and weights via `pns_design()`.</a:t>
-            </a:r>
-            <a:endParaRPr/>
-          </a:p>
-          <a:p>
-            <a:r>
-              <a:rPr sz="660" b="0" i="0">
-                <a:solidFill>
-                  <a:srgbClr val="111111"/>
-                </a:solidFill>
-                <a:latin typeface="Arial"/>
-                <a:ea typeface="Arial"/>
-                <a:cs typeface="Arial"/>
-              </a:rPr>
-              <a:t>• Beta 95% CI: suited to proportions and small domains.</a:t>
+              <a:rPr sz="590" b="0" i="0">
+                <a:solidFill>
+                  <a:srgbClr val="111111"/>
+                </a:solidFill>
+                <a:latin typeface="Arial"/>
+                <a:ea typeface="Arial"/>
+                <a:cs typeface="Arial"/>
+              </a:rPr>
+              <a:t>METHOD</a:t>
+            </a:r>
+            <a:endParaRPr/>
+          </a:p>
+          <a:p>
+            <a:r>
+              <a:rPr sz="590" b="0" i="0">
+                <a:solidFill>
+                  <a:srgbClr val="111111"/>
+                </a:solidFill>
+                <a:latin typeface="Arial"/>
+                <a:ea typeface="Arial"/>
+                <a:cs typeface="Arial"/>
+              </a:rPr>
+              <a:t>• `pns_design()` incorporates PSU,</a:t>
+            </a:r>
+            <a:endParaRPr/>
+          </a:p>
+          <a:p>
+            <a:r>
+              <a:rPr sz="590" b="0" i="0">
+                <a:solidFill>
+                  <a:srgbClr val="111111"/>
+                </a:solidFill>
+                <a:latin typeface="Arial"/>
+                <a:ea typeface="Arial"/>
+                <a:cs typeface="Arial"/>
+              </a:rPr>
+              <a:t>  strata and calibrated weights.</a:t>
+            </a:r>
+            <a:endParaRPr/>
+          </a:p>
+          <a:p>
+            <a:r>
+              <a:rPr sz="590" b="0" i="0">
+                <a:solidFill>
+                  <a:srgbClr val="111111"/>
+                </a:solidFill>
+                <a:latin typeface="Arial"/>
+                <a:ea typeface="Arial"/>
+                <a:cs typeface="Arial"/>
+              </a:rPr>
+              <a:t>• Variables: Q074 diagnosis, Q076</a:t>
+            </a:r>
+            <a:endParaRPr/>
+          </a:p>
+          <a:p>
+            <a:r>
+              <a:rPr sz="590" b="0" i="0">
+                <a:solidFill>
+                  <a:srgbClr val="111111"/>
+                </a:solidFill>
+                <a:latin typeface="Arial"/>
+                <a:ea typeface="Arial"/>
+                <a:cs typeface="Arial"/>
+              </a:rPr>
+              <a:t>  attack, Q077* medication, P050</a:t>
+            </a:r>
+            <a:endParaRPr/>
+          </a:p>
+          <a:p>
+            <a:r>
+              <a:rPr sz="590" b="0" i="0">
+                <a:solidFill>
+                  <a:srgbClr val="111111"/>
+                </a:solidFill>
+                <a:latin typeface="Arial"/>
+                <a:ea typeface="Arial"/>
+                <a:cs typeface="Arial"/>
+              </a:rPr>
+              <a:t>  smoking.</a:t>
+            </a:r>
+            <a:endParaRPr/>
+          </a:p>
+          <a:p>
+            <a:r>
+              <a:rPr sz="590" b="0" i="0">
+                <a:solidFill>
+                  <a:srgbClr val="111111"/>
+                </a:solidFill>
+                <a:latin typeface="Arial"/>
+                <a:ea typeface="Arial"/>
+                <a:cs typeface="Arial"/>
+              </a:rPr>
+              <a:t>• Denominators: population, people with</a:t>
+            </a:r>
+            <a:endParaRPr/>
+          </a:p>
+          <a:p>
+            <a:r>
+              <a:rPr sz="590" b="0" i="0">
+                <a:solidFill>
+                  <a:srgbClr val="111111"/>
+                </a:solidFill>
+                <a:latin typeface="Arial"/>
+                <a:ea typeface="Arial"/>
+                <a:cs typeface="Arial"/>
+              </a:rPr>
+              <a:t>  asthma, people with attack or valid</a:t>
+            </a:r>
+            <a:endParaRPr/>
+          </a:p>
+          <a:p>
+            <a:r>
+              <a:rPr sz="590" b="0" i="0">
+                <a:solidFill>
+                  <a:srgbClr val="111111"/>
+                </a:solidFill>
+                <a:latin typeface="Arial"/>
+                <a:ea typeface="Arial"/>
+                <a:cs typeface="Arial"/>
+              </a:rPr>
+              <a:t>  responses.</a:t>
+            </a:r>
+            <a:endParaRPr/>
+          </a:p>
+          <a:p>
+            <a:r>
+              <a:rPr sz="590" b="0" i="0">
+                <a:solidFill>
+                  <a:srgbClr val="111111"/>
+                </a:solidFill>
+                <a:latin typeface="Arial"/>
+                <a:ea typeface="Arial"/>
+                <a:cs typeface="Arial"/>
+              </a:rPr>
+              <a:t>• Comparisons: point estimate, beta 95%</a:t>
+            </a:r>
+            <a:endParaRPr/>
+          </a:p>
+          <a:p>
+            <a:r>
+              <a:rPr sz="590" b="0" i="0">
+                <a:solidFill>
+                  <a:srgbClr val="111111"/>
+                </a:solidFill>
+                <a:latin typeface="Arial"/>
+                <a:ea typeface="Arial"/>
+                <a:cs typeface="Arial"/>
+              </a:rPr>
+              <a:t>  CI, magnitude and interval overlap.</a:t>
             </a:r>
             <a:endParaRPr/>
           </a:p>
@@ -4849,8 +5051,8 @@
         </p:nvSpPr>
         <p:spPr>
           <a:xfrm>
-            <a:off x="36223575" y="5686425"/>
-            <a:ext cx="6905625" cy="14668500"/>
+            <a:off x="36223575" y="5270000"/>
+            <a:ext cx="6905625" cy="21700000"/>
           </a:xfrm>
           <a:prstGeom prst="rect">
             <a:avLst/>
@@ -4862,53 +5064,109 @@
           </a:ln>
         </p:spPr>
         <p:txBody>
-          <a:bodyPr/>
+          <a:bodyPr wrap="square"/>
           <a:lstStyle/>
           <a:p>
             <a:r>
-              <a:rPr sz="1875" b="0" i="0">
-                <a:solidFill>
-                  <a:srgbClr val="111111"/>
-                </a:solidFill>
-                <a:latin typeface="Arial"/>
-                <a:ea typeface="Arial"/>
-                <a:cs typeface="Arial"/>
-              </a:rPr>
-              <a:t>RESOURCES</a:t>
-            </a:r>
-            <a:endParaRPr/>
-          </a:p>
-          <a:p>
-            <a:r>
-              <a:rPr sz="1875" b="0" i="0">
-                <a:solidFill>
-                  <a:srgbClr val="111111"/>
-                </a:solidFill>
-                <a:latin typeface="Arial"/>
-                <a:ea typeface="Arial"/>
-                <a:cs typeface="Arial"/>
-              </a:rPr>
-              <a:t>• QR: methodological report, reproducible code and figures.</a:t>
-            </a:r>
-            <a:endParaRPr/>
-          </a:p>
-          <a:p>
-            <a:r>
-              <a:rPr sz="1875" b="0" i="0">
-                <a:solidFill>
-                  <a:srgbClr val="111111"/>
-                </a:solidFill>
-                <a:latin typeface="Arial"/>
-                <a:ea typeface="Arial"/>
-                <a:cs typeface="Arial"/>
-              </a:rPr>
-              <a:t>• Link: ingodube.github.io/PNS_2013_2019/metodologia.html</a:t>
-            </a:r>
-            <a:endParaRPr/>
-          </a:p>
-          <a:p>
-            <a:r>
-              <a:rPr sz="1875" b="0" i="0">
+              <a:rPr sz="385" b="1" i="0">
+                <a:solidFill>
+                  <a:srgbClr val="111111"/>
+                </a:solidFill>
+                <a:latin typeface="Arial"/>
+                <a:ea typeface="Arial"/>
+                <a:cs typeface="Arial"/>
+              </a:rPr>
+              <a:t>STATISTICAL INTERPRETATION</a:t>
+            </a:r>
+            <a:endParaRPr/>
+          </a:p>
+          <a:p>
+            <a:r>
+              <a:rPr sz="385" b="0" i="0">
+                <a:solidFill>
+                  <a:srgbClr val="111111"/>
+                </a:solidFill>
+                <a:latin typeface="Arial"/>
+                <a:ea typeface="Arial"/>
+                <a:cs typeface="Arial"/>
+              </a:rPr>
+              <a:t>• The beta CI respects 0-1 limits and is</a:t>
+            </a:r>
+            <a:endParaRPr/>
+          </a:p>
+          <a:p>
+            <a:r>
+              <a:rPr sz="385" b="0" i="0">
+                <a:solidFill>
+                  <a:srgbClr val="111111"/>
+                </a:solidFill>
+                <a:latin typeface="Arial"/>
+                <a:ea typeface="Arial"/>
+                <a:cs typeface="Arial"/>
+              </a:rPr>
+              <a:t>  more robust than Wald for proportions and</a:t>
+            </a:r>
+            <a:endParaRPr/>
+          </a:p>
+          <a:p>
+            <a:r>
+              <a:rPr sz="385" b="0" i="0">
+                <a:solidFill>
+                  <a:srgbClr val="111111"/>
+                </a:solidFill>
+                <a:latin typeface="Arial"/>
+                <a:ea typeface="Arial"/>
+                <a:cs typeface="Arial"/>
+              </a:rPr>
+              <a:t>  small domains.</a:t>
+            </a:r>
+            <a:endParaRPr/>
+          </a:p>
+          <a:p>
+            <a:r>
+              <a:rPr sz="385" b="0" i="0">
+                <a:solidFill>
+                  <a:srgbClr val="111111"/>
+                </a:solidFill>
+                <a:latin typeface="Arial"/>
+                <a:ea typeface="Arial"/>
+                <a:cs typeface="Arial"/>
+              </a:rPr>
+              <a:t>• Non-overlapping CIs support national</a:t>
+            </a:r>
+            <a:endParaRPr/>
+          </a:p>
+          <a:p>
+            <a:r>
+              <a:rPr sz="385" b="0" i="0">
+                <a:solidFill>
+                  <a:srgbClr val="111111"/>
+                </a:solidFill>
+                <a:latin typeface="Arial"/>
+                <a:ea typeface="Arial"/>
+                <a:cs typeface="Arial"/>
+              </a:rPr>
+              <a:t>  growth; overlapping CIs limit conclusions</a:t>
+            </a:r>
+            <a:endParaRPr/>
+          </a:p>
+          <a:p>
+            <a:r>
+              <a:rPr sz="385" b="0" i="0">
+                <a:solidFill>
+                  <a:srgbClr val="111111"/>
+                </a:solidFill>
+                <a:latin typeface="Arial"/>
+                <a:ea typeface="Arial"/>
+                <a:cs typeface="Arial"/>
+              </a:rPr>
+              <a:t>  in many states.</a:t>
+            </a:r>
+            <a:endParaRPr/>
+          </a:p>
+          <a:p>
+            <a:r>
+              <a:rPr sz="385" b="0" i="0">
                 <a:solidFill>
                   <a:srgbClr val="111111"/>
                 </a:solidFill>
@@ -4922,77 +5180,161 @@
           </a:p>
           <a:p>
             <a:r>
-              <a:rPr sz="1875" b="0" i="0">
-                <a:solidFill>
-                  <a:srgbClr val="111111"/>
-                </a:solidFill>
-                <a:latin typeface="Arial"/>
-                <a:ea typeface="Arial"/>
-                <a:cs typeface="Arial"/>
-              </a:rPr>
-              <a:t>INTERPRETATION</a:t>
-            </a:r>
-            <a:endParaRPr/>
-          </a:p>
-          <a:p>
-            <a:r>
-              <a:rPr sz="1875" b="0" i="0">
-                <a:solidFill>
-                  <a:srgbClr val="111111"/>
-                </a:solidFill>
-                <a:latin typeface="Arial"/>
-                <a:ea typeface="Arial"/>
-                <a:cs typeface="Arial"/>
-              </a:rPr>
-              <a:t>• Non-overlapping CIs support the national diagnosis increase.</a:t>
-            </a:r>
-            <a:endParaRPr/>
-          </a:p>
-          <a:p>
-            <a:r>
-              <a:rPr sz="1875" b="0" i="0">
-                <a:solidFill>
-                  <a:srgbClr val="111111"/>
-                </a:solidFill>
-                <a:latin typeface="Arial"/>
-                <a:ea typeface="Arial"/>
-                <a:cs typeface="Arial"/>
-              </a:rPr>
-              <a:t>• Overlapping CIs limit conclusions for several states.</a:t>
-            </a:r>
-            <a:endParaRPr/>
-          </a:p>
-          <a:p>
-            <a:r>
-              <a:rPr sz="1875" b="0" i="0">
-                <a:solidFill>
-                  <a:srgbClr val="111111"/>
-                </a:solidFill>
-                <a:latin typeface="Arial"/>
-                <a:ea typeface="Arial"/>
-                <a:cs typeface="Arial"/>
-              </a:rPr>
-              <a:t>• Stable attacks suggest disease management remains insufficient.</a:t>
-            </a:r>
-            <a:endParaRPr/>
-          </a:p>
-          <a:p>
-            <a:r>
-              <a:rPr sz="1875" b="0" i="0">
-                <a:solidFill>
-                  <a:srgbClr val="111111"/>
-                </a:solidFill>
-                <a:latin typeface="Arial"/>
-                <a:ea typeface="Arial"/>
-                <a:cs typeface="Arial"/>
-              </a:rPr>
-              <a:t>• Smoking declined, but does not by itself explain the diagnosis increase.</a:t>
-            </a:r>
-            <a:endParaRPr/>
-          </a:p>
-          <a:p>
-            <a:r>
-              <a:rPr sz="1875" b="0" i="0">
+              <a:rPr sz="385" b="0" i="0">
+                <a:solidFill>
+                  <a:srgbClr val="111111"/>
+                </a:solidFill>
+                <a:latin typeface="Arial"/>
+                <a:ea typeface="Arial"/>
+                <a:cs typeface="Arial"/>
+              </a:rPr>
+              <a:t>OBSERVATIONAL DATA AND INTEROPERABILITY</a:t>
+            </a:r>
+            <a:endParaRPr/>
+          </a:p>
+          <a:p>
+            <a:r>
+              <a:rPr sz="385" b="0" i="0">
+                <a:solidFill>
+                  <a:srgbClr val="111111"/>
+                </a:solidFill>
+                <a:latin typeface="Arial"/>
+                <a:ea typeface="Arial"/>
+                <a:cs typeface="Arial"/>
+              </a:rPr>
+              <a:t>• ETL workflow: extract microdata,</a:t>
+            </a:r>
+            <a:endParaRPr/>
+          </a:p>
+          <a:p>
+            <a:r>
+              <a:rPr sz="385" b="0" i="0">
+                <a:solidFill>
+                  <a:srgbClr val="111111"/>
+                </a:solidFill>
+                <a:latin typeface="Arial"/>
+                <a:ea typeface="Arial"/>
+                <a:cs typeface="Arial"/>
+              </a:rPr>
+              <a:t>  transform variables, document rules and</a:t>
+            </a:r>
+            <a:endParaRPr/>
+          </a:p>
+          <a:p>
+            <a:r>
+              <a:rPr sz="385" b="0" i="0">
+                <a:solidFill>
+                  <a:srgbClr val="111111"/>
+                </a:solidFill>
+                <a:latin typeface="Arial"/>
+                <a:ea typeface="Arial"/>
+                <a:cs typeface="Arial"/>
+              </a:rPr>
+              <a:t>  load analytical tables.</a:t>
+            </a:r>
+            <a:endParaRPr/>
+          </a:p>
+          <a:p>
+            <a:r>
+              <a:rPr sz="385" b="0" i="0">
+                <a:solidFill>
+                  <a:srgbClr val="111111"/>
+                </a:solidFill>
+                <a:latin typeface="Arial"/>
+                <a:ea typeface="Arial"/>
+                <a:cs typeface="Arial"/>
+              </a:rPr>
+              <a:t>• PNS is not a longitudinal clinical</a:t>
+            </a:r>
+            <a:endParaRPr/>
+          </a:p>
+          <a:p>
+            <a:r>
+              <a:rPr sz="385" b="0" i="0">
+                <a:solidFill>
+                  <a:srgbClr val="111111"/>
+                </a:solidFill>
+                <a:latin typeface="Arial"/>
+                <a:ea typeface="Arial"/>
+                <a:cs typeface="Arial"/>
+              </a:rPr>
+              <a:t>  database; OMOP/OHDSI guides</a:t>
+            </a:r>
+            <a:endParaRPr/>
+          </a:p>
+          <a:p>
+            <a:r>
+              <a:rPr sz="385" b="0" i="0">
+                <a:solidFill>
+                  <a:srgbClr val="111111"/>
+                </a:solidFill>
+                <a:latin typeface="Arial"/>
+                <a:ea typeface="Arial"/>
+                <a:cs typeface="Arial"/>
+              </a:rPr>
+              <a:t>  standardization, vocabularies and future</a:t>
+            </a:r>
+            <a:endParaRPr/>
+          </a:p>
+          <a:p>
+            <a:r>
+              <a:rPr sz="385" b="0" i="0">
+                <a:solidFill>
+                  <a:srgbClr val="111111"/>
+                </a:solidFill>
+                <a:latin typeface="Arial"/>
+                <a:ea typeface="Arial"/>
+                <a:cs typeface="Arial"/>
+              </a:rPr>
+              <a:t>  comparison with health-care data.</a:t>
+            </a:r>
+            <a:endParaRPr/>
+          </a:p>
+          <a:p>
+            <a:r>
+              <a:rPr sz="385" b="0" i="0">
+                <a:solidFill>
+                  <a:srgbClr val="111111"/>
+                </a:solidFill>
+                <a:latin typeface="Arial"/>
+                <a:ea typeface="Arial"/>
+                <a:cs typeface="Arial"/>
+              </a:rPr>
+              <a:t>• The population layer helps contextualize</a:t>
+            </a:r>
+            <a:endParaRPr/>
+          </a:p>
+          <a:p>
+            <a:r>
+              <a:rPr sz="385" b="0" i="0">
+                <a:solidFill>
+                  <a:srgbClr val="111111"/>
+                </a:solidFill>
+                <a:latin typeface="Arial"/>
+                <a:ea typeface="Arial"/>
+                <a:cs typeface="Arial"/>
+              </a:rPr>
+              <a:t>  clinical trajectories, dispensing,</a:t>
+            </a:r>
+            <a:endParaRPr/>
+          </a:p>
+          <a:p>
+            <a:r>
+              <a:rPr sz="385" b="0" i="0">
+                <a:solidFill>
+                  <a:srgbClr val="111111"/>
+                </a:solidFill>
+                <a:latin typeface="Arial"/>
+                <a:ea typeface="Arial"/>
+                <a:cs typeface="Arial"/>
+              </a:rPr>
+              <a:t>  exacerbations and service use.</a:t>
+            </a:r>
+            <a:endParaRPr/>
+          </a:p>
+          <a:p>
+            <a:r>
+              <a:rPr sz="385" b="0" i="0">
                 <a:solidFill>
                   <a:srgbClr val="111111"/>
                 </a:solidFill>
@@ -5006,63 +5348,7 @@
           </a:p>
           <a:p>
             <a:r>
-              <a:rPr sz="1875" b="0" i="0">
-                <a:solidFill>
-                  <a:srgbClr val="111111"/>
-                </a:solidFill>
-                <a:latin typeface="Arial"/>
-                <a:ea typeface="Arial"/>
-                <a:cs typeface="Arial"/>
-              </a:rPr>
-              <a:t>OBSERVATIONAL DATA</a:t>
-            </a:r>
-            <a:endParaRPr/>
-          </a:p>
-          <a:p>
-            <a:r>
-              <a:rPr sz="1875" b="0" i="0">
-                <a:solidFill>
-                  <a:srgbClr val="111111"/>
-                </a:solidFill>
-                <a:latin typeface="Arial"/>
-                <a:ea typeface="Arial"/>
-                <a:cs typeface="Arial"/>
-              </a:rPr>
-              <a:t>• The analytical workflow follows ETL logic.</a:t>
-            </a:r>
-            <a:endParaRPr/>
-          </a:p>
-          <a:p>
-            <a:r>
-              <a:rPr sz="1875" b="0" i="0">
-                <a:solidFill>
-                  <a:srgbClr val="111111"/>
-                </a:solidFill>
-                <a:latin typeface="Arial"/>
-                <a:ea typeface="Arial"/>
-                <a:cs typeface="Arial"/>
-              </a:rPr>
-              <a:t>• OMOP/OHDSI informs standardization, interoperability and future comparison with health-care databases.</a:t>
-            </a:r>
-            <a:endParaRPr/>
-          </a:p>
-          <a:p>
-            <a:r>
-              <a:rPr sz="1875" b="0" i="0">
-                <a:solidFill>
-                  <a:srgbClr val="111111"/>
-                </a:solidFill>
-                <a:latin typeface="Arial"/>
-                <a:ea typeface="Arial"/>
-                <a:cs typeface="Arial"/>
-              </a:rPr>
-              <a:t/>
-            </a:r>
-            <a:endParaRPr/>
-          </a:p>
-          <a:p>
-            <a:r>
-              <a:rPr sz="1875" b="0" i="0">
+              <a:rPr sz="385" b="0" i="0">
                 <a:solidFill>
                   <a:srgbClr val="111111"/>
                 </a:solidFill>
@@ -5076,15 +5362,883 @@
           </a:p>
           <a:p>
             <a:r>
-              <a:rPr sz="1875" b="0" i="0">
-                <a:solidFill>
-                  <a:srgbClr val="111111"/>
-                </a:solidFill>
-                <a:latin typeface="Arial"/>
-                <a:ea typeface="Arial"/>
-                <a:cs typeface="Arial"/>
-              </a:rPr>
-              <a:t>[1] GAN 2022; [2] Souza-Júnior 2015; [3] Dube/Silva 2026; [4] Menezes 2015; [5] Santos 2018; [6] Brown 2001; [7] Korn 1998.</a:t>
+              <a:rPr sz="385" b="0" i="0">
+                <a:solidFill>
+                  <a:srgbClr val="111111"/>
+                </a:solidFill>
+                <a:latin typeface="Arial"/>
+                <a:ea typeface="Arial"/>
+                <a:cs typeface="Arial"/>
+              </a:rPr>
+              <a:t>[1] GLOBAL ASTHMA NETWORK. Global Asthma</a:t>
+            </a:r>
+            <a:endParaRPr/>
+          </a:p>
+          <a:p>
+            <a:r>
+              <a:rPr sz="385" b="0" i="0">
+                <a:solidFill>
+                  <a:srgbClr val="111111"/>
+                </a:solidFill>
+                <a:latin typeface="Arial"/>
+                <a:ea typeface="Arial"/>
+                <a:cs typeface="Arial"/>
+              </a:rPr>
+              <a:t>    Report 2022. Auckland, New Zealand:</a:t>
+            </a:r>
+            <a:endParaRPr/>
+          </a:p>
+          <a:p>
+            <a:r>
+              <a:rPr sz="385" b="0" i="0">
+                <a:solidFill>
+                  <a:srgbClr val="111111"/>
+                </a:solidFill>
+                <a:latin typeface="Arial"/>
+                <a:ea typeface="Arial"/>
+                <a:cs typeface="Arial"/>
+              </a:rPr>
+              <a:t>    Global Asthma Network, 2022. Disponível</a:t>
+            </a:r>
+            <a:endParaRPr/>
+          </a:p>
+          <a:p>
+            <a:r>
+              <a:rPr sz="385" b="0" i="0">
+                <a:solidFill>
+                  <a:srgbClr val="111111"/>
+                </a:solidFill>
+                <a:latin typeface="Arial"/>
+                <a:ea typeface="Arial"/>
+                <a:cs typeface="Arial"/>
+              </a:rPr>
+              <a:t>    em:</a:t>
+            </a:r>
+            <a:endParaRPr/>
+          </a:p>
+          <a:p>
+            <a:r>
+              <a:rPr sz="385" b="0" i="0">
+                <a:solidFill>
+                  <a:srgbClr val="111111"/>
+                </a:solidFill>
+                <a:latin typeface="Arial"/>
+                <a:ea typeface="Arial"/>
+                <a:cs typeface="Arial"/>
+              </a:rPr>
+              <a:t>    https://globalasthmareport.org/resources/Global_Asthma_Report_2022.pdf.</a:t>
+            </a:r>
+            <a:endParaRPr/>
+          </a:p>
+          <a:p>
+            <a:r>
+              <a:rPr sz="385" b="0" i="0">
+                <a:solidFill>
+                  <a:srgbClr val="111111"/>
+                </a:solidFill>
+                <a:latin typeface="Arial"/>
+                <a:ea typeface="Arial"/>
+                <a:cs typeface="Arial"/>
+              </a:rPr>
+              <a:t>    Acesso em: 19 set. 2025.</a:t>
+            </a:r>
+            <a:endParaRPr/>
+          </a:p>
+          <a:p>
+            <a:r>
+              <a:rPr sz="385" b="0" i="0">
+                <a:solidFill>
+                  <a:srgbClr val="111111"/>
+                </a:solidFill>
+                <a:latin typeface="Arial"/>
+                <a:ea typeface="Arial"/>
+                <a:cs typeface="Arial"/>
+              </a:rPr>
+              <a:t>[2] SOUZA-JÚNIOR, Paulo Roberto Borges de</a:t>
+            </a:r>
+            <a:endParaRPr/>
+          </a:p>
+          <a:p>
+            <a:r>
+              <a:rPr sz="385" b="0" i="0">
+                <a:solidFill>
+                  <a:srgbClr val="111111"/>
+                </a:solidFill>
+                <a:latin typeface="Arial"/>
+                <a:ea typeface="Arial"/>
+                <a:cs typeface="Arial"/>
+              </a:rPr>
+              <a:t>    et al. Desenho da amostra da Pesquisa</a:t>
+            </a:r>
+            <a:endParaRPr/>
+          </a:p>
+          <a:p>
+            <a:r>
+              <a:rPr sz="385" b="0" i="0">
+                <a:solidFill>
+                  <a:srgbClr val="111111"/>
+                </a:solidFill>
+                <a:latin typeface="Arial"/>
+                <a:ea typeface="Arial"/>
+                <a:cs typeface="Arial"/>
+              </a:rPr>
+              <a:t>    Nacional de Saúde 2013. Epidemiologia e</a:t>
+            </a:r>
+            <a:endParaRPr/>
+          </a:p>
+          <a:p>
+            <a:r>
+              <a:rPr sz="385" b="0" i="0">
+                <a:solidFill>
+                  <a:srgbClr val="111111"/>
+                </a:solidFill>
+                <a:latin typeface="Arial"/>
+                <a:ea typeface="Arial"/>
+                <a:cs typeface="Arial"/>
+              </a:rPr>
+              <a:t>    Serviços de Saúde, v. 24, p. 207-216,</a:t>
+            </a:r>
+            <a:endParaRPr/>
+          </a:p>
+          <a:p>
+            <a:r>
+              <a:rPr sz="385" b="0" i="0">
+                <a:solidFill>
+                  <a:srgbClr val="111111"/>
+                </a:solidFill>
+                <a:latin typeface="Arial"/>
+                <a:ea typeface="Arial"/>
+                <a:cs typeface="Arial"/>
+              </a:rPr>
+              <a:t>    2015.</a:t>
+            </a:r>
+            <a:endParaRPr/>
+          </a:p>
+          <a:p>
+            <a:r>
+              <a:rPr sz="385" b="0" i="0">
+                <a:solidFill>
+                  <a:srgbClr val="111111"/>
+                </a:solidFill>
+                <a:latin typeface="Arial"/>
+                <a:ea typeface="Arial"/>
+                <a:cs typeface="Arial"/>
+              </a:rPr>
+              <a:t>[3] DUBE, I.; SILVA, M. E. L.</a:t>
+            </a:r>
+            <a:endParaRPr/>
+          </a:p>
+          <a:p>
+            <a:r>
+              <a:rPr sz="385" b="0" i="0">
+                <a:solidFill>
+                  <a:srgbClr val="111111"/>
+                </a:solidFill>
+                <a:latin typeface="Arial"/>
+                <a:ea typeface="Arial"/>
+                <a:cs typeface="Arial"/>
+              </a:rPr>
+              <a:t>    PNS_2013_2019. GitHub, 2026. Disponível</a:t>
+            </a:r>
+            <a:endParaRPr/>
+          </a:p>
+          <a:p>
+            <a:r>
+              <a:rPr sz="385" b="0" i="0">
+                <a:solidFill>
+                  <a:srgbClr val="111111"/>
+                </a:solidFill>
+                <a:latin typeface="Arial"/>
+                <a:ea typeface="Arial"/>
+                <a:cs typeface="Arial"/>
+              </a:rPr>
+              <a:t>    em:</a:t>
+            </a:r>
+            <a:endParaRPr/>
+          </a:p>
+          <a:p>
+            <a:r>
+              <a:rPr sz="385" b="0" i="0">
+                <a:solidFill>
+                  <a:srgbClr val="111111"/>
+                </a:solidFill>
+                <a:latin typeface="Arial"/>
+                <a:ea typeface="Arial"/>
+                <a:cs typeface="Arial"/>
+              </a:rPr>
+              <a:t>    https://github.com/ingodube/PNS_2013_2019.</a:t>
+            </a:r>
+            <a:endParaRPr/>
+          </a:p>
+          <a:p>
+            <a:r>
+              <a:rPr sz="385" b="0" i="0">
+                <a:solidFill>
+                  <a:srgbClr val="111111"/>
+                </a:solidFill>
+                <a:latin typeface="Arial"/>
+                <a:ea typeface="Arial"/>
+                <a:cs typeface="Arial"/>
+              </a:rPr>
+              <a:t>    Acesso em: 28 mai. 2026.</a:t>
+            </a:r>
+            <a:endParaRPr/>
+          </a:p>
+          <a:p>
+            <a:r>
+              <a:rPr sz="385" b="0" i="0">
+                <a:solidFill>
+                  <a:srgbClr val="111111"/>
+                </a:solidFill>
+                <a:latin typeface="Arial"/>
+                <a:ea typeface="Arial"/>
+                <a:cs typeface="Arial"/>
+              </a:rPr>
+              <a:t>[4] MENEZES, A. M. B. et al. Prevalência de</a:t>
+            </a:r>
+            <a:endParaRPr/>
+          </a:p>
+          <a:p>
+            <a:r>
+              <a:rPr sz="385" b="0" i="0">
+                <a:solidFill>
+                  <a:srgbClr val="111111"/>
+                </a:solidFill>
+                <a:latin typeface="Arial"/>
+                <a:ea typeface="Arial"/>
+                <a:cs typeface="Arial"/>
+              </a:rPr>
+              <a:t>    diagnóstico médico de asma em adultos</a:t>
+            </a:r>
+            <a:endParaRPr/>
+          </a:p>
+          <a:p>
+            <a:r>
+              <a:rPr sz="385" b="0" i="0">
+                <a:solidFill>
+                  <a:srgbClr val="111111"/>
+                </a:solidFill>
+                <a:latin typeface="Arial"/>
+                <a:ea typeface="Arial"/>
+                <a:cs typeface="Arial"/>
+              </a:rPr>
+              <a:t>    brasileiros: Pesquisa Nacional de</a:t>
+            </a:r>
+            <a:endParaRPr/>
+          </a:p>
+          <a:p>
+            <a:r>
+              <a:rPr sz="385" b="0" i="0">
+                <a:solidFill>
+                  <a:srgbClr val="111111"/>
+                </a:solidFill>
+                <a:latin typeface="Arial"/>
+                <a:ea typeface="Arial"/>
+                <a:cs typeface="Arial"/>
+              </a:rPr>
+              <a:t>    Saúde, 2013. Revista Brasileira de</a:t>
+            </a:r>
+            <a:endParaRPr/>
+          </a:p>
+          <a:p>
+            <a:r>
+              <a:rPr sz="385" b="0" i="0">
+                <a:solidFill>
+                  <a:srgbClr val="111111"/>
+                </a:solidFill>
+                <a:latin typeface="Arial"/>
+                <a:ea typeface="Arial"/>
+                <a:cs typeface="Arial"/>
+              </a:rPr>
+              <a:t>    Epidemiologia, São Paulo, v. 18, supl.</a:t>
+            </a:r>
+            <a:endParaRPr/>
+          </a:p>
+          <a:p>
+            <a:r>
+              <a:rPr sz="385" b="0" i="0">
+                <a:solidFill>
+                  <a:srgbClr val="111111"/>
+                </a:solidFill>
+                <a:latin typeface="Arial"/>
+                <a:ea typeface="Arial"/>
+                <a:cs typeface="Arial"/>
+              </a:rPr>
+              <a:t>    2, p. 204-213, 2015.</a:t>
+            </a:r>
+            <a:endParaRPr/>
+          </a:p>
+          <a:p>
+            <a:r>
+              <a:rPr sz="385" b="0" i="0">
+                <a:solidFill>
+                  <a:srgbClr val="111111"/>
+                </a:solidFill>
+                <a:latin typeface="Arial"/>
+                <a:ea typeface="Arial"/>
+                <a:cs typeface="Arial"/>
+              </a:rPr>
+              <a:t>[5] SEVERE ASTHMA. Non-Pharmacological</a:t>
+            </a:r>
+            <a:endParaRPr/>
+          </a:p>
+          <a:p>
+            <a:r>
+              <a:rPr sz="385" b="0" i="0">
+                <a:solidFill>
+                  <a:srgbClr val="111111"/>
+                </a:solidFill>
+                <a:latin typeface="Arial"/>
+                <a:ea typeface="Arial"/>
+                <a:cs typeface="Arial"/>
+              </a:rPr>
+              <a:t>    Interventions for Asthma. Disponível</a:t>
+            </a:r>
+            <a:endParaRPr/>
+          </a:p>
+          <a:p>
+            <a:r>
+              <a:rPr sz="385" b="0" i="0">
+                <a:solidFill>
+                  <a:srgbClr val="111111"/>
+                </a:solidFill>
+                <a:latin typeface="Arial"/>
+                <a:ea typeface="Arial"/>
+                <a:cs typeface="Arial"/>
+              </a:rPr>
+              <a:t>    em:</a:t>
+            </a:r>
+            <a:endParaRPr/>
+          </a:p>
+          <a:p>
+            <a:r>
+              <a:rPr sz="385" b="0" i="0">
+                <a:solidFill>
+                  <a:srgbClr val="111111"/>
+                </a:solidFill>
+                <a:latin typeface="Arial"/>
+                <a:ea typeface="Arial"/>
+                <a:cs typeface="Arial"/>
+              </a:rPr>
+              <a:t>    https://www.severeasthma.org.au/non-pharmacological-interventions-asthma/.</a:t>
+            </a:r>
+            <a:endParaRPr/>
+          </a:p>
+          <a:p>
+            <a:r>
+              <a:rPr sz="385" b="0" i="0">
+                <a:solidFill>
+                  <a:srgbClr val="111111"/>
+                </a:solidFill>
+                <a:latin typeface="Arial"/>
+                <a:ea typeface="Arial"/>
+                <a:cs typeface="Arial"/>
+              </a:rPr>
+              <a:t>    Acesso em: 19 set. 2025.</a:t>
+            </a:r>
+            <a:endParaRPr/>
+          </a:p>
+          <a:p>
+            <a:r>
+              <a:rPr sz="385" b="0" i="0">
+                <a:solidFill>
+                  <a:srgbClr val="111111"/>
+                </a:solidFill>
+                <a:latin typeface="Arial"/>
+                <a:ea typeface="Arial"/>
+                <a:cs typeface="Arial"/>
+              </a:rPr>
+              <a:t>[6] SANTOS, Felipe Moraes dos et al.</a:t>
+            </a:r>
+            <a:endParaRPr/>
+          </a:p>
+          <a:p>
+            <a:r>
+              <a:rPr sz="385" b="0" i="0">
+                <a:solidFill>
+                  <a:srgbClr val="111111"/>
+                </a:solidFill>
+                <a:latin typeface="Arial"/>
+                <a:ea typeface="Arial"/>
+                <a:cs typeface="Arial"/>
+              </a:rPr>
+              <a:t>    Tendência da prevalência de asma</a:t>
+            </a:r>
+            <a:endParaRPr/>
+          </a:p>
+          <a:p>
+            <a:r>
+              <a:rPr sz="385" b="0" i="0">
+                <a:solidFill>
+                  <a:srgbClr val="111111"/>
+                </a:solidFill>
+                <a:latin typeface="Arial"/>
+                <a:ea typeface="Arial"/>
+                <a:cs typeface="Arial"/>
+              </a:rPr>
+              <a:t>    autorreferida no Brasil de 2003 a 2013</a:t>
+            </a:r>
+            <a:endParaRPr/>
+          </a:p>
+          <a:p>
+            <a:r>
+              <a:rPr sz="385" b="0" i="0">
+                <a:solidFill>
+                  <a:srgbClr val="111111"/>
+                </a:solidFill>
+                <a:latin typeface="Arial"/>
+                <a:ea typeface="Arial"/>
+                <a:cs typeface="Arial"/>
+              </a:rPr>
+              <a:t>    em adultos e fatores associados à</a:t>
+            </a:r>
+            <a:endParaRPr/>
+          </a:p>
+          <a:p>
+            <a:r>
+              <a:rPr sz="385" b="0" i="0">
+                <a:solidFill>
+                  <a:srgbClr val="111111"/>
+                </a:solidFill>
+                <a:latin typeface="Arial"/>
+                <a:ea typeface="Arial"/>
+                <a:cs typeface="Arial"/>
+              </a:rPr>
+              <a:t>    prevalência. Jornal Brasileiro de</a:t>
+            </a:r>
+            <a:endParaRPr/>
+          </a:p>
+          <a:p>
+            <a:r>
+              <a:rPr sz="385" b="0" i="0">
+                <a:solidFill>
+                  <a:srgbClr val="111111"/>
+                </a:solidFill>
+                <a:latin typeface="Arial"/>
+                <a:ea typeface="Arial"/>
+                <a:cs typeface="Arial"/>
+              </a:rPr>
+              <a:t>    Pneumologia, v. 44, n. 6, p. 491-497,</a:t>
+            </a:r>
+            <a:endParaRPr/>
+          </a:p>
+          <a:p>
+            <a:r>
+              <a:rPr sz="385" b="0" i="0">
+                <a:solidFill>
+                  <a:srgbClr val="111111"/>
+                </a:solidFill>
+                <a:latin typeface="Arial"/>
+                <a:ea typeface="Arial"/>
+                <a:cs typeface="Arial"/>
+              </a:rPr>
+              <a:t>    2018.</a:t>
+            </a:r>
+            <a:endParaRPr/>
+          </a:p>
+          <a:p>
+            <a:r>
+              <a:rPr sz="385" b="0" i="0">
+                <a:solidFill>
+                  <a:srgbClr val="111111"/>
+                </a:solidFill>
+                <a:latin typeface="Arial"/>
+                <a:ea typeface="Arial"/>
+                <a:cs typeface="Arial"/>
+              </a:rPr>
+              <a:t>    doi:10.1590/S1806-37562017000000328.</a:t>
+            </a:r>
+            <a:endParaRPr/>
+          </a:p>
+          <a:p>
+            <a:r>
+              <a:rPr sz="385" b="0" i="0">
+                <a:solidFill>
+                  <a:srgbClr val="111111"/>
+                </a:solidFill>
+                <a:latin typeface="Arial"/>
+                <a:ea typeface="Arial"/>
+                <a:cs typeface="Arial"/>
+              </a:rPr>
+              <a:t>[7] TO, T. et al. Global asthma prevalence</a:t>
+            </a:r>
+            <a:endParaRPr/>
+          </a:p>
+          <a:p>
+            <a:r>
+              <a:rPr sz="385" b="0" i="0">
+                <a:solidFill>
+                  <a:srgbClr val="111111"/>
+                </a:solidFill>
+                <a:latin typeface="Arial"/>
+                <a:ea typeface="Arial"/>
+                <a:cs typeface="Arial"/>
+              </a:rPr>
+              <a:t>    in adults: findings from the</a:t>
+            </a:r>
+            <a:endParaRPr/>
+          </a:p>
+          <a:p>
+            <a:r>
+              <a:rPr sz="385" b="0" i="0">
+                <a:solidFill>
+                  <a:srgbClr val="111111"/>
+                </a:solidFill>
+                <a:latin typeface="Arial"/>
+                <a:ea typeface="Arial"/>
+                <a:cs typeface="Arial"/>
+              </a:rPr>
+              <a:t>    cross-sectional world health survey.</a:t>
+            </a:r>
+            <a:endParaRPr/>
+          </a:p>
+          <a:p>
+            <a:r>
+              <a:rPr sz="385" b="0" i="0">
+                <a:solidFill>
+                  <a:srgbClr val="111111"/>
+                </a:solidFill>
+                <a:latin typeface="Arial"/>
+                <a:ea typeface="Arial"/>
+                <a:cs typeface="Arial"/>
+              </a:rPr>
+              <a:t>    BMC Public Health, v. 12, art. 204,</a:t>
+            </a:r>
+            <a:endParaRPr/>
+          </a:p>
+          <a:p>
+            <a:r>
+              <a:rPr sz="385" b="0" i="0">
+                <a:solidFill>
+                  <a:srgbClr val="111111"/>
+                </a:solidFill>
+                <a:latin typeface="Arial"/>
+                <a:ea typeface="Arial"/>
+                <a:cs typeface="Arial"/>
+              </a:rPr>
+              <a:t>    2012. doi:10.1186/1471-2458-12-204.</a:t>
+            </a:r>
+            <a:endParaRPr/>
+          </a:p>
+          <a:p>
+            <a:r>
+              <a:rPr sz="385" b="0" i="0">
+                <a:solidFill>
+                  <a:srgbClr val="111111"/>
+                </a:solidFill>
+                <a:latin typeface="Arial"/>
+                <a:ea typeface="Arial"/>
+                <a:cs typeface="Arial"/>
+              </a:rPr>
+              <a:t>[8] OHDSI. Standardized Data: The OMOP</a:t>
+            </a:r>
+            <a:endParaRPr/>
+          </a:p>
+          <a:p>
+            <a:r>
+              <a:rPr sz="385" b="0" i="0">
+                <a:solidFill>
+                  <a:srgbClr val="111111"/>
+                </a:solidFill>
+                <a:latin typeface="Arial"/>
+                <a:ea typeface="Arial"/>
+                <a:cs typeface="Arial"/>
+              </a:rPr>
+              <a:t>    Common Data Model. Disponível em:</a:t>
+            </a:r>
+            <a:endParaRPr/>
+          </a:p>
+          <a:p>
+            <a:r>
+              <a:rPr sz="385" b="0" i="0">
+                <a:solidFill>
+                  <a:srgbClr val="111111"/>
+                </a:solidFill>
+                <a:latin typeface="Arial"/>
+                <a:ea typeface="Arial"/>
+                <a:cs typeface="Arial"/>
+              </a:rPr>
+              <a:t>    https://www.ohdsi.org/data-standardization/.</a:t>
+            </a:r>
+            <a:endParaRPr/>
+          </a:p>
+          <a:p>
+            <a:r>
+              <a:rPr sz="385" b="0" i="0">
+                <a:solidFill>
+                  <a:srgbClr val="111111"/>
+                </a:solidFill>
+                <a:latin typeface="Arial"/>
+                <a:ea typeface="Arial"/>
+                <a:cs typeface="Arial"/>
+              </a:rPr>
+              <a:t>[9] OHDSI. OMOP Common Data Model.</a:t>
+            </a:r>
+            <a:endParaRPr/>
+          </a:p>
+          <a:p>
+            <a:r>
+              <a:rPr sz="385" b="0" i="0">
+                <a:solidFill>
+                  <a:srgbClr val="111111"/>
+                </a:solidFill>
+                <a:latin typeface="Arial"/>
+                <a:ea typeface="Arial"/>
+                <a:cs typeface="Arial"/>
+              </a:rPr>
+              <a:t>    Disponível em:</a:t>
+            </a:r>
+            <a:endParaRPr/>
+          </a:p>
+          <a:p>
+            <a:r>
+              <a:rPr sz="385" b="0" i="0">
+                <a:solidFill>
+                  <a:srgbClr val="111111"/>
+                </a:solidFill>
+                <a:latin typeface="Arial"/>
+                <a:ea typeface="Arial"/>
+                <a:cs typeface="Arial"/>
+              </a:rPr>
+              <a:t>    https://ohdsi.github.io/CommonDataModel/.</a:t>
+            </a:r>
+            <a:endParaRPr/>
+          </a:p>
+          <a:p>
+            <a:r>
+              <a:rPr sz="385" b="0" i="0">
+                <a:solidFill>
+                  <a:srgbClr val="111111"/>
+                </a:solidFill>
+                <a:latin typeface="Arial"/>
+                <a:ea typeface="Arial"/>
+                <a:cs typeface="Arial"/>
+              </a:rPr>
+              <a:t>[10] OHDSI. ETL Creation Best Practices.</a:t>
+            </a:r>
+            <a:endParaRPr/>
+          </a:p>
+          <a:p>
+            <a:r>
+              <a:rPr sz="385" b="0" i="0">
+                <a:solidFill>
+                  <a:srgbClr val="111111"/>
+                </a:solidFill>
+                <a:latin typeface="Arial"/>
+                <a:ea typeface="Arial"/>
+                <a:cs typeface="Arial"/>
+              </a:rPr>
+              <a:t>    Disponível em:</a:t>
+            </a:r>
+            <a:endParaRPr/>
+          </a:p>
+          <a:p>
+            <a:r>
+              <a:rPr sz="385" b="0" i="0">
+                <a:solidFill>
+                  <a:srgbClr val="111111"/>
+                </a:solidFill>
+                <a:latin typeface="Arial"/>
+                <a:ea typeface="Arial"/>
+                <a:cs typeface="Arial"/>
+              </a:rPr>
+              <a:t>    https://www.ohdsi.org/web/wiki/doku.php?id=documentation:etl_best_practices.</a:t>
+            </a:r>
+            <a:endParaRPr/>
+          </a:p>
+          <a:p>
+            <a:r>
+              <a:rPr sz="385" b="0" i="0">
+                <a:solidFill>
+                  <a:srgbClr val="111111"/>
+                </a:solidFill>
+                <a:latin typeface="Arial"/>
+                <a:ea typeface="Arial"/>
+                <a:cs typeface="Arial"/>
+              </a:rPr>
+              <a:t>[11] LUMLEY, Thomas. Complex Surveys: A</a:t>
+            </a:r>
+            <a:endParaRPr/>
+          </a:p>
+          <a:p>
+            <a:r>
+              <a:rPr sz="385" b="0" i="0">
+                <a:solidFill>
+                  <a:srgbClr val="111111"/>
+                </a:solidFill>
+                <a:latin typeface="Arial"/>
+                <a:ea typeface="Arial"/>
+                <a:cs typeface="Arial"/>
+              </a:rPr>
+              <a:t>    Guide to Analysis Using R. Hoboken:</a:t>
+            </a:r>
+            <a:endParaRPr/>
+          </a:p>
+          <a:p>
+            <a:r>
+              <a:rPr sz="385" b="0" i="0">
+                <a:solidFill>
+                  <a:srgbClr val="111111"/>
+                </a:solidFill>
+                <a:latin typeface="Arial"/>
+                <a:ea typeface="Arial"/>
+                <a:cs typeface="Arial"/>
+              </a:rPr>
+              <a:t>    Wiley, 2010.</a:t>
+            </a:r>
+            <a:endParaRPr/>
+          </a:p>
+          <a:p>
+            <a:r>
+              <a:rPr sz="385" b="0" i="0">
+                <a:solidFill>
+                  <a:srgbClr val="111111"/>
+                </a:solidFill>
+                <a:latin typeface="Arial"/>
+                <a:ea typeface="Arial"/>
+                <a:cs typeface="Arial"/>
+              </a:rPr>
+              <a:t>[12] BROWN, Lawrence D.; CAI, T. Tony;</a:t>
+            </a:r>
+            <a:endParaRPr/>
+          </a:p>
+          <a:p>
+            <a:r>
+              <a:rPr sz="385" b="0" i="0">
+                <a:solidFill>
+                  <a:srgbClr val="111111"/>
+                </a:solidFill>
+                <a:latin typeface="Arial"/>
+                <a:ea typeface="Arial"/>
+                <a:cs typeface="Arial"/>
+              </a:rPr>
+              <a:t>    DASGUPTA, Anirban. Interval estimation</a:t>
+            </a:r>
+            <a:endParaRPr/>
+          </a:p>
+          <a:p>
+            <a:r>
+              <a:rPr sz="385" b="0" i="0">
+                <a:solidFill>
+                  <a:srgbClr val="111111"/>
+                </a:solidFill>
+                <a:latin typeface="Arial"/>
+                <a:ea typeface="Arial"/>
+                <a:cs typeface="Arial"/>
+              </a:rPr>
+              <a:t>    for a binomial proportion. Statistical</a:t>
+            </a:r>
+            <a:endParaRPr/>
+          </a:p>
+          <a:p>
+            <a:r>
+              <a:rPr sz="385" b="0" i="0">
+                <a:solidFill>
+                  <a:srgbClr val="111111"/>
+                </a:solidFill>
+                <a:latin typeface="Arial"/>
+                <a:ea typeface="Arial"/>
+                <a:cs typeface="Arial"/>
+              </a:rPr>
+              <a:t>    Science, v. 16, n. 2, p. 101-133, 2001.</a:t>
+            </a:r>
+            <a:endParaRPr/>
+          </a:p>
+          <a:p>
+            <a:r>
+              <a:rPr sz="385" b="0" i="0">
+                <a:solidFill>
+                  <a:srgbClr val="111111"/>
+                </a:solidFill>
+                <a:latin typeface="Arial"/>
+                <a:ea typeface="Arial"/>
+                <a:cs typeface="Arial"/>
+              </a:rPr>
+              <a:t>    doi:10.1214/ss/1009213286.</a:t>
+            </a:r>
+            <a:endParaRPr/>
+          </a:p>
+          <a:p>
+            <a:r>
+              <a:rPr sz="385" b="0" i="0">
+                <a:solidFill>
+                  <a:srgbClr val="111111"/>
+                </a:solidFill>
+                <a:latin typeface="Arial"/>
+                <a:ea typeface="Arial"/>
+                <a:cs typeface="Arial"/>
+              </a:rPr>
+              <a:t>[13] KORN, Edward L.; GRAUBARD, Barry I.</a:t>
+            </a:r>
+            <a:endParaRPr/>
+          </a:p>
+          <a:p>
+            <a:r>
+              <a:rPr sz="385" b="0" i="0">
+                <a:solidFill>
+                  <a:srgbClr val="111111"/>
+                </a:solidFill>
+                <a:latin typeface="Arial"/>
+                <a:ea typeface="Arial"/>
+                <a:cs typeface="Arial"/>
+              </a:rPr>
+              <a:t>    Confidence intervals for proportions</a:t>
+            </a:r>
+            <a:endParaRPr/>
+          </a:p>
+          <a:p>
+            <a:r>
+              <a:rPr sz="385" b="0" i="0">
+                <a:solidFill>
+                  <a:srgbClr val="111111"/>
+                </a:solidFill>
+                <a:latin typeface="Arial"/>
+                <a:ea typeface="Arial"/>
+                <a:cs typeface="Arial"/>
+              </a:rPr>
+              <a:t>    with small expected number of positive</a:t>
+            </a:r>
+            <a:endParaRPr/>
+          </a:p>
+          <a:p>
+            <a:r>
+              <a:rPr sz="385" b="0" i="0">
+                <a:solidFill>
+                  <a:srgbClr val="111111"/>
+                </a:solidFill>
+                <a:latin typeface="Arial"/>
+                <a:ea typeface="Arial"/>
+                <a:cs typeface="Arial"/>
+              </a:rPr>
+              <a:t>    counts estimated from survey data.</a:t>
+            </a:r>
+            <a:endParaRPr/>
+          </a:p>
+          <a:p>
+            <a:r>
+              <a:rPr sz="385" b="0" i="0">
+                <a:solidFill>
+                  <a:srgbClr val="111111"/>
+                </a:solidFill>
+                <a:latin typeface="Arial"/>
+                <a:ea typeface="Arial"/>
+                <a:cs typeface="Arial"/>
+              </a:rPr>
+              <a:t>    Survey Methodology, v. 24, n. 2, p.</a:t>
+            </a:r>
+            <a:endParaRPr/>
+          </a:p>
+          <a:p>
+            <a:r>
+              <a:rPr sz="385" b="0" i="0">
+                <a:solidFill>
+                  <a:srgbClr val="111111"/>
+                </a:solidFill>
+                <a:latin typeface="Arial"/>
+                <a:ea typeface="Arial"/>
+                <a:cs typeface="Arial"/>
+              </a:rPr>
+              <a:t>    193-201, 1998.</a:t>
             </a:r>
             <a:endParaRPr/>
           </a:p>
@@ -5099,7 +6253,7 @@
           <p:nvPr/>
         </p:nvPicPr>
         <p:blipFill>
-          <a:blip r:embed="R876f2124fa524b5b"/>
+          <a:blip ns3:embed="R876f2124fa524b5b"/>
           <a:stretch/>
         </p:blipFill>
         <p:spPr>
@@ -5121,7 +6275,7 @@
           <p:nvPr/>
         </p:nvPicPr>
         <p:blipFill>
-          <a:blip r:embed="R69942654c14048d3"/>
+          <a:blip ns3:embed="R69942654c14048d3"/>
           <a:stretch/>
         </p:blipFill>
         <p:spPr>
@@ -5150,8 +6304,8 @@
         </p:nvSpPr>
         <p:spPr>
           <a:xfrm>
-            <a:off x="9334500" y="22145625"/>
-            <a:ext cx="24765000" cy="1238250"/>
+            <a:off x="9334500" y="21970000"/>
+            <a:ext cx="24765000" cy="1350000"/>
           </a:xfrm>
           <a:prstGeom prst="rect">
             <a:avLst/>
@@ -5163,19 +6317,33 @@
           </a:ln>
         </p:spPr>
         <p:txBody>
-          <a:bodyPr/>
+          <a:bodyPr wrap="square"/>
           <a:lstStyle/>
           <a:p>
             <a:r>
-              <a:rPr sz="2325" b="0" i="0">
-                <a:solidFill>
-                  <a:srgbClr val="B9D9EB"/>
-                </a:solidFill>
-                <a:latin typeface="Arial"/>
-                <a:ea typeface="Arial"/>
-                <a:cs typeface="Arial"/>
-              </a:rPr>
-              <a:t>Figures exported from the R code: horizontal state bars, 2013/2019 comparison, 95% CIs and original palette.</a:t>
+              <a:rPr sz="610" b="1" i="0">
+                <a:latin typeface="Arial"/>
+                <a:ea typeface="Arial"/>
+                <a:cs typeface="Arial"/>
+                <a:solidFill>
+                  <a:srgbClr val="FFFFFF"/>
+                </a:solidFill>
+              </a:rPr>
+              <a:t>Figures exported from the R code: horizontal state bars, 2013/2019 comparison, beta 95% CIs and original palette. Bars =</a:t>
+            </a:r>
+            <a:endParaRPr/>
+          </a:p>
+          <a:p>
+            <a:r>
+              <a:rPr sz="610" b="0" i="0">
+                <a:latin typeface="Arial"/>
+                <a:ea typeface="Arial"/>
+                <a:cs typeface="Arial"/>
+                <a:solidFill>
+                  <a:srgbClr val="FFFFFF"/>
+                </a:solidFill>
+              </a:rPr>
+              <a:t>weighted estimates; whiskers = sampling uncertainty.</a:t>
             </a:r>
             <a:endParaRPr/>
           </a:p>
@@ -5189,8 +6357,8 @@
         </p:nvSpPr>
         <p:spPr>
           <a:xfrm>
-            <a:off x="495300" y="14550000"/>
-            <a:ext cx="7239000" cy="1600000"/>
+            <a:off x="495300" y="15150000"/>
+            <a:ext cx="7239000" cy="2850000"/>
             <a:off x="495300" y="14950000"/>
             <a:ext cx="7239000" cy="2450000"/>
           </a:xfrm>
@@ -5212,29 +6380,39 @@
           <a:p>
             <a:pPr algn="ctr"/>
             <a:r>
-              <a:rPr lang="pt-BR" sz="960" b="1">
+              <a:rPr lang="pt-BR" sz="770" b="1">
                 <a:latin typeface="Cambria Math"/>
               </a:rPr>
-              <a:t>FORMULAS</a:t>
+              <a:t>STUDY FORMULAS</a:t>
             </a:r>
             <a:endParaRPr/>
           </a:p>
           <a:p>
             <a:pPr algn="ctr"/>
             <a:r>
-              <a:rPr lang="pt-BR" sz="960" b="0">
+              <a:rPr lang="pt-BR" sz="770" b="0">
                 <a:latin typeface="Cambria Math"/>
               </a:rPr>
-              <a:t>p̂ = Σ wᵢyᵢ / Σ wᵢ</a:t>
+              <a:t>p̂ = Σᵢ wᵢyᵢ / Σᵢ wᵢ</a:t>
             </a:r>
             <a:endParaRPr/>
           </a:p>
           <a:p>
             <a:pPr algn="ctr"/>
             <a:r>
-              <a:rPr lang="pt-BR" sz="960" b="0">
+              <a:rPr lang="pt-BR" sz="770" b="0">
                 <a:latin typeface="Cambria Math"/>
               </a:rPr>
+              <a:t>wᵢ = weight; yᵢ = binary event</a:t>
+            </a:r>
+            <a:endParaRPr/>
+          </a:p>
+          <a:p>
+            <a:pPr algn="ctr"/>
+            <a:r>
+              <a:rPr lang="pt-BR" sz="770" b="0">
+                <a:latin typeface="Cambria Math"/>
+              </a:rPr>
               <a:t>% = 100 × p̂</a:t>
             </a:r>
             <a:endParaRPr/>
@@ -5242,10 +6420,20 @@
           <a:p>
             <a:pPr algn="ctr"/>
             <a:r>
-              <a:rPr lang="pt-BR" sz="960" b="0">
+              <a:rPr lang="pt-BR" sz="770" b="0">
                 <a:latin typeface="Cambria Math"/>
               </a:rPr>
               <a:t>rate₁₀₀k = 100000 × p̂</a:t>
+            </a:r>
+            <a:endParaRPr/>
+          </a:p>
+          <a:p>
+            <a:pPr algn="ctr"/>
+            <a:r>
+              <a:rPr lang="pt-BR" sz="770" b="0">
+                <a:latin typeface="Cambria Math"/>
+              </a:rPr>
+              <a:t>CI₉₅%(p̂): beta</a:t>
             </a:r>
             <a:endParaRPr/>
           </a:p>
@@ -5259,8 +6447,8 @@
         </p:nvSpPr>
         <p:spPr>
           <a:xfrm>
-            <a:off x="495300" y="16450000"/>
-            <a:ext cx="7239000" cy="4700000"/>
+            <a:off x="495300" y="18300000"/>
+            <a:ext cx="7239000" cy="6500000"/>
             <a:off x="495300" y="17650000"/>
             <a:ext cx="7239000" cy="3600000"/>
           </a:xfrm>
@@ -5281,36 +6469,424 @@
           <a:lstStyle/>
           <a:p>
             <a:r>
-              <a:rPr lang="pt-BR" sz="740" b="1"/>
-              <a:t>RESULTS</a:t>
-            </a:r>
-            <a:endParaRPr/>
-          </a:p>
-          <a:p>
-            <a:r>
-              <a:rPr lang="pt-BR" sz="740" b="0"/>
-              <a:t>• Asthma: 4.41% -&gt; 5.40%.</a:t>
-            </a:r>
-            <a:endParaRPr/>
-          </a:p>
-          <a:p>
-            <a:r>
-              <a:rPr lang="pt-BR" sz="740" b="0"/>
-              <a:t>• Attacks: 38.3% -&gt; 37.7%.</a:t>
-            </a:r>
-            <a:endParaRPr/>
-          </a:p>
-          <a:p>
-            <a:r>
-              <a:rPr lang="pt-BR" sz="740" b="0"/>
-              <a:t>• Medication: 81.5% -&gt; 64.4%.</a:t>
-            </a:r>
-            <a:endParaRPr/>
-          </a:p>
-          <a:p>
-            <a:r>
-              <a:rPr lang="pt-BR" sz="740" b="0"/>
-              <a:t>• 95% CIs guide year and state comparisons.</a:t>
+              <a:rPr lang="pt-BR" sz="600" b="1"/>
+              <a:t>KEY FINDINGS</a:t>
+            </a:r>
+            <a:endParaRPr/>
+          </a:p>
+          <a:p>
+            <a:r>
+              <a:rPr lang="pt-BR" sz="600" b="0"/>
+              <a:t>• Physician-diagnosed asthma: 4.41% -&gt;</a:t>
+            </a:r>
+            <a:endParaRPr/>
+          </a:p>
+          <a:p>
+            <a:r>
+              <a:rPr lang="pt-BR" sz="600" b="0"/>
+              <a:t>  5.40%.</a:t>
+            </a:r>
+            <a:endParaRPr/>
+          </a:p>
+          <a:p>
+            <a:r>
+              <a:rPr lang="pt-BR" sz="600" b="0"/>
+              <a:t>• Attacks in 12 months: 38.3% -&gt; 37.7%;</a:t>
+            </a:r>
+            <a:endParaRPr/>
+          </a:p>
+          <a:p>
+            <a:r>
+              <a:rPr lang="pt-BR" sz="600" b="0"/>
+              <a:t>  approximate stability.</a:t>
+            </a:r>
+            <a:endParaRPr/>
+          </a:p>
+          <a:p>
+            <a:r>
+              <a:rPr lang="pt-BR" sz="600" b="0"/>
+              <a:t>• Medication among people with asthma:</a:t>
+            </a:r>
+            <a:endParaRPr/>
+          </a:p>
+          <a:p>
+            <a:r>
+              <a:rPr lang="pt-BR" sz="600" b="0"/>
+              <a:t>  81.5% -&gt; 64.4%; cautious inference.</a:t>
+            </a:r>
+            <a:endParaRPr/>
+          </a:p>
+          <a:p>
+            <a:r>
+              <a:rPr lang="pt-BR" sz="600" b="0"/>
+              <a:t>• Population medication rate separates</a:t>
+            </a:r>
+            <a:endParaRPr/>
+          </a:p>
+          <a:p>
+            <a:r>
+              <a:rPr lang="pt-BR" sz="600" b="0"/>
+              <a:t>  total burden from diagnosed-person</a:t>
+            </a:r>
+            <a:endParaRPr/>
+          </a:p>
+          <a:p>
+            <a:r>
+              <a:rPr lang="pt-BR" sz="600" b="0"/>
+              <a:t>  share.</a:t>
+            </a:r>
+            <a:endParaRPr/>
+          </a:p>
+          <a:p>
+            <a:r>
+              <a:rPr lang="pt-BR" sz="600" b="0"/>
+              <a:t>• Smoking declined in several states;</a:t>
+            </a:r>
+            <a:endParaRPr/>
+          </a:p>
+          <a:p>
+            <a:r>
+              <a:rPr lang="pt-BR" sz="600" b="0"/>
+              <a:t>  it does not alone explain diagnosis</a:t>
+            </a:r>
+            <a:endParaRPr/>
+          </a:p>
+          <a:p>
+            <a:r>
+              <a:rPr lang="pt-BR" sz="600" b="0"/>
+              <a:t>  growth.</a:t>
+            </a:r>
+            <a:endParaRPr/>
+          </a:p>
+          <a:p>
+            <a:r>
+              <a:rPr lang="pt-BR" sz="600" b="0"/>
+              <a:t>• Management requires medication</a:t>
+            </a:r>
+            <a:endParaRPr/>
+          </a:p>
+          <a:p>
+            <a:r>
+              <a:rPr lang="pt-BR" sz="600" b="0"/>
+              <a:t>  access, clinical follow-up and</a:t>
+            </a:r>
+            <a:endParaRPr/>
+          </a:p>
+          <a:p>
+            <a:r>
+              <a:rPr lang="pt-BR" sz="600" b="0"/>
+              <a:t>  non-pharmacological interventions.</a:t>
+            </a:r>
+            <a:endParaRPr/>
+          </a:p>
+        </p:txBody>
+      </p:sp>
+      <p:sp>
+        <p:nvSpPr>
+          <p:cNvPr id="156" name="center-finding-en-1"/>
+          <p:cNvSpPr txBox="1"/>
+          <p:nvPr/>
+        </p:nvSpPr>
+        <p:spPr>
+          <a:xfrm>
+            <a:off x="9630000" y="9650000"/>
+            <a:ext cx="7600000" cy="2300000"/>
+          </a:xfrm>
+          <a:prstGeom prst="rect">
+            <a:avLst/>
+          </a:prstGeom>
+          <a:solidFill>
+            <a:srgbClr val="EFF6FC"/>
+          </a:solidFill>
+          <a:ln w="12700">
+            <a:solidFill>
+              <a:srgbClr val="B9D8EF"/>
+            </a:solidFill>
+          </a:ln>
+        </p:spPr>
+        <p:txBody>
+          <a:bodyPr wrap="square" lIns="76200" rIns="76200" tIns="76200" bIns="76200" anchor="t"/>
+          <a:lstStyle/>
+          <a:p>
+            <a:r>
+              <a:rPr lang="pt-BR" sz="1070" b="1"/>
+              <a:t>PREVALENCE</a:t>
+            </a:r>
+            <a:endParaRPr/>
+          </a:p>
+          <a:p>
+            <a:r>
+              <a:rPr lang="pt-BR" sz="1070" b="0"/>
+              <a:t>Brazil: 4.41% -&gt; 5.40%</a:t>
+            </a:r>
+            <a:endParaRPr/>
+          </a:p>
+          <a:p>
+            <a:r>
+              <a:rPr lang="pt-BR" sz="1070" b="0"/>
+              <a:t>Non-overlapping 95% CIs;</a:t>
+            </a:r>
+            <a:endParaRPr/>
+          </a:p>
+          <a:p>
+            <a:r>
+              <a:rPr lang="pt-BR" sz="1070" b="0"/>
+              <a:t>consistent increase in</a:t>
+            </a:r>
+            <a:endParaRPr/>
+          </a:p>
+          <a:p>
+            <a:r>
+              <a:rPr lang="pt-BR" sz="1070" b="0"/>
+              <a:t>physician diagnosis.</a:t>
+            </a:r>
+            <a:endParaRPr/>
+          </a:p>
+        </p:txBody>
+      </p:sp>
+      <p:sp>
+        <p:nvSpPr>
+          <p:cNvPr id="157" name="center-finding-en-2"/>
+          <p:cNvSpPr txBox="1"/>
+          <p:nvPr/>
+        </p:nvSpPr>
+        <p:spPr>
+          <a:xfrm>
+            <a:off x="18120000" y="9650000"/>
+            <a:ext cx="7600000" cy="2300000"/>
+          </a:xfrm>
+          <a:prstGeom prst="rect">
+            <a:avLst/>
+          </a:prstGeom>
+          <a:solidFill>
+            <a:srgbClr val="EFF6FC"/>
+          </a:solidFill>
+          <a:ln w="12700">
+            <a:solidFill>
+              <a:srgbClr val="B9D8EF"/>
+            </a:solidFill>
+          </a:ln>
+        </p:spPr>
+        <p:txBody>
+          <a:bodyPr wrap="square" lIns="76200" rIns="76200" tIns="76200" bIns="76200" anchor="t"/>
+          <a:lstStyle/>
+          <a:p>
+            <a:r>
+              <a:rPr lang="pt-BR" sz="1070" b="1"/>
+              <a:t>ATTACKS</a:t>
+            </a:r>
+            <a:endParaRPr/>
+          </a:p>
+          <a:p>
+            <a:r>
+              <a:rPr lang="pt-BR" sz="1070" b="0"/>
+              <a:t>38.3% -&gt; 37.7%</a:t>
+            </a:r>
+            <a:endParaRPr/>
+          </a:p>
+          <a:p>
+            <a:r>
+              <a:rPr lang="pt-BR" sz="1070" b="0"/>
+              <a:t>Stability suggests disease</a:t>
+            </a:r>
+            <a:endParaRPr/>
+          </a:p>
+          <a:p>
+            <a:r>
+              <a:rPr lang="pt-BR" sz="1070" b="0"/>
+              <a:t>control remains insufficient.</a:t>
+            </a:r>
+            <a:endParaRPr/>
+          </a:p>
+        </p:txBody>
+      </p:sp>
+      <p:sp>
+        <p:nvSpPr>
+          <p:cNvPr id="158" name="center-finding-en-3"/>
+          <p:cNvSpPr txBox="1"/>
+          <p:nvPr/>
+        </p:nvSpPr>
+        <p:spPr>
+          <a:xfrm>
+            <a:off x="26610000" y="9650000"/>
+            <a:ext cx="7600000" cy="2300000"/>
+          </a:xfrm>
+          <a:prstGeom prst="rect">
+            <a:avLst/>
+          </a:prstGeom>
+          <a:solidFill>
+            <a:srgbClr val="EFF6FC"/>
+          </a:solidFill>
+          <a:ln w="12700">
+            <a:solidFill>
+              <a:srgbClr val="B9D8EF"/>
+            </a:solidFill>
+          </a:ln>
+        </p:spPr>
+        <p:txBody>
+          <a:bodyPr wrap="square" lIns="76200" rIns="76200" tIns="76200" bIns="76200" anchor="t"/>
+          <a:lstStyle/>
+          <a:p>
+            <a:r>
+              <a:rPr lang="pt-BR" sz="1070" b="1"/>
+              <a:t>MEDICATION</a:t>
+            </a:r>
+            <a:endParaRPr/>
+          </a:p>
+          <a:p>
+            <a:r>
+              <a:rPr lang="pt-BR" sz="1070" b="0"/>
+              <a:t>81.5% -&gt; 64.4%</a:t>
+            </a:r>
+            <a:endParaRPr/>
+          </a:p>
+          <a:p>
+            <a:r>
+              <a:rPr lang="pt-BR" sz="1070" b="0"/>
+              <a:t>Separate diagnosed-person</a:t>
+            </a:r>
+            <a:endParaRPr/>
+          </a:p>
+          <a:p>
+            <a:r>
+              <a:rPr lang="pt-BR" sz="1070" b="0"/>
+              <a:t>proportion from population rate</a:t>
+            </a:r>
+            <a:endParaRPr/>
+          </a:p>
+          <a:p>
+            <a:r>
+              <a:rPr lang="pt-BR" sz="1070" b="0"/>
+              <a:t>per 100,000.</a:t>
+            </a:r>
+            <a:endParaRPr/>
+          </a:p>
+        </p:txBody>
+      </p:sp>
+      <p:sp>
+        <p:nvSpPr>
+          <p:cNvPr id="159" name="center-interpretation-en"/>
+          <p:cNvSpPr txBox="1"/>
+          <p:nvPr/>
+        </p:nvSpPr>
+        <p:spPr>
+          <a:xfrm>
+            <a:off x="11000000" y="22350000"/>
+            <a:ext cx="20500000" cy="2050000"/>
+          </a:xfrm>
+          <a:prstGeom prst="rect">
+            <a:avLst/>
+          </a:prstGeom>
+          <a:solidFill>
+            <a:srgbClr val="F6FAFD"/>
+          </a:solidFill>
+          <a:ln w="12700">
+            <a:solidFill>
+              <a:srgbClr val="B9D8EF"/>
+            </a:solidFill>
+          </a:ln>
+        </p:spPr>
+        <p:txBody>
+          <a:bodyPr wrap="square" lIns="76200" rIns="76200" tIns="76200" bIns="76200" anchor="t"/>
+          <a:lstStyle/>
+          <a:p>
+            <a:r>
+              <a:rPr lang="pt-BR" sz="850" b="1"/>
+              <a:t>APPLIED READING</a:t>
+            </a:r>
+            <a:endParaRPr/>
+          </a:p>
+          <a:p>
+            <a:r>
+              <a:rPr lang="pt-BR" sz="850" b="0"/>
+              <a:t>The diagnosis increase may reflect higher occurrence, better diagnostic access or both. States</a:t>
+            </a:r>
+            <a:endParaRPr/>
+          </a:p>
+          <a:p>
+            <a:r>
+              <a:rPr lang="pt-BR" sz="850" b="0"/>
+              <a:t>with overlapping 95% CIs should be treated as exploratory comparisons.</a:t>
+            </a:r>
+            <a:endParaRPr/>
+          </a:p>
+        </p:txBody>
+      </p:sp>
+      <p:sp>
+        <p:nvSpPr>
+          <p:cNvPr id="160" name="chart-caption-above-morrison-en-1"/>
+          <p:cNvSpPr txBox="1"/>
+          <p:nvPr/>
+        </p:nvSpPr>
+        <p:spPr>
+          <a:xfrm>
+            <a:off x="9906000" y="13230000"/>
+            <a:ext cx="10477500" cy="420000"/>
+          </a:xfrm>
+          <a:prstGeom prst="rect">
+            <a:avLst/>
+          </a:prstGeom>
+          <a:solidFill>
+            <a:srgbClr val="1F4E79"/>
+          </a:solidFill>
+          <a:ln w="12700">
+            <a:solidFill>
+              <a:srgbClr val="1F4E79"/>
+            </a:solidFill>
+          </a:ln>
+        </p:spPr>
+        <p:txBody>
+          <a:bodyPr wrap="square" lIns="76200" rIns="76200" tIns="76200" bIns="76200" anchor="t"/>
+          <a:lstStyle/>
+          <a:p>
+            <a:pPr algn="ctr"/>
+            <a:r>
+              <a:rPr lang="pt-BR" sz="620" b="1">
+                <a:solidFill>
+                  <a:srgbClr val="FFFFFF"/>
+                </a:solidFill>
+              </a:rPr>
+              <a:t>Figure 1: Physician-diagnosed asthma prevalence by state.</a:t>
+            </a:r>
+            <a:endParaRPr/>
+          </a:p>
+        </p:txBody>
+      </p:sp>
+      <p:sp>
+        <p:nvSpPr>
+          <p:cNvPr id="161" name="chart-caption-above-morrison-en-2"/>
+          <p:cNvSpPr txBox="1"/>
+          <p:nvPr/>
+        </p:nvSpPr>
+        <p:spPr>
+          <a:xfrm>
+            <a:off x="23050500" y="13230000"/>
+            <a:ext cx="10477500" cy="420000"/>
+          </a:xfrm>
+          <a:prstGeom prst="rect">
+            <a:avLst/>
+          </a:prstGeom>
+          <a:solidFill>
+            <a:srgbClr val="1F4E79"/>
+          </a:solidFill>
+          <a:ln w="12700">
+            <a:solidFill>
+              <a:srgbClr val="1F4E79"/>
+            </a:solidFill>
+          </a:ln>
+        </p:spPr>
+        <p:txBody>
+          <a:bodyPr wrap="square" lIns="76200" rIns="76200" tIns="76200" bIns="76200" anchor="t"/>
+          <a:lstStyle/>
+          <a:p>
+            <a:pPr algn="ctr"/>
+            <a:r>
+              <a:rPr lang="pt-BR" sz="620" b="1">
+                <a:solidFill>
+                  <a:srgbClr val="FFFFFF"/>
+                </a:solidFill>
+              </a:rPr>
+              <a:t>Figure 2: Oral medication or inhaler use by state.</a:t>
             </a:r>
             <a:endParaRPr/>
           </a:p>

--- a/outputs/posters/poster_pns_asma_morrison_en.pptx
+++ b/outputs/posters/poster_pns_asma_morrison_en.pptx
@@ -2,13 +2,13 @@
 <file path=ppt/presentation.xml><?xml version="1.0" encoding="utf-8"?>
 <p:presentation xmlns:p="http://schemas.openxmlformats.org/presentationml/2006/main">
   <p:sldMasterIdLst>
-    <p:sldMasterId xmlns:r="http://schemas.openxmlformats.org/officeDocument/2006/relationships" id="2147483648" r:id="R045e389003e8405d"/>
+    <p:sldMasterId xmlns:r="http://schemas.openxmlformats.org/officeDocument/2006/relationships" id="2147483648" r:id="R644d79f40acb4593"/>
   </p:sldMasterIdLst>
   <p:notesMasterIdLst>
-    <p:notesMasterId xmlns:r="http://schemas.openxmlformats.org/officeDocument/2006/relationships" r:id="Re89ef93af4f0452c"/>
+    <p:notesMasterId xmlns:r="http://schemas.openxmlformats.org/officeDocument/2006/relationships" r:id="Re2605e1096c44c20"/>
   </p:notesMasterIdLst>
   <p:sldIdLst>
-    <p:sldId xmlns:r="http://schemas.openxmlformats.org/officeDocument/2006/relationships" id="256" r:id="R8c49f3595e414926"/>
+    <p:sldId xmlns:r="http://schemas.openxmlformats.org/officeDocument/2006/relationships" id="256" r:id="Rb97627f83d454bfa"/>
   </p:sldIdLst>
   <p:sldSz cx="9525000" cy="13468350"/>
   <p:notesSz cx="6858000" cy="9144000"/>
@@ -601,7 +601,7 @@
   </p:cSld>
   <p:clrMap bg1="lt1" tx1="dk1" bg2="lt2" tx2="dk2" accent1="accent1" accent2="accent2" accent3="accent3" accent4="accent4" accent5="accent5" accent6="accent6" hlink="hlink" folHlink="folHlink"/>
   <p:sldLayoutIdLst>
-    <p:sldLayoutId xmlns:r="http://schemas.openxmlformats.org/officeDocument/2006/relationships" id="2147483649" r:id="Ra72a272a019d43ed"/>
+    <p:sldLayoutId xmlns:r="http://schemas.openxmlformats.org/officeDocument/2006/relationships" id="2147483649" r:id="Rfad600ee12c441a5"/>
   </p:sldLayoutIdLst>
   <p:txStyles>
     <p:titleStyle>
@@ -1156,7 +1156,7 @@
           <p:nvPr/>
         </p:nvPicPr>
         <p:blipFill>
-          <a:blip xmlns:r="http://schemas.openxmlformats.org/officeDocument/2006/relationships" xmlns:a="http://schemas.openxmlformats.org/drawingml/2006/main" r:embed="Rf26e89fc9e714572"/>
+          <a:blip xmlns:r="http://schemas.openxmlformats.org/officeDocument/2006/relationships" xmlns:a="http://schemas.openxmlformats.org/drawingml/2006/main" r:embed="R7a56c00e549743f0"/>
           <a:srcRect xmlns:a="http://schemas.openxmlformats.org/drawingml/2006/main" l="0" t="38622" r="0" b="38622"/>
           <a:stretch xmlns:a="http://schemas.openxmlformats.org/drawingml/2006/main">
             <a:fillRect l="0" t="0" r="0" b="0"/>
@@ -1181,7 +1181,7 @@
           <p:nvPr/>
         </p:nvPicPr>
         <p:blipFill>
-          <a:blip xmlns:r="http://schemas.openxmlformats.org/officeDocument/2006/relationships" xmlns:a="http://schemas.openxmlformats.org/drawingml/2006/main" r:embed="R676009da35564af1"/>
+          <a:blip xmlns:r="http://schemas.openxmlformats.org/officeDocument/2006/relationships" xmlns:a="http://schemas.openxmlformats.org/drawingml/2006/main" r:embed="R16d57b7efad2412e"/>
           <a:stretch xmlns:a="http://schemas.openxmlformats.org/drawingml/2006/main"/>
         </p:blipFill>
         <p:spPr>
@@ -1203,7 +1203,7 @@
           <p:nvPr/>
         </p:nvPicPr>
         <p:blipFill>
-          <a:blip xmlns:r="http://schemas.openxmlformats.org/officeDocument/2006/relationships" xmlns:a="http://schemas.openxmlformats.org/drawingml/2006/main" r:embed="R4667d15553164d26"/>
+          <a:blip xmlns:r="http://schemas.openxmlformats.org/officeDocument/2006/relationships" xmlns:a="http://schemas.openxmlformats.org/drawingml/2006/main" r:embed="R587a7c2cd77340c6"/>
           <a:stretch xmlns:a="http://schemas.openxmlformats.org/drawingml/2006/main"/>
         </p:blipFill>
         <p:spPr>
@@ -1221,7 +1221,7 @@
           <p:cNvPr id="4" name="morrison-title">
             <a:extLst xmlns:a="http://schemas.openxmlformats.org/drawingml/2006/main">
               <a:ext uri="{FF2B5EF4-FFF2-40B4-BE49-F238E27FC236}">
-                <a16:creationId xmlns:a16="http://schemas.microsoft.com/office/drawing/2014/main" id="{DCE4295E-A249-4990-9429-B58190A2F173}"/>
+                <a16:creationId xmlns:a16="http://schemas.microsoft.com/office/drawing/2014/main" id="{F3917962-4BFC-48D9-ACA7-0AA06BBF4AC3}"/>
               </a:ext>
             </a:extLst>
           </p:cNvPr>
@@ -1271,7 +1271,7 @@
           <p:cNvPr id="5" name="morrison-authors">
             <a:extLst xmlns:a="http://schemas.openxmlformats.org/drawingml/2006/main">
               <a:ext uri="{FF2B5EF4-FFF2-40B4-BE49-F238E27FC236}">
-                <a16:creationId xmlns:a16="http://schemas.microsoft.com/office/drawing/2014/main" id="{63D644ED-C4EC-4734-B0EE-05D5CC89C1F3}"/>
+                <a16:creationId xmlns:a16="http://schemas.microsoft.com/office/drawing/2014/main" id="{9D12DE1F-63D4-4066-A99A-7803FC36CDA6}"/>
               </a:ext>
             </a:extLst>
           </p:cNvPr>
@@ -1321,7 +1321,7 @@
           <p:cNvPr id="6" name="central-message">
             <a:extLst xmlns:a="http://schemas.openxmlformats.org/drawingml/2006/main">
               <a:ext uri="{FF2B5EF4-FFF2-40B4-BE49-F238E27FC236}">
-                <a16:creationId xmlns:a16="http://schemas.microsoft.com/office/drawing/2014/main" id="{4D7C6FEC-E0E5-42D6-B272-7079DA65DA54}"/>
+                <a16:creationId xmlns:a16="http://schemas.microsoft.com/office/drawing/2014/main" id="{2DB71BC1-CBBD-4944-8262-629EF1F10958}"/>
               </a:ext>
             </a:extLst>
           </p:cNvPr>
@@ -1375,7 +1375,7 @@
           <p:cNvPr id="7" name="1-Method in one line-box">
             <a:extLst xmlns:a="http://schemas.openxmlformats.org/drawingml/2006/main">
               <a:ext uri="{FF2B5EF4-FFF2-40B4-BE49-F238E27FC236}">
-                <a16:creationId xmlns:a16="http://schemas.microsoft.com/office/drawing/2014/main" id="{0237A171-62E3-4953-9241-2A206AAA570A}"/>
+                <a16:creationId xmlns:a16="http://schemas.microsoft.com/office/drawing/2014/main" id="{842609E9-07E3-4383-B34B-6C4FB549868F}"/>
               </a:ext>
             </a:extLst>
           </p:cNvPr>
@@ -1408,7 +1408,7 @@
           <p:cNvPr id="8" name="1-Method in one line-head">
             <a:extLst xmlns:a="http://schemas.openxmlformats.org/drawingml/2006/main">
               <a:ext uri="{FF2B5EF4-FFF2-40B4-BE49-F238E27FC236}">
-                <a16:creationId xmlns:a16="http://schemas.microsoft.com/office/drawing/2014/main" id="{E4EB831B-65AC-4A64-ABCB-0D1F60B736A9}"/>
+                <a16:creationId xmlns:a16="http://schemas.microsoft.com/office/drawing/2014/main" id="{F3E3DDC7-FAB7-480B-9683-D21062D0A363}"/>
               </a:ext>
             </a:extLst>
           </p:cNvPr>
@@ -1441,7 +1441,7 @@
           <p:cNvPr id="9" name="1-Method in one line-title">
             <a:extLst xmlns:a="http://schemas.openxmlformats.org/drawingml/2006/main">
               <a:ext uri="{FF2B5EF4-FFF2-40B4-BE49-F238E27FC236}">
-                <a16:creationId xmlns:a16="http://schemas.microsoft.com/office/drawing/2014/main" id="{BD0CA31E-CCCA-4986-B635-6788C131930E}"/>
+                <a16:creationId xmlns:a16="http://schemas.microsoft.com/office/drawing/2014/main" id="{467BDEEE-42EA-424E-B534-71D0782F4B76}"/>
               </a:ext>
             </a:extLst>
           </p:cNvPr>
@@ -1491,7 +1491,7 @@
           <p:cNvPr id="10" name="1-Method in one line-body">
             <a:extLst xmlns:a="http://schemas.openxmlformats.org/drawingml/2006/main">
               <a:ext uri="{FF2B5EF4-FFF2-40B4-BE49-F238E27FC236}">
-                <a16:creationId xmlns:a16="http://schemas.microsoft.com/office/drawing/2014/main" id="{2F3D4FB6-6752-446A-849F-8C6D661FFF55}"/>
+                <a16:creationId xmlns:a16="http://schemas.microsoft.com/office/drawing/2014/main" id="{F330FF2C-A534-4031-9104-D94292DA57BF}"/>
               </a:ext>
             </a:extLst>
           </p:cNvPr>
@@ -1592,7 +1592,7 @@
           <p:cNvPr id="11" name="morrison-formula-box">
             <a:extLst xmlns:a="http://schemas.openxmlformats.org/drawingml/2006/main">
               <a:ext uri="{FF2B5EF4-FFF2-40B4-BE49-F238E27FC236}">
-                <a16:creationId xmlns:a16="http://schemas.microsoft.com/office/drawing/2014/main" id="{F9C17C9F-6DC7-47E4-84D6-96A5F3D07938}"/>
+                <a16:creationId xmlns:a16="http://schemas.microsoft.com/office/drawing/2014/main" id="{19712E0C-8A90-4A8E-AD99-A07E0FD8B16C}"/>
               </a:ext>
             </a:extLst>
           </p:cNvPr>
@@ -1625,7 +1625,7 @@
           <p:cNvPr id="12" name="morrison-formula-title">
             <a:extLst xmlns:a="http://schemas.openxmlformats.org/drawingml/2006/main">
               <a:ext uri="{FF2B5EF4-FFF2-40B4-BE49-F238E27FC236}">
-                <a16:creationId xmlns:a16="http://schemas.microsoft.com/office/drawing/2014/main" id="{DD853855-C9B0-4937-AA36-9E65C251F3AB}"/>
+                <a16:creationId xmlns:a16="http://schemas.microsoft.com/office/drawing/2014/main" id="{835EE0C5-A943-4AA9-864B-BAF5EB09A956}"/>
               </a:ext>
             </a:extLst>
           </p:cNvPr>
@@ -1675,7 +1675,7 @@
           <p:cNvPr id="13" name="morrison-formula">
             <a:extLst xmlns:a="http://schemas.openxmlformats.org/drawingml/2006/main">
               <a:ext uri="{FF2B5EF4-FFF2-40B4-BE49-F238E27FC236}">
-                <a16:creationId xmlns:a16="http://schemas.microsoft.com/office/drawing/2014/main" id="{BC8D8BAA-C015-49A0-B783-0B972226C1AF}"/>
+                <a16:creationId xmlns:a16="http://schemas.microsoft.com/office/drawing/2014/main" id="{D21008B1-F6BB-4C56-965B-A799A9DB487F}"/>
               </a:ext>
             </a:extLst>
           </p:cNvPr>
@@ -1793,7 +1793,7 @@
           <p:cNvPr id="14" name="2-Data and denominators-box">
             <a:extLst xmlns:a="http://schemas.openxmlformats.org/drawingml/2006/main">
               <a:ext uri="{FF2B5EF4-FFF2-40B4-BE49-F238E27FC236}">
-                <a16:creationId xmlns:a16="http://schemas.microsoft.com/office/drawing/2014/main" id="{073ED0F5-C112-419E-8907-F24A4A851E05}"/>
+                <a16:creationId xmlns:a16="http://schemas.microsoft.com/office/drawing/2014/main" id="{2FDDA41A-8E98-4FDB-ACD6-949A8DEAB31D}"/>
               </a:ext>
             </a:extLst>
           </p:cNvPr>
@@ -1826,7 +1826,7 @@
           <p:cNvPr id="15" name="2-Data and denominators-head">
             <a:extLst xmlns:a="http://schemas.openxmlformats.org/drawingml/2006/main">
               <a:ext uri="{FF2B5EF4-FFF2-40B4-BE49-F238E27FC236}">
-                <a16:creationId xmlns:a16="http://schemas.microsoft.com/office/drawing/2014/main" id="{A1BBF2DF-2884-4256-B8E5-36C448578125}"/>
+                <a16:creationId xmlns:a16="http://schemas.microsoft.com/office/drawing/2014/main" id="{E4F4D8AD-03D9-4021-A309-995F948610A3}"/>
               </a:ext>
             </a:extLst>
           </p:cNvPr>
@@ -1859,7 +1859,7 @@
           <p:cNvPr id="16" name="2-Data and denominators-title">
             <a:extLst xmlns:a="http://schemas.openxmlformats.org/drawingml/2006/main">
               <a:ext uri="{FF2B5EF4-FFF2-40B4-BE49-F238E27FC236}">
-                <a16:creationId xmlns:a16="http://schemas.microsoft.com/office/drawing/2014/main" id="{37E69782-D12D-4291-865E-C9B0E86DC7AD}"/>
+                <a16:creationId xmlns:a16="http://schemas.microsoft.com/office/drawing/2014/main" id="{7B1F63BF-7E08-4767-A850-F72BC1FFCC18}"/>
               </a:ext>
             </a:extLst>
           </p:cNvPr>
@@ -1909,7 +1909,7 @@
           <p:cNvPr id="17" name="2-Data and denominators-body">
             <a:extLst xmlns:a="http://schemas.openxmlformats.org/drawingml/2006/main">
               <a:ext uri="{FF2B5EF4-FFF2-40B4-BE49-F238E27FC236}">
-                <a16:creationId xmlns:a16="http://schemas.microsoft.com/office/drawing/2014/main" id="{40553B3A-9279-4A35-A76A-41D97F39618F}"/>
+                <a16:creationId xmlns:a16="http://schemas.microsoft.com/office/drawing/2014/main" id="{A3AA1067-BE82-4158-840E-64571C9CC75E}"/>
               </a:ext>
             </a:extLst>
           </p:cNvPr>
@@ -1993,7 +1993,7 @@
           <p:cNvPr id="18" name="3-Why beta CIs?-box">
             <a:extLst xmlns:a="http://schemas.openxmlformats.org/drawingml/2006/main">
               <a:ext uri="{FF2B5EF4-FFF2-40B4-BE49-F238E27FC236}">
-                <a16:creationId xmlns:a16="http://schemas.microsoft.com/office/drawing/2014/main" id="{06166DAE-8DA7-46A5-9A6F-03322F59E8BF}"/>
+                <a16:creationId xmlns:a16="http://schemas.microsoft.com/office/drawing/2014/main" id="{2965C92B-C640-405A-ADBC-C9E80B41581A}"/>
               </a:ext>
             </a:extLst>
           </p:cNvPr>
@@ -2026,7 +2026,7 @@
           <p:cNvPr id="19" name="3-Why beta CIs?-head">
             <a:extLst xmlns:a="http://schemas.openxmlformats.org/drawingml/2006/main">
               <a:ext uri="{FF2B5EF4-FFF2-40B4-BE49-F238E27FC236}">
-                <a16:creationId xmlns:a16="http://schemas.microsoft.com/office/drawing/2014/main" id="{B1AD9B95-8AEF-4FB3-AA52-829075E57F5D}"/>
+                <a16:creationId xmlns:a16="http://schemas.microsoft.com/office/drawing/2014/main" id="{B15B7185-5319-429B-A82A-6673C1850E0F}"/>
               </a:ext>
             </a:extLst>
           </p:cNvPr>
@@ -2059,7 +2059,7 @@
           <p:cNvPr id="20" name="3-Why beta CIs?-title">
             <a:extLst xmlns:a="http://schemas.openxmlformats.org/drawingml/2006/main">
               <a:ext uri="{FF2B5EF4-FFF2-40B4-BE49-F238E27FC236}">
-                <a16:creationId xmlns:a16="http://schemas.microsoft.com/office/drawing/2014/main" id="{DE37D351-9CAC-4D55-BD01-CCB6C0FC99A2}"/>
+                <a16:creationId xmlns:a16="http://schemas.microsoft.com/office/drawing/2014/main" id="{A980F264-84C4-4FD9-A4D7-7A373FA43B1D}"/>
               </a:ext>
             </a:extLst>
           </p:cNvPr>
@@ -2109,7 +2109,7 @@
           <p:cNvPr id="21" name="3-Why beta CIs?-body">
             <a:extLst xmlns:a="http://schemas.openxmlformats.org/drawingml/2006/main">
               <a:ext uri="{FF2B5EF4-FFF2-40B4-BE49-F238E27FC236}">
-                <a16:creationId xmlns:a16="http://schemas.microsoft.com/office/drawing/2014/main" id="{880F927C-B6F5-4E4D-9B92-B219DAADFAB4}"/>
+                <a16:creationId xmlns:a16="http://schemas.microsoft.com/office/drawing/2014/main" id="{285F4BD5-CEA6-4D03-96E7-0EFFBDD6E2F1}"/>
               </a:ext>
             </a:extLst>
           </p:cNvPr>
@@ -2193,7 +2193,7 @@
           <p:cNvPr id="22" name="4-ETL and interoperability-box">
             <a:extLst xmlns:a="http://schemas.openxmlformats.org/drawingml/2006/main">
               <a:ext uri="{FF2B5EF4-FFF2-40B4-BE49-F238E27FC236}">
-                <a16:creationId xmlns:a16="http://schemas.microsoft.com/office/drawing/2014/main" id="{AAB92290-49A6-439C-9555-4A68E1C535EA}"/>
+                <a16:creationId xmlns:a16="http://schemas.microsoft.com/office/drawing/2014/main" id="{91880EA2-EA10-4CFE-88ED-A262FAB4DB0F}"/>
               </a:ext>
             </a:extLst>
           </p:cNvPr>
@@ -2226,7 +2226,7 @@
           <p:cNvPr id="23" name="4-ETL and interoperability-head">
             <a:extLst xmlns:a="http://schemas.openxmlformats.org/drawingml/2006/main">
               <a:ext uri="{FF2B5EF4-FFF2-40B4-BE49-F238E27FC236}">
-                <a16:creationId xmlns:a16="http://schemas.microsoft.com/office/drawing/2014/main" id="{E9CED5D8-5EC3-4D53-9379-7FA1477DA327}"/>
+                <a16:creationId xmlns:a16="http://schemas.microsoft.com/office/drawing/2014/main" id="{1B762024-61B2-48D9-BAE9-64724BE37930}"/>
               </a:ext>
             </a:extLst>
           </p:cNvPr>
@@ -2259,7 +2259,7 @@
           <p:cNvPr id="24" name="4-ETL and interoperability-title">
             <a:extLst xmlns:a="http://schemas.openxmlformats.org/drawingml/2006/main">
               <a:ext uri="{FF2B5EF4-FFF2-40B4-BE49-F238E27FC236}">
-                <a16:creationId xmlns:a16="http://schemas.microsoft.com/office/drawing/2014/main" id="{D6DA139E-4EEA-444B-8D74-FB6A09A30577}"/>
+                <a16:creationId xmlns:a16="http://schemas.microsoft.com/office/drawing/2014/main" id="{DC894CB1-2C73-43D1-B104-9269B1C52284}"/>
               </a:ext>
             </a:extLst>
           </p:cNvPr>
@@ -2309,7 +2309,7 @@
           <p:cNvPr id="25" name="4-ETL and interoperability-body">
             <a:extLst xmlns:a="http://schemas.openxmlformats.org/drawingml/2006/main">
               <a:ext uri="{FF2B5EF4-FFF2-40B4-BE49-F238E27FC236}">
-                <a16:creationId xmlns:a16="http://schemas.microsoft.com/office/drawing/2014/main" id="{7E226686-2519-46B9-A6F8-606390D507E8}"/>
+                <a16:creationId xmlns:a16="http://schemas.microsoft.com/office/drawing/2014/main" id="{D471ECE7-FF21-4155-B48F-2B969A891D8B}"/>
               </a:ext>
             </a:extLst>
           </p:cNvPr>
@@ -2393,7 +2393,7 @@
           <p:cNvPr id="26" name="m-prev-metric">
             <a:extLst xmlns:a="http://schemas.openxmlformats.org/drawingml/2006/main">
               <a:ext uri="{FF2B5EF4-FFF2-40B4-BE49-F238E27FC236}">
-                <a16:creationId xmlns:a16="http://schemas.microsoft.com/office/drawing/2014/main" id="{D72B7883-25BF-4E06-80FE-538E0EE7E94D}"/>
+                <a16:creationId xmlns:a16="http://schemas.microsoft.com/office/drawing/2014/main" id="{5512A0C6-60C5-4098-AF48-3FFF76AE72DF}"/>
               </a:ext>
             </a:extLst>
           </p:cNvPr>
@@ -2426,7 +2426,7 @@
           <p:cNvPr id="27" name="m-prev-metric-title">
             <a:extLst xmlns:a="http://schemas.openxmlformats.org/drawingml/2006/main">
               <a:ext uri="{FF2B5EF4-FFF2-40B4-BE49-F238E27FC236}">
-                <a16:creationId xmlns:a16="http://schemas.microsoft.com/office/drawing/2014/main" id="{D0DD8C6F-A70C-4AF9-8F92-5BB841F5CB67}"/>
+                <a16:creationId xmlns:a16="http://schemas.microsoft.com/office/drawing/2014/main" id="{5871EDE4-E41A-4F34-A22F-9C08DF5CA0ED}"/>
               </a:ext>
             </a:extLst>
           </p:cNvPr>
@@ -2476,7 +2476,7 @@
           <p:cNvPr id="28" name="m-prev-metric-value">
             <a:extLst xmlns:a="http://schemas.openxmlformats.org/drawingml/2006/main">
               <a:ext uri="{FF2B5EF4-FFF2-40B4-BE49-F238E27FC236}">
-                <a16:creationId xmlns:a16="http://schemas.microsoft.com/office/drawing/2014/main" id="{304945B9-0D14-4B7F-8901-6ED464C2797F}"/>
+                <a16:creationId xmlns:a16="http://schemas.microsoft.com/office/drawing/2014/main" id="{8056234E-A1E9-419D-9E6B-38C496A97FE2}"/>
               </a:ext>
             </a:extLst>
           </p:cNvPr>
@@ -2526,7 +2526,7 @@
           <p:cNvPr id="29" name="m-prev-metric-note">
             <a:extLst xmlns:a="http://schemas.openxmlformats.org/drawingml/2006/main">
               <a:ext uri="{FF2B5EF4-FFF2-40B4-BE49-F238E27FC236}">
-                <a16:creationId xmlns:a16="http://schemas.microsoft.com/office/drawing/2014/main" id="{FA581E86-4658-440A-B00B-A00EAE02E389}"/>
+                <a16:creationId xmlns:a16="http://schemas.microsoft.com/office/drawing/2014/main" id="{C68A1DC6-9A61-4476-A353-787C89AD7ED1}"/>
               </a:ext>
             </a:extLst>
           </p:cNvPr>
@@ -2576,7 +2576,7 @@
           <p:cNvPr id="30" name="m-crisis-metric">
             <a:extLst xmlns:a="http://schemas.openxmlformats.org/drawingml/2006/main">
               <a:ext uri="{FF2B5EF4-FFF2-40B4-BE49-F238E27FC236}">
-                <a16:creationId xmlns:a16="http://schemas.microsoft.com/office/drawing/2014/main" id="{D9CA2E19-DE1B-46DC-820A-ABFB94E51A5A}"/>
+                <a16:creationId xmlns:a16="http://schemas.microsoft.com/office/drawing/2014/main" id="{0F17A1BC-3045-4564-9C54-0A85FF8FA693}"/>
               </a:ext>
             </a:extLst>
           </p:cNvPr>
@@ -2609,7 +2609,7 @@
           <p:cNvPr id="31" name="m-crisis-metric-title">
             <a:extLst xmlns:a="http://schemas.openxmlformats.org/drawingml/2006/main">
               <a:ext uri="{FF2B5EF4-FFF2-40B4-BE49-F238E27FC236}">
-                <a16:creationId xmlns:a16="http://schemas.microsoft.com/office/drawing/2014/main" id="{CBFD7B0B-C8E9-47AD-BC9F-6DB38359F57B}"/>
+                <a16:creationId xmlns:a16="http://schemas.microsoft.com/office/drawing/2014/main" id="{4BF458A2-0A86-4607-81EC-DE0834D4E5D5}"/>
               </a:ext>
             </a:extLst>
           </p:cNvPr>
@@ -2659,7 +2659,7 @@
           <p:cNvPr id="32" name="m-crisis-metric-value">
             <a:extLst xmlns:a="http://schemas.openxmlformats.org/drawingml/2006/main">
               <a:ext uri="{FF2B5EF4-FFF2-40B4-BE49-F238E27FC236}">
-                <a16:creationId xmlns:a16="http://schemas.microsoft.com/office/drawing/2014/main" id="{15A4F5BE-4E71-4551-B390-4D117E331FC4}"/>
+                <a16:creationId xmlns:a16="http://schemas.microsoft.com/office/drawing/2014/main" id="{7F4AEA68-7A75-4344-A347-6A93877EAB9E}"/>
               </a:ext>
             </a:extLst>
           </p:cNvPr>
@@ -2709,7 +2709,7 @@
           <p:cNvPr id="33" name="m-crisis-metric-note">
             <a:extLst xmlns:a="http://schemas.openxmlformats.org/drawingml/2006/main">
               <a:ext uri="{FF2B5EF4-FFF2-40B4-BE49-F238E27FC236}">
-                <a16:creationId xmlns:a16="http://schemas.microsoft.com/office/drawing/2014/main" id="{F674BD3D-FB89-4CF2-B74B-02B37C21420B}"/>
+                <a16:creationId xmlns:a16="http://schemas.microsoft.com/office/drawing/2014/main" id="{E5F52621-823C-414F-BEAD-8A8C3A0BB27F}"/>
               </a:ext>
             </a:extLst>
           </p:cNvPr>
@@ -2759,7 +2759,7 @@
           <p:cNvPr id="34" name="m-meds-metric">
             <a:extLst xmlns:a="http://schemas.openxmlformats.org/drawingml/2006/main">
               <a:ext uri="{FF2B5EF4-FFF2-40B4-BE49-F238E27FC236}">
-                <a16:creationId xmlns:a16="http://schemas.microsoft.com/office/drawing/2014/main" id="{1ABCAFF5-5AB6-4C62-B5B3-43B310A57365}"/>
+                <a16:creationId xmlns:a16="http://schemas.microsoft.com/office/drawing/2014/main" id="{DBDA1B61-64D8-4D20-93C4-A95ED9E779E7}"/>
               </a:ext>
             </a:extLst>
           </p:cNvPr>
@@ -2792,7 +2792,7 @@
           <p:cNvPr id="35" name="m-meds-metric-title">
             <a:extLst xmlns:a="http://schemas.openxmlformats.org/drawingml/2006/main">
               <a:ext uri="{FF2B5EF4-FFF2-40B4-BE49-F238E27FC236}">
-                <a16:creationId xmlns:a16="http://schemas.microsoft.com/office/drawing/2014/main" id="{0FC3B339-9C29-42E6-8D63-C6E62AB661FC}"/>
+                <a16:creationId xmlns:a16="http://schemas.microsoft.com/office/drawing/2014/main" id="{FBD9A5E1-B949-47A5-9419-FE7192FEAB16}"/>
               </a:ext>
             </a:extLst>
           </p:cNvPr>
@@ -2842,7 +2842,7 @@
           <p:cNvPr id="36" name="m-meds-metric-value">
             <a:extLst xmlns:a="http://schemas.openxmlformats.org/drawingml/2006/main">
               <a:ext uri="{FF2B5EF4-FFF2-40B4-BE49-F238E27FC236}">
-                <a16:creationId xmlns:a16="http://schemas.microsoft.com/office/drawing/2014/main" id="{E82A9061-C1E1-4E2C-A621-06B3BCCB68B9}"/>
+                <a16:creationId xmlns:a16="http://schemas.microsoft.com/office/drawing/2014/main" id="{5CD3CBE4-1C2A-49DE-A20F-056C3DB4B0B9}"/>
               </a:ext>
             </a:extLst>
           </p:cNvPr>
@@ -2892,7 +2892,7 @@
           <p:cNvPr id="37" name="m-meds-metric-note">
             <a:extLst xmlns:a="http://schemas.openxmlformats.org/drawingml/2006/main">
               <a:ext uri="{FF2B5EF4-FFF2-40B4-BE49-F238E27FC236}">
-                <a16:creationId xmlns:a16="http://schemas.microsoft.com/office/drawing/2014/main" id="{5CE2A137-E8EA-4498-B4FC-33F221618DA4}"/>
+                <a16:creationId xmlns:a16="http://schemas.microsoft.com/office/drawing/2014/main" id="{6332FCC1-B577-405E-AFC4-C0A2744A898F}"/>
               </a:ext>
             </a:extLst>
           </p:cNvPr>
@@ -2942,7 +2942,7 @@
           <p:cNvPr id="38" name="m-chart-prev-caption">
             <a:extLst xmlns:a="http://schemas.openxmlformats.org/drawingml/2006/main">
               <a:ext uri="{FF2B5EF4-FFF2-40B4-BE49-F238E27FC236}">
-                <a16:creationId xmlns:a16="http://schemas.microsoft.com/office/drawing/2014/main" id="{8A342652-8961-4680-933B-A204B3D53DEF}"/>
+                <a16:creationId xmlns:a16="http://schemas.microsoft.com/office/drawing/2014/main" id="{290B8A6A-964D-431A-B58F-2684E287F22A}"/>
               </a:ext>
             </a:extLst>
           </p:cNvPr>
@@ -2992,7 +2992,7 @@
           <p:cNvPr id="39" name="m-chart-prev-frame">
             <a:extLst xmlns:a="http://schemas.openxmlformats.org/drawingml/2006/main">
               <a:ext uri="{FF2B5EF4-FFF2-40B4-BE49-F238E27FC236}">
-                <a16:creationId xmlns:a16="http://schemas.microsoft.com/office/drawing/2014/main" id="{1B591323-2F10-4D36-91DC-0EFAD31300A0}"/>
+                <a16:creationId xmlns:a16="http://schemas.microsoft.com/office/drawing/2014/main" id="{C6672C41-07D2-4B67-99BD-157845711D60}"/>
               </a:ext>
             </a:extLst>
           </p:cNvPr>
@@ -3029,13 +3029,13 @@
           <p:nvPr/>
         </p:nvPicPr>
         <p:blipFill>
-          <a:blip xmlns:r="http://schemas.openxmlformats.org/officeDocument/2006/relationships" xmlns:a="http://schemas.openxmlformats.org/drawingml/2006/main" r:embed="R702e602df57c4000"/>
+          <a:blip xmlns:r="http://schemas.openxmlformats.org/officeDocument/2006/relationships" xmlns:a="http://schemas.openxmlformats.org/drawingml/2006/main" r:embed="R5ded3da0c05a457b"/>
           <a:stretch xmlns:a="http://schemas.openxmlformats.org/drawingml/2006/main"/>
         </p:blipFill>
         <p:spPr>
           <a:xfrm xmlns:a="http://schemas.openxmlformats.org/drawingml/2006/main">
-            <a:off x="3219450" y="5052616"/>
-            <a:ext cx="3562350" cy="1039019"/>
+            <a:off x="3480513" y="4476750"/>
+            <a:ext cx="3040224" cy="2190750"/>
           </a:xfrm>
           <a:prstGeom xmlns:a="http://schemas.openxmlformats.org/drawingml/2006/main" prst="rect">
             <a:avLst/>
@@ -3047,7 +3047,7 @@
           <p:cNvPr id="41" name="m-chart-meds-caption">
             <a:extLst xmlns:a="http://schemas.openxmlformats.org/drawingml/2006/main">
               <a:ext uri="{FF2B5EF4-FFF2-40B4-BE49-F238E27FC236}">
-                <a16:creationId xmlns:a16="http://schemas.microsoft.com/office/drawing/2014/main" id="{95C549A3-B75F-451D-BD6B-6F5F937A68B4}"/>
+                <a16:creationId xmlns:a16="http://schemas.microsoft.com/office/drawing/2014/main" id="{FC3D3BB4-79E2-4DC7-A770-8284E9668826}"/>
               </a:ext>
             </a:extLst>
           </p:cNvPr>
@@ -3097,7 +3097,7 @@
           <p:cNvPr id="42" name="m-chart-meds-frame">
             <a:extLst xmlns:a="http://schemas.openxmlformats.org/drawingml/2006/main">
               <a:ext uri="{FF2B5EF4-FFF2-40B4-BE49-F238E27FC236}">
-                <a16:creationId xmlns:a16="http://schemas.microsoft.com/office/drawing/2014/main" id="{C5735FEA-866C-4000-A9C6-D324AFCA8455}"/>
+                <a16:creationId xmlns:a16="http://schemas.microsoft.com/office/drawing/2014/main" id="{AF037BB9-FC2D-4C1E-B2E1-00D58C0995F1}"/>
               </a:ext>
             </a:extLst>
           </p:cNvPr>
@@ -3134,13 +3134,13 @@
           <p:nvPr/>
         </p:nvPicPr>
         <p:blipFill>
-          <a:blip xmlns:r="http://schemas.openxmlformats.org/officeDocument/2006/relationships" xmlns:a="http://schemas.openxmlformats.org/drawingml/2006/main" r:embed="R889414437750401b"/>
+          <a:blip xmlns:r="http://schemas.openxmlformats.org/officeDocument/2006/relationships" xmlns:a="http://schemas.openxmlformats.org/drawingml/2006/main" r:embed="R6e6b21235e85480e"/>
           <a:stretch xmlns:a="http://schemas.openxmlformats.org/drawingml/2006/main"/>
         </p:blipFill>
         <p:spPr>
           <a:xfrm xmlns:a="http://schemas.openxmlformats.org/drawingml/2006/main">
-            <a:off x="3219450" y="7719616"/>
-            <a:ext cx="3562350" cy="1039019"/>
+            <a:off x="3480513" y="7143750"/>
+            <a:ext cx="3040224" cy="2190750"/>
           </a:xfrm>
           <a:prstGeom xmlns:a="http://schemas.openxmlformats.org/drawingml/2006/main" prst="rect">
             <a:avLst/>
@@ -3152,7 +3152,7 @@
           <p:cNvPr id="44" name="m-chart-smoke-caption">
             <a:extLst xmlns:a="http://schemas.openxmlformats.org/drawingml/2006/main">
               <a:ext uri="{FF2B5EF4-FFF2-40B4-BE49-F238E27FC236}">
-                <a16:creationId xmlns:a16="http://schemas.microsoft.com/office/drawing/2014/main" id="{2713095F-0330-481E-89EE-BEC1B191B728}"/>
+                <a16:creationId xmlns:a16="http://schemas.microsoft.com/office/drawing/2014/main" id="{9CCE5D92-4DE6-4E10-91FA-C2FFD5728374}"/>
               </a:ext>
             </a:extLst>
           </p:cNvPr>
@@ -3202,7 +3202,7 @@
           <p:cNvPr id="45" name="m-chart-smoke-frame">
             <a:extLst xmlns:a="http://schemas.openxmlformats.org/drawingml/2006/main">
               <a:ext uri="{FF2B5EF4-FFF2-40B4-BE49-F238E27FC236}">
-                <a16:creationId xmlns:a16="http://schemas.microsoft.com/office/drawing/2014/main" id="{7580ED13-BBBA-43A5-AF7F-C601503F9DF4}"/>
+                <a16:creationId xmlns:a16="http://schemas.microsoft.com/office/drawing/2014/main" id="{25DB8DCD-68C1-408D-887A-8707A68784B8}"/>
               </a:ext>
             </a:extLst>
           </p:cNvPr>
@@ -3239,13 +3239,13 @@
           <p:nvPr/>
         </p:nvPicPr>
         <p:blipFill>
-          <a:blip xmlns:r="http://schemas.openxmlformats.org/officeDocument/2006/relationships" xmlns:a="http://schemas.openxmlformats.org/drawingml/2006/main" r:embed="Raa8e2554f71c462b"/>
+          <a:blip xmlns:r="http://schemas.openxmlformats.org/officeDocument/2006/relationships" xmlns:a="http://schemas.openxmlformats.org/drawingml/2006/main" r:embed="Rc11ccae5299848db"/>
           <a:stretch xmlns:a="http://schemas.openxmlformats.org/drawingml/2006/main"/>
         </p:blipFill>
         <p:spPr>
           <a:xfrm xmlns:a="http://schemas.openxmlformats.org/drawingml/2006/main">
-            <a:off x="3219450" y="10291366"/>
-            <a:ext cx="3562350" cy="1039019"/>
+            <a:off x="3612696" y="9810750"/>
+            <a:ext cx="2775857" cy="2000250"/>
           </a:xfrm>
           <a:prstGeom xmlns:a="http://schemas.openxmlformats.org/drawingml/2006/main" prst="rect">
             <a:avLst/>
@@ -3257,7 +3257,7 @@
           <p:cNvPr id="47" name="5-Key findings-box">
             <a:extLst xmlns:a="http://schemas.openxmlformats.org/drawingml/2006/main">
               <a:ext uri="{FF2B5EF4-FFF2-40B4-BE49-F238E27FC236}">
-                <a16:creationId xmlns:a16="http://schemas.microsoft.com/office/drawing/2014/main" id="{6A7F160C-7F50-49E0-983A-4B4F2B230AB3}"/>
+                <a16:creationId xmlns:a16="http://schemas.microsoft.com/office/drawing/2014/main" id="{6C14D8FD-CEEA-4DA9-8B63-C49028ABE89C}"/>
               </a:ext>
             </a:extLst>
           </p:cNvPr>
@@ -3290,7 +3290,7 @@
           <p:cNvPr id="48" name="5-Key findings-head">
             <a:extLst xmlns:a="http://schemas.openxmlformats.org/drawingml/2006/main">
               <a:ext uri="{FF2B5EF4-FFF2-40B4-BE49-F238E27FC236}">
-                <a16:creationId xmlns:a16="http://schemas.microsoft.com/office/drawing/2014/main" id="{00AA9587-2119-4809-926F-384264EC5EFF}"/>
+                <a16:creationId xmlns:a16="http://schemas.microsoft.com/office/drawing/2014/main" id="{807E4494-785D-4F46-B32B-0C201345D8DD}"/>
               </a:ext>
             </a:extLst>
           </p:cNvPr>
@@ -3323,7 +3323,7 @@
           <p:cNvPr id="49" name="5-Key findings-title">
             <a:extLst xmlns:a="http://schemas.openxmlformats.org/drawingml/2006/main">
               <a:ext uri="{FF2B5EF4-FFF2-40B4-BE49-F238E27FC236}">
-                <a16:creationId xmlns:a16="http://schemas.microsoft.com/office/drawing/2014/main" id="{39A4C896-032C-4495-8CB6-89C1BE61846B}"/>
+                <a16:creationId xmlns:a16="http://schemas.microsoft.com/office/drawing/2014/main" id="{766FDB1E-D807-4655-8E8A-A4DC2B256D87}"/>
               </a:ext>
             </a:extLst>
           </p:cNvPr>
@@ -3373,7 +3373,7 @@
           <p:cNvPr id="50" name="5-Key findings-body">
             <a:extLst xmlns:a="http://schemas.openxmlformats.org/drawingml/2006/main">
               <a:ext uri="{FF2B5EF4-FFF2-40B4-BE49-F238E27FC236}">
-                <a16:creationId xmlns:a16="http://schemas.microsoft.com/office/drawing/2014/main" id="{39B9DDAE-67EB-41A6-BFBF-19ADE90D006C}"/>
+                <a16:creationId xmlns:a16="http://schemas.microsoft.com/office/drawing/2014/main" id="{1B56CBDC-CACA-47AB-A812-8C1A0235CCFB}"/>
               </a:ext>
             </a:extLst>
           </p:cNvPr>
@@ -3474,7 +3474,7 @@
           <p:cNvPr id="51" name="6-Applied discussion-box">
             <a:extLst xmlns:a="http://schemas.openxmlformats.org/drawingml/2006/main">
               <a:ext uri="{FF2B5EF4-FFF2-40B4-BE49-F238E27FC236}">
-                <a16:creationId xmlns:a16="http://schemas.microsoft.com/office/drawing/2014/main" id="{30BAEB72-7845-4020-A892-B4F49826E6DF}"/>
+                <a16:creationId xmlns:a16="http://schemas.microsoft.com/office/drawing/2014/main" id="{A8E63FC3-EA75-46B1-9C11-0D4372298A98}"/>
               </a:ext>
             </a:extLst>
           </p:cNvPr>
@@ -3507,7 +3507,7 @@
           <p:cNvPr id="52" name="6-Applied discussion-head">
             <a:extLst xmlns:a="http://schemas.openxmlformats.org/drawingml/2006/main">
               <a:ext uri="{FF2B5EF4-FFF2-40B4-BE49-F238E27FC236}">
-                <a16:creationId xmlns:a16="http://schemas.microsoft.com/office/drawing/2014/main" id="{C8AA8487-1619-45B4-813A-A78E59101708}"/>
+                <a16:creationId xmlns:a16="http://schemas.microsoft.com/office/drawing/2014/main" id="{851D27FC-4DF4-465C-9406-3A5DDB4BBECD}"/>
               </a:ext>
             </a:extLst>
           </p:cNvPr>
@@ -3540,7 +3540,7 @@
           <p:cNvPr id="53" name="6-Applied discussion-title">
             <a:extLst xmlns:a="http://schemas.openxmlformats.org/drawingml/2006/main">
               <a:ext uri="{FF2B5EF4-FFF2-40B4-BE49-F238E27FC236}">
-                <a16:creationId xmlns:a16="http://schemas.microsoft.com/office/drawing/2014/main" id="{E808D019-97C1-418F-B777-6FDA259867A6}"/>
+                <a16:creationId xmlns:a16="http://schemas.microsoft.com/office/drawing/2014/main" id="{30E92A5F-9405-406F-ACFE-3A06C5D8778B}"/>
               </a:ext>
             </a:extLst>
           </p:cNvPr>
@@ -3590,7 +3590,7 @@
           <p:cNvPr id="54" name="6-Applied discussion-body">
             <a:extLst xmlns:a="http://schemas.openxmlformats.org/drawingml/2006/main">
               <a:ext uri="{FF2B5EF4-FFF2-40B4-BE49-F238E27FC236}">
-                <a16:creationId xmlns:a16="http://schemas.microsoft.com/office/drawing/2014/main" id="{F6A66F12-05E6-4333-89EF-A2AF8C496365}"/>
+                <a16:creationId xmlns:a16="http://schemas.microsoft.com/office/drawing/2014/main" id="{E0994A0D-24AD-41F3-B15E-D56CFBC10B2C}"/>
               </a:ext>
             </a:extLst>
           </p:cNvPr>
@@ -3674,7 +3674,7 @@
           <p:cNvPr id="55" name="7-Central conclusion-box">
             <a:extLst xmlns:a="http://schemas.openxmlformats.org/drawingml/2006/main">
               <a:ext uri="{FF2B5EF4-FFF2-40B4-BE49-F238E27FC236}">
-                <a16:creationId xmlns:a16="http://schemas.microsoft.com/office/drawing/2014/main" id="{70099076-FF11-487D-B76C-BD7692BC752D}"/>
+                <a16:creationId xmlns:a16="http://schemas.microsoft.com/office/drawing/2014/main" id="{8121A1F6-B696-4ED7-911F-96D3A828863D}"/>
               </a:ext>
             </a:extLst>
           </p:cNvPr>
@@ -3707,7 +3707,7 @@
           <p:cNvPr id="56" name="7-Central conclusion-head">
             <a:extLst xmlns:a="http://schemas.openxmlformats.org/drawingml/2006/main">
               <a:ext uri="{FF2B5EF4-FFF2-40B4-BE49-F238E27FC236}">
-                <a16:creationId xmlns:a16="http://schemas.microsoft.com/office/drawing/2014/main" id="{33F7FA7B-0366-4F42-B3FA-A5F7C74D037A}"/>
+                <a16:creationId xmlns:a16="http://schemas.microsoft.com/office/drawing/2014/main" id="{88D8D64F-C10C-4580-91B0-6664E900FB69}"/>
               </a:ext>
             </a:extLst>
           </p:cNvPr>
@@ -3740,7 +3740,7 @@
           <p:cNvPr id="57" name="7-Central conclusion-title">
             <a:extLst xmlns:a="http://schemas.openxmlformats.org/drawingml/2006/main">
               <a:ext uri="{FF2B5EF4-FFF2-40B4-BE49-F238E27FC236}">
-                <a16:creationId xmlns:a16="http://schemas.microsoft.com/office/drawing/2014/main" id="{668B2B9C-0ADD-4B73-8C6D-B42860C42C02}"/>
+                <a16:creationId xmlns:a16="http://schemas.microsoft.com/office/drawing/2014/main" id="{AB2F1219-34F5-4E7D-8141-35B051BA33B9}"/>
               </a:ext>
             </a:extLst>
           </p:cNvPr>
@@ -3790,7 +3790,7 @@
           <p:cNvPr id="58" name="7-Central conclusion-body">
             <a:extLst xmlns:a="http://schemas.openxmlformats.org/drawingml/2006/main">
               <a:ext uri="{FF2B5EF4-FFF2-40B4-BE49-F238E27FC236}">
-                <a16:creationId xmlns:a16="http://schemas.microsoft.com/office/drawing/2014/main" id="{36D74233-920A-4D79-BA0F-A0DEE9E97199}"/>
+                <a16:creationId xmlns:a16="http://schemas.microsoft.com/office/drawing/2014/main" id="{C3555E63-B793-49A9-9312-9A237E68947B}"/>
               </a:ext>
             </a:extLst>
           </p:cNvPr>
@@ -3874,7 +3874,7 @@
           <p:cNvPr id="59" name="m-chart-crisis-caption">
             <a:extLst xmlns:a="http://schemas.openxmlformats.org/drawingml/2006/main">
               <a:ext uri="{FF2B5EF4-FFF2-40B4-BE49-F238E27FC236}">
-                <a16:creationId xmlns:a16="http://schemas.microsoft.com/office/drawing/2014/main" id="{67F834CA-75E3-40E8-BC6D-96117B6E5C9B}"/>
+                <a16:creationId xmlns:a16="http://schemas.microsoft.com/office/drawing/2014/main" id="{2274B125-517D-4DCE-9E26-E7C008F989A5}"/>
               </a:ext>
             </a:extLst>
           </p:cNvPr>
@@ -3924,7 +3924,7 @@
           <p:cNvPr id="60" name="m-chart-crisis-frame">
             <a:extLst xmlns:a="http://schemas.openxmlformats.org/drawingml/2006/main">
               <a:ext uri="{FF2B5EF4-FFF2-40B4-BE49-F238E27FC236}">
-                <a16:creationId xmlns:a16="http://schemas.microsoft.com/office/drawing/2014/main" id="{7EBE670A-9700-4F88-A595-00FF78EC462E}"/>
+                <a16:creationId xmlns:a16="http://schemas.microsoft.com/office/drawing/2014/main" id="{9B48D0BC-2398-4EC0-8C7D-04809EACD995}"/>
               </a:ext>
             </a:extLst>
           </p:cNvPr>
@@ -3961,13 +3961,13 @@
           <p:nvPr/>
         </p:nvPicPr>
         <p:blipFill>
-          <a:blip xmlns:r="http://schemas.openxmlformats.org/officeDocument/2006/relationships" xmlns:a="http://schemas.openxmlformats.org/drawingml/2006/main" r:embed="Ra07102501ccb4e30"/>
+          <a:blip xmlns:r="http://schemas.openxmlformats.org/officeDocument/2006/relationships" xmlns:a="http://schemas.openxmlformats.org/drawingml/2006/main" r:embed="Rd59cbeaac26044f2"/>
           <a:stretch xmlns:a="http://schemas.openxmlformats.org/drawingml/2006/main"/>
         </p:blipFill>
         <p:spPr>
           <a:xfrm xmlns:a="http://schemas.openxmlformats.org/drawingml/2006/main">
-            <a:off x="7048500" y="9130506"/>
-            <a:ext cx="2247900" cy="655638"/>
+            <a:off x="7075326" y="8667750"/>
+            <a:ext cx="2194249" cy="1581150"/>
           </a:xfrm>
           <a:prstGeom xmlns:a="http://schemas.openxmlformats.org/drawingml/2006/main" prst="rect">
             <a:avLst/>
@@ -3979,7 +3979,7 @@
           <p:cNvPr id="62" name="qr-box">
             <a:extLst xmlns:a="http://schemas.openxmlformats.org/drawingml/2006/main">
               <a:ext uri="{FF2B5EF4-FFF2-40B4-BE49-F238E27FC236}">
-                <a16:creationId xmlns:a16="http://schemas.microsoft.com/office/drawing/2014/main" id="{98E6395D-30A3-4000-BE4F-BA0303CF9A11}"/>
+                <a16:creationId xmlns:a16="http://schemas.microsoft.com/office/drawing/2014/main" id="{34283B7C-DB80-46AC-8D76-82BB1570C26F}"/>
               </a:ext>
             </a:extLst>
           </p:cNvPr>
@@ -4016,7 +4016,7 @@
           <p:nvPr/>
         </p:nvPicPr>
         <p:blipFill>
-          <a:blip xmlns:r="http://schemas.openxmlformats.org/officeDocument/2006/relationships" xmlns:a="http://schemas.openxmlformats.org/drawingml/2006/main" r:embed="R25f414fb4eb246fc"/>
+          <a:blip xmlns:r="http://schemas.openxmlformats.org/officeDocument/2006/relationships" xmlns:a="http://schemas.openxmlformats.org/drawingml/2006/main" r:embed="Rb0b91ed4fb884748"/>
           <a:stretch xmlns:a="http://schemas.openxmlformats.org/drawingml/2006/main"/>
         </p:blipFill>
         <p:spPr>
@@ -4034,7 +4034,7 @@
           <p:cNvPr id="64" name="qr-label">
             <a:extLst xmlns:a="http://schemas.openxmlformats.org/drawingml/2006/main">
               <a:ext uri="{FF2B5EF4-FFF2-40B4-BE49-F238E27FC236}">
-                <a16:creationId xmlns:a16="http://schemas.microsoft.com/office/drawing/2014/main" id="{9F30DC81-1F02-4182-9704-13228CB66725}"/>
+                <a16:creationId xmlns:a16="http://schemas.microsoft.com/office/drawing/2014/main" id="{83D23F73-ADF2-4076-A04A-6A61B2B35183}"/>
               </a:ext>
             </a:extLst>
           </p:cNvPr>
@@ -4101,7 +4101,7 @@
           <p:cNvPr id="65" name="references-box">
             <a:extLst xmlns:a="http://schemas.openxmlformats.org/drawingml/2006/main">
               <a:ext uri="{FF2B5EF4-FFF2-40B4-BE49-F238E27FC236}">
-                <a16:creationId xmlns:a16="http://schemas.microsoft.com/office/drawing/2014/main" id="{A3AF3E82-E060-4E8E-9E8A-07D0E86BBCFC}"/>
+                <a16:creationId xmlns:a16="http://schemas.microsoft.com/office/drawing/2014/main" id="{5F036B7B-E7F5-4538-9335-C2181798718D}"/>
               </a:ext>
             </a:extLst>
           </p:cNvPr>
@@ -4134,7 +4134,7 @@
           <p:cNvPr id="66" name="references-title">
             <a:extLst xmlns:a="http://schemas.openxmlformats.org/drawingml/2006/main">
               <a:ext uri="{FF2B5EF4-FFF2-40B4-BE49-F238E27FC236}">
-                <a16:creationId xmlns:a16="http://schemas.microsoft.com/office/drawing/2014/main" id="{181A49CC-0559-4B78-9094-3116E9313775}"/>
+                <a16:creationId xmlns:a16="http://schemas.microsoft.com/office/drawing/2014/main" id="{78751C3B-6DAB-4964-9844-6E217D35EC66}"/>
               </a:ext>
             </a:extLst>
           </p:cNvPr>
@@ -4184,7 +4184,7 @@
           <p:cNvPr id="67" name="references-body">
             <a:extLst xmlns:a="http://schemas.openxmlformats.org/drawingml/2006/main">
               <a:ext uri="{FF2B5EF4-FFF2-40B4-BE49-F238E27FC236}">
-                <a16:creationId xmlns:a16="http://schemas.microsoft.com/office/drawing/2014/main" id="{EB224C8C-9C10-44F0-878B-FF6A63305435}"/>
+                <a16:creationId xmlns:a16="http://schemas.microsoft.com/office/drawing/2014/main" id="{0337290F-DB9E-4653-B80F-08F55504614A}"/>
               </a:ext>
             </a:extLst>
           </p:cNvPr>
@@ -4436,7 +4436,7 @@
     </p:spTree>
     <p:extLst>
       <p:ext uri="{BB962C8B-B14F-4D97-AF65-F5344CB8AC3E}">
-        <p14:creationId xmlns:p14="http://schemas.microsoft.com/office/powerpoint/2010/main" val="1001207189"/>
+        <p14:creationId xmlns:p14="http://schemas.microsoft.com/office/powerpoint/2010/main" val="1040396622"/>
       </p:ext>
     </p:extLst>
   </p:cSld>

--- a/outputs/posters/poster_pns_asma_morrison_en.pptx
+++ b/outputs/posters/poster_pns_asma_morrison_en.pptx
@@ -2,13 +2,13 @@
 <file path=ppt/presentation.xml><?xml version="1.0" encoding="utf-8"?>
 <p:presentation xmlns:p="http://schemas.openxmlformats.org/presentationml/2006/main">
   <p:sldMasterIdLst>
-    <p:sldMasterId xmlns:r="http://schemas.openxmlformats.org/officeDocument/2006/relationships" id="2147483648" r:id="R644d79f40acb4593"/>
+    <p:sldMasterId xmlns:r="http://schemas.openxmlformats.org/officeDocument/2006/relationships" id="2147483648" r:id="R9cec65c0206f4760"/>
   </p:sldMasterIdLst>
   <p:notesMasterIdLst>
-    <p:notesMasterId xmlns:r="http://schemas.openxmlformats.org/officeDocument/2006/relationships" r:id="Re2605e1096c44c20"/>
+    <p:notesMasterId xmlns:r="http://schemas.openxmlformats.org/officeDocument/2006/relationships" r:id="Rcad50becf0914b2c"/>
   </p:notesMasterIdLst>
   <p:sldIdLst>
-    <p:sldId xmlns:r="http://schemas.openxmlformats.org/officeDocument/2006/relationships" id="256" r:id="Rb97627f83d454bfa"/>
+    <p:sldId xmlns:r="http://schemas.openxmlformats.org/officeDocument/2006/relationships" id="256" r:id="R5ce6d1a2170f425e"/>
   </p:sldIdLst>
   <p:sldSz cx="9525000" cy="13468350"/>
   <p:notesSz cx="6858000" cy="9144000"/>
@@ -601,7 +601,7 @@
   </p:cSld>
   <p:clrMap bg1="lt1" tx1="dk1" bg2="lt2" tx2="dk2" accent1="accent1" accent2="accent2" accent3="accent3" accent4="accent4" accent5="accent5" accent6="accent6" hlink="hlink" folHlink="folHlink"/>
   <p:sldLayoutIdLst>
-    <p:sldLayoutId xmlns:r="http://schemas.openxmlformats.org/officeDocument/2006/relationships" id="2147483649" r:id="Rfad600ee12c441a5"/>
+    <p:sldLayoutId xmlns:r="http://schemas.openxmlformats.org/officeDocument/2006/relationships" id="2147483649" r:id="Rb379ca1a9a9643c5"/>
   </p:sldLayoutIdLst>
   <p:txStyles>
     <p:titleStyle>
@@ -1156,7 +1156,7 @@
           <p:nvPr/>
         </p:nvPicPr>
         <p:blipFill>
-          <a:blip xmlns:r="http://schemas.openxmlformats.org/officeDocument/2006/relationships" xmlns:a="http://schemas.openxmlformats.org/drawingml/2006/main" r:embed="R7a56c00e549743f0"/>
+          <a:blip xmlns:r="http://schemas.openxmlformats.org/officeDocument/2006/relationships" xmlns:a="http://schemas.openxmlformats.org/drawingml/2006/main" r:embed="R380cd81144134b78"/>
           <a:srcRect xmlns:a="http://schemas.openxmlformats.org/drawingml/2006/main" l="0" t="38622" r="0" b="38622"/>
           <a:stretch xmlns:a="http://schemas.openxmlformats.org/drawingml/2006/main">
             <a:fillRect l="0" t="0" r="0" b="0"/>
@@ -1181,7 +1181,7 @@
           <p:nvPr/>
         </p:nvPicPr>
         <p:blipFill>
-          <a:blip xmlns:r="http://schemas.openxmlformats.org/officeDocument/2006/relationships" xmlns:a="http://schemas.openxmlformats.org/drawingml/2006/main" r:embed="R16d57b7efad2412e"/>
+          <a:blip xmlns:r="http://schemas.openxmlformats.org/officeDocument/2006/relationships" xmlns:a="http://schemas.openxmlformats.org/drawingml/2006/main" r:embed="R391e49d391cf4729"/>
           <a:stretch xmlns:a="http://schemas.openxmlformats.org/drawingml/2006/main"/>
         </p:blipFill>
         <p:spPr>
@@ -1203,7 +1203,7 @@
           <p:nvPr/>
         </p:nvPicPr>
         <p:blipFill>
-          <a:blip xmlns:r="http://schemas.openxmlformats.org/officeDocument/2006/relationships" xmlns:a="http://schemas.openxmlformats.org/drawingml/2006/main" r:embed="R587a7c2cd77340c6"/>
+          <a:blip xmlns:r="http://schemas.openxmlformats.org/officeDocument/2006/relationships" xmlns:a="http://schemas.openxmlformats.org/drawingml/2006/main" r:embed="R62ba382a75f74f95"/>
           <a:stretch xmlns:a="http://schemas.openxmlformats.org/drawingml/2006/main"/>
         </p:blipFill>
         <p:spPr>
@@ -1221,7 +1221,7 @@
           <p:cNvPr id="4" name="morrison-title">
             <a:extLst xmlns:a="http://schemas.openxmlformats.org/drawingml/2006/main">
               <a:ext uri="{FF2B5EF4-FFF2-40B4-BE49-F238E27FC236}">
-                <a16:creationId xmlns:a16="http://schemas.microsoft.com/office/drawing/2014/main" id="{F3917962-4BFC-48D9-ACA7-0AA06BBF4AC3}"/>
+                <a16:creationId xmlns:a16="http://schemas.microsoft.com/office/drawing/2014/main" id="{A6FDA2E4-6434-4CA9-AED2-053D6FBAAC87}"/>
               </a:ext>
             </a:extLst>
           </p:cNvPr>
@@ -1271,7 +1271,7 @@
           <p:cNvPr id="5" name="morrison-authors">
             <a:extLst xmlns:a="http://schemas.openxmlformats.org/drawingml/2006/main">
               <a:ext uri="{FF2B5EF4-FFF2-40B4-BE49-F238E27FC236}">
-                <a16:creationId xmlns:a16="http://schemas.microsoft.com/office/drawing/2014/main" id="{9D12DE1F-63D4-4066-A99A-7803FC36CDA6}"/>
+                <a16:creationId xmlns:a16="http://schemas.microsoft.com/office/drawing/2014/main" id="{1C31DED5-B208-4E9D-B4CF-8D350E70F894}"/>
               </a:ext>
             </a:extLst>
           </p:cNvPr>
@@ -1321,7 +1321,7 @@
           <p:cNvPr id="6" name="central-message">
             <a:extLst xmlns:a="http://schemas.openxmlformats.org/drawingml/2006/main">
               <a:ext uri="{FF2B5EF4-FFF2-40B4-BE49-F238E27FC236}">
-                <a16:creationId xmlns:a16="http://schemas.microsoft.com/office/drawing/2014/main" id="{2DB71BC1-CBBD-4944-8262-629EF1F10958}"/>
+                <a16:creationId xmlns:a16="http://schemas.microsoft.com/office/drawing/2014/main" id="{747E8E90-CF8E-4440-A0DB-E0D7C14EE9BB}"/>
               </a:ext>
             </a:extLst>
           </p:cNvPr>
@@ -1375,7 +1375,7 @@
           <p:cNvPr id="7" name="1-Method in one line-box">
             <a:extLst xmlns:a="http://schemas.openxmlformats.org/drawingml/2006/main">
               <a:ext uri="{FF2B5EF4-FFF2-40B4-BE49-F238E27FC236}">
-                <a16:creationId xmlns:a16="http://schemas.microsoft.com/office/drawing/2014/main" id="{842609E9-07E3-4383-B34B-6C4FB549868F}"/>
+                <a16:creationId xmlns:a16="http://schemas.microsoft.com/office/drawing/2014/main" id="{3AEEAECC-EF80-47F6-B008-84078C4BCD5E}"/>
               </a:ext>
             </a:extLst>
           </p:cNvPr>
@@ -1408,7 +1408,7 @@
           <p:cNvPr id="8" name="1-Method in one line-head">
             <a:extLst xmlns:a="http://schemas.openxmlformats.org/drawingml/2006/main">
               <a:ext uri="{FF2B5EF4-FFF2-40B4-BE49-F238E27FC236}">
-                <a16:creationId xmlns:a16="http://schemas.microsoft.com/office/drawing/2014/main" id="{F3E3DDC7-FAB7-480B-9683-D21062D0A363}"/>
+                <a16:creationId xmlns:a16="http://schemas.microsoft.com/office/drawing/2014/main" id="{D944320B-A0CA-44D1-97C0-A93934DA2D4E}"/>
               </a:ext>
             </a:extLst>
           </p:cNvPr>
@@ -1441,7 +1441,7 @@
           <p:cNvPr id="9" name="1-Method in one line-title">
             <a:extLst xmlns:a="http://schemas.openxmlformats.org/drawingml/2006/main">
               <a:ext uri="{FF2B5EF4-FFF2-40B4-BE49-F238E27FC236}">
-                <a16:creationId xmlns:a16="http://schemas.microsoft.com/office/drawing/2014/main" id="{467BDEEE-42EA-424E-B534-71D0782F4B76}"/>
+                <a16:creationId xmlns:a16="http://schemas.microsoft.com/office/drawing/2014/main" id="{E9AB9A87-C544-4169-A590-C6670CA63B97}"/>
               </a:ext>
             </a:extLst>
           </p:cNvPr>
@@ -1491,7 +1491,7 @@
           <p:cNvPr id="10" name="1-Method in one line-body">
             <a:extLst xmlns:a="http://schemas.openxmlformats.org/drawingml/2006/main">
               <a:ext uri="{FF2B5EF4-FFF2-40B4-BE49-F238E27FC236}">
-                <a16:creationId xmlns:a16="http://schemas.microsoft.com/office/drawing/2014/main" id="{F330FF2C-A534-4031-9104-D94292DA57BF}"/>
+                <a16:creationId xmlns:a16="http://schemas.microsoft.com/office/drawing/2014/main" id="{50F98766-E508-4F20-99F5-6EA52F69054A}"/>
               </a:ext>
             </a:extLst>
           </p:cNvPr>
@@ -1592,7 +1592,7 @@
           <p:cNvPr id="11" name="morrison-formula-box">
             <a:extLst xmlns:a="http://schemas.openxmlformats.org/drawingml/2006/main">
               <a:ext uri="{FF2B5EF4-FFF2-40B4-BE49-F238E27FC236}">
-                <a16:creationId xmlns:a16="http://schemas.microsoft.com/office/drawing/2014/main" id="{19712E0C-8A90-4A8E-AD99-A07E0FD8B16C}"/>
+                <a16:creationId xmlns:a16="http://schemas.microsoft.com/office/drawing/2014/main" id="{B042266B-EB44-4EEF-9A3E-154610D15F03}"/>
               </a:ext>
             </a:extLst>
           </p:cNvPr>
@@ -1625,7 +1625,7 @@
           <p:cNvPr id="12" name="morrison-formula-title">
             <a:extLst xmlns:a="http://schemas.openxmlformats.org/drawingml/2006/main">
               <a:ext uri="{FF2B5EF4-FFF2-40B4-BE49-F238E27FC236}">
-                <a16:creationId xmlns:a16="http://schemas.microsoft.com/office/drawing/2014/main" id="{835EE0C5-A943-4AA9-864B-BAF5EB09A956}"/>
+                <a16:creationId xmlns:a16="http://schemas.microsoft.com/office/drawing/2014/main" id="{470AEA45-6F33-4B35-BD2E-7B8A7DF5F001}"/>
               </a:ext>
             </a:extLst>
           </p:cNvPr>
@@ -1675,7 +1675,7 @@
           <p:cNvPr id="13" name="morrison-formula">
             <a:extLst xmlns:a="http://schemas.openxmlformats.org/drawingml/2006/main">
               <a:ext uri="{FF2B5EF4-FFF2-40B4-BE49-F238E27FC236}">
-                <a16:creationId xmlns:a16="http://schemas.microsoft.com/office/drawing/2014/main" id="{D21008B1-F6BB-4C56-965B-A799A9DB487F}"/>
+                <a16:creationId xmlns:a16="http://schemas.microsoft.com/office/drawing/2014/main" id="{6048815D-3779-4834-923B-01EDC0DDD3F1}"/>
               </a:ext>
             </a:extLst>
           </p:cNvPr>
@@ -1793,7 +1793,7 @@
           <p:cNvPr id="14" name="2-Data and denominators-box">
             <a:extLst xmlns:a="http://schemas.openxmlformats.org/drawingml/2006/main">
               <a:ext uri="{FF2B5EF4-FFF2-40B4-BE49-F238E27FC236}">
-                <a16:creationId xmlns:a16="http://schemas.microsoft.com/office/drawing/2014/main" id="{2FDDA41A-8E98-4FDB-ACD6-949A8DEAB31D}"/>
+                <a16:creationId xmlns:a16="http://schemas.microsoft.com/office/drawing/2014/main" id="{67B3AE95-ABE6-417A-A023-265A7640B66E}"/>
               </a:ext>
             </a:extLst>
           </p:cNvPr>
@@ -1826,7 +1826,7 @@
           <p:cNvPr id="15" name="2-Data and denominators-head">
             <a:extLst xmlns:a="http://schemas.openxmlformats.org/drawingml/2006/main">
               <a:ext uri="{FF2B5EF4-FFF2-40B4-BE49-F238E27FC236}">
-                <a16:creationId xmlns:a16="http://schemas.microsoft.com/office/drawing/2014/main" id="{E4F4D8AD-03D9-4021-A309-995F948610A3}"/>
+                <a16:creationId xmlns:a16="http://schemas.microsoft.com/office/drawing/2014/main" id="{4011568D-B1BF-4A26-A76E-069A167120B3}"/>
               </a:ext>
             </a:extLst>
           </p:cNvPr>
@@ -1859,7 +1859,7 @@
           <p:cNvPr id="16" name="2-Data and denominators-title">
             <a:extLst xmlns:a="http://schemas.openxmlformats.org/drawingml/2006/main">
               <a:ext uri="{FF2B5EF4-FFF2-40B4-BE49-F238E27FC236}">
-                <a16:creationId xmlns:a16="http://schemas.microsoft.com/office/drawing/2014/main" id="{7B1F63BF-7E08-4767-A850-F72BC1FFCC18}"/>
+                <a16:creationId xmlns:a16="http://schemas.microsoft.com/office/drawing/2014/main" id="{A95C10D8-1A05-4E47-B8EA-1EF9225662E9}"/>
               </a:ext>
             </a:extLst>
           </p:cNvPr>
@@ -1909,7 +1909,7 @@
           <p:cNvPr id="17" name="2-Data and denominators-body">
             <a:extLst xmlns:a="http://schemas.openxmlformats.org/drawingml/2006/main">
               <a:ext uri="{FF2B5EF4-FFF2-40B4-BE49-F238E27FC236}">
-                <a16:creationId xmlns:a16="http://schemas.microsoft.com/office/drawing/2014/main" id="{A3AA1067-BE82-4158-840E-64571C9CC75E}"/>
+                <a16:creationId xmlns:a16="http://schemas.microsoft.com/office/drawing/2014/main" id="{BAB3777A-EBEA-4866-AA40-DB1F7A558366}"/>
               </a:ext>
             </a:extLst>
           </p:cNvPr>
@@ -1993,7 +1993,7 @@
           <p:cNvPr id="18" name="3-Why beta CIs?-box">
             <a:extLst xmlns:a="http://schemas.openxmlformats.org/drawingml/2006/main">
               <a:ext uri="{FF2B5EF4-FFF2-40B4-BE49-F238E27FC236}">
-                <a16:creationId xmlns:a16="http://schemas.microsoft.com/office/drawing/2014/main" id="{2965C92B-C640-405A-ADBC-C9E80B41581A}"/>
+                <a16:creationId xmlns:a16="http://schemas.microsoft.com/office/drawing/2014/main" id="{8482F732-0A86-468C-8641-3DAB47B2D3C4}"/>
               </a:ext>
             </a:extLst>
           </p:cNvPr>
@@ -2026,7 +2026,7 @@
           <p:cNvPr id="19" name="3-Why beta CIs?-head">
             <a:extLst xmlns:a="http://schemas.openxmlformats.org/drawingml/2006/main">
               <a:ext uri="{FF2B5EF4-FFF2-40B4-BE49-F238E27FC236}">
-                <a16:creationId xmlns:a16="http://schemas.microsoft.com/office/drawing/2014/main" id="{B15B7185-5319-429B-A82A-6673C1850E0F}"/>
+                <a16:creationId xmlns:a16="http://schemas.microsoft.com/office/drawing/2014/main" id="{F60962D2-62E0-4737-9EEE-E217F6581EE4}"/>
               </a:ext>
             </a:extLst>
           </p:cNvPr>
@@ -2059,7 +2059,7 @@
           <p:cNvPr id="20" name="3-Why beta CIs?-title">
             <a:extLst xmlns:a="http://schemas.openxmlformats.org/drawingml/2006/main">
               <a:ext uri="{FF2B5EF4-FFF2-40B4-BE49-F238E27FC236}">
-                <a16:creationId xmlns:a16="http://schemas.microsoft.com/office/drawing/2014/main" id="{A980F264-84C4-4FD9-A4D7-7A373FA43B1D}"/>
+                <a16:creationId xmlns:a16="http://schemas.microsoft.com/office/drawing/2014/main" id="{3B6E50FD-1FB2-4DF7-B4D9-E52D8A86446E}"/>
               </a:ext>
             </a:extLst>
           </p:cNvPr>
@@ -2109,7 +2109,7 @@
           <p:cNvPr id="21" name="3-Why beta CIs?-body">
             <a:extLst xmlns:a="http://schemas.openxmlformats.org/drawingml/2006/main">
               <a:ext uri="{FF2B5EF4-FFF2-40B4-BE49-F238E27FC236}">
-                <a16:creationId xmlns:a16="http://schemas.microsoft.com/office/drawing/2014/main" id="{285F4BD5-CEA6-4D03-96E7-0EFFBDD6E2F1}"/>
+                <a16:creationId xmlns:a16="http://schemas.microsoft.com/office/drawing/2014/main" id="{6256C430-152B-474E-8A43-981E1744C1EB}"/>
               </a:ext>
             </a:extLst>
           </p:cNvPr>
@@ -2193,7 +2193,7 @@
           <p:cNvPr id="22" name="4-ETL and interoperability-box">
             <a:extLst xmlns:a="http://schemas.openxmlformats.org/drawingml/2006/main">
               <a:ext uri="{FF2B5EF4-FFF2-40B4-BE49-F238E27FC236}">
-                <a16:creationId xmlns:a16="http://schemas.microsoft.com/office/drawing/2014/main" id="{91880EA2-EA10-4CFE-88ED-A262FAB4DB0F}"/>
+                <a16:creationId xmlns:a16="http://schemas.microsoft.com/office/drawing/2014/main" id="{5F30F372-BA08-4B98-94AC-CBA12D993E9A}"/>
               </a:ext>
             </a:extLst>
           </p:cNvPr>
@@ -2226,7 +2226,7 @@
           <p:cNvPr id="23" name="4-ETL and interoperability-head">
             <a:extLst xmlns:a="http://schemas.openxmlformats.org/drawingml/2006/main">
               <a:ext uri="{FF2B5EF4-FFF2-40B4-BE49-F238E27FC236}">
-                <a16:creationId xmlns:a16="http://schemas.microsoft.com/office/drawing/2014/main" id="{1B762024-61B2-48D9-BAE9-64724BE37930}"/>
+                <a16:creationId xmlns:a16="http://schemas.microsoft.com/office/drawing/2014/main" id="{1803CDC7-A769-400F-91EC-EB4B70E78ECA}"/>
               </a:ext>
             </a:extLst>
           </p:cNvPr>
@@ -2259,7 +2259,7 @@
           <p:cNvPr id="24" name="4-ETL and interoperability-title">
             <a:extLst xmlns:a="http://schemas.openxmlformats.org/drawingml/2006/main">
               <a:ext uri="{FF2B5EF4-FFF2-40B4-BE49-F238E27FC236}">
-                <a16:creationId xmlns:a16="http://schemas.microsoft.com/office/drawing/2014/main" id="{DC894CB1-2C73-43D1-B104-9269B1C52284}"/>
+                <a16:creationId xmlns:a16="http://schemas.microsoft.com/office/drawing/2014/main" id="{464022D1-F4B2-4E94-9D3B-A8B981ACC09C}"/>
               </a:ext>
             </a:extLst>
           </p:cNvPr>
@@ -2309,7 +2309,7 @@
           <p:cNvPr id="25" name="4-ETL and interoperability-body">
             <a:extLst xmlns:a="http://schemas.openxmlformats.org/drawingml/2006/main">
               <a:ext uri="{FF2B5EF4-FFF2-40B4-BE49-F238E27FC236}">
-                <a16:creationId xmlns:a16="http://schemas.microsoft.com/office/drawing/2014/main" id="{D471ECE7-FF21-4155-B48F-2B969A891D8B}"/>
+                <a16:creationId xmlns:a16="http://schemas.microsoft.com/office/drawing/2014/main" id="{A8AF85DF-4D72-42BB-BFAA-459B3841EE4E}"/>
               </a:ext>
             </a:extLst>
           </p:cNvPr>
@@ -2393,7 +2393,7 @@
           <p:cNvPr id="26" name="m-prev-metric">
             <a:extLst xmlns:a="http://schemas.openxmlformats.org/drawingml/2006/main">
               <a:ext uri="{FF2B5EF4-FFF2-40B4-BE49-F238E27FC236}">
-                <a16:creationId xmlns:a16="http://schemas.microsoft.com/office/drawing/2014/main" id="{5512A0C6-60C5-4098-AF48-3FFF76AE72DF}"/>
+                <a16:creationId xmlns:a16="http://schemas.microsoft.com/office/drawing/2014/main" id="{68AD6E7F-83DD-4622-AA30-893253870177}"/>
               </a:ext>
             </a:extLst>
           </p:cNvPr>
@@ -2426,7 +2426,7 @@
           <p:cNvPr id="27" name="m-prev-metric-title">
             <a:extLst xmlns:a="http://schemas.openxmlformats.org/drawingml/2006/main">
               <a:ext uri="{FF2B5EF4-FFF2-40B4-BE49-F238E27FC236}">
-                <a16:creationId xmlns:a16="http://schemas.microsoft.com/office/drawing/2014/main" id="{5871EDE4-E41A-4F34-A22F-9C08DF5CA0ED}"/>
+                <a16:creationId xmlns:a16="http://schemas.microsoft.com/office/drawing/2014/main" id="{4DF3C22D-6294-485C-9C22-D3B9B7400924}"/>
               </a:ext>
             </a:extLst>
           </p:cNvPr>
@@ -2466,7 +2466,7 @@
                   <a:srgbClr val="153F59"/>
                 </a:solidFill>
               </a:rPr>
-              <a:t>Diagnosis</a:t>
+              <a:t>Brazil: diagnosis</a:t>
             </a:r>
           </a:p>
         </p:txBody>
@@ -2476,7 +2476,7 @@
           <p:cNvPr id="28" name="m-prev-metric-value">
             <a:extLst xmlns:a="http://schemas.openxmlformats.org/drawingml/2006/main">
               <a:ext uri="{FF2B5EF4-FFF2-40B4-BE49-F238E27FC236}">
-                <a16:creationId xmlns:a16="http://schemas.microsoft.com/office/drawing/2014/main" id="{8056234E-A1E9-419D-9E6B-38C496A97FE2}"/>
+                <a16:creationId xmlns:a16="http://schemas.microsoft.com/office/drawing/2014/main" id="{03E0F43C-A5D7-402F-B218-2C327CD9DDCE}"/>
               </a:ext>
             </a:extLst>
           </p:cNvPr>
@@ -2526,7 +2526,7 @@
           <p:cNvPr id="29" name="m-prev-metric-note">
             <a:extLst xmlns:a="http://schemas.openxmlformats.org/drawingml/2006/main">
               <a:ext uri="{FF2B5EF4-FFF2-40B4-BE49-F238E27FC236}">
-                <a16:creationId xmlns:a16="http://schemas.microsoft.com/office/drawing/2014/main" id="{C68A1DC6-9A61-4476-A353-787C89AD7ED1}"/>
+                <a16:creationId xmlns:a16="http://schemas.microsoft.com/office/drawing/2014/main" id="{94D15DC4-AE2E-4A8C-A6C9-AA05CF947DE2}"/>
               </a:ext>
             </a:extLst>
           </p:cNvPr>
@@ -2566,7 +2566,7 @@
                   <a:srgbClr val="102536"/>
                 </a:solidFill>
               </a:rPr>
-              <a:t>National increase with non-overlapping 95% CIs.</a:t>
+              <a:t>Increase with non-overlapping 95% CIs.</a:t>
             </a:r>
           </a:p>
         </p:txBody>
@@ -2576,7 +2576,7 @@
           <p:cNvPr id="30" name="m-crisis-metric">
             <a:extLst xmlns:a="http://schemas.openxmlformats.org/drawingml/2006/main">
               <a:ext uri="{FF2B5EF4-FFF2-40B4-BE49-F238E27FC236}">
-                <a16:creationId xmlns:a16="http://schemas.microsoft.com/office/drawing/2014/main" id="{0F17A1BC-3045-4564-9C54-0A85FF8FA693}"/>
+                <a16:creationId xmlns:a16="http://schemas.microsoft.com/office/drawing/2014/main" id="{9ACA2D21-D979-4681-A445-FD656A66AC64}"/>
               </a:ext>
             </a:extLst>
           </p:cNvPr>
@@ -2609,7 +2609,7 @@
           <p:cNvPr id="31" name="m-crisis-metric-title">
             <a:extLst xmlns:a="http://schemas.openxmlformats.org/drawingml/2006/main">
               <a:ext uri="{FF2B5EF4-FFF2-40B4-BE49-F238E27FC236}">
-                <a16:creationId xmlns:a16="http://schemas.microsoft.com/office/drawing/2014/main" id="{4BF458A2-0A86-4607-81EC-DE0834D4E5D5}"/>
+                <a16:creationId xmlns:a16="http://schemas.microsoft.com/office/drawing/2014/main" id="{B7A849FD-6DE1-4972-939C-81F1C4300DC3}"/>
               </a:ext>
             </a:extLst>
           </p:cNvPr>
@@ -2649,7 +2649,7 @@
                   <a:srgbClr val="153F59"/>
                 </a:solidFill>
               </a:rPr>
-              <a:t>Attacks</a:t>
+              <a:t>Brazil: attacks</a:t>
             </a:r>
           </a:p>
         </p:txBody>
@@ -2659,7 +2659,7 @@
           <p:cNvPr id="32" name="m-crisis-metric-value">
             <a:extLst xmlns:a="http://schemas.openxmlformats.org/drawingml/2006/main">
               <a:ext uri="{FF2B5EF4-FFF2-40B4-BE49-F238E27FC236}">
-                <a16:creationId xmlns:a16="http://schemas.microsoft.com/office/drawing/2014/main" id="{7F4AEA68-7A75-4344-A347-6A93877EAB9E}"/>
+                <a16:creationId xmlns:a16="http://schemas.microsoft.com/office/drawing/2014/main" id="{401916B9-5C1D-4F79-AA0D-96F5B6C4C0A2}"/>
               </a:ext>
             </a:extLst>
           </p:cNvPr>
@@ -2709,7 +2709,7 @@
           <p:cNvPr id="33" name="m-crisis-metric-note">
             <a:extLst xmlns:a="http://schemas.openxmlformats.org/drawingml/2006/main">
               <a:ext uri="{FF2B5EF4-FFF2-40B4-BE49-F238E27FC236}">
-                <a16:creationId xmlns:a16="http://schemas.microsoft.com/office/drawing/2014/main" id="{E5F52621-823C-414F-BEAD-8A8C3A0BB27F}"/>
+                <a16:creationId xmlns:a16="http://schemas.microsoft.com/office/drawing/2014/main" id="{B94F1382-3083-4394-B0C6-949AFBA28E6E}"/>
               </a:ext>
             </a:extLst>
           </p:cNvPr>
@@ -2749,7 +2749,7 @@
                   <a:srgbClr val="102536"/>
                 </a:solidFill>
               </a:rPr>
-              <a:t>No proportional improvement in control.</a:t>
+              <a:t>Stability suggests insufficient control.</a:t>
             </a:r>
           </a:p>
         </p:txBody>
@@ -2759,7 +2759,7 @@
           <p:cNvPr id="34" name="m-meds-metric">
             <a:extLst xmlns:a="http://schemas.openxmlformats.org/drawingml/2006/main">
               <a:ext uri="{FF2B5EF4-FFF2-40B4-BE49-F238E27FC236}">
-                <a16:creationId xmlns:a16="http://schemas.microsoft.com/office/drawing/2014/main" id="{DBDA1B61-64D8-4D20-93C4-A95ED9E779E7}"/>
+                <a16:creationId xmlns:a16="http://schemas.microsoft.com/office/drawing/2014/main" id="{3FBA131A-483D-4499-AD47-4CD12EC8AE3C}"/>
               </a:ext>
             </a:extLst>
           </p:cNvPr>
@@ -2792,7 +2792,7 @@
           <p:cNvPr id="35" name="m-meds-metric-title">
             <a:extLst xmlns:a="http://schemas.openxmlformats.org/drawingml/2006/main">
               <a:ext uri="{FF2B5EF4-FFF2-40B4-BE49-F238E27FC236}">
-                <a16:creationId xmlns:a16="http://schemas.microsoft.com/office/drawing/2014/main" id="{FBD9A5E1-B949-47A5-9419-FE7192FEAB16}"/>
+                <a16:creationId xmlns:a16="http://schemas.microsoft.com/office/drawing/2014/main" id="{8E2C0D0A-A7B5-4384-9C75-FE7AC50399B4}"/>
               </a:ext>
             </a:extLst>
           </p:cNvPr>
@@ -2832,7 +2832,7 @@
                   <a:srgbClr val="153F59"/>
                 </a:solidFill>
               </a:rPr>
-              <a:t>Medication</a:t>
+              <a:t>Brazil: medication</a:t>
             </a:r>
           </a:p>
         </p:txBody>
@@ -2842,7 +2842,7 @@
           <p:cNvPr id="36" name="m-meds-metric-value">
             <a:extLst xmlns:a="http://schemas.openxmlformats.org/drawingml/2006/main">
               <a:ext uri="{FF2B5EF4-FFF2-40B4-BE49-F238E27FC236}">
-                <a16:creationId xmlns:a16="http://schemas.microsoft.com/office/drawing/2014/main" id="{5CD3CBE4-1C2A-49DE-A20F-056C3DB4B0B9}"/>
+                <a16:creationId xmlns:a16="http://schemas.microsoft.com/office/drawing/2014/main" id="{BB001C17-345F-474F-B556-5F507B37E6DF}"/>
               </a:ext>
             </a:extLst>
           </p:cNvPr>
@@ -2892,7 +2892,7 @@
           <p:cNvPr id="37" name="m-meds-metric-note">
             <a:extLst xmlns:a="http://schemas.openxmlformats.org/drawingml/2006/main">
               <a:ext uri="{FF2B5EF4-FFF2-40B4-BE49-F238E27FC236}">
-                <a16:creationId xmlns:a16="http://schemas.microsoft.com/office/drawing/2014/main" id="{6332FCC1-B577-405E-AFC4-C0A2744A898F}"/>
+                <a16:creationId xmlns:a16="http://schemas.microsoft.com/office/drawing/2014/main" id="{4A6B5D4B-7B87-47F5-9F6D-70D8FBF10535}"/>
               </a:ext>
             </a:extLst>
           </p:cNvPr>
@@ -2932,7 +2932,7 @@
                   <a:srgbClr val="102536"/>
                 </a:solidFill>
               </a:rPr>
-              <a:t>Read by denominator and CI.</a:t>
+              <a:t>Lower use among asthmatics; 95% CIs guide caution.</a:t>
             </a:r>
           </a:p>
         </p:txBody>
@@ -2942,7 +2942,7 @@
           <p:cNvPr id="38" name="m-chart-prev-caption">
             <a:extLst xmlns:a="http://schemas.openxmlformats.org/drawingml/2006/main">
               <a:ext uri="{FF2B5EF4-FFF2-40B4-BE49-F238E27FC236}">
-                <a16:creationId xmlns:a16="http://schemas.microsoft.com/office/drawing/2014/main" id="{290B8A6A-964D-431A-B58F-2684E287F22A}"/>
+                <a16:creationId xmlns:a16="http://schemas.microsoft.com/office/drawing/2014/main" id="{F72C5D3D-FFC0-4768-9CF2-2B2D19804EAB}"/>
               </a:ext>
             </a:extLst>
           </p:cNvPr>
@@ -2992,7 +2992,7 @@
           <p:cNvPr id="39" name="m-chart-prev-frame">
             <a:extLst xmlns:a="http://schemas.openxmlformats.org/drawingml/2006/main">
               <a:ext uri="{FF2B5EF4-FFF2-40B4-BE49-F238E27FC236}">
-                <a16:creationId xmlns:a16="http://schemas.microsoft.com/office/drawing/2014/main" id="{C6672C41-07D2-4B67-99BD-157845711D60}"/>
+                <a16:creationId xmlns:a16="http://schemas.microsoft.com/office/drawing/2014/main" id="{D729912F-93B5-493B-BBDA-8B1F63E02089}"/>
               </a:ext>
             </a:extLst>
           </p:cNvPr>
@@ -3029,7 +3029,7 @@
           <p:nvPr/>
         </p:nvPicPr>
         <p:blipFill>
-          <a:blip xmlns:r="http://schemas.openxmlformats.org/officeDocument/2006/relationships" xmlns:a="http://schemas.openxmlformats.org/drawingml/2006/main" r:embed="R5ded3da0c05a457b"/>
+          <a:blip xmlns:r="http://schemas.openxmlformats.org/officeDocument/2006/relationships" xmlns:a="http://schemas.openxmlformats.org/drawingml/2006/main" r:embed="Rf89a8baa8c464cc3"/>
           <a:stretch xmlns:a="http://schemas.openxmlformats.org/drawingml/2006/main"/>
         </p:blipFill>
         <p:spPr>
@@ -3047,7 +3047,7 @@
           <p:cNvPr id="41" name="m-chart-meds-caption">
             <a:extLst xmlns:a="http://schemas.openxmlformats.org/drawingml/2006/main">
               <a:ext uri="{FF2B5EF4-FFF2-40B4-BE49-F238E27FC236}">
-                <a16:creationId xmlns:a16="http://schemas.microsoft.com/office/drawing/2014/main" id="{FC3D3BB4-79E2-4DC7-A770-8284E9668826}"/>
+                <a16:creationId xmlns:a16="http://schemas.microsoft.com/office/drawing/2014/main" id="{C2C25F64-51D1-4789-9D49-E17C62EA4821}"/>
               </a:ext>
             </a:extLst>
           </p:cNvPr>
@@ -3097,7 +3097,7 @@
           <p:cNvPr id="42" name="m-chart-meds-frame">
             <a:extLst xmlns:a="http://schemas.openxmlformats.org/drawingml/2006/main">
               <a:ext uri="{FF2B5EF4-FFF2-40B4-BE49-F238E27FC236}">
-                <a16:creationId xmlns:a16="http://schemas.microsoft.com/office/drawing/2014/main" id="{AF037BB9-FC2D-4C1E-B2E1-00D58C0995F1}"/>
+                <a16:creationId xmlns:a16="http://schemas.microsoft.com/office/drawing/2014/main" id="{B4AF39D9-771C-46E0-B308-DB46A23D1C48}"/>
               </a:ext>
             </a:extLst>
           </p:cNvPr>
@@ -3134,7 +3134,7 @@
           <p:nvPr/>
         </p:nvPicPr>
         <p:blipFill>
-          <a:blip xmlns:r="http://schemas.openxmlformats.org/officeDocument/2006/relationships" xmlns:a="http://schemas.openxmlformats.org/drawingml/2006/main" r:embed="R6e6b21235e85480e"/>
+          <a:blip xmlns:r="http://schemas.openxmlformats.org/officeDocument/2006/relationships" xmlns:a="http://schemas.openxmlformats.org/drawingml/2006/main" r:embed="Rd4ffe81246324642"/>
           <a:stretch xmlns:a="http://schemas.openxmlformats.org/drawingml/2006/main"/>
         </p:blipFill>
         <p:spPr>
@@ -3152,7 +3152,7 @@
           <p:cNvPr id="44" name="m-chart-smoke-caption">
             <a:extLst xmlns:a="http://schemas.openxmlformats.org/drawingml/2006/main">
               <a:ext uri="{FF2B5EF4-FFF2-40B4-BE49-F238E27FC236}">
-                <a16:creationId xmlns:a16="http://schemas.microsoft.com/office/drawing/2014/main" id="{9CCE5D92-4DE6-4E10-91FA-C2FFD5728374}"/>
+                <a16:creationId xmlns:a16="http://schemas.microsoft.com/office/drawing/2014/main" id="{FEFE85BA-A08D-4D2C-BB9D-82158545324A}"/>
               </a:ext>
             </a:extLst>
           </p:cNvPr>
@@ -3202,7 +3202,7 @@
           <p:cNvPr id="45" name="m-chart-smoke-frame">
             <a:extLst xmlns:a="http://schemas.openxmlformats.org/drawingml/2006/main">
               <a:ext uri="{FF2B5EF4-FFF2-40B4-BE49-F238E27FC236}">
-                <a16:creationId xmlns:a16="http://schemas.microsoft.com/office/drawing/2014/main" id="{25DB8DCD-68C1-408D-887A-8707A68784B8}"/>
+                <a16:creationId xmlns:a16="http://schemas.microsoft.com/office/drawing/2014/main" id="{7ADDF11A-0808-414F-846C-5467B6E9B5AD}"/>
               </a:ext>
             </a:extLst>
           </p:cNvPr>
@@ -3239,7 +3239,7 @@
           <p:nvPr/>
         </p:nvPicPr>
         <p:blipFill>
-          <a:blip xmlns:r="http://schemas.openxmlformats.org/officeDocument/2006/relationships" xmlns:a="http://schemas.openxmlformats.org/drawingml/2006/main" r:embed="Rc11ccae5299848db"/>
+          <a:blip xmlns:r="http://schemas.openxmlformats.org/officeDocument/2006/relationships" xmlns:a="http://schemas.openxmlformats.org/drawingml/2006/main" r:embed="Rd64d1aa4aaca4683"/>
           <a:stretch xmlns:a="http://schemas.openxmlformats.org/drawingml/2006/main"/>
         </p:blipFill>
         <p:spPr>
@@ -3257,7 +3257,7 @@
           <p:cNvPr id="47" name="5-Key findings-box">
             <a:extLst xmlns:a="http://schemas.openxmlformats.org/drawingml/2006/main">
               <a:ext uri="{FF2B5EF4-FFF2-40B4-BE49-F238E27FC236}">
-                <a16:creationId xmlns:a16="http://schemas.microsoft.com/office/drawing/2014/main" id="{6C14D8FD-CEEA-4DA9-8B63-C49028ABE89C}"/>
+                <a16:creationId xmlns:a16="http://schemas.microsoft.com/office/drawing/2014/main" id="{5BA8BE57-FCA1-4CA7-AF40-A75443A374D8}"/>
               </a:ext>
             </a:extLst>
           </p:cNvPr>
@@ -3290,7 +3290,7 @@
           <p:cNvPr id="48" name="5-Key findings-head">
             <a:extLst xmlns:a="http://schemas.openxmlformats.org/drawingml/2006/main">
               <a:ext uri="{FF2B5EF4-FFF2-40B4-BE49-F238E27FC236}">
-                <a16:creationId xmlns:a16="http://schemas.microsoft.com/office/drawing/2014/main" id="{807E4494-785D-4F46-B32B-0C201345D8DD}"/>
+                <a16:creationId xmlns:a16="http://schemas.microsoft.com/office/drawing/2014/main" id="{750AD8D1-AA15-49CC-8411-D6BCA0019080}"/>
               </a:ext>
             </a:extLst>
           </p:cNvPr>
@@ -3323,7 +3323,7 @@
           <p:cNvPr id="49" name="5-Key findings-title">
             <a:extLst xmlns:a="http://schemas.openxmlformats.org/drawingml/2006/main">
               <a:ext uri="{FF2B5EF4-FFF2-40B4-BE49-F238E27FC236}">
-                <a16:creationId xmlns:a16="http://schemas.microsoft.com/office/drawing/2014/main" id="{766FDB1E-D807-4655-8E8A-A4DC2B256D87}"/>
+                <a16:creationId xmlns:a16="http://schemas.microsoft.com/office/drawing/2014/main" id="{6FB4EFB2-04C1-49A7-9459-F4639E54FC10}"/>
               </a:ext>
             </a:extLst>
           </p:cNvPr>
@@ -3373,7 +3373,7 @@
           <p:cNvPr id="50" name="5-Key findings-body">
             <a:extLst xmlns:a="http://schemas.openxmlformats.org/drawingml/2006/main">
               <a:ext uri="{FF2B5EF4-FFF2-40B4-BE49-F238E27FC236}">
-                <a16:creationId xmlns:a16="http://schemas.microsoft.com/office/drawing/2014/main" id="{1B56CBDC-CACA-47AB-A812-8C1A0235CCFB}"/>
+                <a16:creationId xmlns:a16="http://schemas.microsoft.com/office/drawing/2014/main" id="{E67360EE-C5D3-46E1-8815-478EB0EA48B6}"/>
               </a:ext>
             </a:extLst>
           </p:cNvPr>
@@ -3413,7 +3413,7 @@
                   <a:srgbClr val="102536"/>
                 </a:solidFill>
               </a:rPr>
-              <a:t>• Physician-diagnosed asthma: 4.41% in 2013 to 5.40% in 2019, with non-overlapping CIs.</a:t>
+              <a:t>• Brazil: physician-diagnosed asthma increased from 4.41% in 2013 to 5.40% in 2019, with non-overlapping 95% CIs.</a:t>
             </a:r>
           </a:p>
           <a:p xmlns:a="http://schemas.openxmlformats.org/drawingml/2006/main">
@@ -3430,7 +3430,7 @@
                   <a:srgbClr val="102536"/>
                 </a:solidFill>
               </a:rPr>
-              <a:t>• Attacks in the previous 12 months: 38.3% to 37.7%, indicating approximate stability.</a:t>
+              <a:t>• Brazil: attacks in the previous 12 months were stable, from 38.3% to 37.7%.</a:t>
             </a:r>
           </a:p>
           <a:p xmlns:a="http://schemas.openxmlformats.org/drawingml/2006/main">
@@ -3447,7 +3447,7 @@
                   <a:srgbClr val="102536"/>
                 </a:solidFill>
               </a:rPr>
-              <a:t>• Oral/inhaler medication use among people with asthma: 81.5% to 64.4%; reading requires denominator and CI caution.</a:t>
+              <a:t>• Brazil: oral/inhaler medication use among people with asthma changed from 81.5% to 64.4%; interpretation should consider 95% CIs, the diagnosed group and the population rate.</a:t>
             </a:r>
           </a:p>
           <a:p xmlns:a="http://schemas.openxmlformats.org/drawingml/2006/main">
@@ -3474,7 +3474,7 @@
           <p:cNvPr id="51" name="6-Applied discussion-box">
             <a:extLst xmlns:a="http://schemas.openxmlformats.org/drawingml/2006/main">
               <a:ext uri="{FF2B5EF4-FFF2-40B4-BE49-F238E27FC236}">
-                <a16:creationId xmlns:a16="http://schemas.microsoft.com/office/drawing/2014/main" id="{A8E63FC3-EA75-46B1-9C11-0D4372298A98}"/>
+                <a16:creationId xmlns:a16="http://schemas.microsoft.com/office/drawing/2014/main" id="{C4A845A2-9299-4960-9407-DD2BD89EF855}"/>
               </a:ext>
             </a:extLst>
           </p:cNvPr>
@@ -3507,7 +3507,7 @@
           <p:cNvPr id="52" name="6-Applied discussion-head">
             <a:extLst xmlns:a="http://schemas.openxmlformats.org/drawingml/2006/main">
               <a:ext uri="{FF2B5EF4-FFF2-40B4-BE49-F238E27FC236}">
-                <a16:creationId xmlns:a16="http://schemas.microsoft.com/office/drawing/2014/main" id="{851D27FC-4DF4-465C-9406-3A5DDB4BBECD}"/>
+                <a16:creationId xmlns:a16="http://schemas.microsoft.com/office/drawing/2014/main" id="{8D8BCC2C-B5A9-4A2B-A277-6D30ACF5AEE1}"/>
               </a:ext>
             </a:extLst>
           </p:cNvPr>
@@ -3540,7 +3540,7 @@
           <p:cNvPr id="53" name="6-Applied discussion-title">
             <a:extLst xmlns:a="http://schemas.openxmlformats.org/drawingml/2006/main">
               <a:ext uri="{FF2B5EF4-FFF2-40B4-BE49-F238E27FC236}">
-                <a16:creationId xmlns:a16="http://schemas.microsoft.com/office/drawing/2014/main" id="{30E92A5F-9405-406F-ACFE-3A06C5D8778B}"/>
+                <a16:creationId xmlns:a16="http://schemas.microsoft.com/office/drawing/2014/main" id="{55D30B12-05D4-4C44-A279-27080E5117BF}"/>
               </a:ext>
             </a:extLst>
           </p:cNvPr>
@@ -3590,7 +3590,7 @@
           <p:cNvPr id="54" name="6-Applied discussion-body">
             <a:extLst xmlns:a="http://schemas.openxmlformats.org/drawingml/2006/main">
               <a:ext uri="{FF2B5EF4-FFF2-40B4-BE49-F238E27FC236}">
-                <a16:creationId xmlns:a16="http://schemas.microsoft.com/office/drawing/2014/main" id="{E0994A0D-24AD-41F3-B15E-D56CFBC10B2C}"/>
+                <a16:creationId xmlns:a16="http://schemas.microsoft.com/office/drawing/2014/main" id="{9D38AFAF-04A6-4B06-8DBC-DE3A5042E2AC}"/>
               </a:ext>
             </a:extLst>
           </p:cNvPr>
@@ -3630,6 +3630,23 @@
                   <a:srgbClr val="102536"/>
                 </a:solidFill>
               </a:rPr>
+              <a:t>• The pattern diagnosis↑, attacks≈ and medication use↓ suggests broader asthma recognition without proportional improvement in control.</a:t>
+            </a:r>
+          </a:p>
+          <a:p xmlns:a="http://schemas.openxmlformats.org/drawingml/2006/main">
+            <a:pPr algn="l">
+              <a:defRPr sz="555" b="0">
+                <a:solidFill>
+                  <a:srgbClr val="102536"/>
+                </a:solidFill>
+              </a:defRPr>
+            </a:pPr>
+            <a:r>
+              <a:rPr sz="555" b="0">
+                <a:solidFill>
+                  <a:srgbClr val="102536"/>
+                </a:solidFill>
+              </a:rPr>
               <a:t>• The diagnosis increase may reflect higher occurrence, better diagnostic access or both.</a:t>
             </a:r>
           </a:p>
@@ -3647,23 +3664,6 @@
                   <a:srgbClr val="102536"/>
                 </a:solidFill>
               </a:rPr>
-              <a:t>• Stable attacks suggest clinical management did not improve proportionally.</a:t>
-            </a:r>
-          </a:p>
-          <a:p xmlns:a="http://schemas.openxmlformats.org/drawingml/2006/main">
-            <a:pPr algn="l">
-              <a:defRPr sz="555" b="0">
-                <a:solidFill>
-                  <a:srgbClr val="102536"/>
-                </a:solidFill>
-              </a:defRPr>
-            </a:pPr>
-            <a:r>
-              <a:rPr sz="555" b="0">
-                <a:solidFill>
-                  <a:srgbClr val="102536"/>
-                </a:solidFill>
-              </a:rPr>
               <a:t>• Asthma control depends on medication access, clinical follow-up, education, exposure control and non-pharmacological interventions.</a:t>
             </a:r>
           </a:p>
@@ -3674,7 +3674,7 @@
           <p:cNvPr id="55" name="7-Central conclusion-box">
             <a:extLst xmlns:a="http://schemas.openxmlformats.org/drawingml/2006/main">
               <a:ext uri="{FF2B5EF4-FFF2-40B4-BE49-F238E27FC236}">
-                <a16:creationId xmlns:a16="http://schemas.microsoft.com/office/drawing/2014/main" id="{8121A1F6-B696-4ED7-911F-96D3A828863D}"/>
+                <a16:creationId xmlns:a16="http://schemas.microsoft.com/office/drawing/2014/main" id="{8E5A80FC-72A4-4E30-A620-45877EF9E521}"/>
               </a:ext>
             </a:extLst>
           </p:cNvPr>
@@ -3707,7 +3707,7 @@
           <p:cNvPr id="56" name="7-Central conclusion-head">
             <a:extLst xmlns:a="http://schemas.openxmlformats.org/drawingml/2006/main">
               <a:ext uri="{FF2B5EF4-FFF2-40B4-BE49-F238E27FC236}">
-                <a16:creationId xmlns:a16="http://schemas.microsoft.com/office/drawing/2014/main" id="{88D8D64F-C10C-4580-91B0-6664E900FB69}"/>
+                <a16:creationId xmlns:a16="http://schemas.microsoft.com/office/drawing/2014/main" id="{6820CA92-336D-4A8E-8DE7-4A76893CA2C4}"/>
               </a:ext>
             </a:extLst>
           </p:cNvPr>
@@ -3740,7 +3740,7 @@
           <p:cNvPr id="57" name="7-Central conclusion-title">
             <a:extLst xmlns:a="http://schemas.openxmlformats.org/drawingml/2006/main">
               <a:ext uri="{FF2B5EF4-FFF2-40B4-BE49-F238E27FC236}">
-                <a16:creationId xmlns:a16="http://schemas.microsoft.com/office/drawing/2014/main" id="{AB2F1219-34F5-4E7D-8141-35B051BA33B9}"/>
+                <a16:creationId xmlns:a16="http://schemas.microsoft.com/office/drawing/2014/main" id="{3D1EE876-7A28-4C1E-B5EA-6BCC06B22BF7}"/>
               </a:ext>
             </a:extLst>
           </p:cNvPr>
@@ -3790,7 +3790,7 @@
           <p:cNvPr id="58" name="7-Central conclusion-body">
             <a:extLst xmlns:a="http://schemas.openxmlformats.org/drawingml/2006/main">
               <a:ext uri="{FF2B5EF4-FFF2-40B4-BE49-F238E27FC236}">
-                <a16:creationId xmlns:a16="http://schemas.microsoft.com/office/drawing/2014/main" id="{C3555E63-B793-49A9-9312-9A237E68947B}"/>
+                <a16:creationId xmlns:a16="http://schemas.microsoft.com/office/drawing/2014/main" id="{8DBA6F29-57B7-4219-8450-463AAF685F6E}"/>
               </a:ext>
             </a:extLst>
           </p:cNvPr>
@@ -3874,7 +3874,7 @@
           <p:cNvPr id="59" name="m-chart-crisis-caption">
             <a:extLst xmlns:a="http://schemas.openxmlformats.org/drawingml/2006/main">
               <a:ext uri="{FF2B5EF4-FFF2-40B4-BE49-F238E27FC236}">
-                <a16:creationId xmlns:a16="http://schemas.microsoft.com/office/drawing/2014/main" id="{2274B125-517D-4DCE-9E26-E7C008F989A5}"/>
+                <a16:creationId xmlns:a16="http://schemas.microsoft.com/office/drawing/2014/main" id="{A3060C47-F68B-4A96-AFBE-BB7A17F796B8}"/>
               </a:ext>
             </a:extLst>
           </p:cNvPr>
@@ -3924,7 +3924,7 @@
           <p:cNvPr id="60" name="m-chart-crisis-frame">
             <a:extLst xmlns:a="http://schemas.openxmlformats.org/drawingml/2006/main">
               <a:ext uri="{FF2B5EF4-FFF2-40B4-BE49-F238E27FC236}">
-                <a16:creationId xmlns:a16="http://schemas.microsoft.com/office/drawing/2014/main" id="{9B48D0BC-2398-4EC0-8C7D-04809EACD995}"/>
+                <a16:creationId xmlns:a16="http://schemas.microsoft.com/office/drawing/2014/main" id="{FB22D81E-4048-42D6-BF3A-930C8DB8B552}"/>
               </a:ext>
             </a:extLst>
           </p:cNvPr>
@@ -3961,7 +3961,7 @@
           <p:nvPr/>
         </p:nvPicPr>
         <p:blipFill>
-          <a:blip xmlns:r="http://schemas.openxmlformats.org/officeDocument/2006/relationships" xmlns:a="http://schemas.openxmlformats.org/drawingml/2006/main" r:embed="Rd59cbeaac26044f2"/>
+          <a:blip xmlns:r="http://schemas.openxmlformats.org/officeDocument/2006/relationships" xmlns:a="http://schemas.openxmlformats.org/drawingml/2006/main" r:embed="Ree6655d8718e48cb"/>
           <a:stretch xmlns:a="http://schemas.openxmlformats.org/drawingml/2006/main"/>
         </p:blipFill>
         <p:spPr>
@@ -3979,7 +3979,7 @@
           <p:cNvPr id="62" name="qr-box">
             <a:extLst xmlns:a="http://schemas.openxmlformats.org/drawingml/2006/main">
               <a:ext uri="{FF2B5EF4-FFF2-40B4-BE49-F238E27FC236}">
-                <a16:creationId xmlns:a16="http://schemas.microsoft.com/office/drawing/2014/main" id="{34283B7C-DB80-46AC-8D76-82BB1570C26F}"/>
+                <a16:creationId xmlns:a16="http://schemas.microsoft.com/office/drawing/2014/main" id="{DF652B81-CE7F-4927-B6BE-326612E1B27E}"/>
               </a:ext>
             </a:extLst>
           </p:cNvPr>
@@ -4016,7 +4016,7 @@
           <p:nvPr/>
         </p:nvPicPr>
         <p:blipFill>
-          <a:blip xmlns:r="http://schemas.openxmlformats.org/officeDocument/2006/relationships" xmlns:a="http://schemas.openxmlformats.org/drawingml/2006/main" r:embed="Rb0b91ed4fb884748"/>
+          <a:blip xmlns:r="http://schemas.openxmlformats.org/officeDocument/2006/relationships" xmlns:a="http://schemas.openxmlformats.org/drawingml/2006/main" r:embed="R9326a2788d8143dc"/>
           <a:stretch xmlns:a="http://schemas.openxmlformats.org/drawingml/2006/main"/>
         </p:blipFill>
         <p:spPr>
@@ -4034,7 +4034,7 @@
           <p:cNvPr id="64" name="qr-label">
             <a:extLst xmlns:a="http://schemas.openxmlformats.org/drawingml/2006/main">
               <a:ext uri="{FF2B5EF4-FFF2-40B4-BE49-F238E27FC236}">
-                <a16:creationId xmlns:a16="http://schemas.microsoft.com/office/drawing/2014/main" id="{83D23F73-ADF2-4076-A04A-6A61B2B35183}"/>
+                <a16:creationId xmlns:a16="http://schemas.microsoft.com/office/drawing/2014/main" id="{DF26ED3C-42D4-4AAB-A537-A114AA7F748C}"/>
               </a:ext>
             </a:extLst>
           </p:cNvPr>
@@ -4101,7 +4101,7 @@
           <p:cNvPr id="65" name="references-box">
             <a:extLst xmlns:a="http://schemas.openxmlformats.org/drawingml/2006/main">
               <a:ext uri="{FF2B5EF4-FFF2-40B4-BE49-F238E27FC236}">
-                <a16:creationId xmlns:a16="http://schemas.microsoft.com/office/drawing/2014/main" id="{5F036B7B-E7F5-4538-9335-C2181798718D}"/>
+                <a16:creationId xmlns:a16="http://schemas.microsoft.com/office/drawing/2014/main" id="{3CAB8BFE-8322-4B0F-98F5-8D054493489E}"/>
               </a:ext>
             </a:extLst>
           </p:cNvPr>
@@ -4134,7 +4134,7 @@
           <p:cNvPr id="66" name="references-title">
             <a:extLst xmlns:a="http://schemas.openxmlformats.org/drawingml/2006/main">
               <a:ext uri="{FF2B5EF4-FFF2-40B4-BE49-F238E27FC236}">
-                <a16:creationId xmlns:a16="http://schemas.microsoft.com/office/drawing/2014/main" id="{78751C3B-6DAB-4964-9844-6E217D35EC66}"/>
+                <a16:creationId xmlns:a16="http://schemas.microsoft.com/office/drawing/2014/main" id="{21838430-1C23-42AD-B42D-492838EA0D12}"/>
               </a:ext>
             </a:extLst>
           </p:cNvPr>
@@ -4184,7 +4184,7 @@
           <p:cNvPr id="67" name="references-body">
             <a:extLst xmlns:a="http://schemas.openxmlformats.org/drawingml/2006/main">
               <a:ext uri="{FF2B5EF4-FFF2-40B4-BE49-F238E27FC236}">
-                <a16:creationId xmlns:a16="http://schemas.microsoft.com/office/drawing/2014/main" id="{0337290F-DB9E-4653-B80F-08F55504614A}"/>
+                <a16:creationId xmlns:a16="http://schemas.microsoft.com/office/drawing/2014/main" id="{E6E0F459-63B3-4F1A-9113-9C57A55008A7}"/>
               </a:ext>
             </a:extLst>
           </p:cNvPr>
@@ -4436,7 +4436,7 @@
     </p:spTree>
     <p:extLst>
       <p:ext uri="{BB962C8B-B14F-4D97-AF65-F5344CB8AC3E}">
-        <p14:creationId xmlns:p14="http://schemas.microsoft.com/office/powerpoint/2010/main" val="1040396622"/>
+        <p14:creationId xmlns:p14="http://schemas.microsoft.com/office/powerpoint/2010/main" val="1714908983"/>
       </p:ext>
     </p:extLst>
   </p:cSld>

--- a/outputs/posters/poster_pns_asma_morrison_en.pptx
+++ b/outputs/posters/poster_pns_asma_morrison_en.pptx
@@ -2,13 +2,13 @@
 <file path=ppt/presentation.xml><?xml version="1.0" encoding="utf-8"?>
 <p:presentation xmlns:p="http://schemas.openxmlformats.org/presentationml/2006/main">
   <p:sldMasterIdLst>
-    <p:sldMasterId xmlns:r="http://schemas.openxmlformats.org/officeDocument/2006/relationships" id="2147483648" r:id="R9cec65c0206f4760"/>
+    <p:sldMasterId xmlns:r="http://schemas.openxmlformats.org/officeDocument/2006/relationships" id="2147483648" r:id="R2da2ef1d5af344fd"/>
   </p:sldMasterIdLst>
   <p:notesMasterIdLst>
-    <p:notesMasterId xmlns:r="http://schemas.openxmlformats.org/officeDocument/2006/relationships" r:id="Rcad50becf0914b2c"/>
+    <p:notesMasterId xmlns:r="http://schemas.openxmlformats.org/officeDocument/2006/relationships" r:id="R6d7ffd8de59a4810"/>
   </p:notesMasterIdLst>
   <p:sldIdLst>
-    <p:sldId xmlns:r="http://schemas.openxmlformats.org/officeDocument/2006/relationships" id="256" r:id="R5ce6d1a2170f425e"/>
+    <p:sldId xmlns:r="http://schemas.openxmlformats.org/officeDocument/2006/relationships" id="256" r:id="Rf33a82278b664e36"/>
   </p:sldIdLst>
   <p:sldSz cx="9525000" cy="13468350"/>
   <p:notesSz cx="6858000" cy="9144000"/>
@@ -601,7 +601,7 @@
   </p:cSld>
   <p:clrMap bg1="lt1" tx1="dk1" bg2="lt2" tx2="dk2" accent1="accent1" accent2="accent2" accent3="accent3" accent4="accent4" accent5="accent5" accent6="accent6" hlink="hlink" folHlink="folHlink"/>
   <p:sldLayoutIdLst>
-    <p:sldLayoutId xmlns:r="http://schemas.openxmlformats.org/officeDocument/2006/relationships" id="2147483649" r:id="Rb379ca1a9a9643c5"/>
+    <p:sldLayoutId xmlns:r="http://schemas.openxmlformats.org/officeDocument/2006/relationships" id="2147483649" r:id="R4dc07bc70e634c0d"/>
   </p:sldLayoutIdLst>
   <p:txStyles>
     <p:titleStyle>
@@ -1149,14 +1149,14 @@
       </p:grpSpPr>
       <p:pic>
         <p:nvPicPr>
-          <p:cNvPr id="68" name=""/>
+          <p:cNvPr id="64" name=""/>
           <p:cNvPicPr>
             <a:picLocks xmlns:a="http://schemas.openxmlformats.org/drawingml/2006/main" noChangeAspect="1"/>
           </p:cNvPicPr>
           <p:nvPr/>
         </p:nvPicPr>
         <p:blipFill>
-          <a:blip xmlns:r="http://schemas.openxmlformats.org/officeDocument/2006/relationships" xmlns:a="http://schemas.openxmlformats.org/drawingml/2006/main" r:embed="R380cd81144134b78"/>
+          <a:blip xmlns:r="http://schemas.openxmlformats.org/officeDocument/2006/relationships" xmlns:a="http://schemas.openxmlformats.org/drawingml/2006/main" r:embed="R23bc01011c684544"/>
           <a:srcRect xmlns:a="http://schemas.openxmlformats.org/drawingml/2006/main" l="0" t="38622" r="0" b="38622"/>
           <a:stretch xmlns:a="http://schemas.openxmlformats.org/drawingml/2006/main">
             <a:fillRect l="0" t="0" r="0" b="0"/>
@@ -1174,14 +1174,14 @@
       </p:pic>
       <p:pic>
         <p:nvPicPr>
-          <p:cNvPr id="69" name=""/>
+          <p:cNvPr id="65" name=""/>
           <p:cNvPicPr>
             <a:picLocks xmlns:a="http://schemas.openxmlformats.org/drawingml/2006/main" noChangeAspect="1"/>
           </p:cNvPicPr>
           <p:nvPr/>
         </p:nvPicPr>
         <p:blipFill>
-          <a:blip xmlns:r="http://schemas.openxmlformats.org/officeDocument/2006/relationships" xmlns:a="http://schemas.openxmlformats.org/drawingml/2006/main" r:embed="R391e49d391cf4729"/>
+          <a:blip xmlns:r="http://schemas.openxmlformats.org/officeDocument/2006/relationships" xmlns:a="http://schemas.openxmlformats.org/drawingml/2006/main" r:embed="Rdb324d8a126448dd"/>
           <a:stretch xmlns:a="http://schemas.openxmlformats.org/drawingml/2006/main"/>
         </p:blipFill>
         <p:spPr>
@@ -1196,14 +1196,14 @@
       </p:pic>
       <p:pic>
         <p:nvPicPr>
-          <p:cNvPr id="70" name=""/>
+          <p:cNvPr id="66" name=""/>
           <p:cNvPicPr>
             <a:picLocks xmlns:a="http://schemas.openxmlformats.org/drawingml/2006/main" noChangeAspect="1"/>
           </p:cNvPicPr>
           <p:nvPr/>
         </p:nvPicPr>
         <p:blipFill>
-          <a:blip xmlns:r="http://schemas.openxmlformats.org/officeDocument/2006/relationships" xmlns:a="http://schemas.openxmlformats.org/drawingml/2006/main" r:embed="R62ba382a75f74f95"/>
+          <a:blip xmlns:r="http://schemas.openxmlformats.org/officeDocument/2006/relationships" xmlns:a="http://schemas.openxmlformats.org/drawingml/2006/main" r:embed="Rf0d67e9d4d674a24"/>
           <a:stretch xmlns:a="http://schemas.openxmlformats.org/drawingml/2006/main"/>
         </p:blipFill>
         <p:spPr>
@@ -1221,7 +1221,7 @@
           <p:cNvPr id="4" name="morrison-title">
             <a:extLst xmlns:a="http://schemas.openxmlformats.org/drawingml/2006/main">
               <a:ext uri="{FF2B5EF4-FFF2-40B4-BE49-F238E27FC236}">
-                <a16:creationId xmlns:a16="http://schemas.microsoft.com/office/drawing/2014/main" id="{A6FDA2E4-6434-4CA9-AED2-053D6FBAAC87}"/>
+                <a16:creationId xmlns:a16="http://schemas.microsoft.com/office/drawing/2014/main" id="{142E962B-AE39-4875-B258-83253AE861AF}"/>
               </a:ext>
             </a:extLst>
           </p:cNvPr>
@@ -1271,7 +1271,7 @@
           <p:cNvPr id="5" name="morrison-authors">
             <a:extLst xmlns:a="http://schemas.openxmlformats.org/drawingml/2006/main">
               <a:ext uri="{FF2B5EF4-FFF2-40B4-BE49-F238E27FC236}">
-                <a16:creationId xmlns:a16="http://schemas.microsoft.com/office/drawing/2014/main" id="{1C31DED5-B208-4E9D-B4CF-8D350E70F894}"/>
+                <a16:creationId xmlns:a16="http://schemas.microsoft.com/office/drawing/2014/main" id="{8290CFC9-914C-4594-8961-4C1FC2044E01}"/>
               </a:ext>
             </a:extLst>
           </p:cNvPr>
@@ -1321,7 +1321,7 @@
           <p:cNvPr id="6" name="central-message">
             <a:extLst xmlns:a="http://schemas.openxmlformats.org/drawingml/2006/main">
               <a:ext uri="{FF2B5EF4-FFF2-40B4-BE49-F238E27FC236}">
-                <a16:creationId xmlns:a16="http://schemas.microsoft.com/office/drawing/2014/main" id="{747E8E90-CF8E-4440-A0DB-E0D7C14EE9BB}"/>
+                <a16:creationId xmlns:a16="http://schemas.microsoft.com/office/drawing/2014/main" id="{D3A3CAD2-F3B1-4570-A7C8-5B545AB6E72B}"/>
               </a:ext>
             </a:extLst>
           </p:cNvPr>
@@ -1365,7 +1365,7 @@
                   <a:srgbClr val="FFFFFF"/>
                 </a:solidFill>
               </a:rPr>
-              <a:t>Physician-diagnosed asthma increased in Brazil; attacks and medication-use indicators did not show proportional improvement in disease control.</a:t>
+              <a:t>Asthma diagnosis increased in Brazil; respiratory absenteeism shows potential productivity loss and economic impact.</a:t>
             </a:r>
           </a:p>
         </p:txBody>
@@ -1375,7 +1375,7 @@
           <p:cNvPr id="7" name="1-Method in one line-box">
             <a:extLst xmlns:a="http://schemas.openxmlformats.org/drawingml/2006/main">
               <a:ext uri="{FF2B5EF4-FFF2-40B4-BE49-F238E27FC236}">
-                <a16:creationId xmlns:a16="http://schemas.microsoft.com/office/drawing/2014/main" id="{3AEEAECC-EF80-47F6-B008-84078C4BCD5E}"/>
+                <a16:creationId xmlns:a16="http://schemas.microsoft.com/office/drawing/2014/main" id="{870C86D8-0E10-4DBA-82B2-5BCEC58F73CE}"/>
               </a:ext>
             </a:extLst>
           </p:cNvPr>
@@ -1408,7 +1408,7 @@
           <p:cNvPr id="8" name="1-Method in one line-head">
             <a:extLst xmlns:a="http://schemas.openxmlformats.org/drawingml/2006/main">
               <a:ext uri="{FF2B5EF4-FFF2-40B4-BE49-F238E27FC236}">
-                <a16:creationId xmlns:a16="http://schemas.microsoft.com/office/drawing/2014/main" id="{D944320B-A0CA-44D1-97C0-A93934DA2D4E}"/>
+                <a16:creationId xmlns:a16="http://schemas.microsoft.com/office/drawing/2014/main" id="{CE6880CA-76A1-4C92-BAD4-53C2AF76C7DE}"/>
               </a:ext>
             </a:extLst>
           </p:cNvPr>
@@ -1441,7 +1441,7 @@
           <p:cNvPr id="9" name="1-Method in one line-title">
             <a:extLst xmlns:a="http://schemas.openxmlformats.org/drawingml/2006/main">
               <a:ext uri="{FF2B5EF4-FFF2-40B4-BE49-F238E27FC236}">
-                <a16:creationId xmlns:a16="http://schemas.microsoft.com/office/drawing/2014/main" id="{E9AB9A87-C544-4169-A590-C6670CA63B97}"/>
+                <a16:creationId xmlns:a16="http://schemas.microsoft.com/office/drawing/2014/main" id="{D74270D0-BF45-401C-A496-86B03929FEC6}"/>
               </a:ext>
             </a:extLst>
           </p:cNvPr>
@@ -1491,7 +1491,7 @@
           <p:cNvPr id="10" name="1-Method in one line-body">
             <a:extLst xmlns:a="http://schemas.openxmlformats.org/drawingml/2006/main">
               <a:ext uri="{FF2B5EF4-FFF2-40B4-BE49-F238E27FC236}">
-                <a16:creationId xmlns:a16="http://schemas.microsoft.com/office/drawing/2014/main" id="{50F98766-E508-4F20-99F5-6EA52F69054A}"/>
+                <a16:creationId xmlns:a16="http://schemas.microsoft.com/office/drawing/2014/main" id="{FBE7A65A-E1FE-48DD-8B8E-78ECA91C1211}"/>
               </a:ext>
             </a:extLst>
           </p:cNvPr>
@@ -1592,7 +1592,7 @@
           <p:cNvPr id="11" name="morrison-formula-box">
             <a:extLst xmlns:a="http://schemas.openxmlformats.org/drawingml/2006/main">
               <a:ext uri="{FF2B5EF4-FFF2-40B4-BE49-F238E27FC236}">
-                <a16:creationId xmlns:a16="http://schemas.microsoft.com/office/drawing/2014/main" id="{B042266B-EB44-4EEF-9A3E-154610D15F03}"/>
+                <a16:creationId xmlns:a16="http://schemas.microsoft.com/office/drawing/2014/main" id="{F02AF21C-8241-44C5-8095-0374F8834E34}"/>
               </a:ext>
             </a:extLst>
           </p:cNvPr>
@@ -1625,7 +1625,7 @@
           <p:cNvPr id="12" name="morrison-formula-title">
             <a:extLst xmlns:a="http://schemas.openxmlformats.org/drawingml/2006/main">
               <a:ext uri="{FF2B5EF4-FFF2-40B4-BE49-F238E27FC236}">
-                <a16:creationId xmlns:a16="http://schemas.microsoft.com/office/drawing/2014/main" id="{470AEA45-6F33-4B35-BD2E-7B8A7DF5F001}"/>
+                <a16:creationId xmlns:a16="http://schemas.microsoft.com/office/drawing/2014/main" id="{75C011E8-74A7-4650-BB65-3988AD49C63C}"/>
               </a:ext>
             </a:extLst>
           </p:cNvPr>
@@ -1675,7 +1675,7 @@
           <p:cNvPr id="13" name="morrison-formula">
             <a:extLst xmlns:a="http://schemas.openxmlformats.org/drawingml/2006/main">
               <a:ext uri="{FF2B5EF4-FFF2-40B4-BE49-F238E27FC236}">
-                <a16:creationId xmlns:a16="http://schemas.microsoft.com/office/drawing/2014/main" id="{6048815D-3779-4834-923B-01EDC0DDD3F1}"/>
+                <a16:creationId xmlns:a16="http://schemas.microsoft.com/office/drawing/2014/main" id="{977D5E72-E325-4976-84F2-21A0D7D0B952}"/>
               </a:ext>
             </a:extLst>
           </p:cNvPr>
@@ -1793,7 +1793,7 @@
           <p:cNvPr id="14" name="2-Data and denominators-box">
             <a:extLst xmlns:a="http://schemas.openxmlformats.org/drawingml/2006/main">
               <a:ext uri="{FF2B5EF4-FFF2-40B4-BE49-F238E27FC236}">
-                <a16:creationId xmlns:a16="http://schemas.microsoft.com/office/drawing/2014/main" id="{67B3AE95-ABE6-417A-A023-265A7640B66E}"/>
+                <a16:creationId xmlns:a16="http://schemas.microsoft.com/office/drawing/2014/main" id="{CA2AC51D-24B8-483D-B848-4D63543A11E4}"/>
               </a:ext>
             </a:extLst>
           </p:cNvPr>
@@ -1826,7 +1826,7 @@
           <p:cNvPr id="15" name="2-Data and denominators-head">
             <a:extLst xmlns:a="http://schemas.openxmlformats.org/drawingml/2006/main">
               <a:ext uri="{FF2B5EF4-FFF2-40B4-BE49-F238E27FC236}">
-                <a16:creationId xmlns:a16="http://schemas.microsoft.com/office/drawing/2014/main" id="{4011568D-B1BF-4A26-A76E-069A167120B3}"/>
+                <a16:creationId xmlns:a16="http://schemas.microsoft.com/office/drawing/2014/main" id="{363368C9-43A9-4783-8A3D-D7803E85622D}"/>
               </a:ext>
             </a:extLst>
           </p:cNvPr>
@@ -1859,7 +1859,7 @@
           <p:cNvPr id="16" name="2-Data and denominators-title">
             <a:extLst xmlns:a="http://schemas.openxmlformats.org/drawingml/2006/main">
               <a:ext uri="{FF2B5EF4-FFF2-40B4-BE49-F238E27FC236}">
-                <a16:creationId xmlns:a16="http://schemas.microsoft.com/office/drawing/2014/main" id="{A95C10D8-1A05-4E47-B8EA-1EF9225662E9}"/>
+                <a16:creationId xmlns:a16="http://schemas.microsoft.com/office/drawing/2014/main" id="{48D928BA-1C98-41C2-873A-E5B294C10650}"/>
               </a:ext>
             </a:extLst>
           </p:cNvPr>
@@ -1909,7 +1909,7 @@
           <p:cNvPr id="17" name="2-Data and denominators-body">
             <a:extLst xmlns:a="http://schemas.openxmlformats.org/drawingml/2006/main">
               <a:ext uri="{FF2B5EF4-FFF2-40B4-BE49-F238E27FC236}">
-                <a16:creationId xmlns:a16="http://schemas.microsoft.com/office/drawing/2014/main" id="{BAB3777A-EBEA-4866-AA40-DB1F7A558366}"/>
+                <a16:creationId xmlns:a16="http://schemas.microsoft.com/office/drawing/2014/main" id="{80E4215E-E828-44AC-8742-CF906157B79B}"/>
               </a:ext>
             </a:extLst>
           </p:cNvPr>
@@ -1993,7 +1993,7 @@
           <p:cNvPr id="18" name="3-Why beta CIs?-box">
             <a:extLst xmlns:a="http://schemas.openxmlformats.org/drawingml/2006/main">
               <a:ext uri="{FF2B5EF4-FFF2-40B4-BE49-F238E27FC236}">
-                <a16:creationId xmlns:a16="http://schemas.microsoft.com/office/drawing/2014/main" id="{8482F732-0A86-468C-8641-3DAB47B2D3C4}"/>
+                <a16:creationId xmlns:a16="http://schemas.microsoft.com/office/drawing/2014/main" id="{B37FEAC3-9EDE-47BA-9078-8CCA106702B3}"/>
               </a:ext>
             </a:extLst>
           </p:cNvPr>
@@ -2026,7 +2026,7 @@
           <p:cNvPr id="19" name="3-Why beta CIs?-head">
             <a:extLst xmlns:a="http://schemas.openxmlformats.org/drawingml/2006/main">
               <a:ext uri="{FF2B5EF4-FFF2-40B4-BE49-F238E27FC236}">
-                <a16:creationId xmlns:a16="http://schemas.microsoft.com/office/drawing/2014/main" id="{F60962D2-62E0-4737-9EEE-E217F6581EE4}"/>
+                <a16:creationId xmlns:a16="http://schemas.microsoft.com/office/drawing/2014/main" id="{B41F5C66-8637-4037-9DF4-ADA06D4E1E09}"/>
               </a:ext>
             </a:extLst>
           </p:cNvPr>
@@ -2059,7 +2059,7 @@
           <p:cNvPr id="20" name="3-Why beta CIs?-title">
             <a:extLst xmlns:a="http://schemas.openxmlformats.org/drawingml/2006/main">
               <a:ext uri="{FF2B5EF4-FFF2-40B4-BE49-F238E27FC236}">
-                <a16:creationId xmlns:a16="http://schemas.microsoft.com/office/drawing/2014/main" id="{3B6E50FD-1FB2-4DF7-B4D9-E52D8A86446E}"/>
+                <a16:creationId xmlns:a16="http://schemas.microsoft.com/office/drawing/2014/main" id="{B9920D36-5EB0-4055-9F64-B7362A791D38}"/>
               </a:ext>
             </a:extLst>
           </p:cNvPr>
@@ -2109,7 +2109,7 @@
           <p:cNvPr id="21" name="3-Why beta CIs?-body">
             <a:extLst xmlns:a="http://schemas.openxmlformats.org/drawingml/2006/main">
               <a:ext uri="{FF2B5EF4-FFF2-40B4-BE49-F238E27FC236}">
-                <a16:creationId xmlns:a16="http://schemas.microsoft.com/office/drawing/2014/main" id="{6256C430-152B-474E-8A43-981E1744C1EB}"/>
+                <a16:creationId xmlns:a16="http://schemas.microsoft.com/office/drawing/2014/main" id="{28469837-1877-4D5F-A3F9-5A39EEC9D00D}"/>
               </a:ext>
             </a:extLst>
           </p:cNvPr>
@@ -2193,7 +2193,7 @@
           <p:cNvPr id="22" name="4-ETL and interoperability-box">
             <a:extLst xmlns:a="http://schemas.openxmlformats.org/drawingml/2006/main">
               <a:ext uri="{FF2B5EF4-FFF2-40B4-BE49-F238E27FC236}">
-                <a16:creationId xmlns:a16="http://schemas.microsoft.com/office/drawing/2014/main" id="{5F30F372-BA08-4B98-94AC-CBA12D993E9A}"/>
+                <a16:creationId xmlns:a16="http://schemas.microsoft.com/office/drawing/2014/main" id="{209A17EA-DD67-4577-8D9D-67DDA120033C}"/>
               </a:ext>
             </a:extLst>
           </p:cNvPr>
@@ -2226,7 +2226,7 @@
           <p:cNvPr id="23" name="4-ETL and interoperability-head">
             <a:extLst xmlns:a="http://schemas.openxmlformats.org/drawingml/2006/main">
               <a:ext uri="{FF2B5EF4-FFF2-40B4-BE49-F238E27FC236}">
-                <a16:creationId xmlns:a16="http://schemas.microsoft.com/office/drawing/2014/main" id="{1803CDC7-A769-400F-91EC-EB4B70E78ECA}"/>
+                <a16:creationId xmlns:a16="http://schemas.microsoft.com/office/drawing/2014/main" id="{699E286A-98EB-4B0B-8C79-A6B34B8E9530}"/>
               </a:ext>
             </a:extLst>
           </p:cNvPr>
@@ -2259,7 +2259,7 @@
           <p:cNvPr id="24" name="4-ETL and interoperability-title">
             <a:extLst xmlns:a="http://schemas.openxmlformats.org/drawingml/2006/main">
               <a:ext uri="{FF2B5EF4-FFF2-40B4-BE49-F238E27FC236}">
-                <a16:creationId xmlns:a16="http://schemas.microsoft.com/office/drawing/2014/main" id="{464022D1-F4B2-4E94-9D3B-A8B981ACC09C}"/>
+                <a16:creationId xmlns:a16="http://schemas.microsoft.com/office/drawing/2014/main" id="{8DBA172B-0DF2-4A7D-BDF0-BC1399C53F0F}"/>
               </a:ext>
             </a:extLst>
           </p:cNvPr>
@@ -2309,7 +2309,7 @@
           <p:cNvPr id="25" name="4-ETL and interoperability-body">
             <a:extLst xmlns:a="http://schemas.openxmlformats.org/drawingml/2006/main">
               <a:ext uri="{FF2B5EF4-FFF2-40B4-BE49-F238E27FC236}">
-                <a16:creationId xmlns:a16="http://schemas.microsoft.com/office/drawing/2014/main" id="{A8AF85DF-4D72-42BB-BFAA-459B3841EE4E}"/>
+                <a16:creationId xmlns:a16="http://schemas.microsoft.com/office/drawing/2014/main" id="{AB78CB38-17AE-4027-A278-AB3C9ECE893C}"/>
               </a:ext>
             </a:extLst>
           </p:cNvPr>
@@ -2393,7 +2393,7 @@
           <p:cNvPr id="26" name="m-prev-metric">
             <a:extLst xmlns:a="http://schemas.openxmlformats.org/drawingml/2006/main">
               <a:ext uri="{FF2B5EF4-FFF2-40B4-BE49-F238E27FC236}">
-                <a16:creationId xmlns:a16="http://schemas.microsoft.com/office/drawing/2014/main" id="{68AD6E7F-83DD-4622-AA30-893253870177}"/>
+                <a16:creationId xmlns:a16="http://schemas.microsoft.com/office/drawing/2014/main" id="{A60801E9-7843-41A1-9B49-2C85EEBA2212}"/>
               </a:ext>
             </a:extLst>
           </p:cNvPr>
@@ -2426,7 +2426,7 @@
           <p:cNvPr id="27" name="m-prev-metric-title">
             <a:extLst xmlns:a="http://schemas.openxmlformats.org/drawingml/2006/main">
               <a:ext uri="{FF2B5EF4-FFF2-40B4-BE49-F238E27FC236}">
-                <a16:creationId xmlns:a16="http://schemas.microsoft.com/office/drawing/2014/main" id="{4DF3C22D-6294-485C-9C22-D3B9B7400924}"/>
+                <a16:creationId xmlns:a16="http://schemas.microsoft.com/office/drawing/2014/main" id="{FDDD986D-7282-40F9-BDB7-C0A382FAD397}"/>
               </a:ext>
             </a:extLst>
           </p:cNvPr>
@@ -2476,7 +2476,7 @@
           <p:cNvPr id="28" name="m-prev-metric-value">
             <a:extLst xmlns:a="http://schemas.openxmlformats.org/drawingml/2006/main">
               <a:ext uri="{FF2B5EF4-FFF2-40B4-BE49-F238E27FC236}">
-                <a16:creationId xmlns:a16="http://schemas.microsoft.com/office/drawing/2014/main" id="{03E0F43C-A5D7-402F-B218-2C327CD9DDCE}"/>
+                <a16:creationId xmlns:a16="http://schemas.microsoft.com/office/drawing/2014/main" id="{4851CDF8-13C0-471D-8136-B7F709E106CD}"/>
               </a:ext>
             </a:extLst>
           </p:cNvPr>
@@ -2526,7 +2526,7 @@
           <p:cNvPr id="29" name="m-prev-metric-note">
             <a:extLst xmlns:a="http://schemas.openxmlformats.org/drawingml/2006/main">
               <a:ext uri="{FF2B5EF4-FFF2-40B4-BE49-F238E27FC236}">
-                <a16:creationId xmlns:a16="http://schemas.microsoft.com/office/drawing/2014/main" id="{94D15DC4-AE2E-4A8C-A6C9-AA05CF947DE2}"/>
+                <a16:creationId xmlns:a16="http://schemas.microsoft.com/office/drawing/2014/main" id="{B919D514-B959-44CE-ADA8-69970F9B42DA}"/>
               </a:ext>
             </a:extLst>
           </p:cNvPr>
@@ -2576,7 +2576,7 @@
           <p:cNvPr id="30" name="m-crisis-metric">
             <a:extLst xmlns:a="http://schemas.openxmlformats.org/drawingml/2006/main">
               <a:ext uri="{FF2B5EF4-FFF2-40B4-BE49-F238E27FC236}">
-                <a16:creationId xmlns:a16="http://schemas.microsoft.com/office/drawing/2014/main" id="{9ACA2D21-D979-4681-A445-FD656A66AC64}"/>
+                <a16:creationId xmlns:a16="http://schemas.microsoft.com/office/drawing/2014/main" id="{73D9EBE3-747B-4826-B661-B5BD9D5EA6EB}"/>
               </a:ext>
             </a:extLst>
           </p:cNvPr>
@@ -2609,7 +2609,7 @@
           <p:cNvPr id="31" name="m-crisis-metric-title">
             <a:extLst xmlns:a="http://schemas.openxmlformats.org/drawingml/2006/main">
               <a:ext uri="{FF2B5EF4-FFF2-40B4-BE49-F238E27FC236}">
-                <a16:creationId xmlns:a16="http://schemas.microsoft.com/office/drawing/2014/main" id="{B7A849FD-6DE1-4972-939C-81F1C4300DC3}"/>
+                <a16:creationId xmlns:a16="http://schemas.microsoft.com/office/drawing/2014/main" id="{17105B93-0FC9-4C3D-B6AF-78EC13EA48D0}"/>
               </a:ext>
             </a:extLst>
           </p:cNvPr>
@@ -2649,7 +2649,7 @@
                   <a:srgbClr val="153F59"/>
                 </a:solidFill>
               </a:rPr>
-              <a:t>Brazil: attacks</a:t>
+              <a:t>Brazil: work</a:t>
             </a:r>
           </a:p>
         </p:txBody>
@@ -2659,7 +2659,7 @@
           <p:cNvPr id="32" name="m-crisis-metric-value">
             <a:extLst xmlns:a="http://schemas.openxmlformats.org/drawingml/2006/main">
               <a:ext uri="{FF2B5EF4-FFF2-40B4-BE49-F238E27FC236}">
-                <a16:creationId xmlns:a16="http://schemas.microsoft.com/office/drawing/2014/main" id="{401916B9-5C1D-4F79-AA0D-96F5B6C4C0A2}"/>
+                <a16:creationId xmlns:a16="http://schemas.microsoft.com/office/drawing/2014/main" id="{576C704F-34F5-4215-A8B6-97A5933B1110}"/>
               </a:ext>
             </a:extLst>
           </p:cNvPr>
@@ -2699,7 +2699,7 @@
                   <a:srgbClr val="153F59"/>
                 </a:solidFill>
               </a:rPr>
-              <a:t>38.3%→37.7%</a:t>
+              <a:t>15.2%; 4.8 d</a:t>
             </a:r>
           </a:p>
         </p:txBody>
@@ -2709,7 +2709,7 @@
           <p:cNvPr id="33" name="m-crisis-metric-note">
             <a:extLst xmlns:a="http://schemas.openxmlformats.org/drawingml/2006/main">
               <a:ext uri="{FF2B5EF4-FFF2-40B4-BE49-F238E27FC236}">
-                <a16:creationId xmlns:a16="http://schemas.microsoft.com/office/drawing/2014/main" id="{B94F1382-3083-4394-B0C6-949AFBA28E6E}"/>
+                <a16:creationId xmlns:a16="http://schemas.microsoft.com/office/drawing/2014/main" id="{C57F4AA5-8623-4F0C-85A8-4282D1842957}"/>
               </a:ext>
             </a:extLst>
           </p:cNvPr>
@@ -2749,7 +2749,7 @@
                   <a:srgbClr val="102536"/>
                 </a:solidFill>
               </a:rPr>
-              <a:t>Stability suggests insufficient control.</a:t>
+              <a:t>Respiratory burden affects workdays.</a:t>
             </a:r>
           </a:p>
         </p:txBody>
@@ -2759,7 +2759,7 @@
           <p:cNvPr id="34" name="m-meds-metric">
             <a:extLst xmlns:a="http://schemas.openxmlformats.org/drawingml/2006/main">
               <a:ext uri="{FF2B5EF4-FFF2-40B4-BE49-F238E27FC236}">
-                <a16:creationId xmlns:a16="http://schemas.microsoft.com/office/drawing/2014/main" id="{3FBA131A-483D-4499-AD47-4CD12EC8AE3C}"/>
+                <a16:creationId xmlns:a16="http://schemas.microsoft.com/office/drawing/2014/main" id="{14212630-D217-4340-8F25-F67F697068E0}"/>
               </a:ext>
             </a:extLst>
           </p:cNvPr>
@@ -2792,7 +2792,7 @@
           <p:cNvPr id="35" name="m-meds-metric-title">
             <a:extLst xmlns:a="http://schemas.openxmlformats.org/drawingml/2006/main">
               <a:ext uri="{FF2B5EF4-FFF2-40B4-BE49-F238E27FC236}">
-                <a16:creationId xmlns:a16="http://schemas.microsoft.com/office/drawing/2014/main" id="{8E2C0D0A-A7B5-4384-9C75-FE7AC50399B4}"/>
+                <a16:creationId xmlns:a16="http://schemas.microsoft.com/office/drawing/2014/main" id="{973D47FA-A8B6-4F9E-BEF5-4AD696E6C35E}"/>
               </a:ext>
             </a:extLst>
           </p:cNvPr>
@@ -2842,7 +2842,7 @@
           <p:cNvPr id="36" name="m-meds-metric-value">
             <a:extLst xmlns:a="http://schemas.openxmlformats.org/drawingml/2006/main">
               <a:ext uri="{FF2B5EF4-FFF2-40B4-BE49-F238E27FC236}">
-                <a16:creationId xmlns:a16="http://schemas.microsoft.com/office/drawing/2014/main" id="{BB001C17-345F-474F-B556-5F507B37E6DF}"/>
+                <a16:creationId xmlns:a16="http://schemas.microsoft.com/office/drawing/2014/main" id="{0568B7B3-D492-42C2-BAF4-AD7C5925CC9C}"/>
               </a:ext>
             </a:extLst>
           </p:cNvPr>
@@ -2892,7 +2892,7 @@
           <p:cNvPr id="37" name="m-meds-metric-note">
             <a:extLst xmlns:a="http://schemas.openxmlformats.org/drawingml/2006/main">
               <a:ext uri="{FF2B5EF4-FFF2-40B4-BE49-F238E27FC236}">
-                <a16:creationId xmlns:a16="http://schemas.microsoft.com/office/drawing/2014/main" id="{4A6B5D4B-7B87-47F5-9F6D-70D8FBF10535}"/>
+                <a16:creationId xmlns:a16="http://schemas.microsoft.com/office/drawing/2014/main" id="{1217FDF6-3758-4C82-BFE0-D96462AE5AE5}"/>
               </a:ext>
             </a:extLst>
           </p:cNvPr>
@@ -2942,7 +2942,7 @@
           <p:cNvPr id="38" name="m-chart-prev-caption">
             <a:extLst xmlns:a="http://schemas.openxmlformats.org/drawingml/2006/main">
               <a:ext uri="{FF2B5EF4-FFF2-40B4-BE49-F238E27FC236}">
-                <a16:creationId xmlns:a16="http://schemas.microsoft.com/office/drawing/2014/main" id="{F72C5D3D-FFC0-4768-9CF2-2B2D19804EAB}"/>
+                <a16:creationId xmlns:a16="http://schemas.microsoft.com/office/drawing/2014/main" id="{C5A9D9E8-C532-468C-A565-F1FA1B3A4D7E}"/>
               </a:ext>
             </a:extLst>
           </p:cNvPr>
@@ -2992,7 +2992,7 @@
           <p:cNvPr id="39" name="m-chart-prev-frame">
             <a:extLst xmlns:a="http://schemas.openxmlformats.org/drawingml/2006/main">
               <a:ext uri="{FF2B5EF4-FFF2-40B4-BE49-F238E27FC236}">
-                <a16:creationId xmlns:a16="http://schemas.microsoft.com/office/drawing/2014/main" id="{D729912F-93B5-493B-BBDA-8B1F63E02089}"/>
+                <a16:creationId xmlns:a16="http://schemas.microsoft.com/office/drawing/2014/main" id="{B60C6F91-BF22-40B6-AA73-72C16E44B81D}"/>
               </a:ext>
             </a:extLst>
           </p:cNvPr>
@@ -3022,14 +3022,14 @@
       </p:sp>
       <p:pic>
         <p:nvPicPr>
-          <p:cNvPr id="107" name=""/>
+          <p:cNvPr id="103" name=""/>
           <p:cNvPicPr>
             <a:picLocks xmlns:a="http://schemas.openxmlformats.org/drawingml/2006/main" noChangeAspect="1"/>
           </p:cNvPicPr>
           <p:nvPr/>
         </p:nvPicPr>
         <p:blipFill>
-          <a:blip xmlns:r="http://schemas.openxmlformats.org/officeDocument/2006/relationships" xmlns:a="http://schemas.openxmlformats.org/drawingml/2006/main" r:embed="Rf89a8baa8c464cc3"/>
+          <a:blip xmlns:r="http://schemas.openxmlformats.org/officeDocument/2006/relationships" xmlns:a="http://schemas.openxmlformats.org/drawingml/2006/main" r:embed="R03b06f23e692415c"/>
           <a:stretch xmlns:a="http://schemas.openxmlformats.org/drawingml/2006/main"/>
         </p:blipFill>
         <p:spPr>
@@ -3047,7 +3047,7 @@
           <p:cNvPr id="41" name="m-chart-meds-caption">
             <a:extLst xmlns:a="http://schemas.openxmlformats.org/drawingml/2006/main">
               <a:ext uri="{FF2B5EF4-FFF2-40B4-BE49-F238E27FC236}">
-                <a16:creationId xmlns:a16="http://schemas.microsoft.com/office/drawing/2014/main" id="{C2C25F64-51D1-4789-9D49-E17C62EA4821}"/>
+                <a16:creationId xmlns:a16="http://schemas.microsoft.com/office/drawing/2014/main" id="{5D82DAAA-5616-4CDD-9B22-FC15BD1EF45E}"/>
               </a:ext>
             </a:extLst>
           </p:cNvPr>
@@ -3097,7 +3097,7 @@
           <p:cNvPr id="42" name="m-chart-meds-frame">
             <a:extLst xmlns:a="http://schemas.openxmlformats.org/drawingml/2006/main">
               <a:ext uri="{FF2B5EF4-FFF2-40B4-BE49-F238E27FC236}">
-                <a16:creationId xmlns:a16="http://schemas.microsoft.com/office/drawing/2014/main" id="{B4AF39D9-771C-46E0-B308-DB46A23D1C48}"/>
+                <a16:creationId xmlns:a16="http://schemas.microsoft.com/office/drawing/2014/main" id="{D51493F3-6BBC-4414-B200-131944E544C8}"/>
               </a:ext>
             </a:extLst>
           </p:cNvPr>
@@ -3127,14 +3127,14 @@
       </p:sp>
       <p:pic>
         <p:nvPicPr>
-          <p:cNvPr id="110" name=""/>
+          <p:cNvPr id="106" name=""/>
           <p:cNvPicPr>
             <a:picLocks xmlns:a="http://schemas.openxmlformats.org/drawingml/2006/main" noChangeAspect="1"/>
           </p:cNvPicPr>
           <p:nvPr/>
         </p:nvPicPr>
         <p:blipFill>
-          <a:blip xmlns:r="http://schemas.openxmlformats.org/officeDocument/2006/relationships" xmlns:a="http://schemas.openxmlformats.org/drawingml/2006/main" r:embed="Rd4ffe81246324642"/>
+          <a:blip xmlns:r="http://schemas.openxmlformats.org/officeDocument/2006/relationships" xmlns:a="http://schemas.openxmlformats.org/drawingml/2006/main" r:embed="R5023f48603e04910"/>
           <a:stretch xmlns:a="http://schemas.openxmlformats.org/drawingml/2006/main"/>
         </p:blipFill>
         <p:spPr>
@@ -3152,7 +3152,7 @@
           <p:cNvPr id="44" name="m-chart-smoke-caption">
             <a:extLst xmlns:a="http://schemas.openxmlformats.org/drawingml/2006/main">
               <a:ext uri="{FF2B5EF4-FFF2-40B4-BE49-F238E27FC236}">
-                <a16:creationId xmlns:a16="http://schemas.microsoft.com/office/drawing/2014/main" id="{FEFE85BA-A08D-4D2C-BB9D-82158545324A}"/>
+                <a16:creationId xmlns:a16="http://schemas.microsoft.com/office/drawing/2014/main" id="{11A000DB-9E1D-4FBD-9F71-8FD3CF611C81}"/>
               </a:ext>
             </a:extLst>
           </p:cNvPr>
@@ -3192,7 +3192,7 @@
                   <a:srgbClr val="153F59"/>
                 </a:solidFill>
               </a:rPr>
-              <a:t>Figure 4: Current smokers per 100,000 inhabitants by state, PNS 2013 and 2019.</a:t>
+              <a:t>Figure 4: Mean lost days by health reason in Brazil, highlighting respiratory causes, PNS 2019.</a:t>
             </a:r>
           </a:p>
         </p:txBody>
@@ -3202,7 +3202,7 @@
           <p:cNvPr id="45" name="m-chart-smoke-frame">
             <a:extLst xmlns:a="http://schemas.openxmlformats.org/drawingml/2006/main">
               <a:ext uri="{FF2B5EF4-FFF2-40B4-BE49-F238E27FC236}">
-                <a16:creationId xmlns:a16="http://schemas.microsoft.com/office/drawing/2014/main" id="{7ADDF11A-0808-414F-846C-5467B6E9B5AD}"/>
+                <a16:creationId xmlns:a16="http://schemas.microsoft.com/office/drawing/2014/main" id="{F516699F-3593-4673-9239-25D5E86DA0AC}"/>
               </a:ext>
             </a:extLst>
           </p:cNvPr>
@@ -3232,14 +3232,14 @@
       </p:sp>
       <p:pic>
         <p:nvPicPr>
-          <p:cNvPr id="113" name=""/>
+          <p:cNvPr id="109" name=""/>
           <p:cNvPicPr>
             <a:picLocks xmlns:a="http://schemas.openxmlformats.org/drawingml/2006/main" noChangeAspect="1"/>
           </p:cNvPicPr>
           <p:nvPr/>
         </p:nvPicPr>
         <p:blipFill>
-          <a:blip xmlns:r="http://schemas.openxmlformats.org/officeDocument/2006/relationships" xmlns:a="http://schemas.openxmlformats.org/drawingml/2006/main" r:embed="Rd64d1aa4aaca4683"/>
+          <a:blip xmlns:r="http://schemas.openxmlformats.org/officeDocument/2006/relationships" xmlns:a="http://schemas.openxmlformats.org/drawingml/2006/main" r:embed="Ra2d18521674749aa"/>
           <a:stretch xmlns:a="http://schemas.openxmlformats.org/drawingml/2006/main"/>
         </p:blipFill>
         <p:spPr>
@@ -3254,10 +3254,10 @@
       </p:pic>
       <p:sp>
         <p:nvSpPr>
-          <p:cNvPr id="47" name="5-Key findings-box">
-            <a:extLst xmlns:a="http://schemas.openxmlformats.org/drawingml/2006/main">
-              <a:ext uri="{FF2B5EF4-FFF2-40B4-BE49-F238E27FC236}">
-                <a16:creationId xmlns:a16="http://schemas.microsoft.com/office/drawing/2014/main" id="{5BA8BE57-FCA1-4CA7-AF40-A75443A374D8}"/>
+          <p:cNvPr id="47" name="5-Discussion-box">
+            <a:extLst xmlns:a="http://schemas.openxmlformats.org/drawingml/2006/main">
+              <a:ext uri="{FF2B5EF4-FFF2-40B4-BE49-F238E27FC236}">
+                <a16:creationId xmlns:a16="http://schemas.microsoft.com/office/drawing/2014/main" id="{5062F57C-DFB4-452D-946C-18A70698A7DB}"/>
               </a:ext>
             </a:extLst>
           </p:cNvPr>
@@ -3269,7 +3269,7 @@
         <p:spPr>
           <a:xfrm xmlns:a="http://schemas.openxmlformats.org/drawingml/2006/main">
             <a:off x="6991350" y="3105150"/>
-            <a:ext cx="2362200" cy="2171700"/>
+            <a:ext cx="2362200" cy="3752850"/>
           </a:xfrm>
           <a:prstGeom xmlns:a="http://schemas.openxmlformats.org/drawingml/2006/main" prst="rect">
             <a:avLst/>
@@ -3287,10 +3287,10 @@
       </p:sp>
       <p:sp>
         <p:nvSpPr>
-          <p:cNvPr id="48" name="5-Key findings-head">
-            <a:extLst xmlns:a="http://schemas.openxmlformats.org/drawingml/2006/main">
-              <a:ext uri="{FF2B5EF4-FFF2-40B4-BE49-F238E27FC236}">
-                <a16:creationId xmlns:a16="http://schemas.microsoft.com/office/drawing/2014/main" id="{750AD8D1-AA15-49CC-8411-D6BCA0019080}"/>
+          <p:cNvPr id="48" name="5-Discussion-head">
+            <a:extLst xmlns:a="http://schemas.openxmlformats.org/drawingml/2006/main">
+              <a:ext uri="{FF2B5EF4-FFF2-40B4-BE49-F238E27FC236}">
+                <a16:creationId xmlns:a16="http://schemas.microsoft.com/office/drawing/2014/main" id="{98FC0017-3B80-4C46-9C0A-35498FEBB974}"/>
               </a:ext>
             </a:extLst>
           </p:cNvPr>
@@ -3320,10 +3320,10 @@
       </p:sp>
       <p:sp>
         <p:nvSpPr>
-          <p:cNvPr id="49" name="5-Key findings-title">
-            <a:extLst xmlns:a="http://schemas.openxmlformats.org/drawingml/2006/main">
-              <a:ext uri="{FF2B5EF4-FFF2-40B4-BE49-F238E27FC236}">
-                <a16:creationId xmlns:a16="http://schemas.microsoft.com/office/drawing/2014/main" id="{6FB4EFB2-04C1-49A7-9459-F4639E54FC10}"/>
+          <p:cNvPr id="49" name="5-Discussion-title">
+            <a:extLst xmlns:a="http://schemas.openxmlformats.org/drawingml/2006/main">
+              <a:ext uri="{FF2B5EF4-FFF2-40B4-BE49-F238E27FC236}">
+                <a16:creationId xmlns:a16="http://schemas.microsoft.com/office/drawing/2014/main" id="{AFFD0BD6-2B6E-441D-983A-E8C701B5E20D}"/>
               </a:ext>
             </a:extLst>
           </p:cNvPr>
@@ -3363,17 +3363,17 @@
                   <a:srgbClr val="FFFFFF"/>
                 </a:solidFill>
               </a:rPr>
-              <a:t>5. Key findings</a:t>
+              <a:t>5. Discussion</a:t>
             </a:r>
           </a:p>
         </p:txBody>
       </p:sp>
       <p:sp>
         <p:nvSpPr>
-          <p:cNvPr id="50" name="5-Key findings-body">
-            <a:extLst xmlns:a="http://schemas.openxmlformats.org/drawingml/2006/main">
-              <a:ext uri="{FF2B5EF4-FFF2-40B4-BE49-F238E27FC236}">
-                <a16:creationId xmlns:a16="http://schemas.microsoft.com/office/drawing/2014/main" id="{E67360EE-C5D3-46E1-8815-478EB0EA48B6}"/>
+          <p:cNvPr id="50" name="5-Discussion-body">
+            <a:extLst xmlns:a="http://schemas.openxmlformats.org/drawingml/2006/main">
+              <a:ext uri="{FF2B5EF4-FFF2-40B4-BE49-F238E27FC236}">
+                <a16:creationId xmlns:a16="http://schemas.microsoft.com/office/drawing/2014/main" id="{06C5DEFF-D299-4555-8AC0-C2F6B2029A2A}"/>
               </a:ext>
             </a:extLst>
           </p:cNvPr>
@@ -3385,7 +3385,7 @@
         <p:spPr>
           <a:xfrm xmlns:a="http://schemas.openxmlformats.org/drawingml/2006/main">
             <a:off x="7086600" y="3448050"/>
-            <a:ext cx="2171700" cy="1771650"/>
+            <a:ext cx="2171700" cy="3352800"/>
           </a:xfrm>
           <a:prstGeom xmlns:a="http://schemas.openxmlformats.org/drawingml/2006/main" prst="rect">
             <a:avLst/>
@@ -3401,14 +3401,14 @@
           <a:lstStyle xmlns:a="http://schemas.openxmlformats.org/drawingml/2006/main"/>
           <a:p xmlns:a="http://schemas.openxmlformats.org/drawingml/2006/main">
             <a:pPr algn="l">
-              <a:defRPr sz="518" b="0">
-                <a:solidFill>
-                  <a:srgbClr val="102536"/>
-                </a:solidFill>
-              </a:defRPr>
-            </a:pPr>
-            <a:r>
-              <a:rPr sz="518" b="0">
+              <a:defRPr sz="424" b="0">
+                <a:solidFill>
+                  <a:srgbClr val="102536"/>
+                </a:solidFill>
+              </a:defRPr>
+            </a:pPr>
+            <a:r>
+              <a:rPr sz="424" b="0">
                 <a:solidFill>
                   <a:srgbClr val="102536"/>
                 </a:solidFill>
@@ -3418,75 +3418,126 @@
           </a:p>
           <a:p xmlns:a="http://schemas.openxmlformats.org/drawingml/2006/main">
             <a:pPr algn="l">
-              <a:defRPr sz="518" b="0">
-                <a:solidFill>
-                  <a:srgbClr val="102536"/>
-                </a:solidFill>
-              </a:defRPr>
-            </a:pPr>
-            <a:r>
-              <a:rPr sz="518" b="0">
-                <a:solidFill>
-                  <a:srgbClr val="102536"/>
-                </a:solidFill>
-              </a:rPr>
-              <a:t>• Brazil: attacks in the previous 12 months were stable, from 38.3% to 37.7%.</a:t>
-            </a:r>
-          </a:p>
-          <a:p xmlns:a="http://schemas.openxmlformats.org/drawingml/2006/main">
-            <a:pPr algn="l">
-              <a:defRPr sz="518" b="0">
-                <a:solidFill>
-                  <a:srgbClr val="102536"/>
-                </a:solidFill>
-              </a:defRPr>
-            </a:pPr>
-            <a:r>
-              <a:rPr sz="518" b="0">
-                <a:solidFill>
-                  <a:srgbClr val="102536"/>
-                </a:solidFill>
-              </a:rPr>
-              <a:t>• Brazil: oral/inhaler medication use among people with asthma changed from 81.5% to 64.4%; interpretation should consider 95% CIs, the diagnosed group and the population rate.</a:t>
-            </a:r>
-          </a:p>
-          <a:p xmlns:a="http://schemas.openxmlformats.org/drawingml/2006/main">
-            <a:pPr algn="l">
-              <a:defRPr sz="518" b="0">
-                <a:solidFill>
-                  <a:srgbClr val="102536"/>
-                </a:solidFill>
-              </a:defRPr>
-            </a:pPr>
-            <a:r>
-              <a:rPr sz="518" b="0">
-                <a:solidFill>
-                  <a:srgbClr val="102536"/>
-                </a:solidFill>
-              </a:rPr>
-              <a:t>• Smoking declined in several states; the national rate cited changed from 14,650 to 12,151 per 100,000.</a:t>
+              <a:defRPr sz="424" b="0">
+                <a:solidFill>
+                  <a:srgbClr val="102536"/>
+                </a:solidFill>
+              </a:defRPr>
+            </a:pPr>
+            <a:r>
+              <a:rPr sz="424" b="0">
+                <a:solidFill>
+                  <a:srgbClr val="102536"/>
+                </a:solidFill>
+              </a:rPr>
+              <a:t>• Respiratory causes, a category including asthma, bronchitis and pneumonia, accounted for 15.2% of health-related absenteeism.</a:t>
+            </a:r>
+          </a:p>
+          <a:p xmlns:a="http://schemas.openxmlformats.org/drawingml/2006/main">
+            <a:pPr algn="l">
+              <a:defRPr sz="424" b="0">
+                <a:solidFill>
+                  <a:srgbClr val="102536"/>
+                </a:solidFill>
+              </a:defRPr>
+            </a:pPr>
+            <a:r>
+              <a:rPr sz="424" b="0">
+                <a:solidFill>
+                  <a:srgbClr val="102536"/>
+                </a:solidFill>
+              </a:rPr>
+              <a:t>• Mean lost days for respiratory causes reached 4.8 days, indicating potential productivity cost.</a:t>
+            </a:r>
+          </a:p>
+          <a:p xmlns:a="http://schemas.openxmlformats.org/drawingml/2006/main">
+            <a:pPr algn="l">
+              <a:defRPr sz="424" b="0">
+                <a:solidFill>
+                  <a:srgbClr val="102536"/>
+                </a:solidFill>
+              </a:defRPr>
+            </a:pPr>
+            <a:r>
+              <a:rPr sz="424" b="0">
+                <a:solidFill>
+                  <a:srgbClr val="102536"/>
+                </a:solidFill>
+              </a:rPr>
+              <a:t>• Oral/inhaler medication use among people with asthma changed from 81.5% to 64.4%; interpret with 95% CIs and the diagnosed-group profile.</a:t>
+            </a:r>
+          </a:p>
+          <a:p xmlns:a="http://schemas.openxmlformats.org/drawingml/2006/main">
+            <a:pPr algn="l">
+              <a:defRPr sz="424" b="0">
+                <a:solidFill>
+                  <a:srgbClr val="102536"/>
+                </a:solidFill>
+              </a:defRPr>
+            </a:pPr>
+            <a:r>
+              <a:rPr sz="424" b="0">
+                <a:solidFill>
+                  <a:srgbClr val="102536"/>
+                </a:solidFill>
+              </a:rPr>
+              <a:t>• More diagnosed asthma expands the population at risk of attacks, work absence and lower productivity.</a:t>
+            </a:r>
+          </a:p>
+          <a:p xmlns:a="http://schemas.openxmlformats.org/drawingml/2006/main">
+            <a:pPr algn="l">
+              <a:defRPr sz="424" b="0">
+                <a:solidFill>
+                  <a:srgbClr val="102536"/>
+                </a:solidFill>
+              </a:defRPr>
+            </a:pPr>
+            <a:r>
+              <a:rPr sz="424" b="0">
+                <a:solidFill>
+                  <a:srgbClr val="102536"/>
+                </a:solidFill>
+              </a:rPr>
+              <a:t>• The respiratory category suggests asthma can contribute to lost workdays, household income pressure and reduced effective labor supply.</a:t>
+            </a:r>
+          </a:p>
+          <a:p xmlns:a="http://schemas.openxmlformats.org/drawingml/2006/main">
+            <a:pPr algn="l">
+              <a:defRPr sz="424" b="0">
+                <a:solidFill>
+                  <a:srgbClr val="102536"/>
+                </a:solidFill>
+              </a:defRPr>
+            </a:pPr>
+            <a:r>
+              <a:rPr sz="424" b="0">
+                <a:solidFill>
+                  <a:srgbClr val="102536"/>
+                </a:solidFill>
+              </a:rPr>
+              <a:t>• Better asthma control can have economic returns: fewer absences, fewer lost days and lower demand for acute care.</a:t>
             </a:r>
           </a:p>
         </p:txBody>
       </p:sp>
       <p:sp>
         <p:nvSpPr>
-          <p:cNvPr id="51" name="6-Applied discussion-box">
-            <a:extLst xmlns:a="http://schemas.openxmlformats.org/drawingml/2006/main">
-              <a:ext uri="{FF2B5EF4-FFF2-40B4-BE49-F238E27FC236}">
-                <a16:creationId xmlns:a16="http://schemas.microsoft.com/office/drawing/2014/main" id="{C4A845A2-9299-4960-9407-DD2BD89EF855}"/>
-              </a:ext>
-            </a:extLst>
-          </p:cNvPr>
-          <p:cNvSpPr>
-            <a:spLocks xmlns:a="http://schemas.openxmlformats.org/drawingml/2006/main" noGrp="1"/>
-          </p:cNvSpPr>
-          <p:nvPr/>
-        </p:nvSpPr>
-        <p:spPr>
-          <a:xfrm xmlns:a="http://schemas.openxmlformats.org/drawingml/2006/main">
-            <a:off x="6991350" y="5410200"/>
-            <a:ext cx="2362200" cy="1447800"/>
+          <p:cNvPr id="51" name="6-Central conclusion-box">
+            <a:extLst xmlns:a="http://schemas.openxmlformats.org/drawingml/2006/main">
+              <a:ext uri="{FF2B5EF4-FFF2-40B4-BE49-F238E27FC236}">
+                <a16:creationId xmlns:a16="http://schemas.microsoft.com/office/drawing/2014/main" id="{6D976B1A-ED83-4AA9-88F8-C57187EA9018}"/>
+              </a:ext>
+            </a:extLst>
+          </p:cNvPr>
+          <p:cNvSpPr>
+            <a:spLocks xmlns:a="http://schemas.openxmlformats.org/drawingml/2006/main" noGrp="1"/>
+          </p:cNvSpPr>
+          <p:nvPr/>
+        </p:nvSpPr>
+        <p:spPr>
+          <a:xfrm xmlns:a="http://schemas.openxmlformats.org/drawingml/2006/main">
+            <a:off x="6991350" y="6991350"/>
+            <a:ext cx="2362200" cy="1238250"/>
           </a:xfrm>
           <a:prstGeom xmlns:a="http://schemas.openxmlformats.org/drawingml/2006/main" prst="rect">
             <a:avLst/>
@@ -3504,21 +3555,21 @@
       </p:sp>
       <p:sp>
         <p:nvSpPr>
-          <p:cNvPr id="52" name="6-Applied discussion-head">
-            <a:extLst xmlns:a="http://schemas.openxmlformats.org/drawingml/2006/main">
-              <a:ext uri="{FF2B5EF4-FFF2-40B4-BE49-F238E27FC236}">
-                <a16:creationId xmlns:a16="http://schemas.microsoft.com/office/drawing/2014/main" id="{8D8BCC2C-B5A9-4A2B-A277-6D30ACF5AEE1}"/>
-              </a:ext>
-            </a:extLst>
-          </p:cNvPr>
-          <p:cNvSpPr>
-            <a:spLocks xmlns:a="http://schemas.openxmlformats.org/drawingml/2006/main" noGrp="1"/>
-          </p:cNvSpPr>
-          <p:nvPr/>
-        </p:nvSpPr>
-        <p:spPr>
-          <a:xfrm xmlns:a="http://schemas.openxmlformats.org/drawingml/2006/main">
-            <a:off x="6991350" y="5410200"/>
+          <p:cNvPr id="52" name="6-Central conclusion-head">
+            <a:extLst xmlns:a="http://schemas.openxmlformats.org/drawingml/2006/main">
+              <a:ext uri="{FF2B5EF4-FFF2-40B4-BE49-F238E27FC236}">
+                <a16:creationId xmlns:a16="http://schemas.microsoft.com/office/drawing/2014/main" id="{E6E70CF2-C5CA-453D-8CCF-FA5C7D52D9EC}"/>
+              </a:ext>
+            </a:extLst>
+          </p:cNvPr>
+          <p:cNvSpPr>
+            <a:spLocks xmlns:a="http://schemas.openxmlformats.org/drawingml/2006/main" noGrp="1"/>
+          </p:cNvSpPr>
+          <p:nvPr/>
+        </p:nvSpPr>
+        <p:spPr>
+          <a:xfrm xmlns:a="http://schemas.openxmlformats.org/drawingml/2006/main">
+            <a:off x="6991350" y="6991350"/>
             <a:ext cx="2362200" cy="266700"/>
           </a:xfrm>
           <a:prstGeom xmlns:a="http://schemas.openxmlformats.org/drawingml/2006/main" prst="rect">
@@ -3537,21 +3588,21 @@
       </p:sp>
       <p:sp>
         <p:nvSpPr>
-          <p:cNvPr id="53" name="6-Applied discussion-title">
-            <a:extLst xmlns:a="http://schemas.openxmlformats.org/drawingml/2006/main">
-              <a:ext uri="{FF2B5EF4-FFF2-40B4-BE49-F238E27FC236}">
-                <a16:creationId xmlns:a16="http://schemas.microsoft.com/office/drawing/2014/main" id="{55D30B12-05D4-4C44-A279-27080E5117BF}"/>
-              </a:ext>
-            </a:extLst>
-          </p:cNvPr>
-          <p:cNvSpPr>
-            <a:spLocks xmlns:a="http://schemas.openxmlformats.org/drawingml/2006/main" noGrp="1"/>
-          </p:cNvSpPr>
-          <p:nvPr/>
-        </p:nvSpPr>
-        <p:spPr>
-          <a:xfrm xmlns:a="http://schemas.openxmlformats.org/drawingml/2006/main">
-            <a:off x="7067550" y="5457825"/>
+          <p:cNvPr id="53" name="6-Central conclusion-title">
+            <a:extLst xmlns:a="http://schemas.openxmlformats.org/drawingml/2006/main">
+              <a:ext uri="{FF2B5EF4-FFF2-40B4-BE49-F238E27FC236}">
+                <a16:creationId xmlns:a16="http://schemas.microsoft.com/office/drawing/2014/main" id="{77A07877-CF4A-486F-98A2-FCF5E1565821}"/>
+              </a:ext>
+            </a:extLst>
+          </p:cNvPr>
+          <p:cNvSpPr>
+            <a:spLocks xmlns:a="http://schemas.openxmlformats.org/drawingml/2006/main" noGrp="1"/>
+          </p:cNvSpPr>
+          <p:nvPr/>
+        </p:nvSpPr>
+        <p:spPr>
+          <a:xfrm xmlns:a="http://schemas.openxmlformats.org/drawingml/2006/main">
+            <a:off x="7067550" y="7038975"/>
             <a:ext cx="2209800" cy="190500"/>
           </a:xfrm>
           <a:prstGeom xmlns:a="http://schemas.openxmlformats.org/drawingml/2006/main" prst="rect">
@@ -3580,29 +3631,29 @@
                   <a:srgbClr val="FFFFFF"/>
                 </a:solidFill>
               </a:rPr>
-              <a:t>6. Applied discussion</a:t>
+              <a:t>6. Central conclusion</a:t>
             </a:r>
           </a:p>
         </p:txBody>
       </p:sp>
       <p:sp>
         <p:nvSpPr>
-          <p:cNvPr id="54" name="6-Applied discussion-body">
-            <a:extLst xmlns:a="http://schemas.openxmlformats.org/drawingml/2006/main">
-              <a:ext uri="{FF2B5EF4-FFF2-40B4-BE49-F238E27FC236}">
-                <a16:creationId xmlns:a16="http://schemas.microsoft.com/office/drawing/2014/main" id="{9D38AFAF-04A6-4B06-8DBC-DE3A5042E2AC}"/>
-              </a:ext>
-            </a:extLst>
-          </p:cNvPr>
-          <p:cNvSpPr>
-            <a:spLocks xmlns:a="http://schemas.openxmlformats.org/drawingml/2006/main" noGrp="1"/>
-          </p:cNvSpPr>
-          <p:nvPr/>
-        </p:nvSpPr>
-        <p:spPr>
-          <a:xfrm xmlns:a="http://schemas.openxmlformats.org/drawingml/2006/main">
-            <a:off x="7086600" y="5753100"/>
-            <a:ext cx="2171700" cy="1047750"/>
+          <p:cNvPr id="54" name="6-Central conclusion-body">
+            <a:extLst xmlns:a="http://schemas.openxmlformats.org/drawingml/2006/main">
+              <a:ext uri="{FF2B5EF4-FFF2-40B4-BE49-F238E27FC236}">
+                <a16:creationId xmlns:a16="http://schemas.microsoft.com/office/drawing/2014/main" id="{A0628E55-DBA5-409F-B0AC-299A37CAB1D4}"/>
+              </a:ext>
+            </a:extLst>
+          </p:cNvPr>
+          <p:cNvSpPr>
+            <a:spLocks xmlns:a="http://schemas.openxmlformats.org/drawingml/2006/main" noGrp="1"/>
+          </p:cNvSpPr>
+          <p:nvPr/>
+        </p:nvSpPr>
+        <p:spPr>
+          <a:xfrm xmlns:a="http://schemas.openxmlformats.org/drawingml/2006/main">
+            <a:off x="7086600" y="7334250"/>
+            <a:ext cx="2171700" cy="838200"/>
           </a:xfrm>
           <a:prstGeom xmlns:a="http://schemas.openxmlformats.org/drawingml/2006/main" prst="rect">
             <a:avLst/>
@@ -3618,75 +3669,125 @@
           <a:lstStyle xmlns:a="http://schemas.openxmlformats.org/drawingml/2006/main"/>
           <a:p xmlns:a="http://schemas.openxmlformats.org/drawingml/2006/main">
             <a:pPr algn="l">
-              <a:defRPr sz="555" b="0">
-                <a:solidFill>
-                  <a:srgbClr val="102536"/>
-                </a:solidFill>
-              </a:defRPr>
-            </a:pPr>
-            <a:r>
-              <a:rPr sz="555" b="0">
-                <a:solidFill>
-                  <a:srgbClr val="102536"/>
-                </a:solidFill>
-              </a:rPr>
-              <a:t>• The pattern diagnosis↑, attacks≈ and medication use↓ suggests broader asthma recognition without proportional improvement in control.</a:t>
-            </a:r>
-          </a:p>
-          <a:p xmlns:a="http://schemas.openxmlformats.org/drawingml/2006/main">
-            <a:pPr algn="l">
-              <a:defRPr sz="555" b="0">
-                <a:solidFill>
-                  <a:srgbClr val="102536"/>
-                </a:solidFill>
-              </a:defRPr>
-            </a:pPr>
-            <a:r>
-              <a:rPr sz="555" b="0">
-                <a:solidFill>
-                  <a:srgbClr val="102536"/>
-                </a:solidFill>
-              </a:rPr>
-              <a:t>• The diagnosis increase may reflect higher occurrence, better diagnostic access or both.</a:t>
-            </a:r>
-          </a:p>
-          <a:p xmlns:a="http://schemas.openxmlformats.org/drawingml/2006/main">
-            <a:pPr algn="l">
-              <a:defRPr sz="555" b="0">
-                <a:solidFill>
-                  <a:srgbClr val="102536"/>
-                </a:solidFill>
-              </a:defRPr>
-            </a:pPr>
-            <a:r>
-              <a:rPr sz="555" b="0">
-                <a:solidFill>
-                  <a:srgbClr val="102536"/>
-                </a:solidFill>
-              </a:rPr>
-              <a:t>• Asthma control depends on medication access, clinical follow-up, education, exposure control and non-pharmacological interventions.</a:t>
+              <a:defRPr sz="525" b="0">
+                <a:solidFill>
+                  <a:srgbClr val="102536"/>
+                </a:solidFill>
+              </a:defRPr>
+            </a:pPr>
+            <a:r>
+              <a:rPr sz="525" b="0">
+                <a:solidFill>
+                  <a:srgbClr val="102536"/>
+                </a:solidFill>
+              </a:rPr>
+              <a:t>• Correct implementation of the sampling design is required for valid estimates.</a:t>
+            </a:r>
+          </a:p>
+          <a:p xmlns:a="http://schemas.openxmlformats.org/drawingml/2006/main">
+            <a:pPr algn="l">
+              <a:defRPr sz="525" b="0">
+                <a:solidFill>
+                  <a:srgbClr val="102536"/>
+                </a:solidFill>
+              </a:defRPr>
+            </a:pPr>
+            <a:r>
+              <a:rPr sz="525" b="0">
+                <a:solidFill>
+                  <a:srgbClr val="102536"/>
+                </a:solidFill>
+              </a:rPr>
+              <a:t>• Asthma should be treated as both a clinical and economic issue because it can affect productivity, income and the labor force.</a:t>
+            </a:r>
+          </a:p>
+          <a:p xmlns:a="http://schemas.openxmlformats.org/drawingml/2006/main">
+            <a:pPr algn="l">
+              <a:defRPr sz="525" b="0">
+                <a:solidFill>
+                  <a:srgbClr val="102536"/>
+                </a:solidFill>
+              </a:defRPr>
+            </a:pPr>
+            <a:r>
+              <a:rPr sz="525" b="0">
+                <a:solidFill>
+                  <a:srgbClr val="102536"/>
+                </a:solidFill>
+              </a:rPr>
+              <a:t>• Absenteeism results are aggregated respiratory estimates; they should not be read as asthma-only estimates.</a:t>
             </a:r>
           </a:p>
         </p:txBody>
       </p:sp>
       <p:sp>
         <p:nvSpPr>
-          <p:cNvPr id="55" name="7-Central conclusion-box">
-            <a:extLst xmlns:a="http://schemas.openxmlformats.org/drawingml/2006/main">
-              <a:ext uri="{FF2B5EF4-FFF2-40B4-BE49-F238E27FC236}">
-                <a16:creationId xmlns:a16="http://schemas.microsoft.com/office/drawing/2014/main" id="{8E5A80FC-72A4-4E30-A620-45877EF9E521}"/>
-              </a:ext>
-            </a:extLst>
-          </p:cNvPr>
-          <p:cNvSpPr>
-            <a:spLocks xmlns:a="http://schemas.openxmlformats.org/drawingml/2006/main" noGrp="1"/>
-          </p:cNvSpPr>
-          <p:nvPr/>
-        </p:nvSpPr>
-        <p:spPr>
-          <a:xfrm xmlns:a="http://schemas.openxmlformats.org/drawingml/2006/main">
-            <a:off x="6991350" y="6991350"/>
-            <a:ext cx="2362200" cy="1238250"/>
+          <p:cNvPr id="55" name="m-chart-crisis-caption">
+            <a:extLst xmlns:a="http://schemas.openxmlformats.org/drawingml/2006/main">
+              <a:ext uri="{FF2B5EF4-FFF2-40B4-BE49-F238E27FC236}">
+                <a16:creationId xmlns:a16="http://schemas.microsoft.com/office/drawing/2014/main" id="{C3C585E2-B1B8-458C-A71E-A76675E9F3D5}"/>
+              </a:ext>
+            </a:extLst>
+          </p:cNvPr>
+          <p:cNvSpPr>
+            <a:spLocks xmlns:a="http://schemas.openxmlformats.org/drawingml/2006/main" noGrp="1"/>
+          </p:cNvSpPr>
+          <p:nvPr/>
+        </p:nvSpPr>
+        <p:spPr>
+          <a:xfrm xmlns:a="http://schemas.openxmlformats.org/drawingml/2006/main">
+            <a:off x="6991350" y="8362950"/>
+            <a:ext cx="2362200" cy="228600"/>
+          </a:xfrm>
+          <a:prstGeom xmlns:a="http://schemas.openxmlformats.org/drawingml/2006/main" prst="rect">
+            <a:avLst/>
+          </a:prstGeom>
+          <a:noFill xmlns:a="http://schemas.openxmlformats.org/drawingml/2006/main"/>
+          <a:ln xmlns:a="http://schemas.openxmlformats.org/drawingml/2006/main" w="0">
+            <a:noFill/>
+            <a:prstDash val="solid"/>
+          </a:ln>
+        </p:spPr>
+        <p:txBody>
+          <a:bodyPr xmlns:a="http://schemas.openxmlformats.org/drawingml/2006/main"/>
+          <a:lstStyle xmlns:a="http://schemas.openxmlformats.org/drawingml/2006/main"/>
+          <a:p xmlns:a="http://schemas.openxmlformats.org/drawingml/2006/main">
+            <a:pPr algn="ctr">
+              <a:defRPr sz="660" b="1">
+                <a:solidFill>
+                  <a:srgbClr val="153F59"/>
+                </a:solidFill>
+              </a:defRPr>
+            </a:pPr>
+            <a:r>
+              <a:rPr sz="660" b="1">
+                <a:solidFill>
+                  <a:srgbClr val="153F59"/>
+                </a:solidFill>
+              </a:rPr>
+              <a:t>Figure 2: Health-related absenteeism in Brazil, highlighting respiratory causes, PNS 2019.</a:t>
+            </a:r>
+          </a:p>
+        </p:txBody>
+      </p:sp>
+      <p:sp>
+        <p:nvSpPr>
+          <p:cNvPr id="56" name="m-chart-crisis-frame">
+            <a:extLst xmlns:a="http://schemas.openxmlformats.org/drawingml/2006/main">
+              <a:ext uri="{FF2B5EF4-FFF2-40B4-BE49-F238E27FC236}">
+                <a16:creationId xmlns:a16="http://schemas.microsoft.com/office/drawing/2014/main" id="{55EBBA24-9314-4C28-9F61-CF8C47EA68AF}"/>
+              </a:ext>
+            </a:extLst>
+          </p:cNvPr>
+          <p:cNvSpPr>
+            <a:spLocks xmlns:a="http://schemas.openxmlformats.org/drawingml/2006/main" noGrp="1"/>
+          </p:cNvSpPr>
+          <p:nvPr/>
+        </p:nvSpPr>
+        <p:spPr>
+          <a:xfrm xmlns:a="http://schemas.openxmlformats.org/drawingml/2006/main">
+            <a:off x="6991350" y="8610600"/>
+            <a:ext cx="2362200" cy="1695450"/>
           </a:xfrm>
           <a:prstGeom xmlns:a="http://schemas.openxmlformats.org/drawingml/2006/main" prst="rect">
             <a:avLst/>
@@ -3702,30 +3803,52 @@
           </a:ln>
         </p:spPr>
       </p:sp>
-      <p:sp>
-        <p:nvSpPr>
-          <p:cNvPr id="56" name="7-Central conclusion-head">
-            <a:extLst xmlns:a="http://schemas.openxmlformats.org/drawingml/2006/main">
-              <a:ext uri="{FF2B5EF4-FFF2-40B4-BE49-F238E27FC236}">
-                <a16:creationId xmlns:a16="http://schemas.microsoft.com/office/drawing/2014/main" id="{6820CA92-336D-4A8E-8DE7-4A76893CA2C4}"/>
-              </a:ext>
-            </a:extLst>
-          </p:cNvPr>
-          <p:cNvSpPr>
-            <a:spLocks xmlns:a="http://schemas.openxmlformats.org/drawingml/2006/main" noGrp="1"/>
-          </p:cNvSpPr>
-          <p:nvPr/>
-        </p:nvSpPr>
-        <p:spPr>
-          <a:xfrm xmlns:a="http://schemas.openxmlformats.org/drawingml/2006/main">
-            <a:off x="6991350" y="6991350"/>
-            <a:ext cx="2362200" cy="266700"/>
+      <p:pic>
+        <p:nvPicPr>
+          <p:cNvPr id="120" name=""/>
+          <p:cNvPicPr>
+            <a:picLocks xmlns:a="http://schemas.openxmlformats.org/drawingml/2006/main" noChangeAspect="1"/>
+          </p:cNvPicPr>
+          <p:nvPr/>
+        </p:nvPicPr>
+        <p:blipFill>
+          <a:blip xmlns:r="http://schemas.openxmlformats.org/officeDocument/2006/relationships" xmlns:a="http://schemas.openxmlformats.org/drawingml/2006/main" r:embed="R303fb0780265450d"/>
+          <a:stretch xmlns:a="http://schemas.openxmlformats.org/drawingml/2006/main"/>
+        </p:blipFill>
+        <p:spPr>
+          <a:xfrm xmlns:a="http://schemas.openxmlformats.org/drawingml/2006/main">
+            <a:off x="7075326" y="8667750"/>
+            <a:ext cx="2194249" cy="1581150"/>
+          </a:xfrm>
+          <a:prstGeom xmlns:a="http://schemas.openxmlformats.org/drawingml/2006/main" prst="rect">
+            <a:avLst/>
+          </a:prstGeom>
+        </p:spPr>
+      </p:pic>
+      <p:sp>
+        <p:nvSpPr>
+          <p:cNvPr id="58" name="qr-box">
+            <a:extLst xmlns:a="http://schemas.openxmlformats.org/drawingml/2006/main">
+              <a:ext uri="{FF2B5EF4-FFF2-40B4-BE49-F238E27FC236}">
+                <a16:creationId xmlns:a16="http://schemas.microsoft.com/office/drawing/2014/main" id="{72ED4A2C-4C63-4A50-9988-6BF3A3A5E350}"/>
+              </a:ext>
+            </a:extLst>
+          </p:cNvPr>
+          <p:cNvSpPr>
+            <a:spLocks xmlns:a="http://schemas.openxmlformats.org/drawingml/2006/main" noGrp="1"/>
+          </p:cNvSpPr>
+          <p:nvPr/>
+        </p:nvSpPr>
+        <p:spPr>
+          <a:xfrm xmlns:a="http://schemas.openxmlformats.org/drawingml/2006/main">
+            <a:off x="7581900" y="10591800"/>
+            <a:ext cx="1181100" cy="1676400"/>
           </a:xfrm>
           <a:prstGeom xmlns:a="http://schemas.openxmlformats.org/drawingml/2006/main" prst="rect">
             <a:avLst/>
           </a:prstGeom>
           <a:solidFill xmlns:a="http://schemas.openxmlformats.org/drawingml/2006/main">
-            <a:srgbClr val="1F5673"/>
+            <a:srgbClr val="FFFFFF"/>
           </a:solidFill>
           <a:ln xmlns:a="http://schemas.openxmlformats.org/drawingml/2006/main" w="9525">
             <a:solidFill>
@@ -3735,24 +3858,46 @@
           </a:ln>
         </p:spPr>
       </p:sp>
-      <p:sp>
-        <p:nvSpPr>
-          <p:cNvPr id="57" name="7-Central conclusion-title">
-            <a:extLst xmlns:a="http://schemas.openxmlformats.org/drawingml/2006/main">
-              <a:ext uri="{FF2B5EF4-FFF2-40B4-BE49-F238E27FC236}">
-                <a16:creationId xmlns:a16="http://schemas.microsoft.com/office/drawing/2014/main" id="{3D1EE876-7A28-4C1E-B5EA-6BCC06B22BF7}"/>
-              </a:ext>
-            </a:extLst>
-          </p:cNvPr>
-          <p:cNvSpPr>
-            <a:spLocks xmlns:a="http://schemas.openxmlformats.org/drawingml/2006/main" noGrp="1"/>
-          </p:cNvSpPr>
-          <p:nvPr/>
-        </p:nvSpPr>
-        <p:spPr>
-          <a:xfrm xmlns:a="http://schemas.openxmlformats.org/drawingml/2006/main">
-            <a:off x="7067550" y="7038975"/>
-            <a:ext cx="2209800" cy="190500"/>
+      <p:pic>
+        <p:nvPicPr>
+          <p:cNvPr id="122" name=""/>
+          <p:cNvPicPr>
+            <a:picLocks xmlns:a="http://schemas.openxmlformats.org/drawingml/2006/main" noChangeAspect="1"/>
+          </p:cNvPicPr>
+          <p:nvPr/>
+        </p:nvPicPr>
+        <p:blipFill>
+          <a:blip xmlns:r="http://schemas.openxmlformats.org/officeDocument/2006/relationships" xmlns:a="http://schemas.openxmlformats.org/drawingml/2006/main" r:embed="Reedfa9a9f28e4690"/>
+          <a:stretch xmlns:a="http://schemas.openxmlformats.org/drawingml/2006/main"/>
+        </p:blipFill>
+        <p:spPr>
+          <a:xfrm xmlns:a="http://schemas.openxmlformats.org/drawingml/2006/main">
+            <a:off x="7715250" y="10706100"/>
+            <a:ext cx="914400" cy="914400"/>
+          </a:xfrm>
+          <a:prstGeom xmlns:a="http://schemas.openxmlformats.org/drawingml/2006/main" prst="rect">
+            <a:avLst/>
+          </a:prstGeom>
+        </p:spPr>
+      </p:pic>
+      <p:sp>
+        <p:nvSpPr>
+          <p:cNvPr id="60" name="qr-label">
+            <a:extLst xmlns:a="http://schemas.openxmlformats.org/drawingml/2006/main">
+              <a:ext uri="{FF2B5EF4-FFF2-40B4-BE49-F238E27FC236}">
+                <a16:creationId xmlns:a16="http://schemas.microsoft.com/office/drawing/2014/main" id="{284B1126-D6B4-4CFD-8FA2-8340F53C51E5}"/>
+              </a:ext>
+            </a:extLst>
+          </p:cNvPr>
+          <p:cNvSpPr>
+            <a:spLocks xmlns:a="http://schemas.openxmlformats.org/drawingml/2006/main" noGrp="1"/>
+          </p:cNvSpPr>
+          <p:nvPr/>
+        </p:nvSpPr>
+        <p:spPr>
+          <a:xfrm xmlns:a="http://schemas.openxmlformats.org/drawingml/2006/main">
+            <a:off x="7658100" y="11696700"/>
+            <a:ext cx="1028700" cy="523875"/>
           </a:xfrm>
           <a:prstGeom xmlns:a="http://schemas.openxmlformats.org/drawingml/2006/main" prst="rect">
             <a:avLst/>
@@ -3767,176 +3912,59 @@
           <a:bodyPr xmlns:a="http://schemas.openxmlformats.org/drawingml/2006/main"/>
           <a:lstStyle xmlns:a="http://schemas.openxmlformats.org/drawingml/2006/main"/>
           <a:p xmlns:a="http://schemas.openxmlformats.org/drawingml/2006/main">
-            <a:pPr algn="l">
-              <a:defRPr sz="900" b="1">
-                <a:solidFill>
-                  <a:srgbClr val="FFFFFF"/>
-                </a:solidFill>
-              </a:defRPr>
-            </a:pPr>
-            <a:r>
-              <a:rPr sz="900" b="1">
-                <a:solidFill>
-                  <a:srgbClr val="FFFFFF"/>
-                </a:solidFill>
-              </a:rPr>
-              <a:t>7. Central conclusion</a:t>
+            <a:pPr algn="ctr">
+              <a:defRPr sz="488" b="1">
+                <a:solidFill>
+                  <a:srgbClr val="153F59"/>
+                </a:solidFill>
+              </a:defRPr>
+            </a:pPr>
+            <a:r>
+              <a:rPr sz="488" b="1">
+                <a:solidFill>
+                  <a:srgbClr val="153F59"/>
+                </a:solidFill>
+              </a:rPr>
+              <a:t>Methodological report, reproducible code and figures</a:t>
+            </a:r>
+          </a:p>
+          <a:p xmlns:a="http://schemas.openxmlformats.org/drawingml/2006/main">
+            <a:pPr algn="ctr">
+              <a:defRPr sz="488" b="1">
+                <a:solidFill>
+                  <a:srgbClr val="153F59"/>
+                </a:solidFill>
+              </a:defRPr>
+            </a:pPr>
+            <a:r>
+              <a:rPr sz="488" b="1">
+                <a:solidFill>
+                  <a:srgbClr val="153F59"/>
+                </a:solidFill>
+              </a:rPr>
+              <a:t>https://ingodube.github.io/PNS_2013_2019/metodologia.html</a:t>
             </a:r>
           </a:p>
         </p:txBody>
       </p:sp>
       <p:sp>
         <p:nvSpPr>
-          <p:cNvPr id="58" name="7-Central conclusion-body">
-            <a:extLst xmlns:a="http://schemas.openxmlformats.org/drawingml/2006/main">
-              <a:ext uri="{FF2B5EF4-FFF2-40B4-BE49-F238E27FC236}">
-                <a16:creationId xmlns:a16="http://schemas.microsoft.com/office/drawing/2014/main" id="{8DBA6F29-57B7-4219-8450-463AAF685F6E}"/>
-              </a:ext>
-            </a:extLst>
-          </p:cNvPr>
-          <p:cNvSpPr>
-            <a:spLocks xmlns:a="http://schemas.openxmlformats.org/drawingml/2006/main" noGrp="1"/>
-          </p:cNvSpPr>
-          <p:nvPr/>
-        </p:nvSpPr>
-        <p:spPr>
-          <a:xfrm xmlns:a="http://schemas.openxmlformats.org/drawingml/2006/main">
-            <a:off x="7086600" y="7334250"/>
-            <a:ext cx="2171700" cy="838200"/>
-          </a:xfrm>
-          <a:prstGeom xmlns:a="http://schemas.openxmlformats.org/drawingml/2006/main" prst="rect">
-            <a:avLst/>
-          </a:prstGeom>
-          <a:noFill xmlns:a="http://schemas.openxmlformats.org/drawingml/2006/main"/>
-          <a:ln xmlns:a="http://schemas.openxmlformats.org/drawingml/2006/main" w="0">
-            <a:noFill/>
-            <a:prstDash val="solid"/>
-          </a:ln>
-        </p:spPr>
-        <p:txBody>
-          <a:bodyPr xmlns:a="http://schemas.openxmlformats.org/drawingml/2006/main"/>
-          <a:lstStyle xmlns:a="http://schemas.openxmlformats.org/drawingml/2006/main"/>
-          <a:p xmlns:a="http://schemas.openxmlformats.org/drawingml/2006/main">
-            <a:pPr algn="l">
-              <a:defRPr sz="540" b="0">
-                <a:solidFill>
-                  <a:srgbClr val="102536"/>
-                </a:solidFill>
-              </a:defRPr>
-            </a:pPr>
-            <a:r>
-              <a:rPr sz="540" b="0">
-                <a:solidFill>
-                  <a:srgbClr val="102536"/>
-                </a:solidFill>
-              </a:rPr>
-              <a:t>• Correct implementation of the sampling design is required for valid estimates.</a:t>
-            </a:r>
-          </a:p>
-          <a:p xmlns:a="http://schemas.openxmlformats.org/drawingml/2006/main">
-            <a:pPr algn="l">
-              <a:defRPr sz="540" b="0">
-                <a:solidFill>
-                  <a:srgbClr val="102536"/>
-                </a:solidFill>
-              </a:defRPr>
-            </a:pPr>
-            <a:r>
-              <a:rPr sz="540" b="0">
-                <a:solidFill>
-                  <a:srgbClr val="102536"/>
-                </a:solidFill>
-              </a:rPr>
-              <a:t>• Brazil showed increased diagnosis, but not equivalent evidence of improved control.</a:t>
-            </a:r>
-          </a:p>
-          <a:p xmlns:a="http://schemas.openxmlformats.org/drawingml/2006/main">
-            <a:pPr algn="l">
-              <a:defRPr sz="540" b="0">
-                <a:solidFill>
-                  <a:srgbClr val="102536"/>
-                </a:solidFill>
-              </a:defRPr>
-            </a:pPr>
-            <a:r>
-              <a:rPr sz="540" b="0">
-                <a:solidFill>
-                  <a:srgbClr val="102536"/>
-                </a:solidFill>
-              </a:rPr>
-              <a:t>• State-level charts must be read with 95% CIs because many comparisons have overlapping intervals.</a:t>
-            </a:r>
-          </a:p>
-        </p:txBody>
-      </p:sp>
-      <p:sp>
-        <p:nvSpPr>
-          <p:cNvPr id="59" name="m-chart-crisis-caption">
-            <a:extLst xmlns:a="http://schemas.openxmlformats.org/drawingml/2006/main">
-              <a:ext uri="{FF2B5EF4-FFF2-40B4-BE49-F238E27FC236}">
-                <a16:creationId xmlns:a16="http://schemas.microsoft.com/office/drawing/2014/main" id="{A3060C47-F68B-4A96-AFBE-BB7A17F796B8}"/>
-              </a:ext>
-            </a:extLst>
-          </p:cNvPr>
-          <p:cNvSpPr>
-            <a:spLocks xmlns:a="http://schemas.openxmlformats.org/drawingml/2006/main" noGrp="1"/>
-          </p:cNvSpPr>
-          <p:nvPr/>
-        </p:nvSpPr>
-        <p:spPr>
-          <a:xfrm xmlns:a="http://schemas.openxmlformats.org/drawingml/2006/main">
-            <a:off x="6991350" y="8362950"/>
-            <a:ext cx="2362200" cy="228600"/>
-          </a:xfrm>
-          <a:prstGeom xmlns:a="http://schemas.openxmlformats.org/drawingml/2006/main" prst="rect">
-            <a:avLst/>
-          </a:prstGeom>
-          <a:noFill xmlns:a="http://schemas.openxmlformats.org/drawingml/2006/main"/>
-          <a:ln xmlns:a="http://schemas.openxmlformats.org/drawingml/2006/main" w="0">
-            <a:noFill/>
-            <a:prstDash val="solid"/>
-          </a:ln>
-        </p:spPr>
-        <p:txBody>
-          <a:bodyPr xmlns:a="http://schemas.openxmlformats.org/drawingml/2006/main"/>
-          <a:lstStyle xmlns:a="http://schemas.openxmlformats.org/drawingml/2006/main"/>
-          <a:p xmlns:a="http://schemas.openxmlformats.org/drawingml/2006/main">
-            <a:pPr algn="ctr">
-              <a:defRPr sz="660" b="1">
-                <a:solidFill>
-                  <a:srgbClr val="153F59"/>
-                </a:solidFill>
-              </a:defRPr>
-            </a:pPr>
-            <a:r>
-              <a:rPr sz="660" b="1">
-                <a:solidFill>
-                  <a:srgbClr val="153F59"/>
-                </a:solidFill>
-              </a:rPr>
-              <a:t>Figure 2: Asthma attacks in the previous 12 months (%) by state and Brazil, PNS 2013 and 2019.</a:t>
-            </a:r>
-          </a:p>
-        </p:txBody>
-      </p:sp>
-      <p:sp>
-        <p:nvSpPr>
-          <p:cNvPr id="60" name="m-chart-crisis-frame">
-            <a:extLst xmlns:a="http://schemas.openxmlformats.org/drawingml/2006/main">
-              <a:ext uri="{FF2B5EF4-FFF2-40B4-BE49-F238E27FC236}">
-                <a16:creationId xmlns:a16="http://schemas.microsoft.com/office/drawing/2014/main" id="{FB22D81E-4048-42D6-BF3A-930C8DB8B552}"/>
-              </a:ext>
-            </a:extLst>
-          </p:cNvPr>
-          <p:cNvSpPr>
-            <a:spLocks xmlns:a="http://schemas.openxmlformats.org/drawingml/2006/main" noGrp="1"/>
-          </p:cNvSpPr>
-          <p:nvPr/>
-        </p:nvSpPr>
-        <p:spPr>
-          <a:xfrm xmlns:a="http://schemas.openxmlformats.org/drawingml/2006/main">
-            <a:off x="6991350" y="8610600"/>
-            <a:ext cx="2362200" cy="1695450"/>
+          <p:cNvPr id="61" name="references-box">
+            <a:extLst xmlns:a="http://schemas.openxmlformats.org/drawingml/2006/main">
+              <a:ext uri="{FF2B5EF4-FFF2-40B4-BE49-F238E27FC236}">
+                <a16:creationId xmlns:a16="http://schemas.microsoft.com/office/drawing/2014/main" id="{A1FA98AD-5DE6-4480-BFF2-0BD6C12830C2}"/>
+              </a:ext>
+            </a:extLst>
+          </p:cNvPr>
+          <p:cNvSpPr>
+            <a:spLocks xmlns:a="http://schemas.openxmlformats.org/drawingml/2006/main" noGrp="1"/>
+          </p:cNvSpPr>
+          <p:nvPr/>
+        </p:nvSpPr>
+        <p:spPr>
+          <a:xfrm xmlns:a="http://schemas.openxmlformats.org/drawingml/2006/main">
+            <a:off x="323850" y="12382500"/>
+            <a:ext cx="8877300" cy="857250"/>
           </a:xfrm>
           <a:prstGeom xmlns:a="http://schemas.openxmlformats.org/drawingml/2006/main" prst="rect">
             <a:avLst/>
@@ -3952,101 +3980,24 @@
           </a:ln>
         </p:spPr>
       </p:sp>
-      <p:pic>
-        <p:nvPicPr>
-          <p:cNvPr id="128" name=""/>
-          <p:cNvPicPr>
-            <a:picLocks xmlns:a="http://schemas.openxmlformats.org/drawingml/2006/main" noChangeAspect="1"/>
-          </p:cNvPicPr>
-          <p:nvPr/>
-        </p:nvPicPr>
-        <p:blipFill>
-          <a:blip xmlns:r="http://schemas.openxmlformats.org/officeDocument/2006/relationships" xmlns:a="http://schemas.openxmlformats.org/drawingml/2006/main" r:embed="Ree6655d8718e48cb"/>
-          <a:stretch xmlns:a="http://schemas.openxmlformats.org/drawingml/2006/main"/>
-        </p:blipFill>
-        <p:spPr>
-          <a:xfrm xmlns:a="http://schemas.openxmlformats.org/drawingml/2006/main">
-            <a:off x="7075326" y="8667750"/>
-            <a:ext cx="2194249" cy="1581150"/>
-          </a:xfrm>
-          <a:prstGeom xmlns:a="http://schemas.openxmlformats.org/drawingml/2006/main" prst="rect">
-            <a:avLst/>
-          </a:prstGeom>
-        </p:spPr>
-      </p:pic>
-      <p:sp>
-        <p:nvSpPr>
-          <p:cNvPr id="62" name="qr-box">
-            <a:extLst xmlns:a="http://schemas.openxmlformats.org/drawingml/2006/main">
-              <a:ext uri="{FF2B5EF4-FFF2-40B4-BE49-F238E27FC236}">
-                <a16:creationId xmlns:a16="http://schemas.microsoft.com/office/drawing/2014/main" id="{DF652B81-CE7F-4927-B6BE-326612E1B27E}"/>
-              </a:ext>
-            </a:extLst>
-          </p:cNvPr>
-          <p:cNvSpPr>
-            <a:spLocks xmlns:a="http://schemas.openxmlformats.org/drawingml/2006/main" noGrp="1"/>
-          </p:cNvSpPr>
-          <p:nvPr/>
-        </p:nvSpPr>
-        <p:spPr>
-          <a:xfrm xmlns:a="http://schemas.openxmlformats.org/drawingml/2006/main">
-            <a:off x="7581900" y="10591800"/>
-            <a:ext cx="1181100" cy="1676400"/>
-          </a:xfrm>
-          <a:prstGeom xmlns:a="http://schemas.openxmlformats.org/drawingml/2006/main" prst="rect">
-            <a:avLst/>
-          </a:prstGeom>
-          <a:solidFill xmlns:a="http://schemas.openxmlformats.org/drawingml/2006/main">
-            <a:srgbClr val="FFFFFF"/>
-          </a:solidFill>
-          <a:ln xmlns:a="http://schemas.openxmlformats.org/drawingml/2006/main" w="9525">
-            <a:solidFill>
-              <a:srgbClr val="1F5673"/>
-            </a:solidFill>
-            <a:prstDash val="solid"/>
-          </a:ln>
-        </p:spPr>
-      </p:sp>
-      <p:pic>
-        <p:nvPicPr>
-          <p:cNvPr id="130" name=""/>
-          <p:cNvPicPr>
-            <a:picLocks xmlns:a="http://schemas.openxmlformats.org/drawingml/2006/main" noChangeAspect="1"/>
-          </p:cNvPicPr>
-          <p:nvPr/>
-        </p:nvPicPr>
-        <p:blipFill>
-          <a:blip xmlns:r="http://schemas.openxmlformats.org/officeDocument/2006/relationships" xmlns:a="http://schemas.openxmlformats.org/drawingml/2006/main" r:embed="R9326a2788d8143dc"/>
-          <a:stretch xmlns:a="http://schemas.openxmlformats.org/drawingml/2006/main"/>
-        </p:blipFill>
-        <p:spPr>
-          <a:xfrm xmlns:a="http://schemas.openxmlformats.org/drawingml/2006/main">
-            <a:off x="7715250" y="10706100"/>
-            <a:ext cx="914400" cy="914400"/>
-          </a:xfrm>
-          <a:prstGeom xmlns:a="http://schemas.openxmlformats.org/drawingml/2006/main" prst="rect">
-            <a:avLst/>
-          </a:prstGeom>
-        </p:spPr>
-      </p:pic>
-      <p:sp>
-        <p:nvSpPr>
-          <p:cNvPr id="64" name="qr-label">
-            <a:extLst xmlns:a="http://schemas.openxmlformats.org/drawingml/2006/main">
-              <a:ext uri="{FF2B5EF4-FFF2-40B4-BE49-F238E27FC236}">
-                <a16:creationId xmlns:a16="http://schemas.microsoft.com/office/drawing/2014/main" id="{DF26ED3C-42D4-4AAB-A537-A114AA7F748C}"/>
-              </a:ext>
-            </a:extLst>
-          </p:cNvPr>
-          <p:cNvSpPr>
-            <a:spLocks xmlns:a="http://schemas.openxmlformats.org/drawingml/2006/main" noGrp="1"/>
-          </p:cNvSpPr>
-          <p:nvPr/>
-        </p:nvSpPr>
-        <p:spPr>
-          <a:xfrm xmlns:a="http://schemas.openxmlformats.org/drawingml/2006/main">
-            <a:off x="7658100" y="11696700"/>
-            <a:ext cx="1028700" cy="523875"/>
+      <p:sp>
+        <p:nvSpPr>
+          <p:cNvPr id="62" name="references-title">
+            <a:extLst xmlns:a="http://schemas.openxmlformats.org/drawingml/2006/main">
+              <a:ext uri="{FF2B5EF4-FFF2-40B4-BE49-F238E27FC236}">
+                <a16:creationId xmlns:a16="http://schemas.microsoft.com/office/drawing/2014/main" id="{891BD574-A221-473A-9635-D7E8D22214F3}"/>
+              </a:ext>
+            </a:extLst>
+          </p:cNvPr>
+          <p:cNvSpPr>
+            <a:spLocks xmlns:a="http://schemas.openxmlformats.org/drawingml/2006/main" noGrp="1"/>
+          </p:cNvSpPr>
+          <p:nvPr/>
+        </p:nvSpPr>
+        <p:spPr>
+          <a:xfrm xmlns:a="http://schemas.openxmlformats.org/drawingml/2006/main">
+            <a:off x="400050" y="12449175"/>
+            <a:ext cx="8724900" cy="171450"/>
           </a:xfrm>
           <a:prstGeom xmlns:a="http://schemas.openxmlformats.org/drawingml/2006/main" prst="rect">
             <a:avLst/>
@@ -4061,92 +4012,42 @@
           <a:bodyPr xmlns:a="http://schemas.openxmlformats.org/drawingml/2006/main"/>
           <a:lstStyle xmlns:a="http://schemas.openxmlformats.org/drawingml/2006/main"/>
           <a:p xmlns:a="http://schemas.openxmlformats.org/drawingml/2006/main">
-            <a:pPr algn="ctr">
-              <a:defRPr sz="488" b="1">
+            <a:pPr algn="l">
+              <a:defRPr sz="825" b="1">
                 <a:solidFill>
                   <a:srgbClr val="153F59"/>
                 </a:solidFill>
               </a:defRPr>
             </a:pPr>
             <a:r>
-              <a:rPr sz="488" b="1">
+              <a:rPr sz="825" b="1">
                 <a:solidFill>
                   <a:srgbClr val="153F59"/>
                 </a:solidFill>
               </a:rPr>
-              <a:t>Methodological report, reproducible code and figures</a:t>
-            </a:r>
-          </a:p>
-          <a:p xmlns:a="http://schemas.openxmlformats.org/drawingml/2006/main">
-            <a:pPr algn="ctr">
-              <a:defRPr sz="488" b="1">
-                <a:solidFill>
-                  <a:srgbClr val="153F59"/>
-                </a:solidFill>
-              </a:defRPr>
-            </a:pPr>
-            <a:r>
-              <a:rPr sz="488" b="1">
-                <a:solidFill>
-                  <a:srgbClr val="153F59"/>
-                </a:solidFill>
-              </a:rPr>
-              <a:t>https://ingodube.github.io/PNS_2013_2019/metodologia.html</a:t>
+              <a:t>References</a:t>
             </a:r>
           </a:p>
         </p:txBody>
       </p:sp>
       <p:sp>
         <p:nvSpPr>
-          <p:cNvPr id="65" name="references-box">
-            <a:extLst xmlns:a="http://schemas.openxmlformats.org/drawingml/2006/main">
-              <a:ext uri="{FF2B5EF4-FFF2-40B4-BE49-F238E27FC236}">
-                <a16:creationId xmlns:a16="http://schemas.microsoft.com/office/drawing/2014/main" id="{3CAB8BFE-8322-4B0F-98F5-8D054493489E}"/>
-              </a:ext>
-            </a:extLst>
-          </p:cNvPr>
-          <p:cNvSpPr>
-            <a:spLocks xmlns:a="http://schemas.openxmlformats.org/drawingml/2006/main" noGrp="1"/>
-          </p:cNvSpPr>
-          <p:nvPr/>
-        </p:nvSpPr>
-        <p:spPr>
-          <a:xfrm xmlns:a="http://schemas.openxmlformats.org/drawingml/2006/main">
-            <a:off x="323850" y="12382500"/>
-            <a:ext cx="8877300" cy="857250"/>
-          </a:xfrm>
-          <a:prstGeom xmlns:a="http://schemas.openxmlformats.org/drawingml/2006/main" prst="rect">
-            <a:avLst/>
-          </a:prstGeom>
-          <a:solidFill xmlns:a="http://schemas.openxmlformats.org/drawingml/2006/main">
-            <a:srgbClr val="FFFFFF"/>
-          </a:solidFill>
-          <a:ln xmlns:a="http://schemas.openxmlformats.org/drawingml/2006/main" w="9525">
-            <a:solidFill>
-              <a:srgbClr val="B7D0DF"/>
-            </a:solidFill>
-            <a:prstDash val="solid"/>
-          </a:ln>
-        </p:spPr>
-      </p:sp>
-      <p:sp>
-        <p:nvSpPr>
-          <p:cNvPr id="66" name="references-title">
-            <a:extLst xmlns:a="http://schemas.openxmlformats.org/drawingml/2006/main">
-              <a:ext uri="{FF2B5EF4-FFF2-40B4-BE49-F238E27FC236}">
-                <a16:creationId xmlns:a16="http://schemas.microsoft.com/office/drawing/2014/main" id="{21838430-1C23-42AD-B42D-492838EA0D12}"/>
-              </a:ext>
-            </a:extLst>
-          </p:cNvPr>
-          <p:cNvSpPr>
-            <a:spLocks xmlns:a="http://schemas.openxmlformats.org/drawingml/2006/main" noGrp="1"/>
-          </p:cNvSpPr>
-          <p:nvPr/>
-        </p:nvSpPr>
-        <p:spPr>
-          <a:xfrm xmlns:a="http://schemas.openxmlformats.org/drawingml/2006/main">
-            <a:off x="400050" y="12449175"/>
-            <a:ext cx="8724900" cy="171450"/>
+          <p:cNvPr id="63" name="references-body">
+            <a:extLst xmlns:a="http://schemas.openxmlformats.org/drawingml/2006/main">
+              <a:ext uri="{FF2B5EF4-FFF2-40B4-BE49-F238E27FC236}">
+                <a16:creationId xmlns:a16="http://schemas.microsoft.com/office/drawing/2014/main" id="{EACE7DC9-D049-4D18-A9F1-79074A0BA49D}"/>
+              </a:ext>
+            </a:extLst>
+          </p:cNvPr>
+          <p:cNvSpPr>
+            <a:spLocks xmlns:a="http://schemas.openxmlformats.org/drawingml/2006/main" noGrp="1"/>
+          </p:cNvSpPr>
+          <p:nvPr/>
+        </p:nvSpPr>
+        <p:spPr>
+          <a:xfrm xmlns:a="http://schemas.openxmlformats.org/drawingml/2006/main">
+            <a:off x="400050" y="12649200"/>
+            <a:ext cx="8724900" cy="533400"/>
           </a:xfrm>
           <a:prstGeom xmlns:a="http://schemas.openxmlformats.org/drawingml/2006/main" prst="rect">
             <a:avLst/>
@@ -4162,56 +4063,6 @@
           <a:lstStyle xmlns:a="http://schemas.openxmlformats.org/drawingml/2006/main"/>
           <a:p xmlns:a="http://schemas.openxmlformats.org/drawingml/2006/main">
             <a:pPr algn="l">
-              <a:defRPr sz="825" b="1">
-                <a:solidFill>
-                  <a:srgbClr val="153F59"/>
-                </a:solidFill>
-              </a:defRPr>
-            </a:pPr>
-            <a:r>
-              <a:rPr sz="825" b="1">
-                <a:solidFill>
-                  <a:srgbClr val="153F59"/>
-                </a:solidFill>
-              </a:rPr>
-              <a:t>References</a:t>
-            </a:r>
-          </a:p>
-        </p:txBody>
-      </p:sp>
-      <p:sp>
-        <p:nvSpPr>
-          <p:cNvPr id="67" name="references-body">
-            <a:extLst xmlns:a="http://schemas.openxmlformats.org/drawingml/2006/main">
-              <a:ext uri="{FF2B5EF4-FFF2-40B4-BE49-F238E27FC236}">
-                <a16:creationId xmlns:a16="http://schemas.microsoft.com/office/drawing/2014/main" id="{E6E0F459-63B3-4F1A-9113-9C57A55008A7}"/>
-              </a:ext>
-            </a:extLst>
-          </p:cNvPr>
-          <p:cNvSpPr>
-            <a:spLocks xmlns:a="http://schemas.openxmlformats.org/drawingml/2006/main" noGrp="1"/>
-          </p:cNvSpPr>
-          <p:nvPr/>
-        </p:nvSpPr>
-        <p:spPr>
-          <a:xfrm xmlns:a="http://schemas.openxmlformats.org/drawingml/2006/main">
-            <a:off x="400050" y="12649200"/>
-            <a:ext cx="8724900" cy="533400"/>
-          </a:xfrm>
-          <a:prstGeom xmlns:a="http://schemas.openxmlformats.org/drawingml/2006/main" prst="rect">
-            <a:avLst/>
-          </a:prstGeom>
-          <a:noFill xmlns:a="http://schemas.openxmlformats.org/drawingml/2006/main"/>
-          <a:ln xmlns:a="http://schemas.openxmlformats.org/drawingml/2006/main" w="0">
-            <a:noFill/>
-            <a:prstDash val="solid"/>
-          </a:ln>
-        </p:spPr>
-        <p:txBody>
-          <a:bodyPr xmlns:a="http://schemas.openxmlformats.org/drawingml/2006/main"/>
-          <a:lstStyle xmlns:a="http://schemas.openxmlformats.org/drawingml/2006/main"/>
-          <a:p xmlns:a="http://schemas.openxmlformats.org/drawingml/2006/main">
-            <a:pPr algn="l">
               <a:defRPr sz="338" b="0">
                 <a:solidFill>
                   <a:srgbClr val="102536"/>
@@ -4436,7 +4287,7 @@
     </p:spTree>
     <p:extLst>
       <p:ext uri="{BB962C8B-B14F-4D97-AF65-F5344CB8AC3E}">
-        <p14:creationId xmlns:p14="http://schemas.microsoft.com/office/powerpoint/2010/main" val="1714908983"/>
+        <p14:creationId xmlns:p14="http://schemas.microsoft.com/office/powerpoint/2010/main" val="1923956554"/>
       </p:ext>
     </p:extLst>
   </p:cSld>

--- a/outputs/posters/poster_pns_asma_morrison_en.pptx
+++ b/outputs/posters/poster_pns_asma_morrison_en.pptx
@@ -2,13 +2,13 @@
 <file path=ppt/presentation.xml><?xml version="1.0" encoding="utf-8"?>
 <p:presentation xmlns:p="http://schemas.openxmlformats.org/presentationml/2006/main">
   <p:sldMasterIdLst>
-    <p:sldMasterId xmlns:r="http://schemas.openxmlformats.org/officeDocument/2006/relationships" id="2147483648" r:id="R2da2ef1d5af344fd"/>
+    <p:sldMasterId xmlns:r="http://schemas.openxmlformats.org/officeDocument/2006/relationships" id="2147483648" r:id="R8ada595fdf254012"/>
   </p:sldMasterIdLst>
   <p:notesMasterIdLst>
-    <p:notesMasterId xmlns:r="http://schemas.openxmlformats.org/officeDocument/2006/relationships" r:id="R6d7ffd8de59a4810"/>
+    <p:notesMasterId xmlns:r="http://schemas.openxmlformats.org/officeDocument/2006/relationships" r:id="Ra3820a20b54d49f1"/>
   </p:notesMasterIdLst>
   <p:sldIdLst>
-    <p:sldId xmlns:r="http://schemas.openxmlformats.org/officeDocument/2006/relationships" id="256" r:id="Rf33a82278b664e36"/>
+    <p:sldId xmlns:r="http://schemas.openxmlformats.org/officeDocument/2006/relationships" id="256" r:id="Rf14fb708bc264b7f"/>
   </p:sldIdLst>
   <p:sldSz cx="9525000" cy="13468350"/>
   <p:notesSz cx="6858000" cy="9144000"/>
@@ -601,7 +601,7 @@
   </p:cSld>
   <p:clrMap bg1="lt1" tx1="dk1" bg2="lt2" tx2="dk2" accent1="accent1" accent2="accent2" accent3="accent3" accent4="accent4" accent5="accent5" accent6="accent6" hlink="hlink" folHlink="folHlink"/>
   <p:sldLayoutIdLst>
-    <p:sldLayoutId xmlns:r="http://schemas.openxmlformats.org/officeDocument/2006/relationships" id="2147483649" r:id="R4dc07bc70e634c0d"/>
+    <p:sldLayoutId xmlns:r="http://schemas.openxmlformats.org/officeDocument/2006/relationships" id="2147483649" r:id="R23e58f06122d43a5"/>
   </p:sldLayoutIdLst>
   <p:txStyles>
     <p:titleStyle>
@@ -1149,14 +1149,14 @@
       </p:grpSpPr>
       <p:pic>
         <p:nvPicPr>
-          <p:cNvPr id="64" name=""/>
+          <p:cNvPr id="65" name=""/>
           <p:cNvPicPr>
             <a:picLocks xmlns:a="http://schemas.openxmlformats.org/drawingml/2006/main" noChangeAspect="1"/>
           </p:cNvPicPr>
           <p:nvPr/>
         </p:nvPicPr>
         <p:blipFill>
-          <a:blip xmlns:r="http://schemas.openxmlformats.org/officeDocument/2006/relationships" xmlns:a="http://schemas.openxmlformats.org/drawingml/2006/main" r:embed="R23bc01011c684544"/>
+          <a:blip xmlns:r="http://schemas.openxmlformats.org/officeDocument/2006/relationships" xmlns:a="http://schemas.openxmlformats.org/drawingml/2006/main" r:embed="R10fe8035664d4b84"/>
           <a:srcRect xmlns:a="http://schemas.openxmlformats.org/drawingml/2006/main" l="0" t="38622" r="0" b="38622"/>
           <a:stretch xmlns:a="http://schemas.openxmlformats.org/drawingml/2006/main">
             <a:fillRect l="0" t="0" r="0" b="0"/>
@@ -1166,28 +1166,6 @@
           <a:xfrm xmlns:a="http://schemas.openxmlformats.org/drawingml/2006/main">
             <a:off x="0" y="0"/>
             <a:ext cx="9525000" cy="1219200"/>
-          </a:xfrm>
-          <a:prstGeom xmlns:a="http://schemas.openxmlformats.org/drawingml/2006/main" prst="rect">
-            <a:avLst/>
-          </a:prstGeom>
-        </p:spPr>
-      </p:pic>
-      <p:pic>
-        <p:nvPicPr>
-          <p:cNvPr id="65" name=""/>
-          <p:cNvPicPr>
-            <a:picLocks xmlns:a="http://schemas.openxmlformats.org/drawingml/2006/main" noChangeAspect="1"/>
-          </p:cNvPicPr>
-          <p:nvPr/>
-        </p:nvPicPr>
-        <p:blipFill>
-          <a:blip xmlns:r="http://schemas.openxmlformats.org/officeDocument/2006/relationships" xmlns:a="http://schemas.openxmlformats.org/drawingml/2006/main" r:embed="Rdb324d8a126448dd"/>
-          <a:stretch xmlns:a="http://schemas.openxmlformats.org/drawingml/2006/main"/>
-        </p:blipFill>
-        <p:spPr>
-          <a:xfrm xmlns:a="http://schemas.openxmlformats.org/drawingml/2006/main">
-            <a:off x="323850" y="265374"/>
-            <a:ext cx="2952750" cy="612252"/>
           </a:xfrm>
           <a:prstGeom xmlns:a="http://schemas.openxmlformats.org/drawingml/2006/main" prst="rect">
             <a:avLst/>
@@ -1203,11 +1181,33 @@
           <p:nvPr/>
         </p:nvPicPr>
         <p:blipFill>
-          <a:blip xmlns:r="http://schemas.openxmlformats.org/officeDocument/2006/relationships" xmlns:a="http://schemas.openxmlformats.org/drawingml/2006/main" r:embed="Rf0d67e9d4d674a24"/>
+          <a:blip xmlns:r="http://schemas.openxmlformats.org/officeDocument/2006/relationships" xmlns:a="http://schemas.openxmlformats.org/drawingml/2006/main" r:embed="R5596aa549d6b4f72"/>
           <a:stretch xmlns:a="http://schemas.openxmlformats.org/drawingml/2006/main"/>
         </p:blipFill>
         <p:spPr>
           <a:xfrm xmlns:a="http://schemas.openxmlformats.org/drawingml/2006/main">
+            <a:off x="323850" y="265374"/>
+            <a:ext cx="2952750" cy="612252"/>
+          </a:xfrm>
+          <a:prstGeom xmlns:a="http://schemas.openxmlformats.org/drawingml/2006/main" prst="rect">
+            <a:avLst/>
+          </a:prstGeom>
+        </p:spPr>
+      </p:pic>
+      <p:pic>
+        <p:nvPicPr>
+          <p:cNvPr id="67" name=""/>
+          <p:cNvPicPr>
+            <a:picLocks xmlns:a="http://schemas.openxmlformats.org/drawingml/2006/main" noChangeAspect="1"/>
+          </p:cNvPicPr>
+          <p:nvPr/>
+        </p:nvPicPr>
+        <p:blipFill>
+          <a:blip xmlns:r="http://schemas.openxmlformats.org/officeDocument/2006/relationships" xmlns:a="http://schemas.openxmlformats.org/drawingml/2006/main" r:embed="Rd485346d649048b6"/>
+          <a:stretch xmlns:a="http://schemas.openxmlformats.org/drawingml/2006/main"/>
+        </p:blipFill>
+        <p:spPr>
+          <a:xfrm xmlns:a="http://schemas.openxmlformats.org/drawingml/2006/main">
             <a:off x="3905250" y="425056"/>
             <a:ext cx="4953000" cy="311937"/>
           </a:xfrm>
@@ -1221,7 +1221,7 @@
           <p:cNvPr id="4" name="morrison-title">
             <a:extLst xmlns:a="http://schemas.openxmlformats.org/drawingml/2006/main">
               <a:ext uri="{FF2B5EF4-FFF2-40B4-BE49-F238E27FC236}">
-                <a16:creationId xmlns:a16="http://schemas.microsoft.com/office/drawing/2014/main" id="{142E962B-AE39-4875-B258-83253AE861AF}"/>
+                <a16:creationId xmlns:a16="http://schemas.microsoft.com/office/drawing/2014/main" id="{A37EC5BE-B84C-438D-A717-07894D4F40F1}"/>
               </a:ext>
             </a:extLst>
           </p:cNvPr>
@@ -1271,7 +1271,7 @@
           <p:cNvPr id="5" name="morrison-authors">
             <a:extLst xmlns:a="http://schemas.openxmlformats.org/drawingml/2006/main">
               <a:ext uri="{FF2B5EF4-FFF2-40B4-BE49-F238E27FC236}">
-                <a16:creationId xmlns:a16="http://schemas.microsoft.com/office/drawing/2014/main" id="{8290CFC9-914C-4594-8961-4C1FC2044E01}"/>
+                <a16:creationId xmlns:a16="http://schemas.microsoft.com/office/drawing/2014/main" id="{E614DFB2-0F89-4140-927A-1239DE340DFE}"/>
               </a:ext>
             </a:extLst>
           </p:cNvPr>
@@ -1321,7 +1321,7 @@
           <p:cNvPr id="6" name="central-message">
             <a:extLst xmlns:a="http://schemas.openxmlformats.org/drawingml/2006/main">
               <a:ext uri="{FF2B5EF4-FFF2-40B4-BE49-F238E27FC236}">
-                <a16:creationId xmlns:a16="http://schemas.microsoft.com/office/drawing/2014/main" id="{D3A3CAD2-F3B1-4570-A7C8-5B545AB6E72B}"/>
+                <a16:creationId xmlns:a16="http://schemas.microsoft.com/office/drawing/2014/main" id="{19157170-E41D-4E1A-860F-1D59C7CEAF04}"/>
               </a:ext>
             </a:extLst>
           </p:cNvPr>
@@ -1375,7 +1375,7 @@
           <p:cNvPr id="7" name="1-Method in one line-box">
             <a:extLst xmlns:a="http://schemas.openxmlformats.org/drawingml/2006/main">
               <a:ext uri="{FF2B5EF4-FFF2-40B4-BE49-F238E27FC236}">
-                <a16:creationId xmlns:a16="http://schemas.microsoft.com/office/drawing/2014/main" id="{870C86D8-0E10-4DBA-82B2-5BCEC58F73CE}"/>
+                <a16:creationId xmlns:a16="http://schemas.microsoft.com/office/drawing/2014/main" id="{2B1A9B64-A63D-4298-8B22-12B50404BD79}"/>
               </a:ext>
             </a:extLst>
           </p:cNvPr>
@@ -1408,7 +1408,7 @@
           <p:cNvPr id="8" name="1-Method in one line-head">
             <a:extLst xmlns:a="http://schemas.openxmlformats.org/drawingml/2006/main">
               <a:ext uri="{FF2B5EF4-FFF2-40B4-BE49-F238E27FC236}">
-                <a16:creationId xmlns:a16="http://schemas.microsoft.com/office/drawing/2014/main" id="{CE6880CA-76A1-4C92-BAD4-53C2AF76C7DE}"/>
+                <a16:creationId xmlns:a16="http://schemas.microsoft.com/office/drawing/2014/main" id="{306A5864-D34D-4F3E-A7AD-843B4903AA6F}"/>
               </a:ext>
             </a:extLst>
           </p:cNvPr>
@@ -1441,7 +1441,7 @@
           <p:cNvPr id="9" name="1-Method in one line-title">
             <a:extLst xmlns:a="http://schemas.openxmlformats.org/drawingml/2006/main">
               <a:ext uri="{FF2B5EF4-FFF2-40B4-BE49-F238E27FC236}">
-                <a16:creationId xmlns:a16="http://schemas.microsoft.com/office/drawing/2014/main" id="{D74270D0-BF45-401C-A496-86B03929FEC6}"/>
+                <a16:creationId xmlns:a16="http://schemas.microsoft.com/office/drawing/2014/main" id="{441699A9-E1BE-4B15-9138-052CA1EA2E92}"/>
               </a:ext>
             </a:extLst>
           </p:cNvPr>
@@ -1491,7 +1491,7 @@
           <p:cNvPr id="10" name="1-Method in one line-body">
             <a:extLst xmlns:a="http://schemas.openxmlformats.org/drawingml/2006/main">
               <a:ext uri="{FF2B5EF4-FFF2-40B4-BE49-F238E27FC236}">
-                <a16:creationId xmlns:a16="http://schemas.microsoft.com/office/drawing/2014/main" id="{FBE7A65A-E1FE-48DD-8B8E-78ECA91C1211}"/>
+                <a16:creationId xmlns:a16="http://schemas.microsoft.com/office/drawing/2014/main" id="{2A8B129F-7F93-453A-9F21-530F1004170E}"/>
               </a:ext>
             </a:extLst>
           </p:cNvPr>
@@ -1592,7 +1592,7 @@
           <p:cNvPr id="11" name="morrison-formula-box">
             <a:extLst xmlns:a="http://schemas.openxmlformats.org/drawingml/2006/main">
               <a:ext uri="{FF2B5EF4-FFF2-40B4-BE49-F238E27FC236}">
-                <a16:creationId xmlns:a16="http://schemas.microsoft.com/office/drawing/2014/main" id="{F02AF21C-8241-44C5-8095-0374F8834E34}"/>
+                <a16:creationId xmlns:a16="http://schemas.microsoft.com/office/drawing/2014/main" id="{02E84914-16D9-4E09-A16A-5E23E4A169B4}"/>
               </a:ext>
             </a:extLst>
           </p:cNvPr>
@@ -1625,7 +1625,7 @@
           <p:cNvPr id="12" name="morrison-formula-title">
             <a:extLst xmlns:a="http://schemas.openxmlformats.org/drawingml/2006/main">
               <a:ext uri="{FF2B5EF4-FFF2-40B4-BE49-F238E27FC236}">
-                <a16:creationId xmlns:a16="http://schemas.microsoft.com/office/drawing/2014/main" id="{75C011E8-74A7-4650-BB65-3988AD49C63C}"/>
+                <a16:creationId xmlns:a16="http://schemas.microsoft.com/office/drawing/2014/main" id="{A32E9AED-7930-41A4-A477-2C4D9200B1EF}"/>
               </a:ext>
             </a:extLst>
           </p:cNvPr>
@@ -1675,7 +1675,7 @@
           <p:cNvPr id="13" name="morrison-formula">
             <a:extLst xmlns:a="http://schemas.openxmlformats.org/drawingml/2006/main">
               <a:ext uri="{FF2B5EF4-FFF2-40B4-BE49-F238E27FC236}">
-                <a16:creationId xmlns:a16="http://schemas.microsoft.com/office/drawing/2014/main" id="{977D5E72-E325-4976-84F2-21A0D7D0B952}"/>
+                <a16:creationId xmlns:a16="http://schemas.microsoft.com/office/drawing/2014/main" id="{F84B2327-0749-4A89-A188-CAE32143CFC2}"/>
               </a:ext>
             </a:extLst>
           </p:cNvPr>
@@ -1793,7 +1793,7 @@
           <p:cNvPr id="14" name="2-Data and denominators-box">
             <a:extLst xmlns:a="http://schemas.openxmlformats.org/drawingml/2006/main">
               <a:ext uri="{FF2B5EF4-FFF2-40B4-BE49-F238E27FC236}">
-                <a16:creationId xmlns:a16="http://schemas.microsoft.com/office/drawing/2014/main" id="{CA2AC51D-24B8-483D-B848-4D63543A11E4}"/>
+                <a16:creationId xmlns:a16="http://schemas.microsoft.com/office/drawing/2014/main" id="{579C9E39-964B-4CF5-9E10-30DB00B4F822}"/>
               </a:ext>
             </a:extLst>
           </p:cNvPr>
@@ -1826,7 +1826,7 @@
           <p:cNvPr id="15" name="2-Data and denominators-head">
             <a:extLst xmlns:a="http://schemas.openxmlformats.org/drawingml/2006/main">
               <a:ext uri="{FF2B5EF4-FFF2-40B4-BE49-F238E27FC236}">
-                <a16:creationId xmlns:a16="http://schemas.microsoft.com/office/drawing/2014/main" id="{363368C9-43A9-4783-8A3D-D7803E85622D}"/>
+                <a16:creationId xmlns:a16="http://schemas.microsoft.com/office/drawing/2014/main" id="{9D1F4150-1981-4679-9F5F-381C925B27F7}"/>
               </a:ext>
             </a:extLst>
           </p:cNvPr>
@@ -1859,7 +1859,7 @@
           <p:cNvPr id="16" name="2-Data and denominators-title">
             <a:extLst xmlns:a="http://schemas.openxmlformats.org/drawingml/2006/main">
               <a:ext uri="{FF2B5EF4-FFF2-40B4-BE49-F238E27FC236}">
-                <a16:creationId xmlns:a16="http://schemas.microsoft.com/office/drawing/2014/main" id="{48D928BA-1C98-41C2-873A-E5B294C10650}"/>
+                <a16:creationId xmlns:a16="http://schemas.microsoft.com/office/drawing/2014/main" id="{CE9A419B-3580-4573-A169-277F0E9698F5}"/>
               </a:ext>
             </a:extLst>
           </p:cNvPr>
@@ -1909,7 +1909,7 @@
           <p:cNvPr id="17" name="2-Data and denominators-body">
             <a:extLst xmlns:a="http://schemas.openxmlformats.org/drawingml/2006/main">
               <a:ext uri="{FF2B5EF4-FFF2-40B4-BE49-F238E27FC236}">
-                <a16:creationId xmlns:a16="http://schemas.microsoft.com/office/drawing/2014/main" id="{80E4215E-E828-44AC-8742-CF906157B79B}"/>
+                <a16:creationId xmlns:a16="http://schemas.microsoft.com/office/drawing/2014/main" id="{4DD2DBBE-4BFA-4B13-A8C0-7B1914EE99A9}"/>
               </a:ext>
             </a:extLst>
           </p:cNvPr>
@@ -1993,7 +1993,7 @@
           <p:cNvPr id="18" name="3-Why beta CIs?-box">
             <a:extLst xmlns:a="http://schemas.openxmlformats.org/drawingml/2006/main">
               <a:ext uri="{FF2B5EF4-FFF2-40B4-BE49-F238E27FC236}">
-                <a16:creationId xmlns:a16="http://schemas.microsoft.com/office/drawing/2014/main" id="{B37FEAC3-9EDE-47BA-9078-8CCA106702B3}"/>
+                <a16:creationId xmlns:a16="http://schemas.microsoft.com/office/drawing/2014/main" id="{81397162-AB87-42E2-80A5-2C76517A6837}"/>
               </a:ext>
             </a:extLst>
           </p:cNvPr>
@@ -2026,7 +2026,7 @@
           <p:cNvPr id="19" name="3-Why beta CIs?-head">
             <a:extLst xmlns:a="http://schemas.openxmlformats.org/drawingml/2006/main">
               <a:ext uri="{FF2B5EF4-FFF2-40B4-BE49-F238E27FC236}">
-                <a16:creationId xmlns:a16="http://schemas.microsoft.com/office/drawing/2014/main" id="{B41F5C66-8637-4037-9DF4-ADA06D4E1E09}"/>
+                <a16:creationId xmlns:a16="http://schemas.microsoft.com/office/drawing/2014/main" id="{5F079014-5C9E-4CD1-9F57-06B0FFF4D66E}"/>
               </a:ext>
             </a:extLst>
           </p:cNvPr>
@@ -2059,7 +2059,7 @@
           <p:cNvPr id="20" name="3-Why beta CIs?-title">
             <a:extLst xmlns:a="http://schemas.openxmlformats.org/drawingml/2006/main">
               <a:ext uri="{FF2B5EF4-FFF2-40B4-BE49-F238E27FC236}">
-                <a16:creationId xmlns:a16="http://schemas.microsoft.com/office/drawing/2014/main" id="{B9920D36-5EB0-4055-9F64-B7362A791D38}"/>
+                <a16:creationId xmlns:a16="http://schemas.microsoft.com/office/drawing/2014/main" id="{EA1F153F-399E-4043-85AB-C7C11502A03B}"/>
               </a:ext>
             </a:extLst>
           </p:cNvPr>
@@ -2109,7 +2109,7 @@
           <p:cNvPr id="21" name="3-Why beta CIs?-body">
             <a:extLst xmlns:a="http://schemas.openxmlformats.org/drawingml/2006/main">
               <a:ext uri="{FF2B5EF4-FFF2-40B4-BE49-F238E27FC236}">
-                <a16:creationId xmlns:a16="http://schemas.microsoft.com/office/drawing/2014/main" id="{28469837-1877-4D5F-A3F9-5A39EEC9D00D}"/>
+                <a16:creationId xmlns:a16="http://schemas.microsoft.com/office/drawing/2014/main" id="{886F9400-B1A8-4C70-A74E-2CE58923427E}"/>
               </a:ext>
             </a:extLst>
           </p:cNvPr>
@@ -2193,7 +2193,7 @@
           <p:cNvPr id="22" name="4-ETL and interoperability-box">
             <a:extLst xmlns:a="http://schemas.openxmlformats.org/drawingml/2006/main">
               <a:ext uri="{FF2B5EF4-FFF2-40B4-BE49-F238E27FC236}">
-                <a16:creationId xmlns:a16="http://schemas.microsoft.com/office/drawing/2014/main" id="{209A17EA-DD67-4577-8D9D-67DDA120033C}"/>
+                <a16:creationId xmlns:a16="http://schemas.microsoft.com/office/drawing/2014/main" id="{6C15C9A4-0FC0-4F0B-B888-79D9C36E40E7}"/>
               </a:ext>
             </a:extLst>
           </p:cNvPr>
@@ -2226,7 +2226,7 @@
           <p:cNvPr id="23" name="4-ETL and interoperability-head">
             <a:extLst xmlns:a="http://schemas.openxmlformats.org/drawingml/2006/main">
               <a:ext uri="{FF2B5EF4-FFF2-40B4-BE49-F238E27FC236}">
-                <a16:creationId xmlns:a16="http://schemas.microsoft.com/office/drawing/2014/main" id="{699E286A-98EB-4B0B-8C79-A6B34B8E9530}"/>
+                <a16:creationId xmlns:a16="http://schemas.microsoft.com/office/drawing/2014/main" id="{72A0C436-CC38-4927-A1F7-65CA88B6CBDE}"/>
               </a:ext>
             </a:extLst>
           </p:cNvPr>
@@ -2259,7 +2259,7 @@
           <p:cNvPr id="24" name="4-ETL and interoperability-title">
             <a:extLst xmlns:a="http://schemas.openxmlformats.org/drawingml/2006/main">
               <a:ext uri="{FF2B5EF4-FFF2-40B4-BE49-F238E27FC236}">
-                <a16:creationId xmlns:a16="http://schemas.microsoft.com/office/drawing/2014/main" id="{8DBA172B-0DF2-4A7D-BDF0-BC1399C53F0F}"/>
+                <a16:creationId xmlns:a16="http://schemas.microsoft.com/office/drawing/2014/main" id="{6DB66DD0-731B-47A8-BBCD-63C22D13E169}"/>
               </a:ext>
             </a:extLst>
           </p:cNvPr>
@@ -2309,7 +2309,7 @@
           <p:cNvPr id="25" name="4-ETL and interoperability-body">
             <a:extLst xmlns:a="http://schemas.openxmlformats.org/drawingml/2006/main">
               <a:ext uri="{FF2B5EF4-FFF2-40B4-BE49-F238E27FC236}">
-                <a16:creationId xmlns:a16="http://schemas.microsoft.com/office/drawing/2014/main" id="{AB78CB38-17AE-4027-A278-AB3C9ECE893C}"/>
+                <a16:creationId xmlns:a16="http://schemas.microsoft.com/office/drawing/2014/main" id="{19E81CA4-33B8-41BC-B388-DAB8C71C3AFA}"/>
               </a:ext>
             </a:extLst>
           </p:cNvPr>
@@ -2393,7 +2393,7 @@
           <p:cNvPr id="26" name="m-prev-metric">
             <a:extLst xmlns:a="http://schemas.openxmlformats.org/drawingml/2006/main">
               <a:ext uri="{FF2B5EF4-FFF2-40B4-BE49-F238E27FC236}">
-                <a16:creationId xmlns:a16="http://schemas.microsoft.com/office/drawing/2014/main" id="{A60801E9-7843-41A1-9B49-2C85EEBA2212}"/>
+                <a16:creationId xmlns:a16="http://schemas.microsoft.com/office/drawing/2014/main" id="{19418887-6E00-4DC5-AF6D-CECF522BA69E}"/>
               </a:ext>
             </a:extLst>
           </p:cNvPr>
@@ -2426,7 +2426,7 @@
           <p:cNvPr id="27" name="m-prev-metric-title">
             <a:extLst xmlns:a="http://schemas.openxmlformats.org/drawingml/2006/main">
               <a:ext uri="{FF2B5EF4-FFF2-40B4-BE49-F238E27FC236}">
-                <a16:creationId xmlns:a16="http://schemas.microsoft.com/office/drawing/2014/main" id="{FDDD986D-7282-40F9-BDB7-C0A382FAD397}"/>
+                <a16:creationId xmlns:a16="http://schemas.microsoft.com/office/drawing/2014/main" id="{4C9EB2CD-03EE-4B42-B4D8-33BB952D23DD}"/>
               </a:ext>
             </a:extLst>
           </p:cNvPr>
@@ -2476,7 +2476,7 @@
           <p:cNvPr id="28" name="m-prev-metric-value">
             <a:extLst xmlns:a="http://schemas.openxmlformats.org/drawingml/2006/main">
               <a:ext uri="{FF2B5EF4-FFF2-40B4-BE49-F238E27FC236}">
-                <a16:creationId xmlns:a16="http://schemas.microsoft.com/office/drawing/2014/main" id="{4851CDF8-13C0-471D-8136-B7F709E106CD}"/>
+                <a16:creationId xmlns:a16="http://schemas.microsoft.com/office/drawing/2014/main" id="{3B1A7F83-7848-4E52-B074-1E7F8A6FDE98}"/>
               </a:ext>
             </a:extLst>
           </p:cNvPr>
@@ -2526,7 +2526,7 @@
           <p:cNvPr id="29" name="m-prev-metric-note">
             <a:extLst xmlns:a="http://schemas.openxmlformats.org/drawingml/2006/main">
               <a:ext uri="{FF2B5EF4-FFF2-40B4-BE49-F238E27FC236}">
-                <a16:creationId xmlns:a16="http://schemas.microsoft.com/office/drawing/2014/main" id="{B919D514-B959-44CE-ADA8-69970F9B42DA}"/>
+                <a16:creationId xmlns:a16="http://schemas.microsoft.com/office/drawing/2014/main" id="{39C1162C-EA0D-4D15-BF06-2EBFCAA3017A}"/>
               </a:ext>
             </a:extLst>
           </p:cNvPr>
@@ -2576,7 +2576,7 @@
           <p:cNvPr id="30" name="m-crisis-metric">
             <a:extLst xmlns:a="http://schemas.openxmlformats.org/drawingml/2006/main">
               <a:ext uri="{FF2B5EF4-FFF2-40B4-BE49-F238E27FC236}">
-                <a16:creationId xmlns:a16="http://schemas.microsoft.com/office/drawing/2014/main" id="{73D9EBE3-747B-4826-B661-B5BD9D5EA6EB}"/>
+                <a16:creationId xmlns:a16="http://schemas.microsoft.com/office/drawing/2014/main" id="{0CAC820D-B22E-42B0-B204-0062F3482AAE}"/>
               </a:ext>
             </a:extLst>
           </p:cNvPr>
@@ -2609,7 +2609,7 @@
           <p:cNvPr id="31" name="m-crisis-metric-title">
             <a:extLst xmlns:a="http://schemas.openxmlformats.org/drawingml/2006/main">
               <a:ext uri="{FF2B5EF4-FFF2-40B4-BE49-F238E27FC236}">
-                <a16:creationId xmlns:a16="http://schemas.microsoft.com/office/drawing/2014/main" id="{17105B93-0FC9-4C3D-B6AF-78EC13EA48D0}"/>
+                <a16:creationId xmlns:a16="http://schemas.microsoft.com/office/drawing/2014/main" id="{DD18DEA2-FC70-4A94-BEC6-9F5B0B8DC4EA}"/>
               </a:ext>
             </a:extLst>
           </p:cNvPr>
@@ -2659,7 +2659,7 @@
           <p:cNvPr id="32" name="m-crisis-metric-value">
             <a:extLst xmlns:a="http://schemas.openxmlformats.org/drawingml/2006/main">
               <a:ext uri="{FF2B5EF4-FFF2-40B4-BE49-F238E27FC236}">
-                <a16:creationId xmlns:a16="http://schemas.microsoft.com/office/drawing/2014/main" id="{576C704F-34F5-4215-A8B6-97A5933B1110}"/>
+                <a16:creationId xmlns:a16="http://schemas.microsoft.com/office/drawing/2014/main" id="{7B1AC243-C68D-4F79-B487-A16283C32AE1}"/>
               </a:ext>
             </a:extLst>
           </p:cNvPr>
@@ -2709,7 +2709,7 @@
           <p:cNvPr id="33" name="m-crisis-metric-note">
             <a:extLst xmlns:a="http://schemas.openxmlformats.org/drawingml/2006/main">
               <a:ext uri="{FF2B5EF4-FFF2-40B4-BE49-F238E27FC236}">
-                <a16:creationId xmlns:a16="http://schemas.microsoft.com/office/drawing/2014/main" id="{C57F4AA5-8623-4F0C-85A8-4282D1842957}"/>
+                <a16:creationId xmlns:a16="http://schemas.microsoft.com/office/drawing/2014/main" id="{42DECB49-3C0E-419D-A07B-5051A287EA4C}"/>
               </a:ext>
             </a:extLst>
           </p:cNvPr>
@@ -2759,7 +2759,7 @@
           <p:cNvPr id="34" name="m-meds-metric">
             <a:extLst xmlns:a="http://schemas.openxmlformats.org/drawingml/2006/main">
               <a:ext uri="{FF2B5EF4-FFF2-40B4-BE49-F238E27FC236}">
-                <a16:creationId xmlns:a16="http://schemas.microsoft.com/office/drawing/2014/main" id="{14212630-D217-4340-8F25-F67F697068E0}"/>
+                <a16:creationId xmlns:a16="http://schemas.microsoft.com/office/drawing/2014/main" id="{6508A0B7-DD24-4E33-9A60-A99A32177C94}"/>
               </a:ext>
             </a:extLst>
           </p:cNvPr>
@@ -2792,7 +2792,7 @@
           <p:cNvPr id="35" name="m-meds-metric-title">
             <a:extLst xmlns:a="http://schemas.openxmlformats.org/drawingml/2006/main">
               <a:ext uri="{FF2B5EF4-FFF2-40B4-BE49-F238E27FC236}">
-                <a16:creationId xmlns:a16="http://schemas.microsoft.com/office/drawing/2014/main" id="{973D47FA-A8B6-4F9E-BEF5-4AD696E6C35E}"/>
+                <a16:creationId xmlns:a16="http://schemas.microsoft.com/office/drawing/2014/main" id="{D875C4CD-7936-48B8-97D2-B4FA79E13130}"/>
               </a:ext>
             </a:extLst>
           </p:cNvPr>
@@ -2842,7 +2842,7 @@
           <p:cNvPr id="36" name="m-meds-metric-value">
             <a:extLst xmlns:a="http://schemas.openxmlformats.org/drawingml/2006/main">
               <a:ext uri="{FF2B5EF4-FFF2-40B4-BE49-F238E27FC236}">
-                <a16:creationId xmlns:a16="http://schemas.microsoft.com/office/drawing/2014/main" id="{0568B7B3-D492-42C2-BAF4-AD7C5925CC9C}"/>
+                <a16:creationId xmlns:a16="http://schemas.microsoft.com/office/drawing/2014/main" id="{FD066432-AD49-408A-BBDD-45DF5BD2A22B}"/>
               </a:ext>
             </a:extLst>
           </p:cNvPr>
@@ -2892,7 +2892,7 @@
           <p:cNvPr id="37" name="m-meds-metric-note">
             <a:extLst xmlns:a="http://schemas.openxmlformats.org/drawingml/2006/main">
               <a:ext uri="{FF2B5EF4-FFF2-40B4-BE49-F238E27FC236}">
-                <a16:creationId xmlns:a16="http://schemas.microsoft.com/office/drawing/2014/main" id="{1217FDF6-3758-4C82-BFE0-D96462AE5AE5}"/>
+                <a16:creationId xmlns:a16="http://schemas.microsoft.com/office/drawing/2014/main" id="{E0AA9C00-923C-4433-A025-EBDA14948AB3}"/>
               </a:ext>
             </a:extLst>
           </p:cNvPr>
@@ -2942,7 +2942,7 @@
           <p:cNvPr id="38" name="m-chart-prev-caption">
             <a:extLst xmlns:a="http://schemas.openxmlformats.org/drawingml/2006/main">
               <a:ext uri="{FF2B5EF4-FFF2-40B4-BE49-F238E27FC236}">
-                <a16:creationId xmlns:a16="http://schemas.microsoft.com/office/drawing/2014/main" id="{C5A9D9E8-C532-468C-A565-F1FA1B3A4D7E}"/>
+                <a16:creationId xmlns:a16="http://schemas.microsoft.com/office/drawing/2014/main" id="{078FAEE1-21F7-4416-BCBE-C3C84F9B7E7E}"/>
               </a:ext>
             </a:extLst>
           </p:cNvPr>
@@ -2992,7 +2992,7 @@
           <p:cNvPr id="39" name="m-chart-prev-frame">
             <a:extLst xmlns:a="http://schemas.openxmlformats.org/drawingml/2006/main">
               <a:ext uri="{FF2B5EF4-FFF2-40B4-BE49-F238E27FC236}">
-                <a16:creationId xmlns:a16="http://schemas.microsoft.com/office/drawing/2014/main" id="{B60C6F91-BF22-40B6-AA73-72C16E44B81D}"/>
+                <a16:creationId xmlns:a16="http://schemas.microsoft.com/office/drawing/2014/main" id="{D831F4D4-6189-4F24-8FD6-77E6EBBE70DE}"/>
               </a:ext>
             </a:extLst>
           </p:cNvPr>
@@ -3022,14 +3022,14 @@
       </p:sp>
       <p:pic>
         <p:nvPicPr>
-          <p:cNvPr id="103" name=""/>
+          <p:cNvPr id="104" name=""/>
           <p:cNvPicPr>
             <a:picLocks xmlns:a="http://schemas.openxmlformats.org/drawingml/2006/main" noChangeAspect="1"/>
           </p:cNvPicPr>
           <p:nvPr/>
         </p:nvPicPr>
         <p:blipFill>
-          <a:blip xmlns:r="http://schemas.openxmlformats.org/officeDocument/2006/relationships" xmlns:a="http://schemas.openxmlformats.org/drawingml/2006/main" r:embed="R03b06f23e692415c"/>
+          <a:blip xmlns:r="http://schemas.openxmlformats.org/officeDocument/2006/relationships" xmlns:a="http://schemas.openxmlformats.org/drawingml/2006/main" r:embed="Raf9be7e708f94b94"/>
           <a:stretch xmlns:a="http://schemas.openxmlformats.org/drawingml/2006/main"/>
         </p:blipFill>
         <p:spPr>
@@ -3047,7 +3047,7 @@
           <p:cNvPr id="41" name="m-chart-meds-caption">
             <a:extLst xmlns:a="http://schemas.openxmlformats.org/drawingml/2006/main">
               <a:ext uri="{FF2B5EF4-FFF2-40B4-BE49-F238E27FC236}">
-                <a16:creationId xmlns:a16="http://schemas.microsoft.com/office/drawing/2014/main" id="{5D82DAAA-5616-4CDD-9B22-FC15BD1EF45E}"/>
+                <a16:creationId xmlns:a16="http://schemas.microsoft.com/office/drawing/2014/main" id="{154855AF-2E0A-4633-9AE6-825357B850E5}"/>
               </a:ext>
             </a:extLst>
           </p:cNvPr>
@@ -3097,7 +3097,7 @@
           <p:cNvPr id="42" name="m-chart-meds-frame">
             <a:extLst xmlns:a="http://schemas.openxmlformats.org/drawingml/2006/main">
               <a:ext uri="{FF2B5EF4-FFF2-40B4-BE49-F238E27FC236}">
-                <a16:creationId xmlns:a16="http://schemas.microsoft.com/office/drawing/2014/main" id="{D51493F3-6BBC-4414-B200-131944E544C8}"/>
+                <a16:creationId xmlns:a16="http://schemas.microsoft.com/office/drawing/2014/main" id="{1613E63B-AECC-4D56-81DF-D2BC8E0A000E}"/>
               </a:ext>
             </a:extLst>
           </p:cNvPr>
@@ -3127,14 +3127,14 @@
       </p:sp>
       <p:pic>
         <p:nvPicPr>
-          <p:cNvPr id="106" name=""/>
+          <p:cNvPr id="107" name=""/>
           <p:cNvPicPr>
             <a:picLocks xmlns:a="http://schemas.openxmlformats.org/drawingml/2006/main" noChangeAspect="1"/>
           </p:cNvPicPr>
           <p:nvPr/>
         </p:nvPicPr>
         <p:blipFill>
-          <a:blip xmlns:r="http://schemas.openxmlformats.org/officeDocument/2006/relationships" xmlns:a="http://schemas.openxmlformats.org/drawingml/2006/main" r:embed="R5023f48603e04910"/>
+          <a:blip xmlns:r="http://schemas.openxmlformats.org/officeDocument/2006/relationships" xmlns:a="http://schemas.openxmlformats.org/drawingml/2006/main" r:embed="R828062c8adea47db"/>
           <a:stretch xmlns:a="http://schemas.openxmlformats.org/drawingml/2006/main"/>
         </p:blipFill>
         <p:spPr>
@@ -3152,7 +3152,7 @@
           <p:cNvPr id="44" name="m-chart-smoke-caption">
             <a:extLst xmlns:a="http://schemas.openxmlformats.org/drawingml/2006/main">
               <a:ext uri="{FF2B5EF4-FFF2-40B4-BE49-F238E27FC236}">
-                <a16:creationId xmlns:a16="http://schemas.microsoft.com/office/drawing/2014/main" id="{11A000DB-9E1D-4FBD-9F71-8FD3CF611C81}"/>
+                <a16:creationId xmlns:a16="http://schemas.microsoft.com/office/drawing/2014/main" id="{B670413F-8EBB-40F2-A86A-C6A0855BE7EA}"/>
               </a:ext>
             </a:extLst>
           </p:cNvPr>
@@ -3202,7 +3202,7 @@
           <p:cNvPr id="45" name="m-chart-smoke-frame">
             <a:extLst xmlns:a="http://schemas.openxmlformats.org/drawingml/2006/main">
               <a:ext uri="{FF2B5EF4-FFF2-40B4-BE49-F238E27FC236}">
-                <a16:creationId xmlns:a16="http://schemas.microsoft.com/office/drawing/2014/main" id="{F516699F-3593-4673-9239-25D5E86DA0AC}"/>
+                <a16:creationId xmlns:a16="http://schemas.microsoft.com/office/drawing/2014/main" id="{3A6BC5B3-75D3-4D97-A625-1B1429B7E413}"/>
               </a:ext>
             </a:extLst>
           </p:cNvPr>
@@ -3232,14 +3232,14 @@
       </p:sp>
       <p:pic>
         <p:nvPicPr>
-          <p:cNvPr id="109" name=""/>
+          <p:cNvPr id="110" name=""/>
           <p:cNvPicPr>
             <a:picLocks xmlns:a="http://schemas.openxmlformats.org/drawingml/2006/main" noChangeAspect="1"/>
           </p:cNvPicPr>
           <p:nvPr/>
         </p:nvPicPr>
         <p:blipFill>
-          <a:blip xmlns:r="http://schemas.openxmlformats.org/officeDocument/2006/relationships" xmlns:a="http://schemas.openxmlformats.org/drawingml/2006/main" r:embed="Ra2d18521674749aa"/>
+          <a:blip xmlns:r="http://schemas.openxmlformats.org/officeDocument/2006/relationships" xmlns:a="http://schemas.openxmlformats.org/drawingml/2006/main" r:embed="R4f738cbadf1d4ac5"/>
           <a:stretch xmlns:a="http://schemas.openxmlformats.org/drawingml/2006/main"/>
         </p:blipFill>
         <p:spPr>
@@ -3257,7 +3257,7 @@
           <p:cNvPr id="47" name="5-Discussion-box">
             <a:extLst xmlns:a="http://schemas.openxmlformats.org/drawingml/2006/main">
               <a:ext uri="{FF2B5EF4-FFF2-40B4-BE49-F238E27FC236}">
-                <a16:creationId xmlns:a16="http://schemas.microsoft.com/office/drawing/2014/main" id="{5062F57C-DFB4-452D-946C-18A70698A7DB}"/>
+                <a16:creationId xmlns:a16="http://schemas.microsoft.com/office/drawing/2014/main" id="{279DD782-CC00-42F2-A69A-CCC1DEA9B9BF}"/>
               </a:ext>
             </a:extLst>
           </p:cNvPr>
@@ -3290,7 +3290,7 @@
           <p:cNvPr id="48" name="5-Discussion-head">
             <a:extLst xmlns:a="http://schemas.openxmlformats.org/drawingml/2006/main">
               <a:ext uri="{FF2B5EF4-FFF2-40B4-BE49-F238E27FC236}">
-                <a16:creationId xmlns:a16="http://schemas.microsoft.com/office/drawing/2014/main" id="{98FC0017-3B80-4C46-9C0A-35498FEBB974}"/>
+                <a16:creationId xmlns:a16="http://schemas.microsoft.com/office/drawing/2014/main" id="{EC62A2EC-8F23-446E-A94D-39C57AEEA9B7}"/>
               </a:ext>
             </a:extLst>
           </p:cNvPr>
@@ -3323,7 +3323,7 @@
           <p:cNvPr id="49" name="5-Discussion-title">
             <a:extLst xmlns:a="http://schemas.openxmlformats.org/drawingml/2006/main">
               <a:ext uri="{FF2B5EF4-FFF2-40B4-BE49-F238E27FC236}">
-                <a16:creationId xmlns:a16="http://schemas.microsoft.com/office/drawing/2014/main" id="{AFFD0BD6-2B6E-441D-983A-E8C701B5E20D}"/>
+                <a16:creationId xmlns:a16="http://schemas.microsoft.com/office/drawing/2014/main" id="{D3217D52-F1DD-4E9C-8803-08D0F1AE730E}"/>
               </a:ext>
             </a:extLst>
           </p:cNvPr>
@@ -3373,7 +3373,7 @@
           <p:cNvPr id="50" name="5-Discussion-body">
             <a:extLst xmlns:a="http://schemas.openxmlformats.org/drawingml/2006/main">
               <a:ext uri="{FF2B5EF4-FFF2-40B4-BE49-F238E27FC236}">
-                <a16:creationId xmlns:a16="http://schemas.microsoft.com/office/drawing/2014/main" id="{06C5DEFF-D299-4555-8AC0-C2F6B2029A2A}"/>
+                <a16:creationId xmlns:a16="http://schemas.microsoft.com/office/drawing/2014/main" id="{40F3F5A8-2246-4BC8-9652-C901BEE89778}"/>
               </a:ext>
             </a:extLst>
           </p:cNvPr>
@@ -3525,7 +3525,7 @@
           <p:cNvPr id="51" name="6-Central conclusion-box">
             <a:extLst xmlns:a="http://schemas.openxmlformats.org/drawingml/2006/main">
               <a:ext uri="{FF2B5EF4-FFF2-40B4-BE49-F238E27FC236}">
-                <a16:creationId xmlns:a16="http://schemas.microsoft.com/office/drawing/2014/main" id="{6D976B1A-ED83-4AA9-88F8-C57187EA9018}"/>
+                <a16:creationId xmlns:a16="http://schemas.microsoft.com/office/drawing/2014/main" id="{8064B8CC-D2FD-4F38-8516-22C704A3B7CE}"/>
               </a:ext>
             </a:extLst>
           </p:cNvPr>
@@ -3558,7 +3558,7 @@
           <p:cNvPr id="52" name="6-Central conclusion-head">
             <a:extLst xmlns:a="http://schemas.openxmlformats.org/drawingml/2006/main">
               <a:ext uri="{FF2B5EF4-FFF2-40B4-BE49-F238E27FC236}">
-                <a16:creationId xmlns:a16="http://schemas.microsoft.com/office/drawing/2014/main" id="{E6E70CF2-C5CA-453D-8CCF-FA5C7D52D9EC}"/>
+                <a16:creationId xmlns:a16="http://schemas.microsoft.com/office/drawing/2014/main" id="{C0580B82-5B59-4B7B-B101-7B700AA96399}"/>
               </a:ext>
             </a:extLst>
           </p:cNvPr>
@@ -3591,7 +3591,7 @@
           <p:cNvPr id="53" name="6-Central conclusion-title">
             <a:extLst xmlns:a="http://schemas.openxmlformats.org/drawingml/2006/main">
               <a:ext uri="{FF2B5EF4-FFF2-40B4-BE49-F238E27FC236}">
-                <a16:creationId xmlns:a16="http://schemas.microsoft.com/office/drawing/2014/main" id="{77A07877-CF4A-486F-98A2-FCF5E1565821}"/>
+                <a16:creationId xmlns:a16="http://schemas.microsoft.com/office/drawing/2014/main" id="{0B09E707-ED2C-4F56-AA2E-2B53802252E1}"/>
               </a:ext>
             </a:extLst>
           </p:cNvPr>
@@ -3641,7 +3641,7 @@
           <p:cNvPr id="54" name="6-Central conclusion-body">
             <a:extLst xmlns:a="http://schemas.openxmlformats.org/drawingml/2006/main">
               <a:ext uri="{FF2B5EF4-FFF2-40B4-BE49-F238E27FC236}">
-                <a16:creationId xmlns:a16="http://schemas.microsoft.com/office/drawing/2014/main" id="{A0628E55-DBA5-409F-B0AC-299A37CAB1D4}"/>
+                <a16:creationId xmlns:a16="http://schemas.microsoft.com/office/drawing/2014/main" id="{78B59DD8-603A-40A3-82FA-62603D069B44}"/>
               </a:ext>
             </a:extLst>
           </p:cNvPr>
@@ -3725,7 +3725,7 @@
           <p:cNvPr id="55" name="m-chart-crisis-caption">
             <a:extLst xmlns:a="http://schemas.openxmlformats.org/drawingml/2006/main">
               <a:ext uri="{FF2B5EF4-FFF2-40B4-BE49-F238E27FC236}">
-                <a16:creationId xmlns:a16="http://schemas.microsoft.com/office/drawing/2014/main" id="{C3C585E2-B1B8-458C-A71E-A76675E9F3D5}"/>
+                <a16:creationId xmlns:a16="http://schemas.microsoft.com/office/drawing/2014/main" id="{48B738B6-120F-4214-B588-E2B392962CA8}"/>
               </a:ext>
             </a:extLst>
           </p:cNvPr>
@@ -3775,7 +3775,7 @@
           <p:cNvPr id="56" name="m-chart-crisis-frame">
             <a:extLst xmlns:a="http://schemas.openxmlformats.org/drawingml/2006/main">
               <a:ext uri="{FF2B5EF4-FFF2-40B4-BE49-F238E27FC236}">
-                <a16:creationId xmlns:a16="http://schemas.microsoft.com/office/drawing/2014/main" id="{55EBBA24-9314-4C28-9F61-CF8C47EA68AF}"/>
+                <a16:creationId xmlns:a16="http://schemas.microsoft.com/office/drawing/2014/main" id="{4E115667-5D00-43FB-82C7-108BFFDC32F8}"/>
               </a:ext>
             </a:extLst>
           </p:cNvPr>
@@ -3805,14 +3805,14 @@
       </p:sp>
       <p:pic>
         <p:nvPicPr>
-          <p:cNvPr id="120" name=""/>
+          <p:cNvPr id="121" name=""/>
           <p:cNvPicPr>
             <a:picLocks xmlns:a="http://schemas.openxmlformats.org/drawingml/2006/main" noChangeAspect="1"/>
           </p:cNvPicPr>
           <p:nvPr/>
         </p:nvPicPr>
         <p:blipFill>
-          <a:blip xmlns:r="http://schemas.openxmlformats.org/officeDocument/2006/relationships" xmlns:a="http://schemas.openxmlformats.org/drawingml/2006/main" r:embed="R303fb0780265450d"/>
+          <a:blip xmlns:r="http://schemas.openxmlformats.org/officeDocument/2006/relationships" xmlns:a="http://schemas.openxmlformats.org/drawingml/2006/main" r:embed="Rf0ec58bd9175458b"/>
           <a:stretch xmlns:a="http://schemas.openxmlformats.org/drawingml/2006/main"/>
         </p:blipFill>
         <p:spPr>
@@ -3830,7 +3830,7 @@
           <p:cNvPr id="58" name="qr-box">
             <a:extLst xmlns:a="http://schemas.openxmlformats.org/drawingml/2006/main">
               <a:ext uri="{FF2B5EF4-FFF2-40B4-BE49-F238E27FC236}">
-                <a16:creationId xmlns:a16="http://schemas.microsoft.com/office/drawing/2014/main" id="{72ED4A2C-4C63-4A50-9988-6BF3A3A5E350}"/>
+                <a16:creationId xmlns:a16="http://schemas.microsoft.com/office/drawing/2014/main" id="{BFC05223-5456-4CBD-ACC8-2DEFB8252737}"/>
               </a:ext>
             </a:extLst>
           </p:cNvPr>
@@ -3860,14 +3860,14 @@
       </p:sp>
       <p:pic>
         <p:nvPicPr>
-          <p:cNvPr id="122" name=""/>
+          <p:cNvPr id="123" name=""/>
           <p:cNvPicPr>
             <a:picLocks xmlns:a="http://schemas.openxmlformats.org/drawingml/2006/main" noChangeAspect="1"/>
           </p:cNvPicPr>
           <p:nvPr/>
         </p:nvPicPr>
         <p:blipFill>
-          <a:blip xmlns:r="http://schemas.openxmlformats.org/officeDocument/2006/relationships" xmlns:a="http://schemas.openxmlformats.org/drawingml/2006/main" r:embed="Reedfa9a9f28e4690"/>
+          <a:blip xmlns:r="http://schemas.openxmlformats.org/officeDocument/2006/relationships" xmlns:a="http://schemas.openxmlformats.org/drawingml/2006/main" r:embed="R75bcb6c6532d4acc"/>
           <a:stretch xmlns:a="http://schemas.openxmlformats.org/drawingml/2006/main"/>
         </p:blipFill>
         <p:spPr>
@@ -3885,7 +3885,7 @@
           <p:cNvPr id="60" name="qr-label">
             <a:extLst xmlns:a="http://schemas.openxmlformats.org/drawingml/2006/main">
               <a:ext uri="{FF2B5EF4-FFF2-40B4-BE49-F238E27FC236}">
-                <a16:creationId xmlns:a16="http://schemas.microsoft.com/office/drawing/2014/main" id="{284B1126-D6B4-4CFD-8FA2-8340F53C51E5}"/>
+                <a16:creationId xmlns:a16="http://schemas.microsoft.com/office/drawing/2014/main" id="{977B54EA-87DB-406A-BE9C-201130A01479}"/>
               </a:ext>
             </a:extLst>
           </p:cNvPr>
@@ -3952,7 +3952,7 @@
           <p:cNvPr id="61" name="references-box">
             <a:extLst xmlns:a="http://schemas.openxmlformats.org/drawingml/2006/main">
               <a:ext uri="{FF2B5EF4-FFF2-40B4-BE49-F238E27FC236}">
-                <a16:creationId xmlns:a16="http://schemas.microsoft.com/office/drawing/2014/main" id="{A1FA98AD-5DE6-4480-BFF2-0BD6C12830C2}"/>
+                <a16:creationId xmlns:a16="http://schemas.microsoft.com/office/drawing/2014/main" id="{5B82C0EB-7D43-4F3A-B51B-6E2E479FCD96}"/>
               </a:ext>
             </a:extLst>
           </p:cNvPr>
@@ -3985,7 +3985,7 @@
           <p:cNvPr id="62" name="references-title">
             <a:extLst xmlns:a="http://schemas.openxmlformats.org/drawingml/2006/main">
               <a:ext uri="{FF2B5EF4-FFF2-40B4-BE49-F238E27FC236}">
-                <a16:creationId xmlns:a16="http://schemas.microsoft.com/office/drawing/2014/main" id="{891BD574-A221-473A-9635-D7E8D22214F3}"/>
+                <a16:creationId xmlns:a16="http://schemas.microsoft.com/office/drawing/2014/main" id="{233B0604-2EBB-4DCE-B750-A3D7499341B4}"/>
               </a:ext>
             </a:extLst>
           </p:cNvPr>
@@ -4032,10 +4032,10 @@
       </p:sp>
       <p:sp>
         <p:nvSpPr>
-          <p:cNvPr id="63" name="references-body">
-            <a:extLst xmlns:a="http://schemas.openxmlformats.org/drawingml/2006/main">
-              <a:ext uri="{FF2B5EF4-FFF2-40B4-BE49-F238E27FC236}">
-                <a16:creationId xmlns:a16="http://schemas.microsoft.com/office/drawing/2014/main" id="{EACE7DC9-D049-4D18-A9F1-79074A0BA49D}"/>
+          <p:cNvPr id="63" name="references-body-left">
+            <a:extLst xmlns:a="http://schemas.openxmlformats.org/drawingml/2006/main">
+              <a:ext uri="{FF2B5EF4-FFF2-40B4-BE49-F238E27FC236}">
+                <a16:creationId xmlns:a16="http://schemas.microsoft.com/office/drawing/2014/main" id="{5B81CCD5-7703-4B69-BFA7-A72F30E9C02F}"/>
               </a:ext>
             </a:extLst>
           </p:cNvPr>
@@ -4047,7 +4047,7 @@
         <p:spPr>
           <a:xfrm xmlns:a="http://schemas.openxmlformats.org/drawingml/2006/main">
             <a:off x="400050" y="12649200"/>
-            <a:ext cx="8724900" cy="533400"/>
+            <a:ext cx="4276725" cy="533400"/>
           </a:xfrm>
           <a:prstGeom xmlns:a="http://schemas.openxmlformats.org/drawingml/2006/main" prst="rect">
             <a:avLst/>
@@ -4063,14 +4063,14 @@
           <a:lstStyle xmlns:a="http://schemas.openxmlformats.org/drawingml/2006/main"/>
           <a:p xmlns:a="http://schemas.openxmlformats.org/drawingml/2006/main">
             <a:pPr algn="l">
-              <a:defRPr sz="338" b="0">
-                <a:solidFill>
-                  <a:srgbClr val="102536"/>
-                </a:solidFill>
-              </a:defRPr>
-            </a:pPr>
-            <a:r>
-              <a:rPr sz="338" b="0">
+              <a:defRPr sz="368" b="0">
+                <a:solidFill>
+                  <a:srgbClr val="102536"/>
+                </a:solidFill>
+              </a:defRPr>
+            </a:pPr>
+            <a:r>
+              <a:rPr sz="368" b="0">
                 <a:solidFill>
                   <a:srgbClr val="102536"/>
                 </a:solidFill>
@@ -4080,14 +4080,14 @@
           </a:p>
           <a:p xmlns:a="http://schemas.openxmlformats.org/drawingml/2006/main">
             <a:pPr algn="l">
-              <a:defRPr sz="338" b="0">
-                <a:solidFill>
-                  <a:srgbClr val="102536"/>
-                </a:solidFill>
-              </a:defRPr>
-            </a:pPr>
-            <a:r>
-              <a:rPr sz="338" b="0">
+              <a:defRPr sz="368" b="0">
+                <a:solidFill>
+                  <a:srgbClr val="102536"/>
+                </a:solidFill>
+              </a:defRPr>
+            </a:pPr>
+            <a:r>
+              <a:rPr sz="368" b="0">
                 <a:solidFill>
                   <a:srgbClr val="102536"/>
                 </a:solidFill>
@@ -4097,14 +4097,14 @@
           </a:p>
           <a:p xmlns:a="http://schemas.openxmlformats.org/drawingml/2006/main">
             <a:pPr algn="l">
-              <a:defRPr sz="338" b="0">
-                <a:solidFill>
-                  <a:srgbClr val="102536"/>
-                </a:solidFill>
-              </a:defRPr>
-            </a:pPr>
-            <a:r>
-              <a:rPr sz="338" b="0">
+              <a:defRPr sz="368" b="0">
+                <a:solidFill>
+                  <a:srgbClr val="102536"/>
+                </a:solidFill>
+              </a:defRPr>
+            </a:pPr>
+            <a:r>
+              <a:rPr sz="368" b="0">
                 <a:solidFill>
                   <a:srgbClr val="102536"/>
                 </a:solidFill>
@@ -4114,14 +4114,14 @@
           </a:p>
           <a:p xmlns:a="http://schemas.openxmlformats.org/drawingml/2006/main">
             <a:pPr algn="l">
-              <a:defRPr sz="338" b="0">
-                <a:solidFill>
-                  <a:srgbClr val="102536"/>
-                </a:solidFill>
-              </a:defRPr>
-            </a:pPr>
-            <a:r>
-              <a:rPr sz="338" b="0">
+              <a:defRPr sz="368" b="0">
+                <a:solidFill>
+                  <a:srgbClr val="102536"/>
+                </a:solidFill>
+              </a:defRPr>
+            </a:pPr>
+            <a:r>
+              <a:rPr sz="368" b="0">
                 <a:solidFill>
                   <a:srgbClr val="102536"/>
                 </a:solidFill>
@@ -4131,14 +4131,14 @@
           </a:p>
           <a:p xmlns:a="http://schemas.openxmlformats.org/drawingml/2006/main">
             <a:pPr algn="l">
-              <a:defRPr sz="338" b="0">
-                <a:solidFill>
-                  <a:srgbClr val="102536"/>
-                </a:solidFill>
-              </a:defRPr>
-            </a:pPr>
-            <a:r>
-              <a:rPr sz="338" b="0">
+              <a:defRPr sz="368" b="0">
+                <a:solidFill>
+                  <a:srgbClr val="102536"/>
+                </a:solidFill>
+              </a:defRPr>
+            </a:pPr>
+            <a:r>
+              <a:rPr sz="368" b="0">
                 <a:solidFill>
                   <a:srgbClr val="102536"/>
                 </a:solidFill>
@@ -4148,14 +4148,14 @@
           </a:p>
           <a:p xmlns:a="http://schemas.openxmlformats.org/drawingml/2006/main">
             <a:pPr algn="l">
-              <a:defRPr sz="338" b="0">
-                <a:solidFill>
-                  <a:srgbClr val="102536"/>
-                </a:solidFill>
-              </a:defRPr>
-            </a:pPr>
-            <a:r>
-              <a:rPr sz="338" b="0">
+              <a:defRPr sz="368" b="0">
+                <a:solidFill>
+                  <a:srgbClr val="102536"/>
+                </a:solidFill>
+              </a:defRPr>
+            </a:pPr>
+            <a:r>
+              <a:rPr sz="368" b="0">
                 <a:solidFill>
                   <a:srgbClr val="102536"/>
                 </a:solidFill>
@@ -4165,14 +4165,14 @@
           </a:p>
           <a:p xmlns:a="http://schemas.openxmlformats.org/drawingml/2006/main">
             <a:pPr algn="l">
-              <a:defRPr sz="338" b="0">
-                <a:solidFill>
-                  <a:srgbClr val="102536"/>
-                </a:solidFill>
-              </a:defRPr>
-            </a:pPr>
-            <a:r>
-              <a:rPr sz="338" b="0">
+              <a:defRPr sz="368" b="0">
+                <a:solidFill>
+                  <a:srgbClr val="102536"/>
+                </a:solidFill>
+              </a:defRPr>
+            </a:pPr>
+            <a:r>
+              <a:rPr sz="368" b="0">
                 <a:solidFill>
                   <a:srgbClr val="102536"/>
                 </a:solidFill>
@@ -4180,16 +4180,49 @@
               <a:t>[7] TO, T. et al. Global asthma prevalence in adults: findings from the cross-sectional world health survey. BMC Public Health, v. 12, art. 204, 2012. doi:10.1186/1471-2458-12-204.</a:t>
             </a:r>
           </a:p>
-          <a:p xmlns:a="http://schemas.openxmlformats.org/drawingml/2006/main">
-            <a:pPr algn="l">
-              <a:defRPr sz="338" b="0">
-                <a:solidFill>
-                  <a:srgbClr val="102536"/>
-                </a:solidFill>
-              </a:defRPr>
-            </a:pPr>
-            <a:r>
-              <a:rPr sz="338" b="0">
+        </p:txBody>
+      </p:sp>
+      <p:sp>
+        <p:nvSpPr>
+          <p:cNvPr id="64" name="references-body-right">
+            <a:extLst xmlns:a="http://schemas.openxmlformats.org/drawingml/2006/main">
+              <a:ext uri="{FF2B5EF4-FFF2-40B4-BE49-F238E27FC236}">
+                <a16:creationId xmlns:a16="http://schemas.microsoft.com/office/drawing/2014/main" id="{617868D5-6225-4B73-A46D-60CABF875A8E}"/>
+              </a:ext>
+            </a:extLst>
+          </p:cNvPr>
+          <p:cNvSpPr>
+            <a:spLocks xmlns:a="http://schemas.openxmlformats.org/drawingml/2006/main" noGrp="1"/>
+          </p:cNvSpPr>
+          <p:nvPr/>
+        </p:nvSpPr>
+        <p:spPr>
+          <a:xfrm xmlns:a="http://schemas.openxmlformats.org/drawingml/2006/main">
+            <a:off x="4848225" y="12649200"/>
+            <a:ext cx="4276725" cy="533400"/>
+          </a:xfrm>
+          <a:prstGeom xmlns:a="http://schemas.openxmlformats.org/drawingml/2006/main" prst="rect">
+            <a:avLst/>
+          </a:prstGeom>
+          <a:noFill xmlns:a="http://schemas.openxmlformats.org/drawingml/2006/main"/>
+          <a:ln xmlns:a="http://schemas.openxmlformats.org/drawingml/2006/main" w="0">
+            <a:noFill/>
+            <a:prstDash val="solid"/>
+          </a:ln>
+        </p:spPr>
+        <p:txBody>
+          <a:bodyPr xmlns:a="http://schemas.openxmlformats.org/drawingml/2006/main"/>
+          <a:lstStyle xmlns:a="http://schemas.openxmlformats.org/drawingml/2006/main"/>
+          <a:p xmlns:a="http://schemas.openxmlformats.org/drawingml/2006/main">
+            <a:pPr algn="l">
+              <a:defRPr sz="368" b="0">
+                <a:solidFill>
+                  <a:srgbClr val="102536"/>
+                </a:solidFill>
+              </a:defRPr>
+            </a:pPr>
+            <a:r>
+              <a:rPr sz="368" b="0">
                 <a:solidFill>
                   <a:srgbClr val="102536"/>
                 </a:solidFill>
@@ -4199,14 +4232,14 @@
           </a:p>
           <a:p xmlns:a="http://schemas.openxmlformats.org/drawingml/2006/main">
             <a:pPr algn="l">
-              <a:defRPr sz="338" b="0">
-                <a:solidFill>
-                  <a:srgbClr val="102536"/>
-                </a:solidFill>
-              </a:defRPr>
-            </a:pPr>
-            <a:r>
-              <a:rPr sz="338" b="0">
+              <a:defRPr sz="368" b="0">
+                <a:solidFill>
+                  <a:srgbClr val="102536"/>
+                </a:solidFill>
+              </a:defRPr>
+            </a:pPr>
+            <a:r>
+              <a:rPr sz="368" b="0">
                 <a:solidFill>
                   <a:srgbClr val="102536"/>
                 </a:solidFill>
@@ -4216,14 +4249,14 @@
           </a:p>
           <a:p xmlns:a="http://schemas.openxmlformats.org/drawingml/2006/main">
             <a:pPr algn="l">
-              <a:defRPr sz="338" b="0">
-                <a:solidFill>
-                  <a:srgbClr val="102536"/>
-                </a:solidFill>
-              </a:defRPr>
-            </a:pPr>
-            <a:r>
-              <a:rPr sz="338" b="0">
+              <a:defRPr sz="368" b="0">
+                <a:solidFill>
+                  <a:srgbClr val="102536"/>
+                </a:solidFill>
+              </a:defRPr>
+            </a:pPr>
+            <a:r>
+              <a:rPr sz="368" b="0">
                 <a:solidFill>
                   <a:srgbClr val="102536"/>
                 </a:solidFill>
@@ -4233,14 +4266,14 @@
           </a:p>
           <a:p xmlns:a="http://schemas.openxmlformats.org/drawingml/2006/main">
             <a:pPr algn="l">
-              <a:defRPr sz="338" b="0">
-                <a:solidFill>
-                  <a:srgbClr val="102536"/>
-                </a:solidFill>
-              </a:defRPr>
-            </a:pPr>
-            <a:r>
-              <a:rPr sz="338" b="0">
+              <a:defRPr sz="368" b="0">
+                <a:solidFill>
+                  <a:srgbClr val="102536"/>
+                </a:solidFill>
+              </a:defRPr>
+            </a:pPr>
+            <a:r>
+              <a:rPr sz="368" b="0">
                 <a:solidFill>
                   <a:srgbClr val="102536"/>
                 </a:solidFill>
@@ -4250,14 +4283,14 @@
           </a:p>
           <a:p xmlns:a="http://schemas.openxmlformats.org/drawingml/2006/main">
             <a:pPr algn="l">
-              <a:defRPr sz="338" b="0">
-                <a:solidFill>
-                  <a:srgbClr val="102536"/>
-                </a:solidFill>
-              </a:defRPr>
-            </a:pPr>
-            <a:r>
-              <a:rPr sz="338" b="0">
+              <a:defRPr sz="368" b="0">
+                <a:solidFill>
+                  <a:srgbClr val="102536"/>
+                </a:solidFill>
+              </a:defRPr>
+            </a:pPr>
+            <a:r>
+              <a:rPr sz="368" b="0">
                 <a:solidFill>
                   <a:srgbClr val="102536"/>
                 </a:solidFill>
@@ -4267,14 +4300,14 @@
           </a:p>
           <a:p xmlns:a="http://schemas.openxmlformats.org/drawingml/2006/main">
             <a:pPr algn="l">
-              <a:defRPr sz="338" b="0">
-                <a:solidFill>
-                  <a:srgbClr val="102536"/>
-                </a:solidFill>
-              </a:defRPr>
-            </a:pPr>
-            <a:r>
-              <a:rPr sz="338" b="0">
+              <a:defRPr sz="368" b="0">
+                <a:solidFill>
+                  <a:srgbClr val="102536"/>
+                </a:solidFill>
+              </a:defRPr>
+            </a:pPr>
+            <a:r>
+              <a:rPr sz="368" b="0">
                 <a:solidFill>
                   <a:srgbClr val="102536"/>
                 </a:solidFill>
@@ -4287,7 +4320,7 @@
     </p:spTree>
     <p:extLst>
       <p:ext uri="{BB962C8B-B14F-4D97-AF65-F5344CB8AC3E}">
-        <p14:creationId xmlns:p14="http://schemas.microsoft.com/office/powerpoint/2010/main" val="1923956554"/>
+        <p14:creationId xmlns:p14="http://schemas.microsoft.com/office/powerpoint/2010/main" val="948577147"/>
       </p:ext>
     </p:extLst>
   </p:cSld>

--- a/outputs/posters/poster_pns_asma_morrison_en.pptx
+++ b/outputs/posters/poster_pns_asma_morrison_en.pptx
@@ -2,13 +2,13 @@
 <file path=ppt/presentation.xml><?xml version="1.0" encoding="utf-8"?>
 <p:presentation xmlns:p="http://schemas.openxmlformats.org/presentationml/2006/main">
   <p:sldMasterIdLst>
-    <p:sldMasterId xmlns:r="http://schemas.openxmlformats.org/officeDocument/2006/relationships" id="2147483648" r:id="R8ada595fdf254012"/>
+    <p:sldMasterId xmlns:r="http://schemas.openxmlformats.org/officeDocument/2006/relationships" id="2147483648" r:id="Rb796f47f85a94d52"/>
   </p:sldMasterIdLst>
   <p:notesMasterIdLst>
-    <p:notesMasterId xmlns:r="http://schemas.openxmlformats.org/officeDocument/2006/relationships" r:id="Ra3820a20b54d49f1"/>
+    <p:notesMasterId xmlns:r="http://schemas.openxmlformats.org/officeDocument/2006/relationships" r:id="R779ecc9d6f95419a"/>
   </p:notesMasterIdLst>
   <p:sldIdLst>
-    <p:sldId xmlns:r="http://schemas.openxmlformats.org/officeDocument/2006/relationships" id="256" r:id="Rf14fb708bc264b7f"/>
+    <p:sldId xmlns:r="http://schemas.openxmlformats.org/officeDocument/2006/relationships" id="256" r:id="Ree48ac6190a542c7"/>
   </p:sldIdLst>
   <p:sldSz cx="9525000" cy="13468350"/>
   <p:notesSz cx="6858000" cy="9144000"/>
@@ -601,7 +601,7 @@
   </p:cSld>
   <p:clrMap bg1="lt1" tx1="dk1" bg2="lt2" tx2="dk2" accent1="accent1" accent2="accent2" accent3="accent3" accent4="accent4" accent5="accent5" accent6="accent6" hlink="hlink" folHlink="folHlink"/>
   <p:sldLayoutIdLst>
-    <p:sldLayoutId xmlns:r="http://schemas.openxmlformats.org/officeDocument/2006/relationships" id="2147483649" r:id="R23e58f06122d43a5"/>
+    <p:sldLayoutId xmlns:r="http://schemas.openxmlformats.org/officeDocument/2006/relationships" id="2147483649" r:id="Rc551c62876b34c2d"/>
   </p:sldLayoutIdLst>
   <p:txStyles>
     <p:titleStyle>
@@ -1149,14 +1149,14 @@
       </p:grpSpPr>
       <p:pic>
         <p:nvPicPr>
-          <p:cNvPr id="65" name=""/>
+          <p:cNvPr id="66" name=""/>
           <p:cNvPicPr>
             <a:picLocks xmlns:a="http://schemas.openxmlformats.org/drawingml/2006/main" noChangeAspect="1"/>
           </p:cNvPicPr>
           <p:nvPr/>
         </p:nvPicPr>
         <p:blipFill>
-          <a:blip xmlns:r="http://schemas.openxmlformats.org/officeDocument/2006/relationships" xmlns:a="http://schemas.openxmlformats.org/drawingml/2006/main" r:embed="R10fe8035664d4b84"/>
+          <a:blip xmlns:r="http://schemas.openxmlformats.org/officeDocument/2006/relationships" xmlns:a="http://schemas.openxmlformats.org/drawingml/2006/main" r:embed="R6511fded18434444"/>
           <a:srcRect xmlns:a="http://schemas.openxmlformats.org/drawingml/2006/main" l="0" t="38622" r="0" b="38622"/>
           <a:stretch xmlns:a="http://schemas.openxmlformats.org/drawingml/2006/main">
             <a:fillRect l="0" t="0" r="0" b="0"/>
@@ -1166,28 +1166,6 @@
           <a:xfrm xmlns:a="http://schemas.openxmlformats.org/drawingml/2006/main">
             <a:off x="0" y="0"/>
             <a:ext cx="9525000" cy="1219200"/>
-          </a:xfrm>
-          <a:prstGeom xmlns:a="http://schemas.openxmlformats.org/drawingml/2006/main" prst="rect">
-            <a:avLst/>
-          </a:prstGeom>
-        </p:spPr>
-      </p:pic>
-      <p:pic>
-        <p:nvPicPr>
-          <p:cNvPr id="66" name=""/>
-          <p:cNvPicPr>
-            <a:picLocks xmlns:a="http://schemas.openxmlformats.org/drawingml/2006/main" noChangeAspect="1"/>
-          </p:cNvPicPr>
-          <p:nvPr/>
-        </p:nvPicPr>
-        <p:blipFill>
-          <a:blip xmlns:r="http://schemas.openxmlformats.org/officeDocument/2006/relationships" xmlns:a="http://schemas.openxmlformats.org/drawingml/2006/main" r:embed="R5596aa549d6b4f72"/>
-          <a:stretch xmlns:a="http://schemas.openxmlformats.org/drawingml/2006/main"/>
-        </p:blipFill>
-        <p:spPr>
-          <a:xfrm xmlns:a="http://schemas.openxmlformats.org/drawingml/2006/main">
-            <a:off x="323850" y="265374"/>
-            <a:ext cx="2952750" cy="612252"/>
           </a:xfrm>
           <a:prstGeom xmlns:a="http://schemas.openxmlformats.org/drawingml/2006/main" prst="rect">
             <a:avLst/>
@@ -1203,11 +1181,33 @@
           <p:nvPr/>
         </p:nvPicPr>
         <p:blipFill>
-          <a:blip xmlns:r="http://schemas.openxmlformats.org/officeDocument/2006/relationships" xmlns:a="http://schemas.openxmlformats.org/drawingml/2006/main" r:embed="Rd485346d649048b6"/>
+          <a:blip xmlns:r="http://schemas.openxmlformats.org/officeDocument/2006/relationships" xmlns:a="http://schemas.openxmlformats.org/drawingml/2006/main" r:embed="Reff777fb585845d3"/>
           <a:stretch xmlns:a="http://schemas.openxmlformats.org/drawingml/2006/main"/>
         </p:blipFill>
         <p:spPr>
           <a:xfrm xmlns:a="http://schemas.openxmlformats.org/drawingml/2006/main">
+            <a:off x="323850" y="265374"/>
+            <a:ext cx="2952750" cy="612252"/>
+          </a:xfrm>
+          <a:prstGeom xmlns:a="http://schemas.openxmlformats.org/drawingml/2006/main" prst="rect">
+            <a:avLst/>
+          </a:prstGeom>
+        </p:spPr>
+      </p:pic>
+      <p:pic>
+        <p:nvPicPr>
+          <p:cNvPr id="68" name=""/>
+          <p:cNvPicPr>
+            <a:picLocks xmlns:a="http://schemas.openxmlformats.org/drawingml/2006/main" noChangeAspect="1"/>
+          </p:cNvPicPr>
+          <p:nvPr/>
+        </p:nvPicPr>
+        <p:blipFill>
+          <a:blip xmlns:r="http://schemas.openxmlformats.org/officeDocument/2006/relationships" xmlns:a="http://schemas.openxmlformats.org/drawingml/2006/main" r:embed="Ra154fb04bec84f03"/>
+          <a:stretch xmlns:a="http://schemas.openxmlformats.org/drawingml/2006/main"/>
+        </p:blipFill>
+        <p:spPr>
+          <a:xfrm xmlns:a="http://schemas.openxmlformats.org/drawingml/2006/main">
             <a:off x="3905250" y="425056"/>
             <a:ext cx="4953000" cy="311937"/>
           </a:xfrm>
@@ -1221,7 +1221,7 @@
           <p:cNvPr id="4" name="morrison-title">
             <a:extLst xmlns:a="http://schemas.openxmlformats.org/drawingml/2006/main">
               <a:ext uri="{FF2B5EF4-FFF2-40B4-BE49-F238E27FC236}">
-                <a16:creationId xmlns:a16="http://schemas.microsoft.com/office/drawing/2014/main" id="{A37EC5BE-B84C-438D-A717-07894D4F40F1}"/>
+                <a16:creationId xmlns:a16="http://schemas.microsoft.com/office/drawing/2014/main" id="{D5514971-68DA-40B8-8E73-2BE5ED6DC158}"/>
               </a:ext>
             </a:extLst>
           </p:cNvPr>
@@ -1271,7 +1271,7 @@
           <p:cNvPr id="5" name="morrison-authors">
             <a:extLst xmlns:a="http://schemas.openxmlformats.org/drawingml/2006/main">
               <a:ext uri="{FF2B5EF4-FFF2-40B4-BE49-F238E27FC236}">
-                <a16:creationId xmlns:a16="http://schemas.microsoft.com/office/drawing/2014/main" id="{E614DFB2-0F89-4140-927A-1239DE340DFE}"/>
+                <a16:creationId xmlns:a16="http://schemas.microsoft.com/office/drawing/2014/main" id="{55262E77-5F08-48AE-981E-A557DBC92DF0}"/>
               </a:ext>
             </a:extLst>
           </p:cNvPr>
@@ -1321,7 +1321,7 @@
           <p:cNvPr id="6" name="central-message">
             <a:extLst xmlns:a="http://schemas.openxmlformats.org/drawingml/2006/main">
               <a:ext uri="{FF2B5EF4-FFF2-40B4-BE49-F238E27FC236}">
-                <a16:creationId xmlns:a16="http://schemas.microsoft.com/office/drawing/2014/main" id="{19157170-E41D-4E1A-860F-1D59C7CEAF04}"/>
+                <a16:creationId xmlns:a16="http://schemas.microsoft.com/office/drawing/2014/main" id="{E93989B3-CDBF-45D9-A390-061EC124EA2B}"/>
               </a:ext>
             </a:extLst>
           </p:cNvPr>
@@ -1375,7 +1375,7 @@
           <p:cNvPr id="7" name="1-Method in one line-box">
             <a:extLst xmlns:a="http://schemas.openxmlformats.org/drawingml/2006/main">
               <a:ext uri="{FF2B5EF4-FFF2-40B4-BE49-F238E27FC236}">
-                <a16:creationId xmlns:a16="http://schemas.microsoft.com/office/drawing/2014/main" id="{2B1A9B64-A63D-4298-8B22-12B50404BD79}"/>
+                <a16:creationId xmlns:a16="http://schemas.microsoft.com/office/drawing/2014/main" id="{FDC6CA63-1B02-41F4-9C79-2E9A5AC373AC}"/>
               </a:ext>
             </a:extLst>
           </p:cNvPr>
@@ -1408,7 +1408,7 @@
           <p:cNvPr id="8" name="1-Method in one line-head">
             <a:extLst xmlns:a="http://schemas.openxmlformats.org/drawingml/2006/main">
               <a:ext uri="{FF2B5EF4-FFF2-40B4-BE49-F238E27FC236}">
-                <a16:creationId xmlns:a16="http://schemas.microsoft.com/office/drawing/2014/main" id="{306A5864-D34D-4F3E-A7AD-843B4903AA6F}"/>
+                <a16:creationId xmlns:a16="http://schemas.microsoft.com/office/drawing/2014/main" id="{9709E071-D115-4255-9A0E-F7B3378A8AFD}"/>
               </a:ext>
             </a:extLst>
           </p:cNvPr>
@@ -1441,7 +1441,7 @@
           <p:cNvPr id="9" name="1-Method in one line-title">
             <a:extLst xmlns:a="http://schemas.openxmlformats.org/drawingml/2006/main">
               <a:ext uri="{FF2B5EF4-FFF2-40B4-BE49-F238E27FC236}">
-                <a16:creationId xmlns:a16="http://schemas.microsoft.com/office/drawing/2014/main" id="{441699A9-E1BE-4B15-9138-052CA1EA2E92}"/>
+                <a16:creationId xmlns:a16="http://schemas.microsoft.com/office/drawing/2014/main" id="{DB42F00D-00E2-4837-B876-A2A18CC72507}"/>
               </a:ext>
             </a:extLst>
           </p:cNvPr>
@@ -1491,7 +1491,7 @@
           <p:cNvPr id="10" name="1-Method in one line-body">
             <a:extLst xmlns:a="http://schemas.openxmlformats.org/drawingml/2006/main">
               <a:ext uri="{FF2B5EF4-FFF2-40B4-BE49-F238E27FC236}">
-                <a16:creationId xmlns:a16="http://schemas.microsoft.com/office/drawing/2014/main" id="{2A8B129F-7F93-453A-9F21-530F1004170E}"/>
+                <a16:creationId xmlns:a16="http://schemas.microsoft.com/office/drawing/2014/main" id="{6CDBA738-096E-4210-92A6-F9256893659F}"/>
               </a:ext>
             </a:extLst>
           </p:cNvPr>
@@ -1592,7 +1592,7 @@
           <p:cNvPr id="11" name="morrison-formula-box">
             <a:extLst xmlns:a="http://schemas.openxmlformats.org/drawingml/2006/main">
               <a:ext uri="{FF2B5EF4-FFF2-40B4-BE49-F238E27FC236}">
-                <a16:creationId xmlns:a16="http://schemas.microsoft.com/office/drawing/2014/main" id="{02E84914-16D9-4E09-A16A-5E23E4A169B4}"/>
+                <a16:creationId xmlns:a16="http://schemas.microsoft.com/office/drawing/2014/main" id="{3462C64B-05A0-4064-81CD-DFE17BA55489}"/>
               </a:ext>
             </a:extLst>
           </p:cNvPr>
@@ -1625,7 +1625,7 @@
           <p:cNvPr id="12" name="morrison-formula-title">
             <a:extLst xmlns:a="http://schemas.openxmlformats.org/drawingml/2006/main">
               <a:ext uri="{FF2B5EF4-FFF2-40B4-BE49-F238E27FC236}">
-                <a16:creationId xmlns:a16="http://schemas.microsoft.com/office/drawing/2014/main" id="{A32E9AED-7930-41A4-A477-2C4D9200B1EF}"/>
+                <a16:creationId xmlns:a16="http://schemas.microsoft.com/office/drawing/2014/main" id="{D8B918EC-02C2-498A-B82E-EDC14FFA3D69}"/>
               </a:ext>
             </a:extLst>
           </p:cNvPr>
@@ -1675,7 +1675,7 @@
           <p:cNvPr id="13" name="morrison-formula">
             <a:extLst xmlns:a="http://schemas.openxmlformats.org/drawingml/2006/main">
               <a:ext uri="{FF2B5EF4-FFF2-40B4-BE49-F238E27FC236}">
-                <a16:creationId xmlns:a16="http://schemas.microsoft.com/office/drawing/2014/main" id="{F84B2327-0749-4A89-A188-CAE32143CFC2}"/>
+                <a16:creationId xmlns:a16="http://schemas.microsoft.com/office/drawing/2014/main" id="{02C7B5BA-F6DC-469A-BFD5-C2286358A15F}"/>
               </a:ext>
             </a:extLst>
           </p:cNvPr>
@@ -1793,7 +1793,7 @@
           <p:cNvPr id="14" name="2-Data and denominators-box">
             <a:extLst xmlns:a="http://schemas.openxmlformats.org/drawingml/2006/main">
               <a:ext uri="{FF2B5EF4-FFF2-40B4-BE49-F238E27FC236}">
-                <a16:creationId xmlns:a16="http://schemas.microsoft.com/office/drawing/2014/main" id="{579C9E39-964B-4CF5-9E10-30DB00B4F822}"/>
+                <a16:creationId xmlns:a16="http://schemas.microsoft.com/office/drawing/2014/main" id="{483D3862-E2B7-4013-A75A-7F8E9ED61104}"/>
               </a:ext>
             </a:extLst>
           </p:cNvPr>
@@ -1826,7 +1826,7 @@
           <p:cNvPr id="15" name="2-Data and denominators-head">
             <a:extLst xmlns:a="http://schemas.openxmlformats.org/drawingml/2006/main">
               <a:ext uri="{FF2B5EF4-FFF2-40B4-BE49-F238E27FC236}">
-                <a16:creationId xmlns:a16="http://schemas.microsoft.com/office/drawing/2014/main" id="{9D1F4150-1981-4679-9F5F-381C925B27F7}"/>
+                <a16:creationId xmlns:a16="http://schemas.microsoft.com/office/drawing/2014/main" id="{30228466-4B64-4CD1-A465-68A8488C443A}"/>
               </a:ext>
             </a:extLst>
           </p:cNvPr>
@@ -1859,7 +1859,7 @@
           <p:cNvPr id="16" name="2-Data and denominators-title">
             <a:extLst xmlns:a="http://schemas.openxmlformats.org/drawingml/2006/main">
               <a:ext uri="{FF2B5EF4-FFF2-40B4-BE49-F238E27FC236}">
-                <a16:creationId xmlns:a16="http://schemas.microsoft.com/office/drawing/2014/main" id="{CE9A419B-3580-4573-A169-277F0E9698F5}"/>
+                <a16:creationId xmlns:a16="http://schemas.microsoft.com/office/drawing/2014/main" id="{F1EAB744-9E32-4E00-BDAE-15CB2CE6C313}"/>
               </a:ext>
             </a:extLst>
           </p:cNvPr>
@@ -1909,7 +1909,7 @@
           <p:cNvPr id="17" name="2-Data and denominators-body">
             <a:extLst xmlns:a="http://schemas.openxmlformats.org/drawingml/2006/main">
               <a:ext uri="{FF2B5EF4-FFF2-40B4-BE49-F238E27FC236}">
-                <a16:creationId xmlns:a16="http://schemas.microsoft.com/office/drawing/2014/main" id="{4DD2DBBE-4BFA-4B13-A8C0-7B1914EE99A9}"/>
+                <a16:creationId xmlns:a16="http://schemas.microsoft.com/office/drawing/2014/main" id="{7F6C8A0A-362C-46A4-BD1B-DB0D26D10D14}"/>
               </a:ext>
             </a:extLst>
           </p:cNvPr>
@@ -1993,7 +1993,7 @@
           <p:cNvPr id="18" name="3-Why beta CIs?-box">
             <a:extLst xmlns:a="http://schemas.openxmlformats.org/drawingml/2006/main">
               <a:ext uri="{FF2B5EF4-FFF2-40B4-BE49-F238E27FC236}">
-                <a16:creationId xmlns:a16="http://schemas.microsoft.com/office/drawing/2014/main" id="{81397162-AB87-42E2-80A5-2C76517A6837}"/>
+                <a16:creationId xmlns:a16="http://schemas.microsoft.com/office/drawing/2014/main" id="{5C5CE4BE-56FA-43AB-AD32-F67A8C47526C}"/>
               </a:ext>
             </a:extLst>
           </p:cNvPr>
@@ -2026,7 +2026,7 @@
           <p:cNvPr id="19" name="3-Why beta CIs?-head">
             <a:extLst xmlns:a="http://schemas.openxmlformats.org/drawingml/2006/main">
               <a:ext uri="{FF2B5EF4-FFF2-40B4-BE49-F238E27FC236}">
-                <a16:creationId xmlns:a16="http://schemas.microsoft.com/office/drawing/2014/main" id="{5F079014-5C9E-4CD1-9F57-06B0FFF4D66E}"/>
+                <a16:creationId xmlns:a16="http://schemas.microsoft.com/office/drawing/2014/main" id="{083D677C-83C7-4B08-90E2-25DB05038CCA}"/>
               </a:ext>
             </a:extLst>
           </p:cNvPr>
@@ -2059,7 +2059,7 @@
           <p:cNvPr id="20" name="3-Why beta CIs?-title">
             <a:extLst xmlns:a="http://schemas.openxmlformats.org/drawingml/2006/main">
               <a:ext uri="{FF2B5EF4-FFF2-40B4-BE49-F238E27FC236}">
-                <a16:creationId xmlns:a16="http://schemas.microsoft.com/office/drawing/2014/main" id="{EA1F153F-399E-4043-85AB-C7C11502A03B}"/>
+                <a16:creationId xmlns:a16="http://schemas.microsoft.com/office/drawing/2014/main" id="{FF5CBAFC-45F1-40F5-B72E-6E04A35CE8B5}"/>
               </a:ext>
             </a:extLst>
           </p:cNvPr>
@@ -2109,7 +2109,7 @@
           <p:cNvPr id="21" name="3-Why beta CIs?-body">
             <a:extLst xmlns:a="http://schemas.openxmlformats.org/drawingml/2006/main">
               <a:ext uri="{FF2B5EF4-FFF2-40B4-BE49-F238E27FC236}">
-                <a16:creationId xmlns:a16="http://schemas.microsoft.com/office/drawing/2014/main" id="{886F9400-B1A8-4C70-A74E-2CE58923427E}"/>
+                <a16:creationId xmlns:a16="http://schemas.microsoft.com/office/drawing/2014/main" id="{2AEE2BD1-93C7-4AB7-A6B4-0E9AC23D77D1}"/>
               </a:ext>
             </a:extLst>
           </p:cNvPr>
@@ -2193,7 +2193,7 @@
           <p:cNvPr id="22" name="4-ETL and interoperability-box">
             <a:extLst xmlns:a="http://schemas.openxmlformats.org/drawingml/2006/main">
               <a:ext uri="{FF2B5EF4-FFF2-40B4-BE49-F238E27FC236}">
-                <a16:creationId xmlns:a16="http://schemas.microsoft.com/office/drawing/2014/main" id="{6C15C9A4-0FC0-4F0B-B888-79D9C36E40E7}"/>
+                <a16:creationId xmlns:a16="http://schemas.microsoft.com/office/drawing/2014/main" id="{E5A74190-FF12-40FE-9A53-A273C64E66EC}"/>
               </a:ext>
             </a:extLst>
           </p:cNvPr>
@@ -2226,7 +2226,7 @@
           <p:cNvPr id="23" name="4-ETL and interoperability-head">
             <a:extLst xmlns:a="http://schemas.openxmlformats.org/drawingml/2006/main">
               <a:ext uri="{FF2B5EF4-FFF2-40B4-BE49-F238E27FC236}">
-                <a16:creationId xmlns:a16="http://schemas.microsoft.com/office/drawing/2014/main" id="{72A0C436-CC38-4927-A1F7-65CA88B6CBDE}"/>
+                <a16:creationId xmlns:a16="http://schemas.microsoft.com/office/drawing/2014/main" id="{01B0D6E7-69DC-430F-90BE-CA00726B84BF}"/>
               </a:ext>
             </a:extLst>
           </p:cNvPr>
@@ -2259,7 +2259,7 @@
           <p:cNvPr id="24" name="4-ETL and interoperability-title">
             <a:extLst xmlns:a="http://schemas.openxmlformats.org/drawingml/2006/main">
               <a:ext uri="{FF2B5EF4-FFF2-40B4-BE49-F238E27FC236}">
-                <a16:creationId xmlns:a16="http://schemas.microsoft.com/office/drawing/2014/main" id="{6DB66DD0-731B-47A8-BBCD-63C22D13E169}"/>
+                <a16:creationId xmlns:a16="http://schemas.microsoft.com/office/drawing/2014/main" id="{4CA2634C-7B1F-4C30-A306-A60DB8FE1C43}"/>
               </a:ext>
             </a:extLst>
           </p:cNvPr>
@@ -2309,7 +2309,7 @@
           <p:cNvPr id="25" name="4-ETL and interoperability-body">
             <a:extLst xmlns:a="http://schemas.openxmlformats.org/drawingml/2006/main">
               <a:ext uri="{FF2B5EF4-FFF2-40B4-BE49-F238E27FC236}">
-                <a16:creationId xmlns:a16="http://schemas.microsoft.com/office/drawing/2014/main" id="{19E81CA4-33B8-41BC-B388-DAB8C71C3AFA}"/>
+                <a16:creationId xmlns:a16="http://schemas.microsoft.com/office/drawing/2014/main" id="{5724804C-FCA1-49CB-B1E8-DB5141595CD1}"/>
               </a:ext>
             </a:extLst>
           </p:cNvPr>
@@ -2393,7 +2393,7 @@
           <p:cNvPr id="26" name="m-prev-metric">
             <a:extLst xmlns:a="http://schemas.openxmlformats.org/drawingml/2006/main">
               <a:ext uri="{FF2B5EF4-FFF2-40B4-BE49-F238E27FC236}">
-                <a16:creationId xmlns:a16="http://schemas.microsoft.com/office/drawing/2014/main" id="{19418887-6E00-4DC5-AF6D-CECF522BA69E}"/>
+                <a16:creationId xmlns:a16="http://schemas.microsoft.com/office/drawing/2014/main" id="{156AF691-ADC5-42E5-B614-E74B9A839ACA}"/>
               </a:ext>
             </a:extLst>
           </p:cNvPr>
@@ -2426,7 +2426,7 @@
           <p:cNvPr id="27" name="m-prev-metric-title">
             <a:extLst xmlns:a="http://schemas.openxmlformats.org/drawingml/2006/main">
               <a:ext uri="{FF2B5EF4-FFF2-40B4-BE49-F238E27FC236}">
-                <a16:creationId xmlns:a16="http://schemas.microsoft.com/office/drawing/2014/main" id="{4C9EB2CD-03EE-4B42-B4D8-33BB952D23DD}"/>
+                <a16:creationId xmlns:a16="http://schemas.microsoft.com/office/drawing/2014/main" id="{38EA17E6-C82F-438F-A230-E3E8EFEE031D}"/>
               </a:ext>
             </a:extLst>
           </p:cNvPr>
@@ -2476,7 +2476,7 @@
           <p:cNvPr id="28" name="m-prev-metric-value">
             <a:extLst xmlns:a="http://schemas.openxmlformats.org/drawingml/2006/main">
               <a:ext uri="{FF2B5EF4-FFF2-40B4-BE49-F238E27FC236}">
-                <a16:creationId xmlns:a16="http://schemas.microsoft.com/office/drawing/2014/main" id="{3B1A7F83-7848-4E52-B074-1E7F8A6FDE98}"/>
+                <a16:creationId xmlns:a16="http://schemas.microsoft.com/office/drawing/2014/main" id="{5F288295-A5F2-4898-A86D-00FAA03496B7}"/>
               </a:ext>
             </a:extLst>
           </p:cNvPr>
@@ -2526,7 +2526,7 @@
           <p:cNvPr id="29" name="m-prev-metric-note">
             <a:extLst xmlns:a="http://schemas.openxmlformats.org/drawingml/2006/main">
               <a:ext uri="{FF2B5EF4-FFF2-40B4-BE49-F238E27FC236}">
-                <a16:creationId xmlns:a16="http://schemas.microsoft.com/office/drawing/2014/main" id="{39C1162C-EA0D-4D15-BF06-2EBFCAA3017A}"/>
+                <a16:creationId xmlns:a16="http://schemas.microsoft.com/office/drawing/2014/main" id="{CC2F7066-DB8E-4C85-A375-FBFB2B187847}"/>
               </a:ext>
             </a:extLst>
           </p:cNvPr>
@@ -2576,7 +2576,7 @@
           <p:cNvPr id="30" name="m-crisis-metric">
             <a:extLst xmlns:a="http://schemas.openxmlformats.org/drawingml/2006/main">
               <a:ext uri="{FF2B5EF4-FFF2-40B4-BE49-F238E27FC236}">
-                <a16:creationId xmlns:a16="http://schemas.microsoft.com/office/drawing/2014/main" id="{0CAC820D-B22E-42B0-B204-0062F3482AAE}"/>
+                <a16:creationId xmlns:a16="http://schemas.microsoft.com/office/drawing/2014/main" id="{539CBC50-29D8-4498-A82F-77998A4BA70A}"/>
               </a:ext>
             </a:extLst>
           </p:cNvPr>
@@ -2609,7 +2609,7 @@
           <p:cNvPr id="31" name="m-crisis-metric-title">
             <a:extLst xmlns:a="http://schemas.openxmlformats.org/drawingml/2006/main">
               <a:ext uri="{FF2B5EF4-FFF2-40B4-BE49-F238E27FC236}">
-                <a16:creationId xmlns:a16="http://schemas.microsoft.com/office/drawing/2014/main" id="{DD18DEA2-FC70-4A94-BEC6-9F5B0B8DC4EA}"/>
+                <a16:creationId xmlns:a16="http://schemas.microsoft.com/office/drawing/2014/main" id="{9AA98652-439A-440E-8365-B40AED96E477}"/>
               </a:ext>
             </a:extLst>
           </p:cNvPr>
@@ -2659,7 +2659,7 @@
           <p:cNvPr id="32" name="m-crisis-metric-value">
             <a:extLst xmlns:a="http://schemas.openxmlformats.org/drawingml/2006/main">
               <a:ext uri="{FF2B5EF4-FFF2-40B4-BE49-F238E27FC236}">
-                <a16:creationId xmlns:a16="http://schemas.microsoft.com/office/drawing/2014/main" id="{7B1AC243-C68D-4F79-B487-A16283C32AE1}"/>
+                <a16:creationId xmlns:a16="http://schemas.microsoft.com/office/drawing/2014/main" id="{F7479AE7-520B-4A49-B80A-2B30F612FBAB}"/>
               </a:ext>
             </a:extLst>
           </p:cNvPr>
@@ -2709,7 +2709,7 @@
           <p:cNvPr id="33" name="m-crisis-metric-note">
             <a:extLst xmlns:a="http://schemas.openxmlformats.org/drawingml/2006/main">
               <a:ext uri="{FF2B5EF4-FFF2-40B4-BE49-F238E27FC236}">
-                <a16:creationId xmlns:a16="http://schemas.microsoft.com/office/drawing/2014/main" id="{42DECB49-3C0E-419D-A07B-5051A287EA4C}"/>
+                <a16:creationId xmlns:a16="http://schemas.microsoft.com/office/drawing/2014/main" id="{CF049EC0-B815-42EB-A61B-A106C50FAF27}"/>
               </a:ext>
             </a:extLst>
           </p:cNvPr>
@@ -2759,7 +2759,7 @@
           <p:cNvPr id="34" name="m-meds-metric">
             <a:extLst xmlns:a="http://schemas.openxmlformats.org/drawingml/2006/main">
               <a:ext uri="{FF2B5EF4-FFF2-40B4-BE49-F238E27FC236}">
-                <a16:creationId xmlns:a16="http://schemas.microsoft.com/office/drawing/2014/main" id="{6508A0B7-DD24-4E33-9A60-A99A32177C94}"/>
+                <a16:creationId xmlns:a16="http://schemas.microsoft.com/office/drawing/2014/main" id="{6989049D-E071-49D5-978C-C39DDE408D21}"/>
               </a:ext>
             </a:extLst>
           </p:cNvPr>
@@ -2792,7 +2792,7 @@
           <p:cNvPr id="35" name="m-meds-metric-title">
             <a:extLst xmlns:a="http://schemas.openxmlformats.org/drawingml/2006/main">
               <a:ext uri="{FF2B5EF4-FFF2-40B4-BE49-F238E27FC236}">
-                <a16:creationId xmlns:a16="http://schemas.microsoft.com/office/drawing/2014/main" id="{D875C4CD-7936-48B8-97D2-B4FA79E13130}"/>
+                <a16:creationId xmlns:a16="http://schemas.microsoft.com/office/drawing/2014/main" id="{B1D7F53D-91CE-44B3-B3E1-FDCD2E406575}"/>
               </a:ext>
             </a:extLst>
           </p:cNvPr>
@@ -2842,7 +2842,7 @@
           <p:cNvPr id="36" name="m-meds-metric-value">
             <a:extLst xmlns:a="http://schemas.openxmlformats.org/drawingml/2006/main">
               <a:ext uri="{FF2B5EF4-FFF2-40B4-BE49-F238E27FC236}">
-                <a16:creationId xmlns:a16="http://schemas.microsoft.com/office/drawing/2014/main" id="{FD066432-AD49-408A-BBDD-45DF5BD2A22B}"/>
+                <a16:creationId xmlns:a16="http://schemas.microsoft.com/office/drawing/2014/main" id="{2B602034-55A1-4FDE-8495-24C7B65587D2}"/>
               </a:ext>
             </a:extLst>
           </p:cNvPr>
@@ -2892,7 +2892,7 @@
           <p:cNvPr id="37" name="m-meds-metric-note">
             <a:extLst xmlns:a="http://schemas.openxmlformats.org/drawingml/2006/main">
               <a:ext uri="{FF2B5EF4-FFF2-40B4-BE49-F238E27FC236}">
-                <a16:creationId xmlns:a16="http://schemas.microsoft.com/office/drawing/2014/main" id="{E0AA9C00-923C-4433-A025-EBDA14948AB3}"/>
+                <a16:creationId xmlns:a16="http://schemas.microsoft.com/office/drawing/2014/main" id="{20EEB764-B36C-49C7-8783-51516CC5E1AD}"/>
               </a:ext>
             </a:extLst>
           </p:cNvPr>
@@ -2942,7 +2942,7 @@
           <p:cNvPr id="38" name="m-chart-prev-caption">
             <a:extLst xmlns:a="http://schemas.openxmlformats.org/drawingml/2006/main">
               <a:ext uri="{FF2B5EF4-FFF2-40B4-BE49-F238E27FC236}">
-                <a16:creationId xmlns:a16="http://schemas.microsoft.com/office/drawing/2014/main" id="{078FAEE1-21F7-4416-BCBE-C3C84F9B7E7E}"/>
+                <a16:creationId xmlns:a16="http://schemas.microsoft.com/office/drawing/2014/main" id="{DCB583D3-9BB1-463B-B346-65994E940299}"/>
               </a:ext>
             </a:extLst>
           </p:cNvPr>
@@ -2992,7 +2992,7 @@
           <p:cNvPr id="39" name="m-chart-prev-frame">
             <a:extLst xmlns:a="http://schemas.openxmlformats.org/drawingml/2006/main">
               <a:ext uri="{FF2B5EF4-FFF2-40B4-BE49-F238E27FC236}">
-                <a16:creationId xmlns:a16="http://schemas.microsoft.com/office/drawing/2014/main" id="{D831F4D4-6189-4F24-8FD6-77E6EBBE70DE}"/>
+                <a16:creationId xmlns:a16="http://schemas.microsoft.com/office/drawing/2014/main" id="{97E8D029-15CD-41E5-9DE4-8F1016DA6488}"/>
               </a:ext>
             </a:extLst>
           </p:cNvPr>
@@ -3022,14 +3022,14 @@
       </p:sp>
       <p:pic>
         <p:nvPicPr>
-          <p:cNvPr id="104" name=""/>
+          <p:cNvPr id="105" name=""/>
           <p:cNvPicPr>
             <a:picLocks xmlns:a="http://schemas.openxmlformats.org/drawingml/2006/main" noChangeAspect="1"/>
           </p:cNvPicPr>
           <p:nvPr/>
         </p:nvPicPr>
         <p:blipFill>
-          <a:blip xmlns:r="http://schemas.openxmlformats.org/officeDocument/2006/relationships" xmlns:a="http://schemas.openxmlformats.org/drawingml/2006/main" r:embed="Raf9be7e708f94b94"/>
+          <a:blip xmlns:r="http://schemas.openxmlformats.org/officeDocument/2006/relationships" xmlns:a="http://schemas.openxmlformats.org/drawingml/2006/main" r:embed="Rbd78dc13921b45ff"/>
           <a:stretch xmlns:a="http://schemas.openxmlformats.org/drawingml/2006/main"/>
         </p:blipFill>
         <p:spPr>
@@ -3047,7 +3047,7 @@
           <p:cNvPr id="41" name="m-chart-meds-caption">
             <a:extLst xmlns:a="http://schemas.openxmlformats.org/drawingml/2006/main">
               <a:ext uri="{FF2B5EF4-FFF2-40B4-BE49-F238E27FC236}">
-                <a16:creationId xmlns:a16="http://schemas.microsoft.com/office/drawing/2014/main" id="{154855AF-2E0A-4633-9AE6-825357B850E5}"/>
+                <a16:creationId xmlns:a16="http://schemas.microsoft.com/office/drawing/2014/main" id="{EA7896E7-F231-4D3E-8835-EC475FAE6301}"/>
               </a:ext>
             </a:extLst>
           </p:cNvPr>
@@ -3097,7 +3097,7 @@
           <p:cNvPr id="42" name="m-chart-meds-frame">
             <a:extLst xmlns:a="http://schemas.openxmlformats.org/drawingml/2006/main">
               <a:ext uri="{FF2B5EF4-FFF2-40B4-BE49-F238E27FC236}">
-                <a16:creationId xmlns:a16="http://schemas.microsoft.com/office/drawing/2014/main" id="{1613E63B-AECC-4D56-81DF-D2BC8E0A000E}"/>
+                <a16:creationId xmlns:a16="http://schemas.microsoft.com/office/drawing/2014/main" id="{D6CD4B8D-3EDD-4548-B379-801376B59391}"/>
               </a:ext>
             </a:extLst>
           </p:cNvPr>
@@ -3127,14 +3127,14 @@
       </p:sp>
       <p:pic>
         <p:nvPicPr>
-          <p:cNvPr id="107" name=""/>
+          <p:cNvPr id="108" name=""/>
           <p:cNvPicPr>
             <a:picLocks xmlns:a="http://schemas.openxmlformats.org/drawingml/2006/main" noChangeAspect="1"/>
           </p:cNvPicPr>
           <p:nvPr/>
         </p:nvPicPr>
         <p:blipFill>
-          <a:blip xmlns:r="http://schemas.openxmlformats.org/officeDocument/2006/relationships" xmlns:a="http://schemas.openxmlformats.org/drawingml/2006/main" r:embed="R828062c8adea47db"/>
+          <a:blip xmlns:r="http://schemas.openxmlformats.org/officeDocument/2006/relationships" xmlns:a="http://schemas.openxmlformats.org/drawingml/2006/main" r:embed="R08da982c6c93425c"/>
           <a:stretch xmlns:a="http://schemas.openxmlformats.org/drawingml/2006/main"/>
         </p:blipFill>
         <p:spPr>
@@ -3152,7 +3152,7 @@
           <p:cNvPr id="44" name="m-chart-smoke-caption">
             <a:extLst xmlns:a="http://schemas.openxmlformats.org/drawingml/2006/main">
               <a:ext uri="{FF2B5EF4-FFF2-40B4-BE49-F238E27FC236}">
-                <a16:creationId xmlns:a16="http://schemas.microsoft.com/office/drawing/2014/main" id="{B670413F-8EBB-40F2-A86A-C6A0855BE7EA}"/>
+                <a16:creationId xmlns:a16="http://schemas.microsoft.com/office/drawing/2014/main" id="{3392650B-1626-4AD3-83C2-9BCAF6A7CEC2}"/>
               </a:ext>
             </a:extLst>
           </p:cNvPr>
@@ -3202,7 +3202,7 @@
           <p:cNvPr id="45" name="m-chart-smoke-frame">
             <a:extLst xmlns:a="http://schemas.openxmlformats.org/drawingml/2006/main">
               <a:ext uri="{FF2B5EF4-FFF2-40B4-BE49-F238E27FC236}">
-                <a16:creationId xmlns:a16="http://schemas.microsoft.com/office/drawing/2014/main" id="{3A6BC5B3-75D3-4D97-A625-1B1429B7E413}"/>
+                <a16:creationId xmlns:a16="http://schemas.microsoft.com/office/drawing/2014/main" id="{9FE1B11F-8C87-4229-B6FE-26A20C5F35B7}"/>
               </a:ext>
             </a:extLst>
           </p:cNvPr>
@@ -3232,14 +3232,14 @@
       </p:sp>
       <p:pic>
         <p:nvPicPr>
-          <p:cNvPr id="110" name=""/>
+          <p:cNvPr id="111" name=""/>
           <p:cNvPicPr>
             <a:picLocks xmlns:a="http://schemas.openxmlformats.org/drawingml/2006/main" noChangeAspect="1"/>
           </p:cNvPicPr>
           <p:nvPr/>
         </p:nvPicPr>
         <p:blipFill>
-          <a:blip xmlns:r="http://schemas.openxmlformats.org/officeDocument/2006/relationships" xmlns:a="http://schemas.openxmlformats.org/drawingml/2006/main" r:embed="R4f738cbadf1d4ac5"/>
+          <a:blip xmlns:r="http://schemas.openxmlformats.org/officeDocument/2006/relationships" xmlns:a="http://schemas.openxmlformats.org/drawingml/2006/main" r:embed="R4ff1207bcae14798"/>
           <a:stretch xmlns:a="http://schemas.openxmlformats.org/drawingml/2006/main"/>
         </p:blipFill>
         <p:spPr>
@@ -3257,7 +3257,7 @@
           <p:cNvPr id="47" name="5-Discussion-box">
             <a:extLst xmlns:a="http://schemas.openxmlformats.org/drawingml/2006/main">
               <a:ext uri="{FF2B5EF4-FFF2-40B4-BE49-F238E27FC236}">
-                <a16:creationId xmlns:a16="http://schemas.microsoft.com/office/drawing/2014/main" id="{279DD782-CC00-42F2-A69A-CCC1DEA9B9BF}"/>
+                <a16:creationId xmlns:a16="http://schemas.microsoft.com/office/drawing/2014/main" id="{16DEE12B-26FB-4E90-9F53-35715C7BAEE9}"/>
               </a:ext>
             </a:extLst>
           </p:cNvPr>
@@ -3290,7 +3290,7 @@
           <p:cNvPr id="48" name="5-Discussion-head">
             <a:extLst xmlns:a="http://schemas.openxmlformats.org/drawingml/2006/main">
               <a:ext uri="{FF2B5EF4-FFF2-40B4-BE49-F238E27FC236}">
-                <a16:creationId xmlns:a16="http://schemas.microsoft.com/office/drawing/2014/main" id="{EC62A2EC-8F23-446E-A94D-39C57AEEA9B7}"/>
+                <a16:creationId xmlns:a16="http://schemas.microsoft.com/office/drawing/2014/main" id="{C0BA6549-03B3-4C1C-A6FA-1AC2A26213BB}"/>
               </a:ext>
             </a:extLst>
           </p:cNvPr>
@@ -3323,7 +3323,7 @@
           <p:cNvPr id="49" name="5-Discussion-title">
             <a:extLst xmlns:a="http://schemas.openxmlformats.org/drawingml/2006/main">
               <a:ext uri="{FF2B5EF4-FFF2-40B4-BE49-F238E27FC236}">
-                <a16:creationId xmlns:a16="http://schemas.microsoft.com/office/drawing/2014/main" id="{D3217D52-F1DD-4E9C-8803-08D0F1AE730E}"/>
+                <a16:creationId xmlns:a16="http://schemas.microsoft.com/office/drawing/2014/main" id="{C24D4A0E-B236-4B90-84A4-F9F602728D7E}"/>
               </a:ext>
             </a:extLst>
           </p:cNvPr>
@@ -3373,7 +3373,7 @@
           <p:cNvPr id="50" name="5-Discussion-body">
             <a:extLst xmlns:a="http://schemas.openxmlformats.org/drawingml/2006/main">
               <a:ext uri="{FF2B5EF4-FFF2-40B4-BE49-F238E27FC236}">
-                <a16:creationId xmlns:a16="http://schemas.microsoft.com/office/drawing/2014/main" id="{40F3F5A8-2246-4BC8-9652-C901BEE89778}"/>
+                <a16:creationId xmlns:a16="http://schemas.microsoft.com/office/drawing/2014/main" id="{DEA1BB08-5D20-40CA-8A2D-BF377F9D3426}"/>
               </a:ext>
             </a:extLst>
           </p:cNvPr>
@@ -3525,7 +3525,7 @@
           <p:cNvPr id="51" name="6-Central conclusion-box">
             <a:extLst xmlns:a="http://schemas.openxmlformats.org/drawingml/2006/main">
               <a:ext uri="{FF2B5EF4-FFF2-40B4-BE49-F238E27FC236}">
-                <a16:creationId xmlns:a16="http://schemas.microsoft.com/office/drawing/2014/main" id="{8064B8CC-D2FD-4F38-8516-22C704A3B7CE}"/>
+                <a16:creationId xmlns:a16="http://schemas.microsoft.com/office/drawing/2014/main" id="{6FF2F46E-BF10-4457-843F-F3D8C9F77EC1}"/>
               </a:ext>
             </a:extLst>
           </p:cNvPr>
@@ -3558,7 +3558,7 @@
           <p:cNvPr id="52" name="6-Central conclusion-head">
             <a:extLst xmlns:a="http://schemas.openxmlformats.org/drawingml/2006/main">
               <a:ext uri="{FF2B5EF4-FFF2-40B4-BE49-F238E27FC236}">
-                <a16:creationId xmlns:a16="http://schemas.microsoft.com/office/drawing/2014/main" id="{C0580B82-5B59-4B7B-B101-7B700AA96399}"/>
+                <a16:creationId xmlns:a16="http://schemas.microsoft.com/office/drawing/2014/main" id="{1569AD37-994C-4DF2-926B-762772E68F1C}"/>
               </a:ext>
             </a:extLst>
           </p:cNvPr>
@@ -3591,7 +3591,7 @@
           <p:cNvPr id="53" name="6-Central conclusion-title">
             <a:extLst xmlns:a="http://schemas.openxmlformats.org/drawingml/2006/main">
               <a:ext uri="{FF2B5EF4-FFF2-40B4-BE49-F238E27FC236}">
-                <a16:creationId xmlns:a16="http://schemas.microsoft.com/office/drawing/2014/main" id="{0B09E707-ED2C-4F56-AA2E-2B53802252E1}"/>
+                <a16:creationId xmlns:a16="http://schemas.microsoft.com/office/drawing/2014/main" id="{6A04E2C4-3120-4DFD-A05D-B898F1666890}"/>
               </a:ext>
             </a:extLst>
           </p:cNvPr>
@@ -3641,7 +3641,7 @@
           <p:cNvPr id="54" name="6-Central conclusion-body">
             <a:extLst xmlns:a="http://schemas.openxmlformats.org/drawingml/2006/main">
               <a:ext uri="{FF2B5EF4-FFF2-40B4-BE49-F238E27FC236}">
-                <a16:creationId xmlns:a16="http://schemas.microsoft.com/office/drawing/2014/main" id="{78B59DD8-603A-40A3-82FA-62603D069B44}"/>
+                <a16:creationId xmlns:a16="http://schemas.microsoft.com/office/drawing/2014/main" id="{CEF92151-244C-40ED-8C83-1306B6310E51}"/>
               </a:ext>
             </a:extLst>
           </p:cNvPr>
@@ -3725,7 +3725,7 @@
           <p:cNvPr id="55" name="m-chart-crisis-caption">
             <a:extLst xmlns:a="http://schemas.openxmlformats.org/drawingml/2006/main">
               <a:ext uri="{FF2B5EF4-FFF2-40B4-BE49-F238E27FC236}">
-                <a16:creationId xmlns:a16="http://schemas.microsoft.com/office/drawing/2014/main" id="{48B738B6-120F-4214-B588-E2B392962CA8}"/>
+                <a16:creationId xmlns:a16="http://schemas.microsoft.com/office/drawing/2014/main" id="{8D88A9D7-7B90-4ED2-ACA5-D679EB4BBCCA}"/>
               </a:ext>
             </a:extLst>
           </p:cNvPr>
@@ -3775,7 +3775,7 @@
           <p:cNvPr id="56" name="m-chart-crisis-frame">
             <a:extLst xmlns:a="http://schemas.openxmlformats.org/drawingml/2006/main">
               <a:ext uri="{FF2B5EF4-FFF2-40B4-BE49-F238E27FC236}">
-                <a16:creationId xmlns:a16="http://schemas.microsoft.com/office/drawing/2014/main" id="{4E115667-5D00-43FB-82C7-108BFFDC32F8}"/>
+                <a16:creationId xmlns:a16="http://schemas.microsoft.com/office/drawing/2014/main" id="{45B61A25-18C8-424A-9997-40570D763010}"/>
               </a:ext>
             </a:extLst>
           </p:cNvPr>
@@ -3805,14 +3805,14 @@
       </p:sp>
       <p:pic>
         <p:nvPicPr>
-          <p:cNvPr id="121" name=""/>
+          <p:cNvPr id="122" name=""/>
           <p:cNvPicPr>
             <a:picLocks xmlns:a="http://schemas.openxmlformats.org/drawingml/2006/main" noChangeAspect="1"/>
           </p:cNvPicPr>
           <p:nvPr/>
         </p:nvPicPr>
         <p:blipFill>
-          <a:blip xmlns:r="http://schemas.openxmlformats.org/officeDocument/2006/relationships" xmlns:a="http://schemas.openxmlformats.org/drawingml/2006/main" r:embed="Rf0ec58bd9175458b"/>
+          <a:blip xmlns:r="http://schemas.openxmlformats.org/officeDocument/2006/relationships" xmlns:a="http://schemas.openxmlformats.org/drawingml/2006/main" r:embed="R55e353833170445d"/>
           <a:stretch xmlns:a="http://schemas.openxmlformats.org/drawingml/2006/main"/>
         </p:blipFill>
         <p:spPr>
@@ -3830,7 +3830,7 @@
           <p:cNvPr id="58" name="qr-box">
             <a:extLst xmlns:a="http://schemas.openxmlformats.org/drawingml/2006/main">
               <a:ext uri="{FF2B5EF4-FFF2-40B4-BE49-F238E27FC236}">
-                <a16:creationId xmlns:a16="http://schemas.microsoft.com/office/drawing/2014/main" id="{BFC05223-5456-4CBD-ACC8-2DEFB8252737}"/>
+                <a16:creationId xmlns:a16="http://schemas.microsoft.com/office/drawing/2014/main" id="{CACE5E85-F793-473D-A342-F244D09CA28C}"/>
               </a:ext>
             </a:extLst>
           </p:cNvPr>
@@ -3860,14 +3860,14 @@
       </p:sp>
       <p:pic>
         <p:nvPicPr>
-          <p:cNvPr id="123" name=""/>
+          <p:cNvPr id="124" name=""/>
           <p:cNvPicPr>
             <a:picLocks xmlns:a="http://schemas.openxmlformats.org/drawingml/2006/main" noChangeAspect="1"/>
           </p:cNvPicPr>
           <p:nvPr/>
         </p:nvPicPr>
         <p:blipFill>
-          <a:blip xmlns:r="http://schemas.openxmlformats.org/officeDocument/2006/relationships" xmlns:a="http://schemas.openxmlformats.org/drawingml/2006/main" r:embed="R75bcb6c6532d4acc"/>
+          <a:blip xmlns:r="http://schemas.openxmlformats.org/officeDocument/2006/relationships" xmlns:a="http://schemas.openxmlformats.org/drawingml/2006/main" r:embed="R40b246558cb54e59"/>
           <a:stretch xmlns:a="http://schemas.openxmlformats.org/drawingml/2006/main"/>
         </p:blipFill>
         <p:spPr>
@@ -3885,7 +3885,7 @@
           <p:cNvPr id="60" name="qr-label">
             <a:extLst xmlns:a="http://schemas.openxmlformats.org/drawingml/2006/main">
               <a:ext uri="{FF2B5EF4-FFF2-40B4-BE49-F238E27FC236}">
-                <a16:creationId xmlns:a16="http://schemas.microsoft.com/office/drawing/2014/main" id="{977B54EA-87DB-406A-BE9C-201130A01479}"/>
+                <a16:creationId xmlns:a16="http://schemas.microsoft.com/office/drawing/2014/main" id="{9131A340-FFCF-40BD-880E-AB509AAB8F31}"/>
               </a:ext>
             </a:extLst>
           </p:cNvPr>
@@ -3952,19 +3952,19 @@
           <p:cNvPr id="61" name="references-box">
             <a:extLst xmlns:a="http://schemas.openxmlformats.org/drawingml/2006/main">
               <a:ext uri="{FF2B5EF4-FFF2-40B4-BE49-F238E27FC236}">
-                <a16:creationId xmlns:a16="http://schemas.microsoft.com/office/drawing/2014/main" id="{5B82C0EB-7D43-4F3A-B51B-6E2E479FCD96}"/>
-              </a:ext>
-            </a:extLst>
-          </p:cNvPr>
-          <p:cNvSpPr>
-            <a:spLocks xmlns:a="http://schemas.openxmlformats.org/drawingml/2006/main" noGrp="1"/>
-          </p:cNvSpPr>
-          <p:nvPr/>
-        </p:nvSpPr>
-        <p:spPr>
-          <a:xfrm xmlns:a="http://schemas.openxmlformats.org/drawingml/2006/main">
-            <a:off x="323850" y="12382500"/>
-            <a:ext cx="8877300" cy="857250"/>
+                <a16:creationId xmlns:a16="http://schemas.microsoft.com/office/drawing/2014/main" id="{6085C1B3-CFAA-4876-812E-3C6510C7DBF8}"/>
+              </a:ext>
+            </a:extLst>
+          </p:cNvPr>
+          <p:cNvSpPr>
+            <a:spLocks xmlns:a="http://schemas.openxmlformats.org/drawingml/2006/main" noGrp="1"/>
+          </p:cNvSpPr>
+          <p:nvPr/>
+        </p:nvSpPr>
+        <p:spPr>
+          <a:xfrm xmlns:a="http://schemas.openxmlformats.org/drawingml/2006/main">
+            <a:off x="323850" y="12268200"/>
+            <a:ext cx="8877300" cy="1066800"/>
           </a:xfrm>
           <a:prstGeom xmlns:a="http://schemas.openxmlformats.org/drawingml/2006/main" prst="rect">
             <a:avLst/>
@@ -3985,18 +3985,18 @@
           <p:cNvPr id="62" name="references-title">
             <a:extLst xmlns:a="http://schemas.openxmlformats.org/drawingml/2006/main">
               <a:ext uri="{FF2B5EF4-FFF2-40B4-BE49-F238E27FC236}">
-                <a16:creationId xmlns:a16="http://schemas.microsoft.com/office/drawing/2014/main" id="{233B0604-2EBB-4DCE-B750-A3D7499341B4}"/>
-              </a:ext>
-            </a:extLst>
-          </p:cNvPr>
-          <p:cNvSpPr>
-            <a:spLocks xmlns:a="http://schemas.openxmlformats.org/drawingml/2006/main" noGrp="1"/>
-          </p:cNvSpPr>
-          <p:nvPr/>
-        </p:nvSpPr>
-        <p:spPr>
-          <a:xfrm xmlns:a="http://schemas.openxmlformats.org/drawingml/2006/main">
-            <a:off x="400050" y="12449175"/>
+                <a16:creationId xmlns:a16="http://schemas.microsoft.com/office/drawing/2014/main" id="{E0B45362-7403-4534-9F15-98FBB85FBA3E}"/>
+              </a:ext>
+            </a:extLst>
+          </p:cNvPr>
+          <p:cNvSpPr>
+            <a:spLocks xmlns:a="http://schemas.openxmlformats.org/drawingml/2006/main" noGrp="1"/>
+          </p:cNvSpPr>
+          <p:nvPr/>
+        </p:nvSpPr>
+        <p:spPr>
+          <a:xfrm xmlns:a="http://schemas.openxmlformats.org/drawingml/2006/main">
+            <a:off x="400050" y="12334875"/>
             <a:ext cx="8724900" cy="171450"/>
           </a:xfrm>
           <a:prstGeom xmlns:a="http://schemas.openxmlformats.org/drawingml/2006/main" prst="rect">
@@ -4032,22 +4032,55 @@
       </p:sp>
       <p:sp>
         <p:nvSpPr>
-          <p:cNvPr id="63" name="references-body-left">
-            <a:extLst xmlns:a="http://schemas.openxmlformats.org/drawingml/2006/main">
-              <a:ext uri="{FF2B5EF4-FFF2-40B4-BE49-F238E27FC236}">
-                <a16:creationId xmlns:a16="http://schemas.microsoft.com/office/drawing/2014/main" id="{5B81CCD5-7703-4B69-BFA7-A72F30E9C02F}"/>
-              </a:ext>
-            </a:extLst>
-          </p:cNvPr>
-          <p:cNvSpPr>
-            <a:spLocks xmlns:a="http://schemas.openxmlformats.org/drawingml/2006/main" noGrp="1"/>
-          </p:cNvSpPr>
-          <p:nvPr/>
-        </p:nvSpPr>
-        <p:spPr>
-          <a:xfrm xmlns:a="http://schemas.openxmlformats.org/drawingml/2006/main">
-            <a:off x="400050" y="12649200"/>
-            <a:ext cx="4276725" cy="533400"/>
+          <p:cNvPr id="63" name="references-column-divider">
+            <a:extLst xmlns:a="http://schemas.openxmlformats.org/drawingml/2006/main">
+              <a:ext uri="{FF2B5EF4-FFF2-40B4-BE49-F238E27FC236}">
+                <a16:creationId xmlns:a16="http://schemas.microsoft.com/office/drawing/2014/main" id="{BE4F3F38-9D33-4F81-AA95-5CF08AC35772}"/>
+              </a:ext>
+            </a:extLst>
+          </p:cNvPr>
+          <p:cNvSpPr>
+            <a:spLocks xmlns:a="http://schemas.openxmlformats.org/drawingml/2006/main" noGrp="1"/>
+          </p:cNvSpPr>
+          <p:nvPr/>
+        </p:nvSpPr>
+        <p:spPr>
+          <a:xfrm xmlns:a="http://schemas.openxmlformats.org/drawingml/2006/main">
+            <a:off x="4762500" y="12515850"/>
+            <a:ext cx="9525" cy="762000"/>
+          </a:xfrm>
+          <a:prstGeom xmlns:a="http://schemas.openxmlformats.org/drawingml/2006/main" prst="rect">
+            <a:avLst/>
+          </a:prstGeom>
+          <a:solidFill xmlns:a="http://schemas.openxmlformats.org/drawingml/2006/main">
+            <a:srgbClr val="B7D0DF"/>
+          </a:solidFill>
+          <a:ln xmlns:a="http://schemas.openxmlformats.org/drawingml/2006/main" w="9525">
+            <a:solidFill>
+              <a:srgbClr val="B7D0DF"/>
+            </a:solidFill>
+            <a:prstDash val="solid"/>
+          </a:ln>
+        </p:spPr>
+      </p:sp>
+      <p:sp>
+        <p:nvSpPr>
+          <p:cNvPr id="64" name="references-body-left">
+            <a:extLst xmlns:a="http://schemas.openxmlformats.org/drawingml/2006/main">
+              <a:ext uri="{FF2B5EF4-FFF2-40B4-BE49-F238E27FC236}">
+                <a16:creationId xmlns:a16="http://schemas.microsoft.com/office/drawing/2014/main" id="{EAF73F07-07CD-467D-ACE5-62E29DA1A8A6}"/>
+              </a:ext>
+            </a:extLst>
+          </p:cNvPr>
+          <p:cNvSpPr>
+            <a:spLocks xmlns:a="http://schemas.openxmlformats.org/drawingml/2006/main" noGrp="1"/>
+          </p:cNvSpPr>
+          <p:nvPr/>
+        </p:nvSpPr>
+        <p:spPr>
+          <a:xfrm xmlns:a="http://schemas.openxmlformats.org/drawingml/2006/main">
+            <a:off x="400050" y="12534900"/>
+            <a:ext cx="4276725" cy="742950"/>
           </a:xfrm>
           <a:prstGeom xmlns:a="http://schemas.openxmlformats.org/drawingml/2006/main" prst="rect">
             <a:avLst/>
@@ -4063,14 +4096,14 @@
           <a:lstStyle xmlns:a="http://schemas.openxmlformats.org/drawingml/2006/main"/>
           <a:p xmlns:a="http://schemas.openxmlformats.org/drawingml/2006/main">
             <a:pPr algn="l">
-              <a:defRPr sz="368" b="0">
-                <a:solidFill>
-                  <a:srgbClr val="102536"/>
-                </a:solidFill>
-              </a:defRPr>
-            </a:pPr>
-            <a:r>
-              <a:rPr sz="368" b="0">
+              <a:defRPr sz="390" b="0">
+                <a:solidFill>
+                  <a:srgbClr val="102536"/>
+                </a:solidFill>
+              </a:defRPr>
+            </a:pPr>
+            <a:r>
+              <a:rPr sz="390" b="0">
                 <a:solidFill>
                   <a:srgbClr val="102536"/>
                 </a:solidFill>
@@ -4080,14 +4113,14 @@
           </a:p>
           <a:p xmlns:a="http://schemas.openxmlformats.org/drawingml/2006/main">
             <a:pPr algn="l">
-              <a:defRPr sz="368" b="0">
-                <a:solidFill>
-                  <a:srgbClr val="102536"/>
-                </a:solidFill>
-              </a:defRPr>
-            </a:pPr>
-            <a:r>
-              <a:rPr sz="368" b="0">
+              <a:defRPr sz="390" b="0">
+                <a:solidFill>
+                  <a:srgbClr val="102536"/>
+                </a:solidFill>
+              </a:defRPr>
+            </a:pPr>
+            <a:r>
+              <a:rPr sz="390" b="0">
                 <a:solidFill>
                   <a:srgbClr val="102536"/>
                 </a:solidFill>
@@ -4097,14 +4130,14 @@
           </a:p>
           <a:p xmlns:a="http://schemas.openxmlformats.org/drawingml/2006/main">
             <a:pPr algn="l">
-              <a:defRPr sz="368" b="0">
-                <a:solidFill>
-                  <a:srgbClr val="102536"/>
-                </a:solidFill>
-              </a:defRPr>
-            </a:pPr>
-            <a:r>
-              <a:rPr sz="368" b="0">
+              <a:defRPr sz="390" b="0">
+                <a:solidFill>
+                  <a:srgbClr val="102536"/>
+                </a:solidFill>
+              </a:defRPr>
+            </a:pPr>
+            <a:r>
+              <a:rPr sz="390" b="0">
                 <a:solidFill>
                   <a:srgbClr val="102536"/>
                 </a:solidFill>
@@ -4114,14 +4147,14 @@
           </a:p>
           <a:p xmlns:a="http://schemas.openxmlformats.org/drawingml/2006/main">
             <a:pPr algn="l">
-              <a:defRPr sz="368" b="0">
-                <a:solidFill>
-                  <a:srgbClr val="102536"/>
-                </a:solidFill>
-              </a:defRPr>
-            </a:pPr>
-            <a:r>
-              <a:rPr sz="368" b="0">
+              <a:defRPr sz="390" b="0">
+                <a:solidFill>
+                  <a:srgbClr val="102536"/>
+                </a:solidFill>
+              </a:defRPr>
+            </a:pPr>
+            <a:r>
+              <a:rPr sz="390" b="0">
                 <a:solidFill>
                   <a:srgbClr val="102536"/>
                 </a:solidFill>
@@ -4131,14 +4164,14 @@
           </a:p>
           <a:p xmlns:a="http://schemas.openxmlformats.org/drawingml/2006/main">
             <a:pPr algn="l">
-              <a:defRPr sz="368" b="0">
-                <a:solidFill>
-                  <a:srgbClr val="102536"/>
-                </a:solidFill>
-              </a:defRPr>
-            </a:pPr>
-            <a:r>
-              <a:rPr sz="368" b="0">
+              <a:defRPr sz="390" b="0">
+                <a:solidFill>
+                  <a:srgbClr val="102536"/>
+                </a:solidFill>
+              </a:defRPr>
+            </a:pPr>
+            <a:r>
+              <a:rPr sz="390" b="0">
                 <a:solidFill>
                   <a:srgbClr val="102536"/>
                 </a:solidFill>
@@ -4148,14 +4181,14 @@
           </a:p>
           <a:p xmlns:a="http://schemas.openxmlformats.org/drawingml/2006/main">
             <a:pPr algn="l">
-              <a:defRPr sz="368" b="0">
-                <a:solidFill>
-                  <a:srgbClr val="102536"/>
-                </a:solidFill>
-              </a:defRPr>
-            </a:pPr>
-            <a:r>
-              <a:rPr sz="368" b="0">
+              <a:defRPr sz="390" b="0">
+                <a:solidFill>
+                  <a:srgbClr val="102536"/>
+                </a:solidFill>
+              </a:defRPr>
+            </a:pPr>
+            <a:r>
+              <a:rPr sz="390" b="0">
                 <a:solidFill>
                   <a:srgbClr val="102536"/>
                 </a:solidFill>
@@ -4165,14 +4198,14 @@
           </a:p>
           <a:p xmlns:a="http://schemas.openxmlformats.org/drawingml/2006/main">
             <a:pPr algn="l">
-              <a:defRPr sz="368" b="0">
-                <a:solidFill>
-                  <a:srgbClr val="102536"/>
-                </a:solidFill>
-              </a:defRPr>
-            </a:pPr>
-            <a:r>
-              <a:rPr sz="368" b="0">
+              <a:defRPr sz="390" b="0">
+                <a:solidFill>
+                  <a:srgbClr val="102536"/>
+                </a:solidFill>
+              </a:defRPr>
+            </a:pPr>
+            <a:r>
+              <a:rPr sz="390" b="0">
                 <a:solidFill>
                   <a:srgbClr val="102536"/>
                 </a:solidFill>
@@ -4184,22 +4217,22 @@
       </p:sp>
       <p:sp>
         <p:nvSpPr>
-          <p:cNvPr id="64" name="references-body-right">
-            <a:extLst xmlns:a="http://schemas.openxmlformats.org/drawingml/2006/main">
-              <a:ext uri="{FF2B5EF4-FFF2-40B4-BE49-F238E27FC236}">
-                <a16:creationId xmlns:a16="http://schemas.microsoft.com/office/drawing/2014/main" id="{617868D5-6225-4B73-A46D-60CABF875A8E}"/>
-              </a:ext>
-            </a:extLst>
-          </p:cNvPr>
-          <p:cNvSpPr>
-            <a:spLocks xmlns:a="http://schemas.openxmlformats.org/drawingml/2006/main" noGrp="1"/>
-          </p:cNvSpPr>
-          <p:nvPr/>
-        </p:nvSpPr>
-        <p:spPr>
-          <a:xfrm xmlns:a="http://schemas.openxmlformats.org/drawingml/2006/main">
-            <a:off x="4848225" y="12649200"/>
-            <a:ext cx="4276725" cy="533400"/>
+          <p:cNvPr id="65" name="references-body-right">
+            <a:extLst xmlns:a="http://schemas.openxmlformats.org/drawingml/2006/main">
+              <a:ext uri="{FF2B5EF4-FFF2-40B4-BE49-F238E27FC236}">
+                <a16:creationId xmlns:a16="http://schemas.microsoft.com/office/drawing/2014/main" id="{B1CBB9CC-5454-432D-9FB5-60B904822AF6}"/>
+              </a:ext>
+            </a:extLst>
+          </p:cNvPr>
+          <p:cNvSpPr>
+            <a:spLocks xmlns:a="http://schemas.openxmlformats.org/drawingml/2006/main" noGrp="1"/>
+          </p:cNvSpPr>
+          <p:nvPr/>
+        </p:nvSpPr>
+        <p:spPr>
+          <a:xfrm xmlns:a="http://schemas.openxmlformats.org/drawingml/2006/main">
+            <a:off x="4848225" y="12534900"/>
+            <a:ext cx="4276725" cy="742950"/>
           </a:xfrm>
           <a:prstGeom xmlns:a="http://schemas.openxmlformats.org/drawingml/2006/main" prst="rect">
             <a:avLst/>
@@ -4215,14 +4248,14 @@
           <a:lstStyle xmlns:a="http://schemas.openxmlformats.org/drawingml/2006/main"/>
           <a:p xmlns:a="http://schemas.openxmlformats.org/drawingml/2006/main">
             <a:pPr algn="l">
-              <a:defRPr sz="368" b="0">
-                <a:solidFill>
-                  <a:srgbClr val="102536"/>
-                </a:solidFill>
-              </a:defRPr>
-            </a:pPr>
-            <a:r>
-              <a:rPr sz="368" b="0">
+              <a:defRPr sz="390" b="0">
+                <a:solidFill>
+                  <a:srgbClr val="102536"/>
+                </a:solidFill>
+              </a:defRPr>
+            </a:pPr>
+            <a:r>
+              <a:rPr sz="390" b="0">
                 <a:solidFill>
                   <a:srgbClr val="102536"/>
                 </a:solidFill>
@@ -4232,14 +4265,14 @@
           </a:p>
           <a:p xmlns:a="http://schemas.openxmlformats.org/drawingml/2006/main">
             <a:pPr algn="l">
-              <a:defRPr sz="368" b="0">
-                <a:solidFill>
-                  <a:srgbClr val="102536"/>
-                </a:solidFill>
-              </a:defRPr>
-            </a:pPr>
-            <a:r>
-              <a:rPr sz="368" b="0">
+              <a:defRPr sz="390" b="0">
+                <a:solidFill>
+                  <a:srgbClr val="102536"/>
+                </a:solidFill>
+              </a:defRPr>
+            </a:pPr>
+            <a:r>
+              <a:rPr sz="390" b="0">
                 <a:solidFill>
                   <a:srgbClr val="102536"/>
                 </a:solidFill>
@@ -4249,14 +4282,14 @@
           </a:p>
           <a:p xmlns:a="http://schemas.openxmlformats.org/drawingml/2006/main">
             <a:pPr algn="l">
-              <a:defRPr sz="368" b="0">
-                <a:solidFill>
-                  <a:srgbClr val="102536"/>
-                </a:solidFill>
-              </a:defRPr>
-            </a:pPr>
-            <a:r>
-              <a:rPr sz="368" b="0">
+              <a:defRPr sz="390" b="0">
+                <a:solidFill>
+                  <a:srgbClr val="102536"/>
+                </a:solidFill>
+              </a:defRPr>
+            </a:pPr>
+            <a:r>
+              <a:rPr sz="390" b="0">
                 <a:solidFill>
                   <a:srgbClr val="102536"/>
                 </a:solidFill>
@@ -4266,14 +4299,14 @@
           </a:p>
           <a:p xmlns:a="http://schemas.openxmlformats.org/drawingml/2006/main">
             <a:pPr algn="l">
-              <a:defRPr sz="368" b="0">
-                <a:solidFill>
-                  <a:srgbClr val="102536"/>
-                </a:solidFill>
-              </a:defRPr>
-            </a:pPr>
-            <a:r>
-              <a:rPr sz="368" b="0">
+              <a:defRPr sz="390" b="0">
+                <a:solidFill>
+                  <a:srgbClr val="102536"/>
+                </a:solidFill>
+              </a:defRPr>
+            </a:pPr>
+            <a:r>
+              <a:rPr sz="390" b="0">
                 <a:solidFill>
                   <a:srgbClr val="102536"/>
                 </a:solidFill>
@@ -4283,14 +4316,14 @@
           </a:p>
           <a:p xmlns:a="http://schemas.openxmlformats.org/drawingml/2006/main">
             <a:pPr algn="l">
-              <a:defRPr sz="368" b="0">
-                <a:solidFill>
-                  <a:srgbClr val="102536"/>
-                </a:solidFill>
-              </a:defRPr>
-            </a:pPr>
-            <a:r>
-              <a:rPr sz="368" b="0">
+              <a:defRPr sz="390" b="0">
+                <a:solidFill>
+                  <a:srgbClr val="102536"/>
+                </a:solidFill>
+              </a:defRPr>
+            </a:pPr>
+            <a:r>
+              <a:rPr sz="390" b="0">
                 <a:solidFill>
                   <a:srgbClr val="102536"/>
                 </a:solidFill>
@@ -4300,14 +4333,14 @@
           </a:p>
           <a:p xmlns:a="http://schemas.openxmlformats.org/drawingml/2006/main">
             <a:pPr algn="l">
-              <a:defRPr sz="368" b="0">
-                <a:solidFill>
-                  <a:srgbClr val="102536"/>
-                </a:solidFill>
-              </a:defRPr>
-            </a:pPr>
-            <a:r>
-              <a:rPr sz="368" b="0">
+              <a:defRPr sz="390" b="0">
+                <a:solidFill>
+                  <a:srgbClr val="102536"/>
+                </a:solidFill>
+              </a:defRPr>
+            </a:pPr>
+            <a:r>
+              <a:rPr sz="390" b="0">
                 <a:solidFill>
                   <a:srgbClr val="102536"/>
                 </a:solidFill>
@@ -4320,7 +4353,7 @@
     </p:spTree>
     <p:extLst>
       <p:ext uri="{BB962C8B-B14F-4D97-AF65-F5344CB8AC3E}">
-        <p14:creationId xmlns:p14="http://schemas.microsoft.com/office/powerpoint/2010/main" val="948577147"/>
+        <p14:creationId xmlns:p14="http://schemas.microsoft.com/office/powerpoint/2010/main" val="1747884301"/>
       </p:ext>
     </p:extLst>
   </p:cSld>

--- a/outputs/posters/poster_pns_asma_morrison_en.pptx
+++ b/outputs/posters/poster_pns_asma_morrison_en.pptx
@@ -2,13 +2,13 @@
 <file path=ppt/presentation.xml><?xml version="1.0" encoding="utf-8"?>
 <p:presentation xmlns:p="http://schemas.openxmlformats.org/presentationml/2006/main">
   <p:sldMasterIdLst>
-    <p:sldMasterId xmlns:r="http://schemas.openxmlformats.org/officeDocument/2006/relationships" id="2147483648" r:id="Rb796f47f85a94d52"/>
+    <p:sldMasterId xmlns:r="http://schemas.openxmlformats.org/officeDocument/2006/relationships" id="2147483648" r:id="R4a7b12f783bb4a1d"/>
   </p:sldMasterIdLst>
   <p:notesMasterIdLst>
-    <p:notesMasterId xmlns:r="http://schemas.openxmlformats.org/officeDocument/2006/relationships" r:id="R779ecc9d6f95419a"/>
+    <p:notesMasterId xmlns:r="http://schemas.openxmlformats.org/officeDocument/2006/relationships" r:id="R12085d50d3734d2b"/>
   </p:notesMasterIdLst>
   <p:sldIdLst>
-    <p:sldId xmlns:r="http://schemas.openxmlformats.org/officeDocument/2006/relationships" id="256" r:id="Ree48ac6190a542c7"/>
+    <p:sldId xmlns:r="http://schemas.openxmlformats.org/officeDocument/2006/relationships" id="256" r:id="Rb3422bf467914f7b"/>
   </p:sldIdLst>
   <p:sldSz cx="9525000" cy="13468350"/>
   <p:notesSz cx="6858000" cy="9144000"/>
@@ -601,7 +601,7 @@
   </p:cSld>
   <p:clrMap bg1="lt1" tx1="dk1" bg2="lt2" tx2="dk2" accent1="accent1" accent2="accent2" accent3="accent3" accent4="accent4" accent5="accent5" accent6="accent6" hlink="hlink" folHlink="folHlink"/>
   <p:sldLayoutIdLst>
-    <p:sldLayoutId xmlns:r="http://schemas.openxmlformats.org/officeDocument/2006/relationships" id="2147483649" r:id="Rc551c62876b34c2d"/>
+    <p:sldLayoutId xmlns:r="http://schemas.openxmlformats.org/officeDocument/2006/relationships" id="2147483649" r:id="R30e1a708aeaf41ea"/>
   </p:sldLayoutIdLst>
   <p:txStyles>
     <p:titleStyle>
@@ -1156,7 +1156,7 @@
           <p:nvPr/>
         </p:nvPicPr>
         <p:blipFill>
-          <a:blip xmlns:r="http://schemas.openxmlformats.org/officeDocument/2006/relationships" xmlns:a="http://schemas.openxmlformats.org/drawingml/2006/main" r:embed="R6511fded18434444"/>
+          <a:blip xmlns:r="http://schemas.openxmlformats.org/officeDocument/2006/relationships" xmlns:a="http://schemas.openxmlformats.org/drawingml/2006/main" r:embed="Ra19843fa2cbe480a"/>
           <a:srcRect xmlns:a="http://schemas.openxmlformats.org/drawingml/2006/main" l="0" t="38622" r="0" b="38622"/>
           <a:stretch xmlns:a="http://schemas.openxmlformats.org/drawingml/2006/main">
             <a:fillRect l="0" t="0" r="0" b="0"/>
@@ -1181,7 +1181,7 @@
           <p:nvPr/>
         </p:nvPicPr>
         <p:blipFill>
-          <a:blip xmlns:r="http://schemas.openxmlformats.org/officeDocument/2006/relationships" xmlns:a="http://schemas.openxmlformats.org/drawingml/2006/main" r:embed="Reff777fb585845d3"/>
+          <a:blip xmlns:r="http://schemas.openxmlformats.org/officeDocument/2006/relationships" xmlns:a="http://schemas.openxmlformats.org/drawingml/2006/main" r:embed="Rc7f534bae3084816"/>
           <a:stretch xmlns:a="http://schemas.openxmlformats.org/drawingml/2006/main"/>
         </p:blipFill>
         <p:spPr>
@@ -1203,7 +1203,7 @@
           <p:nvPr/>
         </p:nvPicPr>
         <p:blipFill>
-          <a:blip xmlns:r="http://schemas.openxmlformats.org/officeDocument/2006/relationships" xmlns:a="http://schemas.openxmlformats.org/drawingml/2006/main" r:embed="Ra154fb04bec84f03"/>
+          <a:blip xmlns:r="http://schemas.openxmlformats.org/officeDocument/2006/relationships" xmlns:a="http://schemas.openxmlformats.org/drawingml/2006/main" r:embed="Rb3edff04db114327"/>
           <a:stretch xmlns:a="http://schemas.openxmlformats.org/drawingml/2006/main"/>
         </p:blipFill>
         <p:spPr>
@@ -1221,7 +1221,7 @@
           <p:cNvPr id="4" name="morrison-title">
             <a:extLst xmlns:a="http://schemas.openxmlformats.org/drawingml/2006/main">
               <a:ext uri="{FF2B5EF4-FFF2-40B4-BE49-F238E27FC236}">
-                <a16:creationId xmlns:a16="http://schemas.microsoft.com/office/drawing/2014/main" id="{D5514971-68DA-40B8-8E73-2BE5ED6DC158}"/>
+                <a16:creationId xmlns:a16="http://schemas.microsoft.com/office/drawing/2014/main" id="{54E3D109-9A72-4C1E-ADC1-9E725CAA1B01}"/>
               </a:ext>
             </a:extLst>
           </p:cNvPr>
@@ -1271,7 +1271,7 @@
           <p:cNvPr id="5" name="morrison-authors">
             <a:extLst xmlns:a="http://schemas.openxmlformats.org/drawingml/2006/main">
               <a:ext uri="{FF2B5EF4-FFF2-40B4-BE49-F238E27FC236}">
-                <a16:creationId xmlns:a16="http://schemas.microsoft.com/office/drawing/2014/main" id="{55262E77-5F08-48AE-981E-A557DBC92DF0}"/>
+                <a16:creationId xmlns:a16="http://schemas.microsoft.com/office/drawing/2014/main" id="{9EE0579C-7CAE-4D67-A752-59A9C046344A}"/>
               </a:ext>
             </a:extLst>
           </p:cNvPr>
@@ -1321,7 +1321,7 @@
           <p:cNvPr id="6" name="central-message">
             <a:extLst xmlns:a="http://schemas.openxmlformats.org/drawingml/2006/main">
               <a:ext uri="{FF2B5EF4-FFF2-40B4-BE49-F238E27FC236}">
-                <a16:creationId xmlns:a16="http://schemas.microsoft.com/office/drawing/2014/main" id="{E93989B3-CDBF-45D9-A390-061EC124EA2B}"/>
+                <a16:creationId xmlns:a16="http://schemas.microsoft.com/office/drawing/2014/main" id="{9CC40E63-56C5-411E-8BC7-CC2795364003}"/>
               </a:ext>
             </a:extLst>
           </p:cNvPr>
@@ -1375,7 +1375,7 @@
           <p:cNvPr id="7" name="1-Method in one line-box">
             <a:extLst xmlns:a="http://schemas.openxmlformats.org/drawingml/2006/main">
               <a:ext uri="{FF2B5EF4-FFF2-40B4-BE49-F238E27FC236}">
-                <a16:creationId xmlns:a16="http://schemas.microsoft.com/office/drawing/2014/main" id="{FDC6CA63-1B02-41F4-9C79-2E9A5AC373AC}"/>
+                <a16:creationId xmlns:a16="http://schemas.microsoft.com/office/drawing/2014/main" id="{C4144248-02F6-4D66-89A2-F68A73F03266}"/>
               </a:ext>
             </a:extLst>
           </p:cNvPr>
@@ -1408,7 +1408,7 @@
           <p:cNvPr id="8" name="1-Method in one line-head">
             <a:extLst xmlns:a="http://schemas.openxmlformats.org/drawingml/2006/main">
               <a:ext uri="{FF2B5EF4-FFF2-40B4-BE49-F238E27FC236}">
-                <a16:creationId xmlns:a16="http://schemas.microsoft.com/office/drawing/2014/main" id="{9709E071-D115-4255-9A0E-F7B3378A8AFD}"/>
+                <a16:creationId xmlns:a16="http://schemas.microsoft.com/office/drawing/2014/main" id="{7D31712E-9EDB-4DDD-87DF-1858D4E24A0D}"/>
               </a:ext>
             </a:extLst>
           </p:cNvPr>
@@ -1441,7 +1441,7 @@
           <p:cNvPr id="9" name="1-Method in one line-title">
             <a:extLst xmlns:a="http://schemas.openxmlformats.org/drawingml/2006/main">
               <a:ext uri="{FF2B5EF4-FFF2-40B4-BE49-F238E27FC236}">
-                <a16:creationId xmlns:a16="http://schemas.microsoft.com/office/drawing/2014/main" id="{DB42F00D-00E2-4837-B876-A2A18CC72507}"/>
+                <a16:creationId xmlns:a16="http://schemas.microsoft.com/office/drawing/2014/main" id="{44D1045C-9E14-45B5-B0D6-D28E32AA5EEC}"/>
               </a:ext>
             </a:extLst>
           </p:cNvPr>
@@ -1491,7 +1491,7 @@
           <p:cNvPr id="10" name="1-Method in one line-body">
             <a:extLst xmlns:a="http://schemas.openxmlformats.org/drawingml/2006/main">
               <a:ext uri="{FF2B5EF4-FFF2-40B4-BE49-F238E27FC236}">
-                <a16:creationId xmlns:a16="http://schemas.microsoft.com/office/drawing/2014/main" id="{6CDBA738-096E-4210-92A6-F9256893659F}"/>
+                <a16:creationId xmlns:a16="http://schemas.microsoft.com/office/drawing/2014/main" id="{3A2051BC-3814-47BD-A665-0E1BC4563B6E}"/>
               </a:ext>
             </a:extLst>
           </p:cNvPr>
@@ -1592,7 +1592,7 @@
           <p:cNvPr id="11" name="morrison-formula-box">
             <a:extLst xmlns:a="http://schemas.openxmlformats.org/drawingml/2006/main">
               <a:ext uri="{FF2B5EF4-FFF2-40B4-BE49-F238E27FC236}">
-                <a16:creationId xmlns:a16="http://schemas.microsoft.com/office/drawing/2014/main" id="{3462C64B-05A0-4064-81CD-DFE17BA55489}"/>
+                <a16:creationId xmlns:a16="http://schemas.microsoft.com/office/drawing/2014/main" id="{38D2B7D9-F8EA-49CA-82A0-D4ABA075FA53}"/>
               </a:ext>
             </a:extLst>
           </p:cNvPr>
@@ -1625,7 +1625,7 @@
           <p:cNvPr id="12" name="morrison-formula-title">
             <a:extLst xmlns:a="http://schemas.openxmlformats.org/drawingml/2006/main">
               <a:ext uri="{FF2B5EF4-FFF2-40B4-BE49-F238E27FC236}">
-                <a16:creationId xmlns:a16="http://schemas.microsoft.com/office/drawing/2014/main" id="{D8B918EC-02C2-498A-B82E-EDC14FFA3D69}"/>
+                <a16:creationId xmlns:a16="http://schemas.microsoft.com/office/drawing/2014/main" id="{2633DEBF-F995-408A-BBE5-C161427C7FC9}"/>
               </a:ext>
             </a:extLst>
           </p:cNvPr>
@@ -1675,7 +1675,7 @@
           <p:cNvPr id="13" name="morrison-formula">
             <a:extLst xmlns:a="http://schemas.openxmlformats.org/drawingml/2006/main">
               <a:ext uri="{FF2B5EF4-FFF2-40B4-BE49-F238E27FC236}">
-                <a16:creationId xmlns:a16="http://schemas.microsoft.com/office/drawing/2014/main" id="{02C7B5BA-F6DC-469A-BFD5-C2286358A15F}"/>
+                <a16:creationId xmlns:a16="http://schemas.microsoft.com/office/drawing/2014/main" id="{A0B723B3-964B-45DB-9D11-BD9358974ED4}"/>
               </a:ext>
             </a:extLst>
           </p:cNvPr>
@@ -1793,7 +1793,7 @@
           <p:cNvPr id="14" name="2-Data and denominators-box">
             <a:extLst xmlns:a="http://schemas.openxmlformats.org/drawingml/2006/main">
               <a:ext uri="{FF2B5EF4-FFF2-40B4-BE49-F238E27FC236}">
-                <a16:creationId xmlns:a16="http://schemas.microsoft.com/office/drawing/2014/main" id="{483D3862-E2B7-4013-A75A-7F8E9ED61104}"/>
+                <a16:creationId xmlns:a16="http://schemas.microsoft.com/office/drawing/2014/main" id="{8F700EF9-BB2A-4358-BA30-B33A1737BB3F}"/>
               </a:ext>
             </a:extLst>
           </p:cNvPr>
@@ -1826,7 +1826,7 @@
           <p:cNvPr id="15" name="2-Data and denominators-head">
             <a:extLst xmlns:a="http://schemas.openxmlformats.org/drawingml/2006/main">
               <a:ext uri="{FF2B5EF4-FFF2-40B4-BE49-F238E27FC236}">
-                <a16:creationId xmlns:a16="http://schemas.microsoft.com/office/drawing/2014/main" id="{30228466-4B64-4CD1-A465-68A8488C443A}"/>
+                <a16:creationId xmlns:a16="http://schemas.microsoft.com/office/drawing/2014/main" id="{1C946E1B-30B9-4F50-889A-AFBCE19434D5}"/>
               </a:ext>
             </a:extLst>
           </p:cNvPr>
@@ -1859,7 +1859,7 @@
           <p:cNvPr id="16" name="2-Data and denominators-title">
             <a:extLst xmlns:a="http://schemas.openxmlformats.org/drawingml/2006/main">
               <a:ext uri="{FF2B5EF4-FFF2-40B4-BE49-F238E27FC236}">
-                <a16:creationId xmlns:a16="http://schemas.microsoft.com/office/drawing/2014/main" id="{F1EAB744-9E32-4E00-BDAE-15CB2CE6C313}"/>
+                <a16:creationId xmlns:a16="http://schemas.microsoft.com/office/drawing/2014/main" id="{1A2285B8-D7BD-4AAB-AD03-0BF5F644E1EB}"/>
               </a:ext>
             </a:extLst>
           </p:cNvPr>
@@ -1909,7 +1909,7 @@
           <p:cNvPr id="17" name="2-Data and denominators-body">
             <a:extLst xmlns:a="http://schemas.openxmlformats.org/drawingml/2006/main">
               <a:ext uri="{FF2B5EF4-FFF2-40B4-BE49-F238E27FC236}">
-                <a16:creationId xmlns:a16="http://schemas.microsoft.com/office/drawing/2014/main" id="{7F6C8A0A-362C-46A4-BD1B-DB0D26D10D14}"/>
+                <a16:creationId xmlns:a16="http://schemas.microsoft.com/office/drawing/2014/main" id="{B7CD6B2E-CAF0-43AB-922E-5CA7FBE56E4A}"/>
               </a:ext>
             </a:extLst>
           </p:cNvPr>
@@ -1993,7 +1993,7 @@
           <p:cNvPr id="18" name="3-Why beta CIs?-box">
             <a:extLst xmlns:a="http://schemas.openxmlformats.org/drawingml/2006/main">
               <a:ext uri="{FF2B5EF4-FFF2-40B4-BE49-F238E27FC236}">
-                <a16:creationId xmlns:a16="http://schemas.microsoft.com/office/drawing/2014/main" id="{5C5CE4BE-56FA-43AB-AD32-F67A8C47526C}"/>
+                <a16:creationId xmlns:a16="http://schemas.microsoft.com/office/drawing/2014/main" id="{ADB1113D-1CDE-4301-ADBC-02E43A1FD145}"/>
               </a:ext>
             </a:extLst>
           </p:cNvPr>
@@ -2026,7 +2026,7 @@
           <p:cNvPr id="19" name="3-Why beta CIs?-head">
             <a:extLst xmlns:a="http://schemas.openxmlformats.org/drawingml/2006/main">
               <a:ext uri="{FF2B5EF4-FFF2-40B4-BE49-F238E27FC236}">
-                <a16:creationId xmlns:a16="http://schemas.microsoft.com/office/drawing/2014/main" id="{083D677C-83C7-4B08-90E2-25DB05038CCA}"/>
+                <a16:creationId xmlns:a16="http://schemas.microsoft.com/office/drawing/2014/main" id="{DFC5E3D4-739F-4DF0-85DA-ADE9D9BD264B}"/>
               </a:ext>
             </a:extLst>
           </p:cNvPr>
@@ -2059,7 +2059,7 @@
           <p:cNvPr id="20" name="3-Why beta CIs?-title">
             <a:extLst xmlns:a="http://schemas.openxmlformats.org/drawingml/2006/main">
               <a:ext uri="{FF2B5EF4-FFF2-40B4-BE49-F238E27FC236}">
-                <a16:creationId xmlns:a16="http://schemas.microsoft.com/office/drawing/2014/main" id="{FF5CBAFC-45F1-40F5-B72E-6E04A35CE8B5}"/>
+                <a16:creationId xmlns:a16="http://schemas.microsoft.com/office/drawing/2014/main" id="{1DA89584-DD52-47F2-896F-380AE3AEFA65}"/>
               </a:ext>
             </a:extLst>
           </p:cNvPr>
@@ -2109,7 +2109,7 @@
           <p:cNvPr id="21" name="3-Why beta CIs?-body">
             <a:extLst xmlns:a="http://schemas.openxmlformats.org/drawingml/2006/main">
               <a:ext uri="{FF2B5EF4-FFF2-40B4-BE49-F238E27FC236}">
-                <a16:creationId xmlns:a16="http://schemas.microsoft.com/office/drawing/2014/main" id="{2AEE2BD1-93C7-4AB7-A6B4-0E9AC23D77D1}"/>
+                <a16:creationId xmlns:a16="http://schemas.microsoft.com/office/drawing/2014/main" id="{80CF3FD3-B5C1-426C-B9D0-962098272619}"/>
               </a:ext>
             </a:extLst>
           </p:cNvPr>
@@ -2193,7 +2193,7 @@
           <p:cNvPr id="22" name="4-ETL and interoperability-box">
             <a:extLst xmlns:a="http://schemas.openxmlformats.org/drawingml/2006/main">
               <a:ext uri="{FF2B5EF4-FFF2-40B4-BE49-F238E27FC236}">
-                <a16:creationId xmlns:a16="http://schemas.microsoft.com/office/drawing/2014/main" id="{E5A74190-FF12-40FE-9A53-A273C64E66EC}"/>
+                <a16:creationId xmlns:a16="http://schemas.microsoft.com/office/drawing/2014/main" id="{21AB174D-2F3E-4557-B405-35F6A27924ED}"/>
               </a:ext>
             </a:extLst>
           </p:cNvPr>
@@ -2226,7 +2226,7 @@
           <p:cNvPr id="23" name="4-ETL and interoperability-head">
             <a:extLst xmlns:a="http://schemas.openxmlformats.org/drawingml/2006/main">
               <a:ext uri="{FF2B5EF4-FFF2-40B4-BE49-F238E27FC236}">
-                <a16:creationId xmlns:a16="http://schemas.microsoft.com/office/drawing/2014/main" id="{01B0D6E7-69DC-430F-90BE-CA00726B84BF}"/>
+                <a16:creationId xmlns:a16="http://schemas.microsoft.com/office/drawing/2014/main" id="{C32EC4C6-84FA-462E-B30C-06F2C7980DC5}"/>
               </a:ext>
             </a:extLst>
           </p:cNvPr>
@@ -2259,7 +2259,7 @@
           <p:cNvPr id="24" name="4-ETL and interoperability-title">
             <a:extLst xmlns:a="http://schemas.openxmlformats.org/drawingml/2006/main">
               <a:ext uri="{FF2B5EF4-FFF2-40B4-BE49-F238E27FC236}">
-                <a16:creationId xmlns:a16="http://schemas.microsoft.com/office/drawing/2014/main" id="{4CA2634C-7B1F-4C30-A306-A60DB8FE1C43}"/>
+                <a16:creationId xmlns:a16="http://schemas.microsoft.com/office/drawing/2014/main" id="{C76B389D-74D4-4035-8863-F6975C6C2F37}"/>
               </a:ext>
             </a:extLst>
           </p:cNvPr>
@@ -2309,7 +2309,7 @@
           <p:cNvPr id="25" name="4-ETL and interoperability-body">
             <a:extLst xmlns:a="http://schemas.openxmlformats.org/drawingml/2006/main">
               <a:ext uri="{FF2B5EF4-FFF2-40B4-BE49-F238E27FC236}">
-                <a16:creationId xmlns:a16="http://schemas.microsoft.com/office/drawing/2014/main" id="{5724804C-FCA1-49CB-B1E8-DB5141595CD1}"/>
+                <a16:creationId xmlns:a16="http://schemas.microsoft.com/office/drawing/2014/main" id="{879F6F64-7D51-448C-9F01-4E6A65C4CB8C}"/>
               </a:ext>
             </a:extLst>
           </p:cNvPr>
@@ -2393,7 +2393,7 @@
           <p:cNvPr id="26" name="m-prev-metric">
             <a:extLst xmlns:a="http://schemas.openxmlformats.org/drawingml/2006/main">
               <a:ext uri="{FF2B5EF4-FFF2-40B4-BE49-F238E27FC236}">
-                <a16:creationId xmlns:a16="http://schemas.microsoft.com/office/drawing/2014/main" id="{156AF691-ADC5-42E5-B614-E74B9A839ACA}"/>
+                <a16:creationId xmlns:a16="http://schemas.microsoft.com/office/drawing/2014/main" id="{944D44C2-C0B4-4658-864F-42AB8CE47EA3}"/>
               </a:ext>
             </a:extLst>
           </p:cNvPr>
@@ -2426,7 +2426,7 @@
           <p:cNvPr id="27" name="m-prev-metric-title">
             <a:extLst xmlns:a="http://schemas.openxmlformats.org/drawingml/2006/main">
               <a:ext uri="{FF2B5EF4-FFF2-40B4-BE49-F238E27FC236}">
-                <a16:creationId xmlns:a16="http://schemas.microsoft.com/office/drawing/2014/main" id="{38EA17E6-C82F-438F-A230-E3E8EFEE031D}"/>
+                <a16:creationId xmlns:a16="http://schemas.microsoft.com/office/drawing/2014/main" id="{CCD4D041-874D-4FA1-9A3F-3D7C9A9E8D03}"/>
               </a:ext>
             </a:extLst>
           </p:cNvPr>
@@ -2476,7 +2476,7 @@
           <p:cNvPr id="28" name="m-prev-metric-value">
             <a:extLst xmlns:a="http://schemas.openxmlformats.org/drawingml/2006/main">
               <a:ext uri="{FF2B5EF4-FFF2-40B4-BE49-F238E27FC236}">
-                <a16:creationId xmlns:a16="http://schemas.microsoft.com/office/drawing/2014/main" id="{5F288295-A5F2-4898-A86D-00FAA03496B7}"/>
+                <a16:creationId xmlns:a16="http://schemas.microsoft.com/office/drawing/2014/main" id="{EF647F3C-1368-496D-ACF8-75AC31C3CCF7}"/>
               </a:ext>
             </a:extLst>
           </p:cNvPr>
@@ -2526,7 +2526,7 @@
           <p:cNvPr id="29" name="m-prev-metric-note">
             <a:extLst xmlns:a="http://schemas.openxmlformats.org/drawingml/2006/main">
               <a:ext uri="{FF2B5EF4-FFF2-40B4-BE49-F238E27FC236}">
-                <a16:creationId xmlns:a16="http://schemas.microsoft.com/office/drawing/2014/main" id="{CC2F7066-DB8E-4C85-A375-FBFB2B187847}"/>
+                <a16:creationId xmlns:a16="http://schemas.microsoft.com/office/drawing/2014/main" id="{5221FA8D-C41B-4FC3-B42A-1362586CF820}"/>
               </a:ext>
             </a:extLst>
           </p:cNvPr>
@@ -2576,7 +2576,7 @@
           <p:cNvPr id="30" name="m-crisis-metric">
             <a:extLst xmlns:a="http://schemas.openxmlformats.org/drawingml/2006/main">
               <a:ext uri="{FF2B5EF4-FFF2-40B4-BE49-F238E27FC236}">
-                <a16:creationId xmlns:a16="http://schemas.microsoft.com/office/drawing/2014/main" id="{539CBC50-29D8-4498-A82F-77998A4BA70A}"/>
+                <a16:creationId xmlns:a16="http://schemas.microsoft.com/office/drawing/2014/main" id="{4DF20AC7-BA42-4B8A-B6C1-AB5C7BDE93AA}"/>
               </a:ext>
             </a:extLst>
           </p:cNvPr>
@@ -2609,7 +2609,7 @@
           <p:cNvPr id="31" name="m-crisis-metric-title">
             <a:extLst xmlns:a="http://schemas.openxmlformats.org/drawingml/2006/main">
               <a:ext uri="{FF2B5EF4-FFF2-40B4-BE49-F238E27FC236}">
-                <a16:creationId xmlns:a16="http://schemas.microsoft.com/office/drawing/2014/main" id="{9AA98652-439A-440E-8365-B40AED96E477}"/>
+                <a16:creationId xmlns:a16="http://schemas.microsoft.com/office/drawing/2014/main" id="{8609AAB0-7558-461D-9741-D0C070D6C527}"/>
               </a:ext>
             </a:extLst>
           </p:cNvPr>
@@ -2659,7 +2659,7 @@
           <p:cNvPr id="32" name="m-crisis-metric-value">
             <a:extLst xmlns:a="http://schemas.openxmlformats.org/drawingml/2006/main">
               <a:ext uri="{FF2B5EF4-FFF2-40B4-BE49-F238E27FC236}">
-                <a16:creationId xmlns:a16="http://schemas.microsoft.com/office/drawing/2014/main" id="{F7479AE7-520B-4A49-B80A-2B30F612FBAB}"/>
+                <a16:creationId xmlns:a16="http://schemas.microsoft.com/office/drawing/2014/main" id="{863903AD-4AFA-43AA-8D44-F29B5AC3C361}"/>
               </a:ext>
             </a:extLst>
           </p:cNvPr>
@@ -2709,7 +2709,7 @@
           <p:cNvPr id="33" name="m-crisis-metric-note">
             <a:extLst xmlns:a="http://schemas.openxmlformats.org/drawingml/2006/main">
               <a:ext uri="{FF2B5EF4-FFF2-40B4-BE49-F238E27FC236}">
-                <a16:creationId xmlns:a16="http://schemas.microsoft.com/office/drawing/2014/main" id="{CF049EC0-B815-42EB-A61B-A106C50FAF27}"/>
+                <a16:creationId xmlns:a16="http://schemas.microsoft.com/office/drawing/2014/main" id="{88078065-051F-4682-9D04-C241E2509117}"/>
               </a:ext>
             </a:extLst>
           </p:cNvPr>
@@ -2759,7 +2759,7 @@
           <p:cNvPr id="34" name="m-meds-metric">
             <a:extLst xmlns:a="http://schemas.openxmlformats.org/drawingml/2006/main">
               <a:ext uri="{FF2B5EF4-FFF2-40B4-BE49-F238E27FC236}">
-                <a16:creationId xmlns:a16="http://schemas.microsoft.com/office/drawing/2014/main" id="{6989049D-E071-49D5-978C-C39DDE408D21}"/>
+                <a16:creationId xmlns:a16="http://schemas.microsoft.com/office/drawing/2014/main" id="{BAFA449D-6301-4ED2-96DF-9E8645AFC788}"/>
               </a:ext>
             </a:extLst>
           </p:cNvPr>
@@ -2792,7 +2792,7 @@
           <p:cNvPr id="35" name="m-meds-metric-title">
             <a:extLst xmlns:a="http://schemas.openxmlformats.org/drawingml/2006/main">
               <a:ext uri="{FF2B5EF4-FFF2-40B4-BE49-F238E27FC236}">
-                <a16:creationId xmlns:a16="http://schemas.microsoft.com/office/drawing/2014/main" id="{B1D7F53D-91CE-44B3-B3E1-FDCD2E406575}"/>
+                <a16:creationId xmlns:a16="http://schemas.microsoft.com/office/drawing/2014/main" id="{6C4A309F-2C93-44B4-8F1D-41FD3267C479}"/>
               </a:ext>
             </a:extLst>
           </p:cNvPr>
@@ -2842,7 +2842,7 @@
           <p:cNvPr id="36" name="m-meds-metric-value">
             <a:extLst xmlns:a="http://schemas.openxmlformats.org/drawingml/2006/main">
               <a:ext uri="{FF2B5EF4-FFF2-40B4-BE49-F238E27FC236}">
-                <a16:creationId xmlns:a16="http://schemas.microsoft.com/office/drawing/2014/main" id="{2B602034-55A1-4FDE-8495-24C7B65587D2}"/>
+                <a16:creationId xmlns:a16="http://schemas.microsoft.com/office/drawing/2014/main" id="{E4EE88F0-7381-4591-866A-D81B19FD8AFF}"/>
               </a:ext>
             </a:extLst>
           </p:cNvPr>
@@ -2892,7 +2892,7 @@
           <p:cNvPr id="37" name="m-meds-metric-note">
             <a:extLst xmlns:a="http://schemas.openxmlformats.org/drawingml/2006/main">
               <a:ext uri="{FF2B5EF4-FFF2-40B4-BE49-F238E27FC236}">
-                <a16:creationId xmlns:a16="http://schemas.microsoft.com/office/drawing/2014/main" id="{20EEB764-B36C-49C7-8783-51516CC5E1AD}"/>
+                <a16:creationId xmlns:a16="http://schemas.microsoft.com/office/drawing/2014/main" id="{3043654D-12AB-4A0E-B1A6-F90C7FFB9482}"/>
               </a:ext>
             </a:extLst>
           </p:cNvPr>
@@ -2942,7 +2942,7 @@
           <p:cNvPr id="38" name="m-chart-prev-caption">
             <a:extLst xmlns:a="http://schemas.openxmlformats.org/drawingml/2006/main">
               <a:ext uri="{FF2B5EF4-FFF2-40B4-BE49-F238E27FC236}">
-                <a16:creationId xmlns:a16="http://schemas.microsoft.com/office/drawing/2014/main" id="{DCB583D3-9BB1-463B-B346-65994E940299}"/>
+                <a16:creationId xmlns:a16="http://schemas.microsoft.com/office/drawing/2014/main" id="{92F1CCA3-F7D1-400A-AC18-E9038139827F}"/>
               </a:ext>
             </a:extLst>
           </p:cNvPr>
@@ -2992,7 +2992,7 @@
           <p:cNvPr id="39" name="m-chart-prev-frame">
             <a:extLst xmlns:a="http://schemas.openxmlformats.org/drawingml/2006/main">
               <a:ext uri="{FF2B5EF4-FFF2-40B4-BE49-F238E27FC236}">
-                <a16:creationId xmlns:a16="http://schemas.microsoft.com/office/drawing/2014/main" id="{97E8D029-15CD-41E5-9DE4-8F1016DA6488}"/>
+                <a16:creationId xmlns:a16="http://schemas.microsoft.com/office/drawing/2014/main" id="{4AFEDE3F-21B1-4ED1-B722-F51D4A6BD2ED}"/>
               </a:ext>
             </a:extLst>
           </p:cNvPr>
@@ -3029,7 +3029,7 @@
           <p:nvPr/>
         </p:nvPicPr>
         <p:blipFill>
-          <a:blip xmlns:r="http://schemas.openxmlformats.org/officeDocument/2006/relationships" xmlns:a="http://schemas.openxmlformats.org/drawingml/2006/main" r:embed="Rbd78dc13921b45ff"/>
+          <a:blip xmlns:r="http://schemas.openxmlformats.org/officeDocument/2006/relationships" xmlns:a="http://schemas.openxmlformats.org/drawingml/2006/main" r:embed="R5b2096def7224d54"/>
           <a:stretch xmlns:a="http://schemas.openxmlformats.org/drawingml/2006/main"/>
         </p:blipFill>
         <p:spPr>
@@ -3047,7 +3047,7 @@
           <p:cNvPr id="41" name="m-chart-meds-caption">
             <a:extLst xmlns:a="http://schemas.openxmlformats.org/drawingml/2006/main">
               <a:ext uri="{FF2B5EF4-FFF2-40B4-BE49-F238E27FC236}">
-                <a16:creationId xmlns:a16="http://schemas.microsoft.com/office/drawing/2014/main" id="{EA7896E7-F231-4D3E-8835-EC475FAE6301}"/>
+                <a16:creationId xmlns:a16="http://schemas.microsoft.com/office/drawing/2014/main" id="{6AA34498-3203-470E-A9CE-6D596E8142FA}"/>
               </a:ext>
             </a:extLst>
           </p:cNvPr>
@@ -3097,7 +3097,7 @@
           <p:cNvPr id="42" name="m-chart-meds-frame">
             <a:extLst xmlns:a="http://schemas.openxmlformats.org/drawingml/2006/main">
               <a:ext uri="{FF2B5EF4-FFF2-40B4-BE49-F238E27FC236}">
-                <a16:creationId xmlns:a16="http://schemas.microsoft.com/office/drawing/2014/main" id="{D6CD4B8D-3EDD-4548-B379-801376B59391}"/>
+                <a16:creationId xmlns:a16="http://schemas.microsoft.com/office/drawing/2014/main" id="{AB2CF0A1-D7AB-4AD9-83A9-BA34D2176F10}"/>
               </a:ext>
             </a:extLst>
           </p:cNvPr>
@@ -3134,13 +3134,13 @@
           <p:nvPr/>
         </p:nvPicPr>
         <p:blipFill>
-          <a:blip xmlns:r="http://schemas.openxmlformats.org/officeDocument/2006/relationships" xmlns:a="http://schemas.openxmlformats.org/drawingml/2006/main" r:embed="R08da982c6c93425c"/>
+          <a:blip xmlns:r="http://schemas.openxmlformats.org/officeDocument/2006/relationships" xmlns:a="http://schemas.openxmlformats.org/drawingml/2006/main" r:embed="Re88a0e6de9d444fa"/>
           <a:stretch xmlns:a="http://schemas.openxmlformats.org/drawingml/2006/main"/>
         </p:blipFill>
         <p:spPr>
           <a:xfrm xmlns:a="http://schemas.openxmlformats.org/drawingml/2006/main">
-            <a:off x="3480513" y="7143750"/>
-            <a:ext cx="3040224" cy="2190750"/>
+            <a:off x="3464428" y="7143750"/>
+            <a:ext cx="3072393" cy="2190750"/>
           </a:xfrm>
           <a:prstGeom xmlns:a="http://schemas.openxmlformats.org/drawingml/2006/main" prst="rect">
             <a:avLst/>
@@ -3152,7 +3152,7 @@
           <p:cNvPr id="44" name="m-chart-smoke-caption">
             <a:extLst xmlns:a="http://schemas.openxmlformats.org/drawingml/2006/main">
               <a:ext uri="{FF2B5EF4-FFF2-40B4-BE49-F238E27FC236}">
-                <a16:creationId xmlns:a16="http://schemas.microsoft.com/office/drawing/2014/main" id="{3392650B-1626-4AD3-83C2-9BCAF6A7CEC2}"/>
+                <a16:creationId xmlns:a16="http://schemas.microsoft.com/office/drawing/2014/main" id="{18D7A0FB-A52D-4D3A-8B61-4AB205A42046}"/>
               </a:ext>
             </a:extLst>
           </p:cNvPr>
@@ -3202,7 +3202,7 @@
           <p:cNvPr id="45" name="m-chart-smoke-frame">
             <a:extLst xmlns:a="http://schemas.openxmlformats.org/drawingml/2006/main">
               <a:ext uri="{FF2B5EF4-FFF2-40B4-BE49-F238E27FC236}">
-                <a16:creationId xmlns:a16="http://schemas.microsoft.com/office/drawing/2014/main" id="{9FE1B11F-8C87-4229-B6FE-26A20C5F35B7}"/>
+                <a16:creationId xmlns:a16="http://schemas.microsoft.com/office/drawing/2014/main" id="{CAFD662F-5384-488B-933D-B1E8EFC51D9F}"/>
               </a:ext>
             </a:extLst>
           </p:cNvPr>
@@ -3239,7 +3239,7 @@
           <p:nvPr/>
         </p:nvPicPr>
         <p:blipFill>
-          <a:blip xmlns:r="http://schemas.openxmlformats.org/officeDocument/2006/relationships" xmlns:a="http://schemas.openxmlformats.org/drawingml/2006/main" r:embed="R4ff1207bcae14798"/>
+          <a:blip xmlns:r="http://schemas.openxmlformats.org/officeDocument/2006/relationships" xmlns:a="http://schemas.openxmlformats.org/drawingml/2006/main" r:embed="R6107c40be7d14a5a"/>
           <a:stretch xmlns:a="http://schemas.openxmlformats.org/drawingml/2006/main"/>
         </p:blipFill>
         <p:spPr>
@@ -3257,7 +3257,7 @@
           <p:cNvPr id="47" name="5-Discussion-box">
             <a:extLst xmlns:a="http://schemas.openxmlformats.org/drawingml/2006/main">
               <a:ext uri="{FF2B5EF4-FFF2-40B4-BE49-F238E27FC236}">
-                <a16:creationId xmlns:a16="http://schemas.microsoft.com/office/drawing/2014/main" id="{16DEE12B-26FB-4E90-9F53-35715C7BAEE9}"/>
+                <a16:creationId xmlns:a16="http://schemas.microsoft.com/office/drawing/2014/main" id="{500B4B90-EE1A-4640-9FD7-BCC9E428D81C}"/>
               </a:ext>
             </a:extLst>
           </p:cNvPr>
@@ -3290,7 +3290,7 @@
           <p:cNvPr id="48" name="5-Discussion-head">
             <a:extLst xmlns:a="http://schemas.openxmlformats.org/drawingml/2006/main">
               <a:ext uri="{FF2B5EF4-FFF2-40B4-BE49-F238E27FC236}">
-                <a16:creationId xmlns:a16="http://schemas.microsoft.com/office/drawing/2014/main" id="{C0BA6549-03B3-4C1C-A6FA-1AC2A26213BB}"/>
+                <a16:creationId xmlns:a16="http://schemas.microsoft.com/office/drawing/2014/main" id="{FCCB7E24-DC1F-40F5-8345-9BBE407936EF}"/>
               </a:ext>
             </a:extLst>
           </p:cNvPr>
@@ -3323,7 +3323,7 @@
           <p:cNvPr id="49" name="5-Discussion-title">
             <a:extLst xmlns:a="http://schemas.openxmlformats.org/drawingml/2006/main">
               <a:ext uri="{FF2B5EF4-FFF2-40B4-BE49-F238E27FC236}">
-                <a16:creationId xmlns:a16="http://schemas.microsoft.com/office/drawing/2014/main" id="{C24D4A0E-B236-4B90-84A4-F9F602728D7E}"/>
+                <a16:creationId xmlns:a16="http://schemas.microsoft.com/office/drawing/2014/main" id="{937BCA4E-EF56-4116-B4EF-DC0AEFE86FD4}"/>
               </a:ext>
             </a:extLst>
           </p:cNvPr>
@@ -3373,7 +3373,7 @@
           <p:cNvPr id="50" name="5-Discussion-body">
             <a:extLst xmlns:a="http://schemas.openxmlformats.org/drawingml/2006/main">
               <a:ext uri="{FF2B5EF4-FFF2-40B4-BE49-F238E27FC236}">
-                <a16:creationId xmlns:a16="http://schemas.microsoft.com/office/drawing/2014/main" id="{DEA1BB08-5D20-40CA-8A2D-BF377F9D3426}"/>
+                <a16:creationId xmlns:a16="http://schemas.microsoft.com/office/drawing/2014/main" id="{92FBE32A-81A4-4D3B-9E82-B1CA3372FC86}"/>
               </a:ext>
             </a:extLst>
           </p:cNvPr>
@@ -3525,7 +3525,7 @@
           <p:cNvPr id="51" name="6-Central conclusion-box">
             <a:extLst xmlns:a="http://schemas.openxmlformats.org/drawingml/2006/main">
               <a:ext uri="{FF2B5EF4-FFF2-40B4-BE49-F238E27FC236}">
-                <a16:creationId xmlns:a16="http://schemas.microsoft.com/office/drawing/2014/main" id="{6FF2F46E-BF10-4457-843F-F3D8C9F77EC1}"/>
+                <a16:creationId xmlns:a16="http://schemas.microsoft.com/office/drawing/2014/main" id="{4B177726-F58A-4DCC-A287-13088BA06108}"/>
               </a:ext>
             </a:extLst>
           </p:cNvPr>
@@ -3558,7 +3558,7 @@
           <p:cNvPr id="52" name="6-Central conclusion-head">
             <a:extLst xmlns:a="http://schemas.openxmlformats.org/drawingml/2006/main">
               <a:ext uri="{FF2B5EF4-FFF2-40B4-BE49-F238E27FC236}">
-                <a16:creationId xmlns:a16="http://schemas.microsoft.com/office/drawing/2014/main" id="{1569AD37-994C-4DF2-926B-762772E68F1C}"/>
+                <a16:creationId xmlns:a16="http://schemas.microsoft.com/office/drawing/2014/main" id="{72FA9D0A-70CA-4C6A-BDB1-1D2C2577D2CA}"/>
               </a:ext>
             </a:extLst>
           </p:cNvPr>
@@ -3591,7 +3591,7 @@
           <p:cNvPr id="53" name="6-Central conclusion-title">
             <a:extLst xmlns:a="http://schemas.openxmlformats.org/drawingml/2006/main">
               <a:ext uri="{FF2B5EF4-FFF2-40B4-BE49-F238E27FC236}">
-                <a16:creationId xmlns:a16="http://schemas.microsoft.com/office/drawing/2014/main" id="{6A04E2C4-3120-4DFD-A05D-B898F1666890}"/>
+                <a16:creationId xmlns:a16="http://schemas.microsoft.com/office/drawing/2014/main" id="{C2DE8933-CFC7-4F2A-90AC-0AB74D10608B}"/>
               </a:ext>
             </a:extLst>
           </p:cNvPr>
@@ -3641,7 +3641,7 @@
           <p:cNvPr id="54" name="6-Central conclusion-body">
             <a:extLst xmlns:a="http://schemas.openxmlformats.org/drawingml/2006/main">
               <a:ext uri="{FF2B5EF4-FFF2-40B4-BE49-F238E27FC236}">
-                <a16:creationId xmlns:a16="http://schemas.microsoft.com/office/drawing/2014/main" id="{CEF92151-244C-40ED-8C83-1306B6310E51}"/>
+                <a16:creationId xmlns:a16="http://schemas.microsoft.com/office/drawing/2014/main" id="{BEAF476C-6C95-408E-A81F-47A9F44DDCE9}"/>
               </a:ext>
             </a:extLst>
           </p:cNvPr>
@@ -3725,7 +3725,7 @@
           <p:cNvPr id="55" name="m-chart-crisis-caption">
             <a:extLst xmlns:a="http://schemas.openxmlformats.org/drawingml/2006/main">
               <a:ext uri="{FF2B5EF4-FFF2-40B4-BE49-F238E27FC236}">
-                <a16:creationId xmlns:a16="http://schemas.microsoft.com/office/drawing/2014/main" id="{8D88A9D7-7B90-4ED2-ACA5-D679EB4BBCCA}"/>
+                <a16:creationId xmlns:a16="http://schemas.microsoft.com/office/drawing/2014/main" id="{830B44AF-7BAD-4DCD-AFB1-93B50EB8070F}"/>
               </a:ext>
             </a:extLst>
           </p:cNvPr>
@@ -3775,7 +3775,7 @@
           <p:cNvPr id="56" name="m-chart-crisis-frame">
             <a:extLst xmlns:a="http://schemas.openxmlformats.org/drawingml/2006/main">
               <a:ext uri="{FF2B5EF4-FFF2-40B4-BE49-F238E27FC236}">
-                <a16:creationId xmlns:a16="http://schemas.microsoft.com/office/drawing/2014/main" id="{45B61A25-18C8-424A-9997-40570D763010}"/>
+                <a16:creationId xmlns:a16="http://schemas.microsoft.com/office/drawing/2014/main" id="{4CC0D7F9-3EAB-4CFB-A4D7-3F7A4CF8ECD1}"/>
               </a:ext>
             </a:extLst>
           </p:cNvPr>
@@ -3812,7 +3812,7 @@
           <p:nvPr/>
         </p:nvPicPr>
         <p:blipFill>
-          <a:blip xmlns:r="http://schemas.openxmlformats.org/officeDocument/2006/relationships" xmlns:a="http://schemas.openxmlformats.org/drawingml/2006/main" r:embed="R55e353833170445d"/>
+          <a:blip xmlns:r="http://schemas.openxmlformats.org/officeDocument/2006/relationships" xmlns:a="http://schemas.openxmlformats.org/drawingml/2006/main" r:embed="Rb0d5084f8b23497e"/>
           <a:stretch xmlns:a="http://schemas.openxmlformats.org/drawingml/2006/main"/>
         </p:blipFill>
         <p:spPr>
@@ -3830,7 +3830,7 @@
           <p:cNvPr id="58" name="qr-box">
             <a:extLst xmlns:a="http://schemas.openxmlformats.org/drawingml/2006/main">
               <a:ext uri="{FF2B5EF4-FFF2-40B4-BE49-F238E27FC236}">
-                <a16:creationId xmlns:a16="http://schemas.microsoft.com/office/drawing/2014/main" id="{CACE5E85-F793-473D-A342-F244D09CA28C}"/>
+                <a16:creationId xmlns:a16="http://schemas.microsoft.com/office/drawing/2014/main" id="{DDC96D3C-321C-494B-8C46-8F84CC907A43}"/>
               </a:ext>
             </a:extLst>
           </p:cNvPr>
@@ -3867,7 +3867,7 @@
           <p:nvPr/>
         </p:nvPicPr>
         <p:blipFill>
-          <a:blip xmlns:r="http://schemas.openxmlformats.org/officeDocument/2006/relationships" xmlns:a="http://schemas.openxmlformats.org/drawingml/2006/main" r:embed="R40b246558cb54e59"/>
+          <a:blip xmlns:r="http://schemas.openxmlformats.org/officeDocument/2006/relationships" xmlns:a="http://schemas.openxmlformats.org/drawingml/2006/main" r:embed="Rec145b8af6c54586"/>
           <a:stretch xmlns:a="http://schemas.openxmlformats.org/drawingml/2006/main"/>
         </p:blipFill>
         <p:spPr>
@@ -3885,7 +3885,7 @@
           <p:cNvPr id="60" name="qr-label">
             <a:extLst xmlns:a="http://schemas.openxmlformats.org/drawingml/2006/main">
               <a:ext uri="{FF2B5EF4-FFF2-40B4-BE49-F238E27FC236}">
-                <a16:creationId xmlns:a16="http://schemas.microsoft.com/office/drawing/2014/main" id="{9131A340-FFCF-40BD-880E-AB509AAB8F31}"/>
+                <a16:creationId xmlns:a16="http://schemas.microsoft.com/office/drawing/2014/main" id="{813FDD06-176A-43B5-94A0-C41FBD49154A}"/>
               </a:ext>
             </a:extLst>
           </p:cNvPr>
@@ -3952,7 +3952,7 @@
           <p:cNvPr id="61" name="references-box">
             <a:extLst xmlns:a="http://schemas.openxmlformats.org/drawingml/2006/main">
               <a:ext uri="{FF2B5EF4-FFF2-40B4-BE49-F238E27FC236}">
-                <a16:creationId xmlns:a16="http://schemas.microsoft.com/office/drawing/2014/main" id="{6085C1B3-CFAA-4876-812E-3C6510C7DBF8}"/>
+                <a16:creationId xmlns:a16="http://schemas.microsoft.com/office/drawing/2014/main" id="{846A2A3F-93CF-486F-95DC-BE0846C33D94}"/>
               </a:ext>
             </a:extLst>
           </p:cNvPr>
@@ -3985,7 +3985,7 @@
           <p:cNvPr id="62" name="references-title">
             <a:extLst xmlns:a="http://schemas.openxmlformats.org/drawingml/2006/main">
               <a:ext uri="{FF2B5EF4-FFF2-40B4-BE49-F238E27FC236}">
-                <a16:creationId xmlns:a16="http://schemas.microsoft.com/office/drawing/2014/main" id="{E0B45362-7403-4534-9F15-98FBB85FBA3E}"/>
+                <a16:creationId xmlns:a16="http://schemas.microsoft.com/office/drawing/2014/main" id="{84376EE6-1E8A-4F82-9384-FD890006E724}"/>
               </a:ext>
             </a:extLst>
           </p:cNvPr>
@@ -4035,7 +4035,7 @@
           <p:cNvPr id="63" name="references-column-divider">
             <a:extLst xmlns:a="http://schemas.openxmlformats.org/drawingml/2006/main">
               <a:ext uri="{FF2B5EF4-FFF2-40B4-BE49-F238E27FC236}">
-                <a16:creationId xmlns:a16="http://schemas.microsoft.com/office/drawing/2014/main" id="{BE4F3F38-9D33-4F81-AA95-5CF08AC35772}"/>
+                <a16:creationId xmlns:a16="http://schemas.microsoft.com/office/drawing/2014/main" id="{1F6A9AA9-2D5C-462C-B4A2-79395880BAC5}"/>
               </a:ext>
             </a:extLst>
           </p:cNvPr>
@@ -4068,7 +4068,7 @@
           <p:cNvPr id="64" name="references-body-left">
             <a:extLst xmlns:a="http://schemas.openxmlformats.org/drawingml/2006/main">
               <a:ext uri="{FF2B5EF4-FFF2-40B4-BE49-F238E27FC236}">
-                <a16:creationId xmlns:a16="http://schemas.microsoft.com/office/drawing/2014/main" id="{EAF73F07-07CD-467D-ACE5-62E29DA1A8A6}"/>
+                <a16:creationId xmlns:a16="http://schemas.microsoft.com/office/drawing/2014/main" id="{8A7C1ECC-D0B6-4D05-B8EB-310DA86B4ECC}"/>
               </a:ext>
             </a:extLst>
           </p:cNvPr>
@@ -4220,7 +4220,7 @@
           <p:cNvPr id="65" name="references-body-right">
             <a:extLst xmlns:a="http://schemas.openxmlformats.org/drawingml/2006/main">
               <a:ext uri="{FF2B5EF4-FFF2-40B4-BE49-F238E27FC236}">
-                <a16:creationId xmlns:a16="http://schemas.microsoft.com/office/drawing/2014/main" id="{B1CBB9CC-5454-432D-9FB5-60B904822AF6}"/>
+                <a16:creationId xmlns:a16="http://schemas.microsoft.com/office/drawing/2014/main" id="{86EAC8F0-7365-45EC-A68E-E7767EC17BBE}"/>
               </a:ext>
             </a:extLst>
           </p:cNvPr>
@@ -4353,7 +4353,7 @@
     </p:spTree>
     <p:extLst>
       <p:ext uri="{BB962C8B-B14F-4D97-AF65-F5344CB8AC3E}">
-        <p14:creationId xmlns:p14="http://schemas.microsoft.com/office/powerpoint/2010/main" val="1747884301"/>
+        <p14:creationId xmlns:p14="http://schemas.microsoft.com/office/powerpoint/2010/main" val="1105415768"/>
       </p:ext>
     </p:extLst>
   </p:cSld>
